--- a/Design/複雑性_5分類とそれぞれで可能な対処について.pptx
+++ b/Design/複雑性_5分類とそれぞれで可能な対処について.pptx
@@ -1187,7 +1187,7 @@
           <a:p>
             <a:fld id="{715B6A4E-7C34-4A40-8B61-BB0C6AAC2A27}" type="datetimeFigureOut">
               <a:rPr kumimoji="1" lang="ja-JP" altLang="en-US" smtClean="0"/>
-              <a:t>2025/12/26</a:t>
+              <a:t>2026/9/29</a:t>
             </a:fld>
             <a:endParaRPr kumimoji="1" lang="ja-JP" altLang="en-US"/>
           </a:p>
@@ -1484,7 +1484,7 @@
           <a:p>
             <a:fld id="{715B6A4E-7C34-4A40-8B61-BB0C6AAC2A27}" type="datetimeFigureOut">
               <a:rPr kumimoji="1" lang="ja-JP" altLang="en-US" smtClean="0"/>
-              <a:t>2025/12/26</a:t>
+              <a:t>2026/9/29</a:t>
             </a:fld>
             <a:endParaRPr kumimoji="1" lang="ja-JP" altLang="en-US"/>
           </a:p>
@@ -1724,7 +1724,7 @@
           <a:p>
             <a:fld id="{715B6A4E-7C34-4A40-8B61-BB0C6AAC2A27}" type="datetimeFigureOut">
               <a:rPr kumimoji="1" lang="ja-JP" altLang="en-US" smtClean="0"/>
-              <a:t>2025/12/26</a:t>
+              <a:t>2026/9/29</a:t>
             </a:fld>
             <a:endParaRPr kumimoji="1" lang="ja-JP" altLang="en-US"/>
           </a:p>
@@ -1837,7 +1837,7 @@
           <a:p>
             <a:fld id="{715B6A4E-7C34-4A40-8B61-BB0C6AAC2A27}" type="datetimeFigureOut">
               <a:rPr kumimoji="1" lang="ja-JP" altLang="en-US" smtClean="0"/>
-              <a:t>2025/12/26</a:t>
+              <a:t>2026/9/29</a:t>
             </a:fld>
             <a:endParaRPr kumimoji="1" lang="ja-JP" altLang="en-US"/>
           </a:p>
@@ -2128,7 +2128,7 @@
           <a:p>
             <a:fld id="{715B6A4E-7C34-4A40-8B61-BB0C6AAC2A27}" type="datetimeFigureOut">
               <a:rPr kumimoji="1" lang="ja-JP" altLang="en-US" smtClean="0"/>
-              <a:t>2025/12/26</a:t>
+              <a:t>2026/9/29</a:t>
             </a:fld>
             <a:endParaRPr kumimoji="1" lang="ja-JP" altLang="en-US"/>
           </a:p>
@@ -2457,7 +2457,7 @@
           <a:p>
             <a:fld id="{715B6A4E-7C34-4A40-8B61-BB0C6AAC2A27}" type="datetimeFigureOut">
               <a:rPr kumimoji="1" lang="ja-JP" altLang="en-US" smtClean="0"/>
-              <a:t>2025/12/26</a:t>
+              <a:t>2026/9/29</a:t>
             </a:fld>
             <a:endParaRPr kumimoji="1" lang="ja-JP" altLang="en-US"/>
           </a:p>
@@ -2933,7 +2933,7 @@
           <a:p>
             <a:fld id="{715B6A4E-7C34-4A40-8B61-BB0C6AAC2A27}" type="datetimeFigureOut">
               <a:rPr kumimoji="1" lang="ja-JP" altLang="en-US" smtClean="0"/>
-              <a:t>2025/12/26</a:t>
+              <a:t>2026/9/29</a:t>
             </a:fld>
             <a:endParaRPr kumimoji="1" lang="ja-JP" altLang="en-US"/>
           </a:p>
@@ -3074,7 +3074,7 @@
           <a:p>
             <a:fld id="{715B6A4E-7C34-4A40-8B61-BB0C6AAC2A27}" type="datetimeFigureOut">
               <a:rPr kumimoji="1" lang="ja-JP" altLang="en-US" smtClean="0"/>
-              <a:t>2025/12/26</a:t>
+              <a:t>2026/9/29</a:t>
             </a:fld>
             <a:endParaRPr kumimoji="1" lang="ja-JP" altLang="en-US"/>
           </a:p>
@@ -3187,7 +3187,7 @@
           <a:p>
             <a:fld id="{715B6A4E-7C34-4A40-8B61-BB0C6AAC2A27}" type="datetimeFigureOut">
               <a:rPr kumimoji="1" lang="ja-JP" altLang="en-US" smtClean="0"/>
-              <a:t>2025/12/26</a:t>
+              <a:t>2026/9/29</a:t>
             </a:fld>
             <a:endParaRPr kumimoji="1" lang="ja-JP" altLang="en-US"/>
           </a:p>
@@ -3530,7 +3530,7 @@
           <a:p>
             <a:fld id="{715B6A4E-7C34-4A40-8B61-BB0C6AAC2A27}" type="datetimeFigureOut">
               <a:rPr kumimoji="1" lang="ja-JP" altLang="en-US" smtClean="0"/>
-              <a:t>2025/12/26</a:t>
+              <a:t>2026/9/29</a:t>
             </a:fld>
             <a:endParaRPr kumimoji="1" lang="ja-JP" altLang="en-US"/>
           </a:p>
@@ -3818,7 +3818,7 @@
           <a:p>
             <a:fld id="{715B6A4E-7C34-4A40-8B61-BB0C6AAC2A27}" type="datetimeFigureOut">
               <a:rPr kumimoji="1" lang="ja-JP" altLang="en-US" smtClean="0"/>
-              <a:t>2025/12/26</a:t>
+              <a:t>2026/9/29</a:t>
             </a:fld>
             <a:endParaRPr kumimoji="1" lang="ja-JP" altLang="en-US"/>
           </a:p>
@@ -4091,7 +4091,7 @@
           <a:p>
             <a:fld id="{715B6A4E-7C34-4A40-8B61-BB0C6AAC2A27}" type="datetimeFigureOut">
               <a:rPr kumimoji="1" lang="ja-JP" altLang="en-US" smtClean="0"/>
-              <a:t>2025/12/26</a:t>
+              <a:t>2026/9/29</a:t>
             </a:fld>
             <a:endParaRPr kumimoji="1" lang="ja-JP" altLang="en-US"/>
           </a:p>
@@ -4592,26 +4592,6 @@
             <a:lstStyle/>
             <a:p>
               <a:pPr algn="l"/>
-              <a:r>
-                <a:rPr kumimoji="1" lang="en-US" altLang="ja-JP" sz="2400" dirty="0">
-                  <a:solidFill>
-                    <a:schemeClr val="tx1">
-                      <a:lumMod val="75000"/>
-                    </a:schemeClr>
-                  </a:solidFill>
-                </a:rPr>
-                <a:t>####</a:t>
-              </a:r>
-              <a:r>
-                <a:rPr kumimoji="1" lang="ja-JP" altLang="en-US" sz="2400" dirty="0">
-                  <a:solidFill>
-                    <a:schemeClr val="tx1">
-                      <a:lumMod val="75000"/>
-                    </a:schemeClr>
-                  </a:solidFill>
-                </a:rPr>
-                <a:t>向け</a:t>
-              </a:r>
               <a:endParaRPr kumimoji="1" lang="en-US" altLang="ja-JP" sz="2400" dirty="0">
                 <a:solidFill>
                   <a:schemeClr val="tx1">
@@ -4621,16 +4601,54 @@
               </a:endParaRPr>
             </a:p>
             <a:p>
-              <a:pPr algn="l"/>
               <a:r>
-                <a:rPr kumimoji="1" lang="ja-JP" altLang="en-US" sz="3600" b="1" dirty="0">
+                <a:rPr lang="ja-JP" altLang="en-US" sz="3600" b="1" dirty="0">
                   <a:solidFill>
                     <a:schemeClr val="tx1">
                       <a:lumMod val="75000"/>
                     </a:schemeClr>
                   </a:solidFill>
                 </a:rPr>
-                <a:t>タイトルタイトルタイトルタイトル</a:t>
+                <a:t>複雑性</a:t>
+              </a:r>
+              <a:r>
+                <a:rPr lang="en-US" altLang="ja-JP" sz="3600" b="1" dirty="0">
+                  <a:solidFill>
+                    <a:schemeClr val="tx1">
+                      <a:lumMod val="75000"/>
+                    </a:schemeClr>
+                  </a:solidFill>
+                </a:rPr>
+                <a:t>_5</a:t>
+              </a:r>
+              <a:r>
+                <a:rPr lang="ja-JP" altLang="en-US" sz="3600" b="1" dirty="0">
+                  <a:solidFill>
+                    <a:schemeClr val="tx1">
+                      <a:lumMod val="75000"/>
+                    </a:schemeClr>
+                  </a:solidFill>
+                </a:rPr>
+                <a:t>分類と</a:t>
+              </a:r>
+              <a:endParaRPr lang="en-US" altLang="ja-JP" sz="3600" b="1" dirty="0">
+                <a:solidFill>
+                  <a:schemeClr val="tx1">
+                    <a:lumMod val="75000"/>
+                  </a:schemeClr>
+                </a:solidFill>
+              </a:endParaRPr>
+            </a:p>
+            <a:p>
+              <a:r>
+                <a:rPr lang="ja-JP" altLang="en-US" sz="3600" b="1" dirty="0">
+                  <a:solidFill>
+                    <a:schemeClr val="tx1">
+                      <a:lumMod val="75000"/>
+                    </a:schemeClr>
+                  </a:solidFill>
+                </a:rPr>
+                <a:t>それぞれで可能な対処について</a:t>
               </a:r>
               <a:endParaRPr kumimoji="1" lang="en-US" altLang="ja-JP" sz="3600" b="1" dirty="0">
                 <a:solidFill>
@@ -4643,24 +4661,14 @@
             <a:p>
               <a:pPr algn="l"/>
               <a:r>
-                <a:rPr kumimoji="1" lang="en-US" altLang="ja-JP" sz="2400" b="0" dirty="0">
+                <a:rPr kumimoji="1" lang="ja-JP" altLang="en-US" sz="2400" b="0" dirty="0">
                   <a:solidFill>
                     <a:schemeClr val="tx1">
                       <a:lumMod val="75000"/>
                     </a:schemeClr>
                   </a:solidFill>
                 </a:rPr>
-                <a:t>Name </a:t>
-              </a:r>
-              <a:r>
-                <a:rPr kumimoji="1" lang="en-US" altLang="ja-JP" sz="2400" b="0" dirty="0" err="1">
-                  <a:solidFill>
-                    <a:schemeClr val="tx1">
-                      <a:lumMod val="75000"/>
-                    </a:schemeClr>
-                  </a:solidFill>
-                </a:rPr>
-                <a:t>Name</a:t>
+                <a:t>ナカムラ ヒロキ</a:t>
               </a:r>
               <a:endParaRPr kumimoji="1" lang="en-US" altLang="ja-JP" sz="2400" b="0" dirty="0">
                 <a:solidFill>
@@ -4680,7 +4688,7 @@
                     </a:schemeClr>
                   </a:solidFill>
                 </a:rPr>
-                <a:t>YYYY</a:t>
+                <a:t>2026</a:t>
               </a:r>
               <a:r>
                 <a:rPr kumimoji="1" lang="ja-JP" altLang="en-US" sz="2400" b="0" dirty="0">
@@ -4693,14 +4701,14 @@
                 <a:t>年</a:t>
               </a:r>
               <a:r>
-                <a:rPr kumimoji="1" lang="en-US" altLang="ja-JP" sz="2400" b="0" dirty="0">
+                <a:rPr lang="en-US" altLang="ja-JP" sz="2400" dirty="0">
                   <a:solidFill>
                     <a:schemeClr val="tx1">
                       <a:lumMod val="75000"/>
                     </a:schemeClr>
                   </a:solidFill>
                 </a:rPr>
-                <a:t>MM</a:t>
+                <a:t>10</a:t>
               </a:r>
               <a:r>
                 <a:rPr kumimoji="1" lang="ja-JP" altLang="en-US" sz="2400" b="0" dirty="0">
@@ -4713,14 +4721,14 @@
                 <a:t>月</a:t>
               </a:r>
               <a:r>
-                <a:rPr kumimoji="1" lang="en-US" altLang="ja-JP" sz="2400" b="0" dirty="0">
+                <a:rPr lang="en-US" altLang="ja-JP" sz="2400" dirty="0">
                   <a:solidFill>
                     <a:schemeClr val="tx1">
                       <a:lumMod val="75000"/>
                     </a:schemeClr>
                   </a:solidFill>
                 </a:rPr>
-                <a:t>DD</a:t>
+                <a:t>10</a:t>
               </a:r>
               <a:r>
                 <a:rPr kumimoji="1" lang="ja-JP" altLang="en-US" sz="2400" b="0" dirty="0">

--- a/Design/複雑性_5分類とそれぞれで可能な対処について.pptx
+++ b/Design/複雑性_5分類とそれぞれで可能な対処について.pptx
@@ -10,24 +10,25 @@
     <p:sldId id="275" r:id="rId4"/>
     <p:sldId id="261" r:id="rId5"/>
     <p:sldId id="264" r:id="rId6"/>
-    <p:sldId id="284" r:id="rId7"/>
-    <p:sldId id="285" r:id="rId8"/>
-    <p:sldId id="286" r:id="rId9"/>
-    <p:sldId id="263" r:id="rId10"/>
-    <p:sldId id="287" r:id="rId11"/>
-    <p:sldId id="273" r:id="rId12"/>
-    <p:sldId id="272" r:id="rId13"/>
-    <p:sldId id="265" r:id="rId14"/>
-    <p:sldId id="266" r:id="rId15"/>
-    <p:sldId id="282" r:id="rId16"/>
-    <p:sldId id="283" r:id="rId17"/>
-    <p:sldId id="267" r:id="rId18"/>
-    <p:sldId id="270" r:id="rId19"/>
-    <p:sldId id="276" r:id="rId20"/>
-    <p:sldId id="271" r:id="rId21"/>
-    <p:sldId id="268" r:id="rId22"/>
-    <p:sldId id="274" r:id="rId23"/>
-    <p:sldId id="269" r:id="rId24"/>
+    <p:sldId id="269" r:id="rId7"/>
+    <p:sldId id="288" r:id="rId8"/>
+    <p:sldId id="284" r:id="rId9"/>
+    <p:sldId id="285" r:id="rId10"/>
+    <p:sldId id="286" r:id="rId11"/>
+    <p:sldId id="263" r:id="rId12"/>
+    <p:sldId id="287" r:id="rId13"/>
+    <p:sldId id="273" r:id="rId14"/>
+    <p:sldId id="272" r:id="rId15"/>
+    <p:sldId id="265" r:id="rId16"/>
+    <p:sldId id="266" r:id="rId17"/>
+    <p:sldId id="282" r:id="rId18"/>
+    <p:sldId id="283" r:id="rId19"/>
+    <p:sldId id="267" r:id="rId20"/>
+    <p:sldId id="270" r:id="rId21"/>
+    <p:sldId id="276" r:id="rId22"/>
+    <p:sldId id="271" r:id="rId23"/>
+    <p:sldId id="268" r:id="rId24"/>
+    <p:sldId id="274" r:id="rId25"/>
   </p:sldIdLst>
   <p:sldSz cx="12192000" cy="6858000"/>
   <p:notesSz cx="6858000" cy="9144000"/>
@@ -139,11 +140,17 @@
             <p14:sldId id="259"/>
           </p14:sldIdLst>
         </p14:section>
-        <p14:section name="よく使うフォーマット" id="{CD149920-7D1D-4D4F-A605-2F04F020684B}">
+        <p14:section name="Body" id="{CD149920-7D1D-4D4F-A605-2F04F020684B}">
           <p14:sldIdLst>
             <p14:sldId id="275"/>
             <p14:sldId id="261"/>
             <p14:sldId id="264"/>
+          </p14:sldIdLst>
+        </p14:section>
+        <p14:section name="参考文献" id="{CA435C64-D513-4FC2-A42F-97C9C85F28B5}">
+          <p14:sldIdLst>
+            <p14:sldId id="269"/>
+            <p14:sldId id="288"/>
           </p14:sldIdLst>
         </p14:section>
         <p14:section name="分解" id="{9EB82B50-7F78-4758-998D-8C3AA9384D16}">
@@ -185,7 +192,6 @@
             <p14:sldId id="271"/>
             <p14:sldId id="268"/>
             <p14:sldId id="274"/>
-            <p14:sldId id="269"/>
           </p14:sldIdLst>
         </p14:section>
       </p14:sectionLst>
@@ -1187,7 +1193,7 @@
           <a:p>
             <a:fld id="{715B6A4E-7C34-4A40-8B61-BB0C6AAC2A27}" type="datetimeFigureOut">
               <a:rPr kumimoji="1" lang="ja-JP" altLang="en-US" smtClean="0"/>
-              <a:t>2026/9/29</a:t>
+              <a:t>2026/9/30</a:t>
             </a:fld>
             <a:endParaRPr kumimoji="1" lang="ja-JP" altLang="en-US"/>
           </a:p>
@@ -1484,7 +1490,7 @@
           <a:p>
             <a:fld id="{715B6A4E-7C34-4A40-8B61-BB0C6AAC2A27}" type="datetimeFigureOut">
               <a:rPr kumimoji="1" lang="ja-JP" altLang="en-US" smtClean="0"/>
-              <a:t>2026/9/29</a:t>
+              <a:t>2026/9/30</a:t>
             </a:fld>
             <a:endParaRPr kumimoji="1" lang="ja-JP" altLang="en-US"/>
           </a:p>
@@ -1724,7 +1730,7 @@
           <a:p>
             <a:fld id="{715B6A4E-7C34-4A40-8B61-BB0C6AAC2A27}" type="datetimeFigureOut">
               <a:rPr kumimoji="1" lang="ja-JP" altLang="en-US" smtClean="0"/>
-              <a:t>2026/9/29</a:t>
+              <a:t>2026/9/30</a:t>
             </a:fld>
             <a:endParaRPr kumimoji="1" lang="ja-JP" altLang="en-US"/>
           </a:p>
@@ -1837,7 +1843,7 @@
           <a:p>
             <a:fld id="{715B6A4E-7C34-4A40-8B61-BB0C6AAC2A27}" type="datetimeFigureOut">
               <a:rPr kumimoji="1" lang="ja-JP" altLang="en-US" smtClean="0"/>
-              <a:t>2026/9/29</a:t>
+              <a:t>2026/9/30</a:t>
             </a:fld>
             <a:endParaRPr kumimoji="1" lang="ja-JP" altLang="en-US"/>
           </a:p>
@@ -2128,7 +2134,7 @@
           <a:p>
             <a:fld id="{715B6A4E-7C34-4A40-8B61-BB0C6AAC2A27}" type="datetimeFigureOut">
               <a:rPr kumimoji="1" lang="ja-JP" altLang="en-US" smtClean="0"/>
-              <a:t>2026/9/29</a:t>
+              <a:t>2026/9/30</a:t>
             </a:fld>
             <a:endParaRPr kumimoji="1" lang="ja-JP" altLang="en-US"/>
           </a:p>
@@ -2457,7 +2463,7 @@
           <a:p>
             <a:fld id="{715B6A4E-7C34-4A40-8B61-BB0C6AAC2A27}" type="datetimeFigureOut">
               <a:rPr kumimoji="1" lang="ja-JP" altLang="en-US" smtClean="0"/>
-              <a:t>2026/9/29</a:t>
+              <a:t>2026/9/30</a:t>
             </a:fld>
             <a:endParaRPr kumimoji="1" lang="ja-JP" altLang="en-US"/>
           </a:p>
@@ -2933,7 +2939,7 @@
           <a:p>
             <a:fld id="{715B6A4E-7C34-4A40-8B61-BB0C6AAC2A27}" type="datetimeFigureOut">
               <a:rPr kumimoji="1" lang="ja-JP" altLang="en-US" smtClean="0"/>
-              <a:t>2026/9/29</a:t>
+              <a:t>2026/9/30</a:t>
             </a:fld>
             <a:endParaRPr kumimoji="1" lang="ja-JP" altLang="en-US"/>
           </a:p>
@@ -3074,7 +3080,7 @@
           <a:p>
             <a:fld id="{715B6A4E-7C34-4A40-8B61-BB0C6AAC2A27}" type="datetimeFigureOut">
               <a:rPr kumimoji="1" lang="ja-JP" altLang="en-US" smtClean="0"/>
-              <a:t>2026/9/29</a:t>
+              <a:t>2026/9/30</a:t>
             </a:fld>
             <a:endParaRPr kumimoji="1" lang="ja-JP" altLang="en-US"/>
           </a:p>
@@ -3187,7 +3193,7 @@
           <a:p>
             <a:fld id="{715B6A4E-7C34-4A40-8B61-BB0C6AAC2A27}" type="datetimeFigureOut">
               <a:rPr kumimoji="1" lang="ja-JP" altLang="en-US" smtClean="0"/>
-              <a:t>2026/9/29</a:t>
+              <a:t>2026/9/30</a:t>
             </a:fld>
             <a:endParaRPr kumimoji="1" lang="ja-JP" altLang="en-US"/>
           </a:p>
@@ -3530,7 +3536,7 @@
           <a:p>
             <a:fld id="{715B6A4E-7C34-4A40-8B61-BB0C6AAC2A27}" type="datetimeFigureOut">
               <a:rPr kumimoji="1" lang="ja-JP" altLang="en-US" smtClean="0"/>
-              <a:t>2026/9/29</a:t>
+              <a:t>2026/9/30</a:t>
             </a:fld>
             <a:endParaRPr kumimoji="1" lang="ja-JP" altLang="en-US"/>
           </a:p>
@@ -3818,7 +3824,7 @@
           <a:p>
             <a:fld id="{715B6A4E-7C34-4A40-8B61-BB0C6AAC2A27}" type="datetimeFigureOut">
               <a:rPr kumimoji="1" lang="ja-JP" altLang="en-US" smtClean="0"/>
-              <a:t>2026/9/29</a:t>
+              <a:t>2026/9/30</a:t>
             </a:fld>
             <a:endParaRPr kumimoji="1" lang="ja-JP" altLang="en-US"/>
           </a:p>
@@ -4091,7 +4097,7 @@
           <a:p>
             <a:fld id="{715B6A4E-7C34-4A40-8B61-BB0C6AAC2A27}" type="datetimeFigureOut">
               <a:rPr kumimoji="1" lang="ja-JP" altLang="en-US" smtClean="0"/>
-              <a:t>2026/9/29</a:t>
+              <a:t>2026/9/30</a:t>
             </a:fld>
             <a:endParaRPr kumimoji="1" lang="ja-JP" altLang="en-US"/>
           </a:p>
@@ -4819,7 +4825,7 @@
         <p:cNvPr id="1" name="">
           <a:extLst>
             <a:ext uri="{FF2B5EF4-FFF2-40B4-BE49-F238E27FC236}">
-              <a16:creationId xmlns:a16="http://schemas.microsoft.com/office/drawing/2014/main" id="{4023654D-8CB7-EE77-A47A-FB307C8B1E23}"/>
+              <a16:creationId xmlns:a16="http://schemas.microsoft.com/office/drawing/2014/main" id="{2C420F8D-7D6F-BCB1-D834-4BE64B402FEC}"/>
             </a:ext>
           </a:extLst>
         </p:cNvPr>
@@ -4839,7 +4845,7 @@
           <p:cNvPr id="2" name="直線コネクタ 1">
             <a:extLst>
               <a:ext uri="{FF2B5EF4-FFF2-40B4-BE49-F238E27FC236}">
-                <a16:creationId xmlns:a16="http://schemas.microsoft.com/office/drawing/2014/main" id="{7EEF1B90-ECC0-9B88-DE52-01177EE4255F}"/>
+                <a16:creationId xmlns:a16="http://schemas.microsoft.com/office/drawing/2014/main" id="{312A614B-B7E1-66F3-93FC-7C68EADC4B92}"/>
               </a:ext>
             </a:extLst>
           </p:cNvPr>
@@ -4878,7 +4884,7 @@
           <p:cNvPr id="3" name="タイトル プレースホルダー 1">
             <a:extLst>
               <a:ext uri="{FF2B5EF4-FFF2-40B4-BE49-F238E27FC236}">
-                <a16:creationId xmlns:a16="http://schemas.microsoft.com/office/drawing/2014/main" id="{7966633A-F384-542C-3723-0833F5768B5A}"/>
+                <a16:creationId xmlns:a16="http://schemas.microsoft.com/office/drawing/2014/main" id="{4EC22920-18AF-5F05-1FBD-345A4F58CB6A}"/>
               </a:ext>
             </a:extLst>
           </p:cNvPr>
@@ -4944,7 +4950,7 @@
           <p:cNvPr id="4" name="タイトル プレースホルダー 1">
             <a:extLst>
               <a:ext uri="{FF2B5EF4-FFF2-40B4-BE49-F238E27FC236}">
-                <a16:creationId xmlns:a16="http://schemas.microsoft.com/office/drawing/2014/main" id="{36178834-2868-A913-580E-E18E96C56795}"/>
+                <a16:creationId xmlns:a16="http://schemas.microsoft.com/office/drawing/2014/main" id="{95AD810E-CD8B-A60F-D611-073BB01B4C10}"/>
               </a:ext>
             </a:extLst>
           </p:cNvPr>
@@ -4987,8 +4993,8 @@
           </a:lstStyle>
           <a:p>
             <a:r>
-              <a:rPr lang="ja-JP" altLang="en-US"/>
-              <a:t>評価テーブル</a:t>
+              <a:rPr lang="ja-JP" altLang="en-US" dirty="0"/>
+              <a:t>目次内のタイトル名そのまま</a:t>
             </a:r>
             <a:endParaRPr lang="en-US" altLang="ja-JP" dirty="0"/>
           </a:p>
@@ -4999,7 +5005,7 @@
           <p:cNvPr id="6" name="タイトル プレースホルダー 1">
             <a:extLst>
               <a:ext uri="{FF2B5EF4-FFF2-40B4-BE49-F238E27FC236}">
-                <a16:creationId xmlns:a16="http://schemas.microsoft.com/office/drawing/2014/main" id="{ED213100-5A00-33EE-9D66-9F4B80EDC912}"/>
+                <a16:creationId xmlns:a16="http://schemas.microsoft.com/office/drawing/2014/main" id="{1A28CD4B-8D98-6C58-B926-910BBD3D40C2}"/>
               </a:ext>
             </a:extLst>
           </p:cNvPr>
@@ -5010,8 +5016,8 @@
         </p:nvSpPr>
         <p:spPr>
           <a:xfrm>
-            <a:off x="7711257" y="2146304"/>
-            <a:ext cx="4150542" cy="4165584"/>
+            <a:off x="7541442" y="2146304"/>
+            <a:ext cx="4320357" cy="4165584"/>
           </a:xfrm>
           <a:prstGeom prst="rect">
             <a:avLst/>
@@ -5047,6 +5053,1308 @@
             </a:pPr>
             <a:r>
               <a:rPr lang="ja-JP" altLang="en-US" sz="1800" dirty="0"/>
+              <a:t>課題・施策分解</a:t>
+            </a:r>
+            <a:br>
+              <a:rPr lang="en-US" altLang="ja-JP" sz="1800" dirty="0"/>
+            </a:br>
+            <a:r>
+              <a:rPr lang="ja-JP" altLang="en-US" sz="1800" dirty="0"/>
+              <a:t>（因果関係があるとき）</a:t>
+            </a:r>
+            <a:endParaRPr lang="en-US" altLang="ja-JP" sz="1800" dirty="0"/>
+          </a:p>
+          <a:p>
+            <a:endParaRPr lang="en-US" altLang="ja-JP" sz="1800" dirty="0"/>
+          </a:p>
+          <a:p>
+            <a:endParaRPr lang="en-US" altLang="ja-JP" sz="1800" dirty="0"/>
+          </a:p>
+          <a:p>
+            <a:endParaRPr lang="en-US" altLang="ja-JP" sz="1800" dirty="0"/>
+          </a:p>
+          <a:p>
+            <a:endParaRPr lang="en-US" altLang="ja-JP" sz="1800" dirty="0"/>
+          </a:p>
+        </p:txBody>
+      </p:sp>
+      <p:sp>
+        <p:nvSpPr>
+          <p:cNvPr id="7" name="正方形/長方形 6">
+            <a:extLst>
+              <a:ext uri="{FF2B5EF4-FFF2-40B4-BE49-F238E27FC236}">
+                <a16:creationId xmlns:a16="http://schemas.microsoft.com/office/drawing/2014/main" id="{8FBACA13-C4C3-ADA5-D958-247C482FF7CC}"/>
+              </a:ext>
+            </a:extLst>
+          </p:cNvPr>
+          <p:cNvSpPr/>
+          <p:nvPr/>
+        </p:nvSpPr>
+        <p:spPr>
+          <a:xfrm>
+            <a:off x="355599" y="3869639"/>
+            <a:ext cx="1605175" cy="718913"/>
+          </a:xfrm>
+          <a:prstGeom prst="rect">
+            <a:avLst/>
+          </a:prstGeom>
+          <a:solidFill>
+            <a:schemeClr val="accent1">
+              <a:lumMod val="20000"/>
+              <a:lumOff val="80000"/>
+            </a:schemeClr>
+          </a:solidFill>
+          <a:ln>
+            <a:noFill/>
+          </a:ln>
+        </p:spPr>
+        <p:style>
+          <a:lnRef idx="2">
+            <a:schemeClr val="accent1">
+              <a:shade val="15000"/>
+            </a:schemeClr>
+          </a:lnRef>
+          <a:fillRef idx="1">
+            <a:schemeClr val="accent1"/>
+          </a:fillRef>
+          <a:effectRef idx="0">
+            <a:schemeClr val="accent1"/>
+          </a:effectRef>
+          <a:fontRef idx="minor">
+            <a:schemeClr val="lt1"/>
+          </a:fontRef>
+        </p:style>
+        <p:txBody>
+          <a:bodyPr rtlCol="0" anchor="ctr"/>
+          <a:lstStyle/>
+          <a:p>
+            <a:pPr algn="ctr"/>
+            <a:r>
+              <a:rPr kumimoji="1" lang="ja-JP" altLang="en-US" sz="1400" dirty="0">
+                <a:solidFill>
+                  <a:schemeClr val="tx1">
+                    <a:lumMod val="75000"/>
+                  </a:schemeClr>
+                </a:solidFill>
+              </a:rPr>
+              <a:t>コメント</a:t>
+            </a:r>
+          </a:p>
+        </p:txBody>
+      </p:sp>
+      <p:sp>
+        <p:nvSpPr>
+          <p:cNvPr id="8" name="正方形/長方形 7">
+            <a:extLst>
+              <a:ext uri="{FF2B5EF4-FFF2-40B4-BE49-F238E27FC236}">
+                <a16:creationId xmlns:a16="http://schemas.microsoft.com/office/drawing/2014/main" id="{C1E093C0-7AB5-C963-456C-CE98FF74E293}"/>
+              </a:ext>
+            </a:extLst>
+          </p:cNvPr>
+          <p:cNvSpPr/>
+          <p:nvPr/>
+        </p:nvSpPr>
+        <p:spPr>
+          <a:xfrm>
+            <a:off x="2193826" y="2710087"/>
+            <a:ext cx="1605175" cy="718913"/>
+          </a:xfrm>
+          <a:prstGeom prst="rect">
+            <a:avLst/>
+          </a:prstGeom>
+          <a:solidFill>
+            <a:schemeClr val="accent1">
+              <a:lumMod val="20000"/>
+              <a:lumOff val="80000"/>
+            </a:schemeClr>
+          </a:solidFill>
+          <a:ln>
+            <a:noFill/>
+          </a:ln>
+        </p:spPr>
+        <p:style>
+          <a:lnRef idx="2">
+            <a:schemeClr val="accent1">
+              <a:shade val="15000"/>
+            </a:schemeClr>
+          </a:lnRef>
+          <a:fillRef idx="1">
+            <a:schemeClr val="accent1"/>
+          </a:fillRef>
+          <a:effectRef idx="0">
+            <a:schemeClr val="accent1"/>
+          </a:effectRef>
+          <a:fontRef idx="minor">
+            <a:schemeClr val="lt1"/>
+          </a:fontRef>
+        </p:style>
+        <p:txBody>
+          <a:bodyPr rtlCol="0" anchor="ctr"/>
+          <a:lstStyle/>
+          <a:p>
+            <a:pPr algn="ctr"/>
+            <a:r>
+              <a:rPr kumimoji="1" lang="ja-JP" altLang="en-US" sz="1400" dirty="0">
+                <a:solidFill>
+                  <a:schemeClr val="tx1">
+                    <a:lumMod val="75000"/>
+                  </a:schemeClr>
+                </a:solidFill>
+              </a:rPr>
+              <a:t>コメント</a:t>
+            </a:r>
+          </a:p>
+        </p:txBody>
+      </p:sp>
+      <p:sp>
+        <p:nvSpPr>
+          <p:cNvPr id="9" name="正方形/長方形 8">
+            <a:extLst>
+              <a:ext uri="{FF2B5EF4-FFF2-40B4-BE49-F238E27FC236}">
+                <a16:creationId xmlns:a16="http://schemas.microsoft.com/office/drawing/2014/main" id="{1510F148-CC65-E1B6-A1AD-621048BCA661}"/>
+              </a:ext>
+            </a:extLst>
+          </p:cNvPr>
+          <p:cNvSpPr/>
+          <p:nvPr/>
+        </p:nvSpPr>
+        <p:spPr>
+          <a:xfrm>
+            <a:off x="4220589" y="3869639"/>
+            <a:ext cx="1605175" cy="718913"/>
+          </a:xfrm>
+          <a:prstGeom prst="rect">
+            <a:avLst/>
+          </a:prstGeom>
+          <a:solidFill>
+            <a:schemeClr val="accent1">
+              <a:lumMod val="20000"/>
+              <a:lumOff val="80000"/>
+            </a:schemeClr>
+          </a:solidFill>
+          <a:ln>
+            <a:noFill/>
+          </a:ln>
+        </p:spPr>
+        <p:style>
+          <a:lnRef idx="2">
+            <a:schemeClr val="accent1">
+              <a:shade val="15000"/>
+            </a:schemeClr>
+          </a:lnRef>
+          <a:fillRef idx="1">
+            <a:schemeClr val="accent1"/>
+          </a:fillRef>
+          <a:effectRef idx="0">
+            <a:schemeClr val="accent1"/>
+          </a:effectRef>
+          <a:fontRef idx="minor">
+            <a:schemeClr val="lt1"/>
+          </a:fontRef>
+        </p:style>
+        <p:txBody>
+          <a:bodyPr rtlCol="0" anchor="ctr"/>
+          <a:lstStyle/>
+          <a:p>
+            <a:pPr algn="ctr"/>
+            <a:r>
+              <a:rPr kumimoji="1" lang="ja-JP" altLang="en-US" sz="1400" dirty="0">
+                <a:solidFill>
+                  <a:schemeClr val="tx1">
+                    <a:lumMod val="75000"/>
+                  </a:schemeClr>
+                </a:solidFill>
+              </a:rPr>
+              <a:t>コメント</a:t>
+            </a:r>
+          </a:p>
+        </p:txBody>
+      </p:sp>
+      <p:sp>
+        <p:nvSpPr>
+          <p:cNvPr id="10" name="正方形/長方形 9">
+            <a:extLst>
+              <a:ext uri="{FF2B5EF4-FFF2-40B4-BE49-F238E27FC236}">
+                <a16:creationId xmlns:a16="http://schemas.microsoft.com/office/drawing/2014/main" id="{7A6F9553-D4E5-65E4-38F5-AA12FDA2DD31}"/>
+              </a:ext>
+            </a:extLst>
+          </p:cNvPr>
+          <p:cNvSpPr/>
+          <p:nvPr/>
+        </p:nvSpPr>
+        <p:spPr>
+          <a:xfrm>
+            <a:off x="2193826" y="5151630"/>
+            <a:ext cx="1605175" cy="718913"/>
+          </a:xfrm>
+          <a:prstGeom prst="rect">
+            <a:avLst/>
+          </a:prstGeom>
+          <a:solidFill>
+            <a:schemeClr val="accent1">
+              <a:lumMod val="20000"/>
+              <a:lumOff val="80000"/>
+            </a:schemeClr>
+          </a:solidFill>
+          <a:ln>
+            <a:noFill/>
+          </a:ln>
+        </p:spPr>
+        <p:style>
+          <a:lnRef idx="2">
+            <a:schemeClr val="accent1">
+              <a:shade val="15000"/>
+            </a:schemeClr>
+          </a:lnRef>
+          <a:fillRef idx="1">
+            <a:schemeClr val="accent1"/>
+          </a:fillRef>
+          <a:effectRef idx="0">
+            <a:schemeClr val="accent1"/>
+          </a:effectRef>
+          <a:fontRef idx="minor">
+            <a:schemeClr val="lt1"/>
+          </a:fontRef>
+        </p:style>
+        <p:txBody>
+          <a:bodyPr rtlCol="0" anchor="ctr"/>
+          <a:lstStyle/>
+          <a:p>
+            <a:pPr algn="ctr"/>
+            <a:r>
+              <a:rPr kumimoji="1" lang="ja-JP" altLang="en-US" sz="1400" dirty="0">
+                <a:solidFill>
+                  <a:schemeClr val="tx1">
+                    <a:lumMod val="75000"/>
+                  </a:schemeClr>
+                </a:solidFill>
+              </a:rPr>
+              <a:t>コメント</a:t>
+            </a:r>
+          </a:p>
+        </p:txBody>
+      </p:sp>
+      <p:sp>
+        <p:nvSpPr>
+          <p:cNvPr id="11" name="正方形/長方形 10">
+            <a:extLst>
+              <a:ext uri="{FF2B5EF4-FFF2-40B4-BE49-F238E27FC236}">
+                <a16:creationId xmlns:a16="http://schemas.microsoft.com/office/drawing/2014/main" id="{399197AE-1B1E-ECF2-0D53-C4C96DDF5D1F}"/>
+              </a:ext>
+            </a:extLst>
+          </p:cNvPr>
+          <p:cNvSpPr/>
+          <p:nvPr/>
+        </p:nvSpPr>
+        <p:spPr>
+          <a:xfrm>
+            <a:off x="5332952" y="5255327"/>
+            <a:ext cx="1605175" cy="718913"/>
+          </a:xfrm>
+          <a:prstGeom prst="rect">
+            <a:avLst/>
+          </a:prstGeom>
+          <a:solidFill>
+            <a:schemeClr val="accent1">
+              <a:lumMod val="20000"/>
+              <a:lumOff val="80000"/>
+            </a:schemeClr>
+          </a:solidFill>
+          <a:ln>
+            <a:noFill/>
+          </a:ln>
+        </p:spPr>
+        <p:style>
+          <a:lnRef idx="2">
+            <a:schemeClr val="accent1">
+              <a:shade val="15000"/>
+            </a:schemeClr>
+          </a:lnRef>
+          <a:fillRef idx="1">
+            <a:schemeClr val="accent1"/>
+          </a:fillRef>
+          <a:effectRef idx="0">
+            <a:schemeClr val="accent1"/>
+          </a:effectRef>
+          <a:fontRef idx="minor">
+            <a:schemeClr val="lt1"/>
+          </a:fontRef>
+        </p:style>
+        <p:txBody>
+          <a:bodyPr rtlCol="0" anchor="ctr"/>
+          <a:lstStyle/>
+          <a:p>
+            <a:pPr algn="ctr"/>
+            <a:r>
+              <a:rPr kumimoji="1" lang="ja-JP" altLang="en-US" sz="1400" dirty="0">
+                <a:solidFill>
+                  <a:schemeClr val="tx1">
+                    <a:lumMod val="75000"/>
+                  </a:schemeClr>
+                </a:solidFill>
+              </a:rPr>
+              <a:t>コメント</a:t>
+            </a:r>
+          </a:p>
+        </p:txBody>
+      </p:sp>
+      <p:cxnSp>
+        <p:nvCxnSpPr>
+          <p:cNvPr id="13" name="コネクタ: カギ線 12">
+            <a:extLst>
+              <a:ext uri="{FF2B5EF4-FFF2-40B4-BE49-F238E27FC236}">
+                <a16:creationId xmlns:a16="http://schemas.microsoft.com/office/drawing/2014/main" id="{AD30A600-E26A-A185-3EB8-6F5D87B8AC18}"/>
+              </a:ext>
+            </a:extLst>
+          </p:cNvPr>
+          <p:cNvCxnSpPr>
+            <a:stCxn id="7" idx="0"/>
+            <a:endCxn id="8" idx="1"/>
+          </p:cNvCxnSpPr>
+          <p:nvPr/>
+        </p:nvCxnSpPr>
+        <p:spPr>
+          <a:xfrm rot="5400000" flipH="1" flipV="1">
+            <a:off x="1275959" y="2951773"/>
+            <a:ext cx="800095" cy="1035639"/>
+          </a:xfrm>
+          <a:prstGeom prst="bentConnector2">
+            <a:avLst/>
+          </a:prstGeom>
+          <a:ln>
+            <a:tailEnd type="triangle"/>
+          </a:ln>
+        </p:spPr>
+        <p:style>
+          <a:lnRef idx="2">
+            <a:schemeClr val="accent1"/>
+          </a:lnRef>
+          <a:fillRef idx="0">
+            <a:schemeClr val="accent1"/>
+          </a:fillRef>
+          <a:effectRef idx="1">
+            <a:schemeClr val="accent1"/>
+          </a:effectRef>
+          <a:fontRef idx="minor">
+            <a:schemeClr val="tx1"/>
+          </a:fontRef>
+        </p:style>
+      </p:cxnSp>
+      <p:cxnSp>
+        <p:nvCxnSpPr>
+          <p:cNvPr id="15" name="コネクタ: カギ線 14">
+            <a:extLst>
+              <a:ext uri="{FF2B5EF4-FFF2-40B4-BE49-F238E27FC236}">
+                <a16:creationId xmlns:a16="http://schemas.microsoft.com/office/drawing/2014/main" id="{D6935BB0-5E93-1FBF-00CE-5E78DCB80AAF}"/>
+              </a:ext>
+            </a:extLst>
+          </p:cNvPr>
+          <p:cNvCxnSpPr>
+            <a:stCxn id="8" idx="3"/>
+            <a:endCxn id="9" idx="0"/>
+          </p:cNvCxnSpPr>
+          <p:nvPr/>
+        </p:nvCxnSpPr>
+        <p:spPr>
+          <a:xfrm>
+            <a:off x="3799001" y="3069544"/>
+            <a:ext cx="1224176" cy="800095"/>
+          </a:xfrm>
+          <a:prstGeom prst="bentConnector2">
+            <a:avLst/>
+          </a:prstGeom>
+          <a:ln>
+            <a:tailEnd type="triangle"/>
+          </a:ln>
+        </p:spPr>
+        <p:style>
+          <a:lnRef idx="2">
+            <a:schemeClr val="accent1"/>
+          </a:lnRef>
+          <a:fillRef idx="0">
+            <a:schemeClr val="accent1"/>
+          </a:fillRef>
+          <a:effectRef idx="1">
+            <a:schemeClr val="accent1"/>
+          </a:effectRef>
+          <a:fontRef idx="minor">
+            <a:schemeClr val="tx1"/>
+          </a:fontRef>
+        </p:style>
+      </p:cxnSp>
+      <p:cxnSp>
+        <p:nvCxnSpPr>
+          <p:cNvPr id="17" name="コネクタ: カギ線 16">
+            <a:extLst>
+              <a:ext uri="{FF2B5EF4-FFF2-40B4-BE49-F238E27FC236}">
+                <a16:creationId xmlns:a16="http://schemas.microsoft.com/office/drawing/2014/main" id="{E5DED94B-2B7B-1C12-F9C9-6AEBD9651D68}"/>
+              </a:ext>
+            </a:extLst>
+          </p:cNvPr>
+          <p:cNvCxnSpPr>
+            <a:stCxn id="10" idx="1"/>
+            <a:endCxn id="7" idx="2"/>
+          </p:cNvCxnSpPr>
+          <p:nvPr/>
+        </p:nvCxnSpPr>
+        <p:spPr>
+          <a:xfrm rot="10800000">
+            <a:off x="1158188" y="4588553"/>
+            <a:ext cx="1035639" cy="922535"/>
+          </a:xfrm>
+          <a:prstGeom prst="bentConnector2">
+            <a:avLst/>
+          </a:prstGeom>
+          <a:ln>
+            <a:tailEnd type="triangle"/>
+          </a:ln>
+        </p:spPr>
+        <p:style>
+          <a:lnRef idx="2">
+            <a:schemeClr val="accent1"/>
+          </a:lnRef>
+          <a:fillRef idx="0">
+            <a:schemeClr val="accent1"/>
+          </a:fillRef>
+          <a:effectRef idx="1">
+            <a:schemeClr val="accent1"/>
+          </a:effectRef>
+          <a:fontRef idx="minor">
+            <a:schemeClr val="tx1"/>
+          </a:fontRef>
+        </p:style>
+      </p:cxnSp>
+      <p:cxnSp>
+        <p:nvCxnSpPr>
+          <p:cNvPr id="19" name="コネクタ: カギ線 18">
+            <a:extLst>
+              <a:ext uri="{FF2B5EF4-FFF2-40B4-BE49-F238E27FC236}">
+                <a16:creationId xmlns:a16="http://schemas.microsoft.com/office/drawing/2014/main" id="{64192DD3-D1F4-C045-168A-E3DDCC4CA542}"/>
+              </a:ext>
+            </a:extLst>
+          </p:cNvPr>
+          <p:cNvCxnSpPr>
+            <a:stCxn id="10" idx="3"/>
+            <a:endCxn id="9" idx="2"/>
+          </p:cNvCxnSpPr>
+          <p:nvPr/>
+        </p:nvCxnSpPr>
+        <p:spPr>
+          <a:xfrm flipV="1">
+            <a:off x="3799001" y="4588552"/>
+            <a:ext cx="1224176" cy="922535"/>
+          </a:xfrm>
+          <a:prstGeom prst="bentConnector2">
+            <a:avLst/>
+          </a:prstGeom>
+          <a:ln>
+            <a:tailEnd type="triangle"/>
+          </a:ln>
+        </p:spPr>
+        <p:style>
+          <a:lnRef idx="2">
+            <a:schemeClr val="accent1"/>
+          </a:lnRef>
+          <a:fillRef idx="0">
+            <a:schemeClr val="accent1"/>
+          </a:fillRef>
+          <a:effectRef idx="1">
+            <a:schemeClr val="accent1"/>
+          </a:effectRef>
+          <a:fontRef idx="minor">
+            <a:schemeClr val="tx1"/>
+          </a:fontRef>
+        </p:style>
+      </p:cxnSp>
+      <p:cxnSp>
+        <p:nvCxnSpPr>
+          <p:cNvPr id="21" name="コネクタ: カギ線 20">
+            <a:extLst>
+              <a:ext uri="{FF2B5EF4-FFF2-40B4-BE49-F238E27FC236}">
+                <a16:creationId xmlns:a16="http://schemas.microsoft.com/office/drawing/2014/main" id="{08F557FD-AD71-DEEE-AF2F-EDFEE78E6D1D}"/>
+              </a:ext>
+            </a:extLst>
+          </p:cNvPr>
+          <p:cNvCxnSpPr>
+            <a:stCxn id="9" idx="3"/>
+            <a:endCxn id="11" idx="0"/>
+          </p:cNvCxnSpPr>
+          <p:nvPr/>
+        </p:nvCxnSpPr>
+        <p:spPr>
+          <a:xfrm>
+            <a:off x="5825764" y="4229096"/>
+            <a:ext cx="309776" cy="1026231"/>
+          </a:xfrm>
+          <a:prstGeom prst="bentConnector2">
+            <a:avLst/>
+          </a:prstGeom>
+          <a:ln>
+            <a:tailEnd type="triangle"/>
+          </a:ln>
+        </p:spPr>
+        <p:style>
+          <a:lnRef idx="2">
+            <a:schemeClr val="accent1"/>
+          </a:lnRef>
+          <a:fillRef idx="0">
+            <a:schemeClr val="accent1"/>
+          </a:fillRef>
+          <a:effectRef idx="1">
+            <a:schemeClr val="accent1"/>
+          </a:effectRef>
+          <a:fontRef idx="minor">
+            <a:schemeClr val="tx1"/>
+          </a:fontRef>
+        </p:style>
+      </p:cxnSp>
+      <p:cxnSp>
+        <p:nvCxnSpPr>
+          <p:cNvPr id="23" name="コネクタ: カギ線 22">
+            <a:extLst>
+              <a:ext uri="{FF2B5EF4-FFF2-40B4-BE49-F238E27FC236}">
+                <a16:creationId xmlns:a16="http://schemas.microsoft.com/office/drawing/2014/main" id="{4C20A49C-14B3-C7C5-B82D-ED93CFFBD69E}"/>
+              </a:ext>
+            </a:extLst>
+          </p:cNvPr>
+          <p:cNvCxnSpPr>
+            <a:stCxn id="11" idx="2"/>
+            <a:endCxn id="10" idx="2"/>
+          </p:cNvCxnSpPr>
+          <p:nvPr/>
+        </p:nvCxnSpPr>
+        <p:spPr>
+          <a:xfrm rot="5400000" flipH="1">
+            <a:off x="4514128" y="4352829"/>
+            <a:ext cx="103697" cy="3139126"/>
+          </a:xfrm>
+          <a:prstGeom prst="bentConnector3">
+            <a:avLst>
+              <a:gd name="adj1" fmla="val -220450"/>
+            </a:avLst>
+          </a:prstGeom>
+          <a:ln>
+            <a:tailEnd type="triangle"/>
+          </a:ln>
+        </p:spPr>
+        <p:style>
+          <a:lnRef idx="2">
+            <a:schemeClr val="accent1"/>
+          </a:lnRef>
+          <a:fillRef idx="0">
+            <a:schemeClr val="accent1"/>
+          </a:fillRef>
+          <a:effectRef idx="1">
+            <a:schemeClr val="accent1"/>
+          </a:effectRef>
+          <a:fontRef idx="minor">
+            <a:schemeClr val="tx1"/>
+          </a:fontRef>
+        </p:style>
+      </p:cxnSp>
+    </p:spTree>
+    <p:extLst>
+      <p:ext uri="{BB962C8B-B14F-4D97-AF65-F5344CB8AC3E}">
+        <p14:creationId xmlns:p14="http://schemas.microsoft.com/office/powerpoint/2010/main" val="3458348416"/>
+      </p:ext>
+    </p:extLst>
+  </p:cSld>
+  <p:clrMapOvr>
+    <a:masterClrMapping/>
+  </p:clrMapOvr>
+</p:sld>
+</file>
+
+<file path=ppt/slides/slide11.xml><?xml version="1.0" encoding="utf-8"?>
+<p:sld xmlns:a="http://schemas.openxmlformats.org/drawingml/2006/main" xmlns:r="http://schemas.openxmlformats.org/officeDocument/2006/relationships" xmlns:p="http://schemas.openxmlformats.org/presentationml/2006/main">
+  <p:cSld>
+    <p:spTree>
+      <p:nvGrpSpPr>
+        <p:cNvPr id="1" name="">
+          <a:extLst>
+            <a:ext uri="{FF2B5EF4-FFF2-40B4-BE49-F238E27FC236}">
+              <a16:creationId xmlns:a16="http://schemas.microsoft.com/office/drawing/2014/main" id="{33E67403-11C8-0D97-203A-15722E330098}"/>
+            </a:ext>
+          </a:extLst>
+        </p:cNvPr>
+        <p:cNvGrpSpPr/>
+        <p:nvPr/>
+      </p:nvGrpSpPr>
+      <p:grpSpPr>
+        <a:xfrm>
+          <a:off x="0" y="0"/>
+          <a:ext cx="0" cy="0"/>
+          <a:chOff x="0" y="0"/>
+          <a:chExt cx="0" cy="0"/>
+        </a:xfrm>
+      </p:grpSpPr>
+      <p:cxnSp>
+        <p:nvCxnSpPr>
+          <p:cNvPr id="2" name="直線コネクタ 1">
+            <a:extLst>
+              <a:ext uri="{FF2B5EF4-FFF2-40B4-BE49-F238E27FC236}">
+                <a16:creationId xmlns:a16="http://schemas.microsoft.com/office/drawing/2014/main" id="{CC722927-7A2E-9706-0A62-B9E81E31BCB8}"/>
+              </a:ext>
+            </a:extLst>
+          </p:cNvPr>
+          <p:cNvCxnSpPr>
+            <a:cxnSpLocks/>
+          </p:cNvCxnSpPr>
+          <p:nvPr/>
+        </p:nvCxnSpPr>
+        <p:spPr>
+          <a:xfrm>
+            <a:off x="0" y="1993900"/>
+            <a:ext cx="12192000" cy="0"/>
+          </a:xfrm>
+          <a:prstGeom prst="line">
+            <a:avLst/>
+          </a:prstGeom>
+          <a:ln w="38100"/>
+        </p:spPr>
+        <p:style>
+          <a:lnRef idx="2">
+            <a:schemeClr val="accent1"/>
+          </a:lnRef>
+          <a:fillRef idx="0">
+            <a:schemeClr val="accent1"/>
+          </a:fillRef>
+          <a:effectRef idx="1">
+            <a:schemeClr val="accent1"/>
+          </a:effectRef>
+          <a:fontRef idx="minor">
+            <a:schemeClr val="tx1"/>
+          </a:fontRef>
+        </p:style>
+      </p:cxnSp>
+      <p:sp>
+        <p:nvSpPr>
+          <p:cNvPr id="3" name="タイトル プレースホルダー 1">
+            <a:extLst>
+              <a:ext uri="{FF2B5EF4-FFF2-40B4-BE49-F238E27FC236}">
+                <a16:creationId xmlns:a16="http://schemas.microsoft.com/office/drawing/2014/main" id="{F295E884-7C3B-2970-C074-28C2C533205D}"/>
+              </a:ext>
+            </a:extLst>
+          </p:cNvPr>
+          <p:cNvSpPr txBox="1">
+            <a:spLocks/>
+          </p:cNvSpPr>
+          <p:nvPr/>
+        </p:nvSpPr>
+        <p:spPr>
+          <a:xfrm>
+            <a:off x="355600" y="1129246"/>
+            <a:ext cx="11506200" cy="812797"/>
+          </a:xfrm>
+          <a:prstGeom prst="rect">
+            <a:avLst/>
+          </a:prstGeom>
+        </p:spPr>
+        <p:txBody>
+          <a:bodyPr vert="horz" lIns="91440" tIns="45720" rIns="91440" bIns="45720" rtlCol="0" anchor="ctr">
+            <a:noAutofit/>
+          </a:bodyPr>
+          <a:lstStyle>
+            <a:lvl1pPr algn="l" defTabSz="914400" rtl="0" eaLnBrk="1" latinLnBrk="0" hangingPunct="1">
+              <a:lnSpc>
+                <a:spcPct val="90000"/>
+              </a:lnSpc>
+              <a:spcBef>
+                <a:spcPct val="0"/>
+              </a:spcBef>
+              <a:buNone/>
+              <a:defRPr kumimoji="1" sz="1400" kern="1200">
+                <a:solidFill>
+                  <a:schemeClr val="tx1"/>
+                </a:solidFill>
+                <a:latin typeface="+mj-lt"/>
+                <a:ea typeface="+mj-ea"/>
+                <a:cs typeface="+mj-cs"/>
+              </a:defRPr>
+            </a:lvl1pPr>
+          </a:lstStyle>
+          <a:p>
+            <a:r>
+              <a:rPr lang="ja-JP" altLang="en-US" sz="2800" dirty="0"/>
+              <a:t>リード文</a:t>
+            </a:r>
+            <a:endParaRPr lang="en-US" altLang="ja-JP" sz="2800" dirty="0"/>
+          </a:p>
+          <a:p>
+            <a:r>
+              <a:rPr lang="en-US" altLang="ja-JP" sz="2800" dirty="0"/>
+              <a:t>2</a:t>
+            </a:r>
+            <a:r>
+              <a:rPr lang="ja-JP" altLang="en-US" sz="2800" dirty="0"/>
+              <a:t>行に収まる程度で</a:t>
+            </a:r>
+            <a:endParaRPr lang="en-US" altLang="ja-JP" sz="2800" dirty="0"/>
+          </a:p>
+        </p:txBody>
+      </p:sp>
+      <p:sp>
+        <p:nvSpPr>
+          <p:cNvPr id="4" name="タイトル プレースホルダー 1">
+            <a:extLst>
+              <a:ext uri="{FF2B5EF4-FFF2-40B4-BE49-F238E27FC236}">
+                <a16:creationId xmlns:a16="http://schemas.microsoft.com/office/drawing/2014/main" id="{21F6BFE7-6AF6-732F-0E21-B09BEA55FA73}"/>
+              </a:ext>
+            </a:extLst>
+          </p:cNvPr>
+          <p:cNvSpPr txBox="1">
+            <a:spLocks/>
+          </p:cNvSpPr>
+          <p:nvPr/>
+        </p:nvSpPr>
+        <p:spPr>
+          <a:xfrm>
+            <a:off x="355600" y="546100"/>
+            <a:ext cx="11506200" cy="488949"/>
+          </a:xfrm>
+          <a:prstGeom prst="rect">
+            <a:avLst/>
+          </a:prstGeom>
+        </p:spPr>
+        <p:txBody>
+          <a:bodyPr vert="horz" lIns="91440" tIns="45720" rIns="91440" bIns="45720" rtlCol="0" anchor="ctr">
+            <a:noAutofit/>
+          </a:bodyPr>
+          <a:lstStyle>
+            <a:lvl1pPr algn="l" defTabSz="914400" rtl="0" eaLnBrk="1" latinLnBrk="0" hangingPunct="1">
+              <a:lnSpc>
+                <a:spcPct val="90000"/>
+              </a:lnSpc>
+              <a:spcBef>
+                <a:spcPct val="0"/>
+              </a:spcBef>
+              <a:buNone/>
+              <a:defRPr kumimoji="1" sz="1400" kern="1200">
+                <a:solidFill>
+                  <a:schemeClr val="tx1"/>
+                </a:solidFill>
+                <a:latin typeface="+mj-lt"/>
+                <a:ea typeface="+mj-ea"/>
+                <a:cs typeface="+mj-cs"/>
+              </a:defRPr>
+            </a:lvl1pPr>
+          </a:lstStyle>
+          <a:p>
+            <a:r>
+              <a:rPr lang="ja-JP" altLang="en-US" dirty="0"/>
+              <a:t>目次内のタイトル名そのまま</a:t>
+            </a:r>
+            <a:endParaRPr lang="en-US" altLang="ja-JP" dirty="0"/>
+          </a:p>
+        </p:txBody>
+      </p:sp>
+      <p:sp>
+        <p:nvSpPr>
+          <p:cNvPr id="5" name="タイトル プレースホルダー 1">
+            <a:extLst>
+              <a:ext uri="{FF2B5EF4-FFF2-40B4-BE49-F238E27FC236}">
+                <a16:creationId xmlns:a16="http://schemas.microsoft.com/office/drawing/2014/main" id="{0720B534-751A-92B9-28C8-2102084B0E36}"/>
+              </a:ext>
+            </a:extLst>
+          </p:cNvPr>
+          <p:cNvSpPr txBox="1">
+            <a:spLocks/>
+          </p:cNvSpPr>
+          <p:nvPr/>
+        </p:nvSpPr>
+        <p:spPr>
+          <a:xfrm>
+            <a:off x="355600" y="2730500"/>
+            <a:ext cx="5448300" cy="3581387"/>
+          </a:xfrm>
+          <a:prstGeom prst="rect">
+            <a:avLst/>
+          </a:prstGeom>
+        </p:spPr>
+        <p:txBody>
+          <a:bodyPr vert="horz" lIns="91440" tIns="45720" rIns="91440" bIns="45720" rtlCol="0" anchor="t" anchorCtr="0">
+            <a:noAutofit/>
+          </a:bodyPr>
+          <a:lstStyle>
+            <a:lvl1pPr algn="l" defTabSz="914400" rtl="0" eaLnBrk="1" latinLnBrk="0" hangingPunct="1">
+              <a:lnSpc>
+                <a:spcPct val="90000"/>
+              </a:lnSpc>
+              <a:spcBef>
+                <a:spcPct val="0"/>
+              </a:spcBef>
+              <a:buNone/>
+              <a:defRPr kumimoji="1" sz="1400" kern="1200">
+                <a:solidFill>
+                  <a:schemeClr val="tx1"/>
+                </a:solidFill>
+                <a:latin typeface="+mj-lt"/>
+                <a:ea typeface="+mj-ea"/>
+                <a:cs typeface="+mj-cs"/>
+              </a:defRPr>
+            </a:lvl1pPr>
+          </a:lstStyle>
+          <a:p>
+            <a:r>
+              <a:rPr lang="ja-JP" altLang="en-US" sz="1800" dirty="0"/>
+              <a:t>本文</a:t>
+            </a:r>
+            <a:endParaRPr lang="en-US" altLang="ja-JP" sz="1800" dirty="0"/>
+          </a:p>
+          <a:p>
+            <a:r>
+              <a:rPr lang="ja-JP" altLang="en-US" sz="1800" dirty="0"/>
+              <a:t>冗長にならないように頑張る</a:t>
+            </a:r>
+            <a:endParaRPr lang="en-US" altLang="ja-JP" sz="1800" dirty="0"/>
+          </a:p>
+          <a:p>
+            <a:r>
+              <a:rPr lang="ja-JP" altLang="en-US" sz="1800" dirty="0"/>
+              <a:t>左右比較したいとき</a:t>
+            </a:r>
+            <a:endParaRPr lang="en-US" altLang="ja-JP" sz="1800" dirty="0"/>
+          </a:p>
+        </p:txBody>
+      </p:sp>
+      <p:sp>
+        <p:nvSpPr>
+          <p:cNvPr id="6" name="タイトル プレースホルダー 1">
+            <a:extLst>
+              <a:ext uri="{FF2B5EF4-FFF2-40B4-BE49-F238E27FC236}">
+                <a16:creationId xmlns:a16="http://schemas.microsoft.com/office/drawing/2014/main" id="{D024BB36-65A3-3218-10D1-283E5E6E05B9}"/>
+              </a:ext>
+            </a:extLst>
+          </p:cNvPr>
+          <p:cNvSpPr txBox="1">
+            <a:spLocks/>
+          </p:cNvSpPr>
+          <p:nvPr/>
+        </p:nvSpPr>
+        <p:spPr>
+          <a:xfrm>
+            <a:off x="6413500" y="2730500"/>
+            <a:ext cx="5448300" cy="3581387"/>
+          </a:xfrm>
+          <a:prstGeom prst="rect">
+            <a:avLst/>
+          </a:prstGeom>
+        </p:spPr>
+        <p:txBody>
+          <a:bodyPr vert="horz" lIns="91440" tIns="45720" rIns="91440" bIns="45720" rtlCol="0" anchor="t" anchorCtr="0">
+            <a:noAutofit/>
+          </a:bodyPr>
+          <a:lstStyle>
+            <a:lvl1pPr algn="l" defTabSz="914400" rtl="0" eaLnBrk="1" latinLnBrk="0" hangingPunct="1">
+              <a:lnSpc>
+                <a:spcPct val="90000"/>
+              </a:lnSpc>
+              <a:spcBef>
+                <a:spcPct val="0"/>
+              </a:spcBef>
+              <a:buNone/>
+              <a:defRPr kumimoji="1" sz="1400" kern="1200">
+                <a:solidFill>
+                  <a:schemeClr val="tx1"/>
+                </a:solidFill>
+                <a:latin typeface="+mj-lt"/>
+                <a:ea typeface="+mj-ea"/>
+                <a:cs typeface="+mj-cs"/>
+              </a:defRPr>
+            </a:lvl1pPr>
+          </a:lstStyle>
+          <a:p>
+            <a:r>
+              <a:rPr lang="ja-JP" altLang="en-US" sz="1800" dirty="0"/>
+              <a:t>本文</a:t>
+            </a:r>
+            <a:endParaRPr lang="en-US" altLang="ja-JP" sz="1800" dirty="0"/>
+          </a:p>
+          <a:p>
+            <a:r>
+              <a:rPr lang="ja-JP" altLang="en-US" sz="1800" dirty="0"/>
+              <a:t>冗長にならないように頑張る</a:t>
+            </a:r>
+            <a:endParaRPr lang="en-US" altLang="ja-JP" sz="1800" dirty="0"/>
+          </a:p>
+          <a:p>
+            <a:r>
+              <a:rPr lang="ja-JP" altLang="en-US" sz="1800" dirty="0"/>
+              <a:t>左右比較したいとき</a:t>
+            </a:r>
+            <a:endParaRPr lang="en-US" altLang="ja-JP" sz="1800" dirty="0"/>
+          </a:p>
+        </p:txBody>
+      </p:sp>
+      <p:sp>
+        <p:nvSpPr>
+          <p:cNvPr id="7" name="正方形/長方形 6">
+            <a:extLst>
+              <a:ext uri="{FF2B5EF4-FFF2-40B4-BE49-F238E27FC236}">
+                <a16:creationId xmlns:a16="http://schemas.microsoft.com/office/drawing/2014/main" id="{1D75A1B6-F70B-25E3-C42A-1400D60D9876}"/>
+              </a:ext>
+            </a:extLst>
+          </p:cNvPr>
+          <p:cNvSpPr/>
+          <p:nvPr/>
+        </p:nvSpPr>
+        <p:spPr>
+          <a:xfrm>
+            <a:off x="342900" y="2184400"/>
+            <a:ext cx="5435600" cy="432810"/>
+          </a:xfrm>
+          <a:prstGeom prst="rect">
+            <a:avLst/>
+          </a:prstGeom>
+          <a:ln>
+            <a:noFill/>
+          </a:ln>
+        </p:spPr>
+        <p:style>
+          <a:lnRef idx="2">
+            <a:schemeClr val="accent1">
+              <a:shade val="15000"/>
+            </a:schemeClr>
+          </a:lnRef>
+          <a:fillRef idx="1">
+            <a:schemeClr val="accent1"/>
+          </a:fillRef>
+          <a:effectRef idx="0">
+            <a:schemeClr val="accent1"/>
+          </a:effectRef>
+          <a:fontRef idx="minor">
+            <a:schemeClr val="lt1"/>
+          </a:fontRef>
+        </p:style>
+        <p:txBody>
+          <a:bodyPr rtlCol="0" anchor="ctr"/>
+          <a:lstStyle/>
+          <a:p>
+            <a:pPr algn="ctr"/>
+            <a:r>
+              <a:rPr kumimoji="1" lang="ja-JP" altLang="en-US" sz="2400" b="1" dirty="0">
+                <a:solidFill>
+                  <a:schemeClr val="bg1"/>
+                </a:solidFill>
+              </a:rPr>
+              <a:t>左側はなにを表す？</a:t>
+            </a:r>
+          </a:p>
+        </p:txBody>
+      </p:sp>
+      <p:sp>
+        <p:nvSpPr>
+          <p:cNvPr id="8" name="正方形/長方形 7">
+            <a:extLst>
+              <a:ext uri="{FF2B5EF4-FFF2-40B4-BE49-F238E27FC236}">
+                <a16:creationId xmlns:a16="http://schemas.microsoft.com/office/drawing/2014/main" id="{7702FE73-EF7E-6834-0827-2C67E6B5B983}"/>
+              </a:ext>
+            </a:extLst>
+          </p:cNvPr>
+          <p:cNvSpPr/>
+          <p:nvPr/>
+        </p:nvSpPr>
+        <p:spPr>
+          <a:xfrm>
+            <a:off x="6413500" y="2184400"/>
+            <a:ext cx="5435600" cy="432810"/>
+          </a:xfrm>
+          <a:prstGeom prst="rect">
+            <a:avLst/>
+          </a:prstGeom>
+          <a:ln>
+            <a:noFill/>
+          </a:ln>
+        </p:spPr>
+        <p:style>
+          <a:lnRef idx="2">
+            <a:schemeClr val="accent1">
+              <a:shade val="15000"/>
+            </a:schemeClr>
+          </a:lnRef>
+          <a:fillRef idx="1">
+            <a:schemeClr val="accent1"/>
+          </a:fillRef>
+          <a:effectRef idx="0">
+            <a:schemeClr val="accent1"/>
+          </a:effectRef>
+          <a:fontRef idx="minor">
+            <a:schemeClr val="lt1"/>
+          </a:fontRef>
+        </p:style>
+        <p:txBody>
+          <a:bodyPr rtlCol="0" anchor="ctr"/>
+          <a:lstStyle/>
+          <a:p>
+            <a:pPr algn="ctr"/>
+            <a:r>
+              <a:rPr lang="ja-JP" altLang="en-US" sz="2400" b="1" dirty="0">
+                <a:solidFill>
+                  <a:schemeClr val="bg1"/>
+                </a:solidFill>
+              </a:rPr>
+              <a:t>右</a:t>
+            </a:r>
+            <a:r>
+              <a:rPr kumimoji="1" lang="ja-JP" altLang="en-US" sz="2400" b="1" dirty="0">
+                <a:solidFill>
+                  <a:schemeClr val="bg1"/>
+                </a:solidFill>
+              </a:rPr>
+              <a:t>側はなにを表す？</a:t>
+            </a:r>
+          </a:p>
+        </p:txBody>
+      </p:sp>
+    </p:spTree>
+    <p:extLst>
+      <p:ext uri="{BB962C8B-B14F-4D97-AF65-F5344CB8AC3E}">
+        <p14:creationId xmlns:p14="http://schemas.microsoft.com/office/powerpoint/2010/main" val="3240422563"/>
+      </p:ext>
+    </p:extLst>
+  </p:cSld>
+  <p:clrMapOvr>
+    <a:masterClrMapping/>
+  </p:clrMapOvr>
+</p:sld>
+</file>
+
+<file path=ppt/slides/slide12.xml><?xml version="1.0" encoding="utf-8"?>
+<p:sld xmlns:a="http://schemas.openxmlformats.org/drawingml/2006/main" xmlns:r="http://schemas.openxmlformats.org/officeDocument/2006/relationships" xmlns:p="http://schemas.openxmlformats.org/presentationml/2006/main">
+  <p:cSld>
+    <p:spTree>
+      <p:nvGrpSpPr>
+        <p:cNvPr id="1" name="">
+          <a:extLst>
+            <a:ext uri="{FF2B5EF4-FFF2-40B4-BE49-F238E27FC236}">
+              <a16:creationId xmlns:a16="http://schemas.microsoft.com/office/drawing/2014/main" id="{4023654D-8CB7-EE77-A47A-FB307C8B1E23}"/>
+            </a:ext>
+          </a:extLst>
+        </p:cNvPr>
+        <p:cNvGrpSpPr/>
+        <p:nvPr/>
+      </p:nvGrpSpPr>
+      <p:grpSpPr>
+        <a:xfrm>
+          <a:off x="0" y="0"/>
+          <a:ext cx="0" cy="0"/>
+          <a:chOff x="0" y="0"/>
+          <a:chExt cx="0" cy="0"/>
+        </a:xfrm>
+      </p:grpSpPr>
+      <p:cxnSp>
+        <p:nvCxnSpPr>
+          <p:cNvPr id="2" name="直線コネクタ 1">
+            <a:extLst>
+              <a:ext uri="{FF2B5EF4-FFF2-40B4-BE49-F238E27FC236}">
+                <a16:creationId xmlns:a16="http://schemas.microsoft.com/office/drawing/2014/main" id="{7EEF1B90-ECC0-9B88-DE52-01177EE4255F}"/>
+              </a:ext>
+            </a:extLst>
+          </p:cNvPr>
+          <p:cNvCxnSpPr>
+            <a:cxnSpLocks/>
+          </p:cNvCxnSpPr>
+          <p:nvPr/>
+        </p:nvCxnSpPr>
+        <p:spPr>
+          <a:xfrm>
+            <a:off x="0" y="1993900"/>
+            <a:ext cx="12192000" cy="0"/>
+          </a:xfrm>
+          <a:prstGeom prst="line">
+            <a:avLst/>
+          </a:prstGeom>
+          <a:ln w="38100"/>
+        </p:spPr>
+        <p:style>
+          <a:lnRef idx="2">
+            <a:schemeClr val="accent1"/>
+          </a:lnRef>
+          <a:fillRef idx="0">
+            <a:schemeClr val="accent1"/>
+          </a:fillRef>
+          <a:effectRef idx="1">
+            <a:schemeClr val="accent1"/>
+          </a:effectRef>
+          <a:fontRef idx="minor">
+            <a:schemeClr val="tx1"/>
+          </a:fontRef>
+        </p:style>
+      </p:cxnSp>
+      <p:sp>
+        <p:nvSpPr>
+          <p:cNvPr id="3" name="タイトル プレースホルダー 1">
+            <a:extLst>
+              <a:ext uri="{FF2B5EF4-FFF2-40B4-BE49-F238E27FC236}">
+                <a16:creationId xmlns:a16="http://schemas.microsoft.com/office/drawing/2014/main" id="{7966633A-F384-542C-3723-0833F5768B5A}"/>
+              </a:ext>
+            </a:extLst>
+          </p:cNvPr>
+          <p:cNvSpPr txBox="1">
+            <a:spLocks/>
+          </p:cNvSpPr>
+          <p:nvPr/>
+        </p:nvSpPr>
+        <p:spPr>
+          <a:xfrm>
+            <a:off x="355600" y="1108076"/>
+            <a:ext cx="11506200" cy="812797"/>
+          </a:xfrm>
+          <a:prstGeom prst="rect">
+            <a:avLst/>
+          </a:prstGeom>
+        </p:spPr>
+        <p:txBody>
+          <a:bodyPr vert="horz" lIns="91440" tIns="45720" rIns="91440" bIns="45720" rtlCol="0" anchor="ctr">
+            <a:noAutofit/>
+          </a:bodyPr>
+          <a:lstStyle>
+            <a:lvl1pPr algn="l" defTabSz="914400" rtl="0" eaLnBrk="1" latinLnBrk="0" hangingPunct="1">
+              <a:lnSpc>
+                <a:spcPct val="90000"/>
+              </a:lnSpc>
+              <a:spcBef>
+                <a:spcPct val="0"/>
+              </a:spcBef>
+              <a:buNone/>
+              <a:defRPr kumimoji="1" sz="1400" kern="1200">
+                <a:solidFill>
+                  <a:schemeClr val="tx1"/>
+                </a:solidFill>
+                <a:latin typeface="+mj-lt"/>
+                <a:ea typeface="+mj-ea"/>
+                <a:cs typeface="+mj-cs"/>
+              </a:defRPr>
+            </a:lvl1pPr>
+          </a:lstStyle>
+          <a:p>
+            <a:r>
+              <a:rPr lang="ja-JP" altLang="en-US" sz="2800" dirty="0"/>
+              <a:t>リード文</a:t>
+            </a:r>
+            <a:endParaRPr lang="en-US" altLang="ja-JP" sz="2800" dirty="0"/>
+          </a:p>
+          <a:p>
+            <a:r>
+              <a:rPr lang="en-US" altLang="ja-JP" sz="2800" dirty="0"/>
+              <a:t>2</a:t>
+            </a:r>
+            <a:r>
+              <a:rPr lang="ja-JP" altLang="en-US" sz="2800" dirty="0"/>
+              <a:t>行に収まる程度で</a:t>
+            </a:r>
+            <a:endParaRPr lang="en-US" altLang="ja-JP" sz="2800" dirty="0"/>
+          </a:p>
+        </p:txBody>
+      </p:sp>
+      <p:sp>
+        <p:nvSpPr>
+          <p:cNvPr id="4" name="タイトル プレースホルダー 1">
+            <a:extLst>
+              <a:ext uri="{FF2B5EF4-FFF2-40B4-BE49-F238E27FC236}">
+                <a16:creationId xmlns:a16="http://schemas.microsoft.com/office/drawing/2014/main" id="{36178834-2868-A913-580E-E18E96C56795}"/>
+              </a:ext>
+            </a:extLst>
+          </p:cNvPr>
+          <p:cNvSpPr txBox="1">
+            <a:spLocks/>
+          </p:cNvSpPr>
+          <p:nvPr/>
+        </p:nvSpPr>
+        <p:spPr>
+          <a:xfrm>
+            <a:off x="355600" y="546100"/>
+            <a:ext cx="11506200" cy="488949"/>
+          </a:xfrm>
+          <a:prstGeom prst="rect">
+            <a:avLst/>
+          </a:prstGeom>
+        </p:spPr>
+        <p:txBody>
+          <a:bodyPr vert="horz" lIns="91440" tIns="45720" rIns="91440" bIns="45720" rtlCol="0" anchor="ctr">
+            <a:noAutofit/>
+          </a:bodyPr>
+          <a:lstStyle>
+            <a:lvl1pPr algn="l" defTabSz="914400" rtl="0" eaLnBrk="1" latinLnBrk="0" hangingPunct="1">
+              <a:lnSpc>
+                <a:spcPct val="90000"/>
+              </a:lnSpc>
+              <a:spcBef>
+                <a:spcPct val="0"/>
+              </a:spcBef>
+              <a:buNone/>
+              <a:defRPr kumimoji="1" sz="1400" kern="1200">
+                <a:solidFill>
+                  <a:schemeClr val="tx1"/>
+                </a:solidFill>
+                <a:latin typeface="+mj-lt"/>
+                <a:ea typeface="+mj-ea"/>
+                <a:cs typeface="+mj-cs"/>
+              </a:defRPr>
+            </a:lvl1pPr>
+          </a:lstStyle>
+          <a:p>
+            <a:r>
+              <a:rPr lang="ja-JP" altLang="en-US"/>
+              <a:t>評価テーブル</a:t>
+            </a:r>
+            <a:endParaRPr lang="en-US" altLang="ja-JP" dirty="0"/>
+          </a:p>
+        </p:txBody>
+      </p:sp>
+      <p:sp>
+        <p:nvSpPr>
+          <p:cNvPr id="6" name="タイトル プレースホルダー 1">
+            <a:extLst>
+              <a:ext uri="{FF2B5EF4-FFF2-40B4-BE49-F238E27FC236}">
+                <a16:creationId xmlns:a16="http://schemas.microsoft.com/office/drawing/2014/main" id="{ED213100-5A00-33EE-9D66-9F4B80EDC912}"/>
+              </a:ext>
+            </a:extLst>
+          </p:cNvPr>
+          <p:cNvSpPr txBox="1">
+            <a:spLocks/>
+          </p:cNvSpPr>
+          <p:nvPr/>
+        </p:nvSpPr>
+        <p:spPr>
+          <a:xfrm>
+            <a:off x="7711257" y="2146304"/>
+            <a:ext cx="4150542" cy="4165584"/>
+          </a:xfrm>
+          <a:prstGeom prst="rect">
+            <a:avLst/>
+          </a:prstGeom>
+        </p:spPr>
+        <p:txBody>
+          <a:bodyPr vert="horz" lIns="91440" tIns="45720" rIns="91440" bIns="45720" rtlCol="0" anchor="t" anchorCtr="0">
+            <a:noAutofit/>
+          </a:bodyPr>
+          <a:lstStyle>
+            <a:lvl1pPr algn="l" defTabSz="914400" rtl="0" eaLnBrk="1" latinLnBrk="0" hangingPunct="1">
+              <a:lnSpc>
+                <a:spcPct val="90000"/>
+              </a:lnSpc>
+              <a:spcBef>
+                <a:spcPct val="0"/>
+              </a:spcBef>
+              <a:buNone/>
+              <a:defRPr kumimoji="1" sz="1400" kern="1200">
+                <a:solidFill>
+                  <a:schemeClr val="tx1"/>
+                </a:solidFill>
+                <a:latin typeface="+mj-lt"/>
+                <a:ea typeface="+mj-ea"/>
+                <a:cs typeface="+mj-cs"/>
+              </a:defRPr>
+            </a:lvl1pPr>
+          </a:lstStyle>
+          <a:p>
+            <a:pPr marL="285750" indent="-285750">
+              <a:buFont typeface="Arial" panose="020B0604020202020204" pitchFamily="34" charset="0"/>
+              <a:buChar char="•"/>
+            </a:pPr>
+            <a:r>
+              <a:rPr lang="ja-JP" altLang="en-US" sz="1800" dirty="0"/>
               <a:t>ポジショニング</a:t>
             </a:r>
             <a:endParaRPr lang="en-US" altLang="ja-JP" sz="1800" dirty="0"/>
@@ -5973,7 +7281,7 @@
 </p:sld>
 </file>
 
-<file path=ppt/slides/slide11.xml><?xml version="1.0" encoding="utf-8"?>
+<file path=ppt/slides/slide13.xml><?xml version="1.0" encoding="utf-8"?>
 <p:sld xmlns:a="http://schemas.openxmlformats.org/drawingml/2006/main" xmlns:r="http://schemas.openxmlformats.org/officeDocument/2006/relationships" xmlns:p="http://schemas.openxmlformats.org/presentationml/2006/main">
   <p:cSld>
     <p:spTree>
@@ -6923,7 +8231,7 @@
 </p:sld>
 </file>
 
-<file path=ppt/slides/slide12.xml><?xml version="1.0" encoding="utf-8"?>
+<file path=ppt/slides/slide14.xml><?xml version="1.0" encoding="utf-8"?>
 <p:sld xmlns:a="http://schemas.openxmlformats.org/drawingml/2006/main" xmlns:r="http://schemas.openxmlformats.org/officeDocument/2006/relationships" xmlns:p="http://schemas.openxmlformats.org/presentationml/2006/main">
   <p:cSld>
     <p:spTree>
@@ -7385,7 +8693,7 @@
 </p:sld>
 </file>
 
-<file path=ppt/slides/slide13.xml><?xml version="1.0" encoding="utf-8"?>
+<file path=ppt/slides/slide15.xml><?xml version="1.0" encoding="utf-8"?>
 <p:sld xmlns:a="http://schemas.openxmlformats.org/drawingml/2006/main" xmlns:r="http://schemas.openxmlformats.org/officeDocument/2006/relationships" xmlns:p="http://schemas.openxmlformats.org/presentationml/2006/main">
   <p:cSld>
     <p:spTree>
@@ -8920,7 +10228,7 @@
 </p:sld>
 </file>
 
-<file path=ppt/slides/slide14.xml><?xml version="1.0" encoding="utf-8"?>
+<file path=ppt/slides/slide16.xml><?xml version="1.0" encoding="utf-8"?>
 <p:sld xmlns:a="http://schemas.openxmlformats.org/drawingml/2006/main" xmlns:r="http://schemas.openxmlformats.org/officeDocument/2006/relationships" xmlns:p="http://schemas.openxmlformats.org/presentationml/2006/main">
   <p:cSld>
     <p:spTree>
@@ -9468,7 +10776,7 @@
 </p:sld>
 </file>
 
-<file path=ppt/slides/slide15.xml><?xml version="1.0" encoding="utf-8"?>
+<file path=ppt/slides/slide17.xml><?xml version="1.0" encoding="utf-8"?>
 <p:sld xmlns:a="http://schemas.openxmlformats.org/drawingml/2006/main" xmlns:r="http://schemas.openxmlformats.org/officeDocument/2006/relationships" xmlns:p="http://schemas.openxmlformats.org/presentationml/2006/main">
   <p:cSld>
     <p:spTree>
@@ -10362,7 +11670,7 @@
 </p:sld>
 </file>
 
-<file path=ppt/slides/slide16.xml><?xml version="1.0" encoding="utf-8"?>
+<file path=ppt/slides/slide18.xml><?xml version="1.0" encoding="utf-8"?>
 <p:sld xmlns:a="http://schemas.openxmlformats.org/drawingml/2006/main" xmlns:r="http://schemas.openxmlformats.org/officeDocument/2006/relationships" xmlns:p="http://schemas.openxmlformats.org/presentationml/2006/main">
   <p:cSld>
     <p:spTree>
@@ -11294,7 +12602,7 @@
 </p:sld>
 </file>
 
-<file path=ppt/slides/slide17.xml><?xml version="1.0" encoding="utf-8"?>
+<file path=ppt/slides/slide19.xml><?xml version="1.0" encoding="utf-8"?>
 <p:sld xmlns:a="http://schemas.openxmlformats.org/drawingml/2006/main" xmlns:r="http://schemas.openxmlformats.org/officeDocument/2006/relationships" xmlns:p="http://schemas.openxmlformats.org/presentationml/2006/main">
   <p:cSld>
     <p:spTree>
@@ -11875,2865 +13183,6 @@
     <p:extLst>
       <p:ext uri="{BB962C8B-B14F-4D97-AF65-F5344CB8AC3E}">
         <p14:creationId xmlns:p14="http://schemas.microsoft.com/office/powerpoint/2010/main" val="1155084605"/>
-      </p:ext>
-    </p:extLst>
-  </p:cSld>
-  <p:clrMapOvr>
-    <a:masterClrMapping/>
-  </p:clrMapOvr>
-</p:sld>
-</file>
-
-<file path=ppt/slides/slide18.xml><?xml version="1.0" encoding="utf-8"?>
-<p:sld xmlns:a="http://schemas.openxmlformats.org/drawingml/2006/main" xmlns:r="http://schemas.openxmlformats.org/officeDocument/2006/relationships" xmlns:p="http://schemas.openxmlformats.org/presentationml/2006/main">
-  <p:cSld>
-    <p:spTree>
-      <p:nvGrpSpPr>
-        <p:cNvPr id="1" name="">
-          <a:extLst>
-            <a:ext uri="{FF2B5EF4-FFF2-40B4-BE49-F238E27FC236}">
-              <a16:creationId xmlns:a16="http://schemas.microsoft.com/office/drawing/2014/main" id="{C4BDF32A-D3EE-4ED4-C8A8-96BE9F9863EF}"/>
-            </a:ext>
-          </a:extLst>
-        </p:cNvPr>
-        <p:cNvGrpSpPr/>
-        <p:nvPr/>
-      </p:nvGrpSpPr>
-      <p:grpSpPr>
-        <a:xfrm>
-          <a:off x="0" y="0"/>
-          <a:ext cx="0" cy="0"/>
-          <a:chOff x="0" y="0"/>
-          <a:chExt cx="0" cy="0"/>
-        </a:xfrm>
-      </p:grpSpPr>
-      <p:cxnSp>
-        <p:nvCxnSpPr>
-          <p:cNvPr id="2" name="直線コネクタ 1">
-            <a:extLst>
-              <a:ext uri="{FF2B5EF4-FFF2-40B4-BE49-F238E27FC236}">
-                <a16:creationId xmlns:a16="http://schemas.microsoft.com/office/drawing/2014/main" id="{8D983B16-5F4F-75CE-3266-3067313572C4}"/>
-              </a:ext>
-            </a:extLst>
-          </p:cNvPr>
-          <p:cNvCxnSpPr>
-            <a:cxnSpLocks/>
-          </p:cNvCxnSpPr>
-          <p:nvPr/>
-        </p:nvCxnSpPr>
-        <p:spPr>
-          <a:xfrm>
-            <a:off x="0" y="1993900"/>
-            <a:ext cx="12192000" cy="0"/>
-          </a:xfrm>
-          <a:prstGeom prst="line">
-            <a:avLst/>
-          </a:prstGeom>
-          <a:ln w="38100"/>
-        </p:spPr>
-        <p:style>
-          <a:lnRef idx="2">
-            <a:schemeClr val="accent1"/>
-          </a:lnRef>
-          <a:fillRef idx="0">
-            <a:schemeClr val="accent1"/>
-          </a:fillRef>
-          <a:effectRef idx="1">
-            <a:schemeClr val="accent1"/>
-          </a:effectRef>
-          <a:fontRef idx="minor">
-            <a:schemeClr val="tx1"/>
-          </a:fontRef>
-        </p:style>
-      </p:cxnSp>
-      <p:sp>
-        <p:nvSpPr>
-          <p:cNvPr id="3" name="タイトル プレースホルダー 1">
-            <a:extLst>
-              <a:ext uri="{FF2B5EF4-FFF2-40B4-BE49-F238E27FC236}">
-                <a16:creationId xmlns:a16="http://schemas.microsoft.com/office/drawing/2014/main" id="{F23457F6-6102-AE36-8337-65DB91D42569}"/>
-              </a:ext>
-            </a:extLst>
-          </p:cNvPr>
-          <p:cNvSpPr txBox="1">
-            <a:spLocks/>
-          </p:cNvSpPr>
-          <p:nvPr/>
-        </p:nvSpPr>
-        <p:spPr>
-          <a:xfrm>
-            <a:off x="355600" y="1108076"/>
-            <a:ext cx="11506200" cy="812797"/>
-          </a:xfrm>
-          <a:prstGeom prst="rect">
-            <a:avLst/>
-          </a:prstGeom>
-        </p:spPr>
-        <p:txBody>
-          <a:bodyPr vert="horz" lIns="91440" tIns="45720" rIns="91440" bIns="45720" rtlCol="0" anchor="ctr">
-            <a:noAutofit/>
-          </a:bodyPr>
-          <a:lstStyle>
-            <a:lvl1pPr algn="l" defTabSz="914400" rtl="0" eaLnBrk="1" latinLnBrk="0" hangingPunct="1">
-              <a:lnSpc>
-                <a:spcPct val="90000"/>
-              </a:lnSpc>
-              <a:spcBef>
-                <a:spcPct val="0"/>
-              </a:spcBef>
-              <a:buNone/>
-              <a:defRPr kumimoji="1" sz="1400" kern="1200">
-                <a:solidFill>
-                  <a:schemeClr val="tx1"/>
-                </a:solidFill>
-                <a:latin typeface="+mj-lt"/>
-                <a:ea typeface="+mj-ea"/>
-                <a:cs typeface="+mj-cs"/>
-              </a:defRPr>
-            </a:lvl1pPr>
-          </a:lstStyle>
-          <a:p>
-            <a:r>
-              <a:rPr lang="ja-JP" altLang="en-US" sz="2800" dirty="0"/>
-              <a:t>リード文</a:t>
-            </a:r>
-            <a:endParaRPr lang="en-US" altLang="ja-JP" sz="2800" dirty="0"/>
-          </a:p>
-          <a:p>
-            <a:r>
-              <a:rPr lang="en-US" altLang="ja-JP" sz="2800" dirty="0"/>
-              <a:t>2</a:t>
-            </a:r>
-            <a:r>
-              <a:rPr lang="ja-JP" altLang="en-US" sz="2800" dirty="0"/>
-              <a:t>行に収まる程度で</a:t>
-            </a:r>
-            <a:endParaRPr lang="en-US" altLang="ja-JP" sz="2800" dirty="0"/>
-          </a:p>
-        </p:txBody>
-      </p:sp>
-      <p:sp>
-        <p:nvSpPr>
-          <p:cNvPr id="4" name="タイトル プレースホルダー 1">
-            <a:extLst>
-              <a:ext uri="{FF2B5EF4-FFF2-40B4-BE49-F238E27FC236}">
-                <a16:creationId xmlns:a16="http://schemas.microsoft.com/office/drawing/2014/main" id="{0FDBCE1D-31E9-0332-4904-671FB573ABDB}"/>
-              </a:ext>
-            </a:extLst>
-          </p:cNvPr>
-          <p:cNvSpPr txBox="1">
-            <a:spLocks/>
-          </p:cNvSpPr>
-          <p:nvPr/>
-        </p:nvSpPr>
-        <p:spPr>
-          <a:xfrm>
-            <a:off x="355600" y="546100"/>
-            <a:ext cx="11506200" cy="488949"/>
-          </a:xfrm>
-          <a:prstGeom prst="rect">
-            <a:avLst/>
-          </a:prstGeom>
-        </p:spPr>
-        <p:txBody>
-          <a:bodyPr vert="horz" lIns="91440" tIns="45720" rIns="91440" bIns="45720" rtlCol="0" anchor="ctr">
-            <a:noAutofit/>
-          </a:bodyPr>
-          <a:lstStyle>
-            <a:lvl1pPr algn="l" defTabSz="914400" rtl="0" eaLnBrk="1" latinLnBrk="0" hangingPunct="1">
-              <a:lnSpc>
-                <a:spcPct val="90000"/>
-              </a:lnSpc>
-              <a:spcBef>
-                <a:spcPct val="0"/>
-              </a:spcBef>
-              <a:buNone/>
-              <a:defRPr kumimoji="1" sz="1400" kern="1200">
-                <a:solidFill>
-                  <a:schemeClr val="tx1"/>
-                </a:solidFill>
-                <a:latin typeface="+mj-lt"/>
-                <a:ea typeface="+mj-ea"/>
-                <a:cs typeface="+mj-cs"/>
-              </a:defRPr>
-            </a:lvl1pPr>
-          </a:lstStyle>
-          <a:p>
-            <a:r>
-              <a:rPr lang="ja-JP" altLang="en-US" dirty="0"/>
-              <a:t>目次内のタイトル名そのまま</a:t>
-            </a:r>
-            <a:endParaRPr lang="en-US" altLang="ja-JP" dirty="0"/>
-          </a:p>
-        </p:txBody>
-      </p:sp>
-      <p:sp>
-        <p:nvSpPr>
-          <p:cNvPr id="8" name="正方形/長方形 7">
-            <a:extLst>
-              <a:ext uri="{FF2B5EF4-FFF2-40B4-BE49-F238E27FC236}">
-                <a16:creationId xmlns:a16="http://schemas.microsoft.com/office/drawing/2014/main" id="{5D8CE1ED-9AEF-00EA-B35A-1DB0B4FEDD6F}"/>
-              </a:ext>
-            </a:extLst>
-          </p:cNvPr>
-          <p:cNvSpPr/>
-          <p:nvPr/>
-        </p:nvSpPr>
-        <p:spPr>
-          <a:xfrm>
-            <a:off x="371800" y="2457442"/>
-            <a:ext cx="5546400" cy="1771658"/>
-          </a:xfrm>
-          <a:prstGeom prst="rect">
-            <a:avLst/>
-          </a:prstGeom>
-          <a:solidFill>
-            <a:schemeClr val="bg1"/>
-          </a:solidFill>
-          <a:ln w="12700">
-            <a:solidFill>
-              <a:schemeClr val="tx1">
-                <a:lumMod val="75000"/>
-              </a:schemeClr>
-            </a:solidFill>
-          </a:ln>
-        </p:spPr>
-        <p:style>
-          <a:lnRef idx="2">
-            <a:schemeClr val="accent1">
-              <a:shade val="15000"/>
-            </a:schemeClr>
-          </a:lnRef>
-          <a:fillRef idx="1">
-            <a:schemeClr val="accent1"/>
-          </a:fillRef>
-          <a:effectRef idx="0">
-            <a:schemeClr val="accent1"/>
-          </a:effectRef>
-          <a:fontRef idx="minor">
-            <a:schemeClr val="lt1"/>
-          </a:fontRef>
-        </p:style>
-        <p:txBody>
-          <a:bodyPr rtlCol="0" anchor="t" anchorCtr="0"/>
-          <a:lstStyle/>
-          <a:p>
-            <a:pPr algn="ctr"/>
-            <a:endParaRPr kumimoji="1" lang="ja-JP" altLang="en-US"/>
-          </a:p>
-        </p:txBody>
-      </p:sp>
-      <p:sp>
-        <p:nvSpPr>
-          <p:cNvPr id="6" name="正方形/長方形 5">
-            <a:extLst>
-              <a:ext uri="{FF2B5EF4-FFF2-40B4-BE49-F238E27FC236}">
-                <a16:creationId xmlns:a16="http://schemas.microsoft.com/office/drawing/2014/main" id="{530B7CFD-2B24-743C-E1E3-8C932E01CAF8}"/>
-              </a:ext>
-            </a:extLst>
-          </p:cNvPr>
-          <p:cNvSpPr/>
-          <p:nvPr/>
-        </p:nvSpPr>
-        <p:spPr>
-          <a:xfrm>
-            <a:off x="355600" y="2159001"/>
-            <a:ext cx="5582416" cy="301599"/>
-          </a:xfrm>
-          <a:prstGeom prst="rect">
-            <a:avLst/>
-          </a:prstGeom>
-          <a:ln>
-            <a:noFill/>
-          </a:ln>
-        </p:spPr>
-        <p:style>
-          <a:lnRef idx="2">
-            <a:schemeClr val="accent1">
-              <a:shade val="15000"/>
-            </a:schemeClr>
-          </a:lnRef>
-          <a:fillRef idx="1">
-            <a:schemeClr val="accent1"/>
-          </a:fillRef>
-          <a:effectRef idx="0">
-            <a:schemeClr val="accent1"/>
-          </a:effectRef>
-          <a:fontRef idx="minor">
-            <a:schemeClr val="lt1"/>
-          </a:fontRef>
-        </p:style>
-        <p:txBody>
-          <a:bodyPr rtlCol="0" anchor="ctr"/>
-          <a:lstStyle/>
-          <a:p>
-            <a:pPr algn="ctr"/>
-            <a:r>
-              <a:rPr kumimoji="1" lang="en-US" altLang="ja-JP" dirty="0">
-                <a:solidFill>
-                  <a:schemeClr val="tx1">
-                    <a:lumMod val="75000"/>
-                  </a:schemeClr>
-                </a:solidFill>
-              </a:rPr>
-              <a:t>A</a:t>
-            </a:r>
-            <a:endParaRPr kumimoji="1" lang="ja-JP" altLang="en-US" dirty="0">
-              <a:solidFill>
-                <a:schemeClr val="tx1">
-                  <a:lumMod val="75000"/>
-                </a:schemeClr>
-              </a:solidFill>
-            </a:endParaRPr>
-          </a:p>
-        </p:txBody>
-      </p:sp>
-      <p:sp>
-        <p:nvSpPr>
-          <p:cNvPr id="9" name="正方形/長方形 8">
-            <a:extLst>
-              <a:ext uri="{FF2B5EF4-FFF2-40B4-BE49-F238E27FC236}">
-                <a16:creationId xmlns:a16="http://schemas.microsoft.com/office/drawing/2014/main" id="{F74551BA-7C54-8597-74DC-8ACC5D994FAF}"/>
-              </a:ext>
-            </a:extLst>
-          </p:cNvPr>
-          <p:cNvSpPr/>
-          <p:nvPr/>
-        </p:nvSpPr>
-        <p:spPr>
-          <a:xfrm>
-            <a:off x="371800" y="4825982"/>
-            <a:ext cx="5546400" cy="1771658"/>
-          </a:xfrm>
-          <a:prstGeom prst="rect">
-            <a:avLst/>
-          </a:prstGeom>
-          <a:solidFill>
-            <a:schemeClr val="bg1"/>
-          </a:solidFill>
-          <a:ln w="12700">
-            <a:solidFill>
-              <a:schemeClr val="tx1">
-                <a:lumMod val="75000"/>
-              </a:schemeClr>
-            </a:solidFill>
-          </a:ln>
-        </p:spPr>
-        <p:style>
-          <a:lnRef idx="2">
-            <a:schemeClr val="accent1">
-              <a:shade val="15000"/>
-            </a:schemeClr>
-          </a:lnRef>
-          <a:fillRef idx="1">
-            <a:schemeClr val="accent1"/>
-          </a:fillRef>
-          <a:effectRef idx="0">
-            <a:schemeClr val="accent1"/>
-          </a:effectRef>
-          <a:fontRef idx="minor">
-            <a:schemeClr val="lt1"/>
-          </a:fontRef>
-        </p:style>
-        <p:txBody>
-          <a:bodyPr rtlCol="0" anchor="t" anchorCtr="0"/>
-          <a:lstStyle/>
-          <a:p>
-            <a:pPr algn="ctr"/>
-            <a:endParaRPr kumimoji="1" lang="ja-JP" altLang="en-US"/>
-          </a:p>
-        </p:txBody>
-      </p:sp>
-      <p:sp>
-        <p:nvSpPr>
-          <p:cNvPr id="10" name="正方形/長方形 9">
-            <a:extLst>
-              <a:ext uri="{FF2B5EF4-FFF2-40B4-BE49-F238E27FC236}">
-                <a16:creationId xmlns:a16="http://schemas.microsoft.com/office/drawing/2014/main" id="{27A8DA5C-2519-379C-09FD-16DE8DA18FF3}"/>
-              </a:ext>
-            </a:extLst>
-          </p:cNvPr>
-          <p:cNvSpPr/>
-          <p:nvPr/>
-        </p:nvSpPr>
-        <p:spPr>
-          <a:xfrm>
-            <a:off x="355600" y="4527541"/>
-            <a:ext cx="5582416" cy="301599"/>
-          </a:xfrm>
-          <a:prstGeom prst="rect">
-            <a:avLst/>
-          </a:prstGeom>
-          <a:ln>
-            <a:noFill/>
-          </a:ln>
-        </p:spPr>
-        <p:style>
-          <a:lnRef idx="2">
-            <a:schemeClr val="accent1">
-              <a:shade val="15000"/>
-            </a:schemeClr>
-          </a:lnRef>
-          <a:fillRef idx="1">
-            <a:schemeClr val="accent1"/>
-          </a:fillRef>
-          <a:effectRef idx="0">
-            <a:schemeClr val="accent1"/>
-          </a:effectRef>
-          <a:fontRef idx="minor">
-            <a:schemeClr val="lt1"/>
-          </a:fontRef>
-        </p:style>
-        <p:txBody>
-          <a:bodyPr rtlCol="0" anchor="ctr"/>
-          <a:lstStyle/>
-          <a:p>
-            <a:pPr algn="ctr"/>
-            <a:r>
-              <a:rPr lang="en-US" altLang="ja-JP" dirty="0">
-                <a:solidFill>
-                  <a:schemeClr val="tx1">
-                    <a:lumMod val="75000"/>
-                  </a:schemeClr>
-                </a:solidFill>
-              </a:rPr>
-              <a:t>B</a:t>
-            </a:r>
-            <a:endParaRPr kumimoji="1" lang="ja-JP" altLang="en-US" dirty="0">
-              <a:solidFill>
-                <a:schemeClr val="tx1">
-                  <a:lumMod val="75000"/>
-                </a:schemeClr>
-              </a:solidFill>
-            </a:endParaRPr>
-          </a:p>
-        </p:txBody>
-      </p:sp>
-      <p:sp>
-        <p:nvSpPr>
-          <p:cNvPr id="11" name="正方形/長方形 10">
-            <a:extLst>
-              <a:ext uri="{FF2B5EF4-FFF2-40B4-BE49-F238E27FC236}">
-                <a16:creationId xmlns:a16="http://schemas.microsoft.com/office/drawing/2014/main" id="{16BD3C59-EDFD-F7E1-7F79-49C3738BB4E1}"/>
-              </a:ext>
-            </a:extLst>
-          </p:cNvPr>
-          <p:cNvSpPr/>
-          <p:nvPr/>
-        </p:nvSpPr>
-        <p:spPr>
-          <a:xfrm>
-            <a:off x="6295584" y="4825982"/>
-            <a:ext cx="5546400" cy="1771658"/>
-          </a:xfrm>
-          <a:prstGeom prst="rect">
-            <a:avLst/>
-          </a:prstGeom>
-          <a:solidFill>
-            <a:schemeClr val="bg1"/>
-          </a:solidFill>
-          <a:ln w="12700">
-            <a:solidFill>
-              <a:schemeClr val="tx1">
-                <a:lumMod val="75000"/>
-              </a:schemeClr>
-            </a:solidFill>
-          </a:ln>
-        </p:spPr>
-        <p:style>
-          <a:lnRef idx="2">
-            <a:schemeClr val="accent1">
-              <a:shade val="15000"/>
-            </a:schemeClr>
-          </a:lnRef>
-          <a:fillRef idx="1">
-            <a:schemeClr val="accent1"/>
-          </a:fillRef>
-          <a:effectRef idx="0">
-            <a:schemeClr val="accent1"/>
-          </a:effectRef>
-          <a:fontRef idx="minor">
-            <a:schemeClr val="lt1"/>
-          </a:fontRef>
-        </p:style>
-        <p:txBody>
-          <a:bodyPr rtlCol="0" anchor="t" anchorCtr="0"/>
-          <a:lstStyle/>
-          <a:p>
-            <a:pPr algn="ctr"/>
-            <a:endParaRPr kumimoji="1" lang="ja-JP" altLang="en-US"/>
-          </a:p>
-        </p:txBody>
-      </p:sp>
-      <p:sp>
-        <p:nvSpPr>
-          <p:cNvPr id="12" name="正方形/長方形 11">
-            <a:extLst>
-              <a:ext uri="{FF2B5EF4-FFF2-40B4-BE49-F238E27FC236}">
-                <a16:creationId xmlns:a16="http://schemas.microsoft.com/office/drawing/2014/main" id="{8F33359A-5AD4-1402-E636-562D036FC009}"/>
-              </a:ext>
-            </a:extLst>
-          </p:cNvPr>
-          <p:cNvSpPr/>
-          <p:nvPr/>
-        </p:nvSpPr>
-        <p:spPr>
-          <a:xfrm>
-            <a:off x="6279384" y="4527541"/>
-            <a:ext cx="5582416" cy="301599"/>
-          </a:xfrm>
-          <a:prstGeom prst="rect">
-            <a:avLst/>
-          </a:prstGeom>
-          <a:ln>
-            <a:noFill/>
-          </a:ln>
-        </p:spPr>
-        <p:style>
-          <a:lnRef idx="2">
-            <a:schemeClr val="accent1">
-              <a:shade val="15000"/>
-            </a:schemeClr>
-          </a:lnRef>
-          <a:fillRef idx="1">
-            <a:schemeClr val="accent1"/>
-          </a:fillRef>
-          <a:effectRef idx="0">
-            <a:schemeClr val="accent1"/>
-          </a:effectRef>
-          <a:fontRef idx="minor">
-            <a:schemeClr val="lt1"/>
-          </a:fontRef>
-        </p:style>
-        <p:txBody>
-          <a:bodyPr rtlCol="0" anchor="ctr"/>
-          <a:lstStyle/>
-          <a:p>
-            <a:pPr algn="ctr"/>
-            <a:r>
-              <a:rPr lang="en-US" altLang="ja-JP" dirty="0">
-                <a:solidFill>
-                  <a:schemeClr val="tx1">
-                    <a:lumMod val="75000"/>
-                  </a:schemeClr>
-                </a:solidFill>
-              </a:rPr>
-              <a:t>D</a:t>
-            </a:r>
-            <a:endParaRPr kumimoji="1" lang="ja-JP" altLang="en-US" dirty="0">
-              <a:solidFill>
-                <a:schemeClr val="tx1">
-                  <a:lumMod val="75000"/>
-                </a:schemeClr>
-              </a:solidFill>
-            </a:endParaRPr>
-          </a:p>
-        </p:txBody>
-      </p:sp>
-      <p:sp>
-        <p:nvSpPr>
-          <p:cNvPr id="13" name="正方形/長方形 12">
-            <a:extLst>
-              <a:ext uri="{FF2B5EF4-FFF2-40B4-BE49-F238E27FC236}">
-                <a16:creationId xmlns:a16="http://schemas.microsoft.com/office/drawing/2014/main" id="{02FE350C-2066-BCBF-8BE5-C00B86DECC1C}"/>
-              </a:ext>
-            </a:extLst>
-          </p:cNvPr>
-          <p:cNvSpPr/>
-          <p:nvPr/>
-        </p:nvSpPr>
-        <p:spPr>
-          <a:xfrm>
-            <a:off x="6295584" y="2478100"/>
-            <a:ext cx="5546400" cy="1771658"/>
-          </a:xfrm>
-          <a:prstGeom prst="rect">
-            <a:avLst/>
-          </a:prstGeom>
-          <a:solidFill>
-            <a:schemeClr val="bg1"/>
-          </a:solidFill>
-          <a:ln w="12700">
-            <a:solidFill>
-              <a:schemeClr val="tx1">
-                <a:lumMod val="75000"/>
-              </a:schemeClr>
-            </a:solidFill>
-          </a:ln>
-        </p:spPr>
-        <p:style>
-          <a:lnRef idx="2">
-            <a:schemeClr val="accent1">
-              <a:shade val="15000"/>
-            </a:schemeClr>
-          </a:lnRef>
-          <a:fillRef idx="1">
-            <a:schemeClr val="accent1"/>
-          </a:fillRef>
-          <a:effectRef idx="0">
-            <a:schemeClr val="accent1"/>
-          </a:effectRef>
-          <a:fontRef idx="minor">
-            <a:schemeClr val="lt1"/>
-          </a:fontRef>
-        </p:style>
-        <p:txBody>
-          <a:bodyPr rtlCol="0" anchor="t" anchorCtr="0"/>
-          <a:lstStyle/>
-          <a:p>
-            <a:pPr algn="ctr"/>
-            <a:endParaRPr kumimoji="1" lang="ja-JP" altLang="en-US"/>
-          </a:p>
-        </p:txBody>
-      </p:sp>
-      <p:sp>
-        <p:nvSpPr>
-          <p:cNvPr id="14" name="正方形/長方形 13">
-            <a:extLst>
-              <a:ext uri="{FF2B5EF4-FFF2-40B4-BE49-F238E27FC236}">
-                <a16:creationId xmlns:a16="http://schemas.microsoft.com/office/drawing/2014/main" id="{867519F8-B1FC-A730-E5C1-01A8C6017141}"/>
-              </a:ext>
-            </a:extLst>
-          </p:cNvPr>
-          <p:cNvSpPr/>
-          <p:nvPr/>
-        </p:nvSpPr>
-        <p:spPr>
-          <a:xfrm>
-            <a:off x="6279384" y="2179659"/>
-            <a:ext cx="5582416" cy="301599"/>
-          </a:xfrm>
-          <a:prstGeom prst="rect">
-            <a:avLst/>
-          </a:prstGeom>
-          <a:ln>
-            <a:noFill/>
-          </a:ln>
-        </p:spPr>
-        <p:style>
-          <a:lnRef idx="2">
-            <a:schemeClr val="accent1">
-              <a:shade val="15000"/>
-            </a:schemeClr>
-          </a:lnRef>
-          <a:fillRef idx="1">
-            <a:schemeClr val="accent1"/>
-          </a:fillRef>
-          <a:effectRef idx="0">
-            <a:schemeClr val="accent1"/>
-          </a:effectRef>
-          <a:fontRef idx="minor">
-            <a:schemeClr val="lt1"/>
-          </a:fontRef>
-        </p:style>
-        <p:txBody>
-          <a:bodyPr rtlCol="0" anchor="ctr"/>
-          <a:lstStyle/>
-          <a:p>
-            <a:pPr algn="ctr"/>
-            <a:r>
-              <a:rPr lang="en-US" altLang="ja-JP" dirty="0">
-                <a:solidFill>
-                  <a:schemeClr val="tx1">
-                    <a:lumMod val="75000"/>
-                  </a:schemeClr>
-                </a:solidFill>
-              </a:rPr>
-              <a:t>C</a:t>
-            </a:r>
-            <a:endParaRPr kumimoji="1" lang="ja-JP" altLang="en-US" dirty="0">
-              <a:solidFill>
-                <a:schemeClr val="tx1">
-                  <a:lumMod val="75000"/>
-                </a:schemeClr>
-              </a:solidFill>
-            </a:endParaRPr>
-          </a:p>
-        </p:txBody>
-      </p:sp>
-      <p:sp>
-        <p:nvSpPr>
-          <p:cNvPr id="15" name="楕円 14">
-            <a:extLst>
-              <a:ext uri="{FF2B5EF4-FFF2-40B4-BE49-F238E27FC236}">
-                <a16:creationId xmlns:a16="http://schemas.microsoft.com/office/drawing/2014/main" id="{B3D7A379-A8F3-A935-E402-A7B1E524F242}"/>
-              </a:ext>
-            </a:extLst>
-          </p:cNvPr>
-          <p:cNvSpPr/>
-          <p:nvPr/>
-        </p:nvSpPr>
-        <p:spPr>
-          <a:xfrm>
-            <a:off x="5237984" y="3616313"/>
-            <a:ext cx="1625600" cy="1625600"/>
-          </a:xfrm>
-          <a:prstGeom prst="ellipse">
-            <a:avLst/>
-          </a:prstGeom>
-          <a:solidFill>
-            <a:schemeClr val="accent1">
-              <a:lumMod val="20000"/>
-              <a:lumOff val="80000"/>
-            </a:schemeClr>
-          </a:solidFill>
-          <a:ln>
-            <a:noFill/>
-          </a:ln>
-        </p:spPr>
-        <p:style>
-          <a:lnRef idx="2">
-            <a:schemeClr val="accent1">
-              <a:shade val="15000"/>
-            </a:schemeClr>
-          </a:lnRef>
-          <a:fillRef idx="1">
-            <a:schemeClr val="accent1"/>
-          </a:fillRef>
-          <a:effectRef idx="0">
-            <a:schemeClr val="accent1"/>
-          </a:effectRef>
-          <a:fontRef idx="minor">
-            <a:schemeClr val="lt1"/>
-          </a:fontRef>
-        </p:style>
-        <p:txBody>
-          <a:bodyPr rtlCol="0" anchor="ctr"/>
-          <a:lstStyle/>
-          <a:p>
-            <a:pPr algn="ctr"/>
-            <a:r>
-              <a:rPr lang="ja-JP" altLang="en-US" dirty="0">
-                <a:solidFill>
-                  <a:schemeClr val="tx1">
-                    <a:lumMod val="75000"/>
-                  </a:schemeClr>
-                </a:solidFill>
-              </a:rPr>
-              <a:t>なにに</a:t>
-            </a:r>
-            <a:endParaRPr lang="en-US" altLang="ja-JP" dirty="0">
-              <a:solidFill>
-                <a:schemeClr val="tx1">
-                  <a:lumMod val="75000"/>
-                </a:schemeClr>
-              </a:solidFill>
-            </a:endParaRPr>
-          </a:p>
-          <a:p>
-            <a:pPr algn="ctr"/>
-            <a:r>
-              <a:rPr lang="ja-JP" altLang="en-US" dirty="0">
-                <a:solidFill>
-                  <a:schemeClr val="tx1">
-                    <a:lumMod val="75000"/>
-                  </a:schemeClr>
-                </a:solidFill>
-              </a:rPr>
-              <a:t>ついての</a:t>
-            </a:r>
-            <a:endParaRPr lang="en-US" altLang="ja-JP" dirty="0">
-              <a:solidFill>
-                <a:schemeClr val="tx1">
-                  <a:lumMod val="75000"/>
-                </a:schemeClr>
-              </a:solidFill>
-            </a:endParaRPr>
-          </a:p>
-          <a:p>
-            <a:pPr algn="ctr"/>
-            <a:r>
-              <a:rPr kumimoji="1" lang="ja-JP" altLang="en-US" dirty="0">
-                <a:solidFill>
-                  <a:schemeClr val="tx1">
-                    <a:lumMod val="75000"/>
-                  </a:schemeClr>
-                </a:solidFill>
-              </a:rPr>
-              <a:t>分割？</a:t>
-            </a:r>
-          </a:p>
-        </p:txBody>
-      </p:sp>
-    </p:spTree>
-    <p:extLst>
-      <p:ext uri="{BB962C8B-B14F-4D97-AF65-F5344CB8AC3E}">
-        <p14:creationId xmlns:p14="http://schemas.microsoft.com/office/powerpoint/2010/main" val="3714738854"/>
-      </p:ext>
-    </p:extLst>
-  </p:cSld>
-  <p:clrMapOvr>
-    <a:masterClrMapping/>
-  </p:clrMapOvr>
-</p:sld>
-</file>
-
-<file path=ppt/slides/slide19.xml><?xml version="1.0" encoding="utf-8"?>
-<p:sld xmlns:a="http://schemas.openxmlformats.org/drawingml/2006/main" xmlns:r="http://schemas.openxmlformats.org/officeDocument/2006/relationships" xmlns:p="http://schemas.openxmlformats.org/presentationml/2006/main">
-  <p:cSld>
-    <p:spTree>
-      <p:nvGrpSpPr>
-        <p:cNvPr id="1" name="">
-          <a:extLst>
-            <a:ext uri="{FF2B5EF4-FFF2-40B4-BE49-F238E27FC236}">
-              <a16:creationId xmlns:a16="http://schemas.microsoft.com/office/drawing/2014/main" id="{977577BA-2D60-D6EB-32E0-C3BBCB0228F9}"/>
-            </a:ext>
-          </a:extLst>
-        </p:cNvPr>
-        <p:cNvGrpSpPr/>
-        <p:nvPr/>
-      </p:nvGrpSpPr>
-      <p:grpSpPr>
-        <a:xfrm>
-          <a:off x="0" y="0"/>
-          <a:ext cx="0" cy="0"/>
-          <a:chOff x="0" y="0"/>
-          <a:chExt cx="0" cy="0"/>
-        </a:xfrm>
-      </p:grpSpPr>
-      <p:cxnSp>
-        <p:nvCxnSpPr>
-          <p:cNvPr id="2" name="直線コネクタ 1">
-            <a:extLst>
-              <a:ext uri="{FF2B5EF4-FFF2-40B4-BE49-F238E27FC236}">
-                <a16:creationId xmlns:a16="http://schemas.microsoft.com/office/drawing/2014/main" id="{A111E20A-D56F-CC97-2496-C398D8AB7AB5}"/>
-              </a:ext>
-            </a:extLst>
-          </p:cNvPr>
-          <p:cNvCxnSpPr>
-            <a:cxnSpLocks/>
-          </p:cNvCxnSpPr>
-          <p:nvPr/>
-        </p:nvCxnSpPr>
-        <p:spPr>
-          <a:xfrm>
-            <a:off x="0" y="1993900"/>
-            <a:ext cx="12192000" cy="0"/>
-          </a:xfrm>
-          <a:prstGeom prst="line">
-            <a:avLst/>
-          </a:prstGeom>
-          <a:ln w="38100"/>
-        </p:spPr>
-        <p:style>
-          <a:lnRef idx="2">
-            <a:schemeClr val="accent1"/>
-          </a:lnRef>
-          <a:fillRef idx="0">
-            <a:schemeClr val="accent1"/>
-          </a:fillRef>
-          <a:effectRef idx="1">
-            <a:schemeClr val="accent1"/>
-          </a:effectRef>
-          <a:fontRef idx="minor">
-            <a:schemeClr val="tx1"/>
-          </a:fontRef>
-        </p:style>
-      </p:cxnSp>
-      <p:sp>
-        <p:nvSpPr>
-          <p:cNvPr id="3" name="タイトル プレースホルダー 1">
-            <a:extLst>
-              <a:ext uri="{FF2B5EF4-FFF2-40B4-BE49-F238E27FC236}">
-                <a16:creationId xmlns:a16="http://schemas.microsoft.com/office/drawing/2014/main" id="{BA9946CA-FED8-9568-3AD1-3A10EDD5BED1}"/>
-              </a:ext>
-            </a:extLst>
-          </p:cNvPr>
-          <p:cNvSpPr txBox="1">
-            <a:spLocks/>
-          </p:cNvSpPr>
-          <p:nvPr/>
-        </p:nvSpPr>
-        <p:spPr>
-          <a:xfrm>
-            <a:off x="355600" y="1108076"/>
-            <a:ext cx="11506200" cy="812797"/>
-          </a:xfrm>
-          <a:prstGeom prst="rect">
-            <a:avLst/>
-          </a:prstGeom>
-        </p:spPr>
-        <p:txBody>
-          <a:bodyPr vert="horz" lIns="91440" tIns="45720" rIns="91440" bIns="45720" rtlCol="0" anchor="ctr">
-            <a:noAutofit/>
-          </a:bodyPr>
-          <a:lstStyle>
-            <a:lvl1pPr algn="l" defTabSz="914400" rtl="0" eaLnBrk="1" latinLnBrk="0" hangingPunct="1">
-              <a:lnSpc>
-                <a:spcPct val="90000"/>
-              </a:lnSpc>
-              <a:spcBef>
-                <a:spcPct val="0"/>
-              </a:spcBef>
-              <a:buNone/>
-              <a:defRPr kumimoji="1" sz="1400" kern="1200">
-                <a:solidFill>
-                  <a:schemeClr val="tx1"/>
-                </a:solidFill>
-                <a:latin typeface="+mj-lt"/>
-                <a:ea typeface="+mj-ea"/>
-                <a:cs typeface="+mj-cs"/>
-              </a:defRPr>
-            </a:lvl1pPr>
-          </a:lstStyle>
-          <a:p>
-            <a:r>
-              <a:rPr lang="ja-JP" altLang="en-US" sz="2800" dirty="0"/>
-              <a:t>洞察のプロセス</a:t>
-            </a:r>
-            <a:endParaRPr lang="en-US" altLang="ja-JP" sz="2800" dirty="0"/>
-          </a:p>
-        </p:txBody>
-      </p:sp>
-      <p:sp>
-        <p:nvSpPr>
-          <p:cNvPr id="4" name="タイトル プレースホルダー 1">
-            <a:extLst>
-              <a:ext uri="{FF2B5EF4-FFF2-40B4-BE49-F238E27FC236}">
-                <a16:creationId xmlns:a16="http://schemas.microsoft.com/office/drawing/2014/main" id="{5D47A94B-E5AE-3CB9-5AED-3000070C4F3C}"/>
-              </a:ext>
-            </a:extLst>
-          </p:cNvPr>
-          <p:cNvSpPr txBox="1">
-            <a:spLocks/>
-          </p:cNvSpPr>
-          <p:nvPr/>
-        </p:nvSpPr>
-        <p:spPr>
-          <a:xfrm>
-            <a:off x="355600" y="546100"/>
-            <a:ext cx="11506200" cy="488949"/>
-          </a:xfrm>
-          <a:prstGeom prst="rect">
-            <a:avLst/>
-          </a:prstGeom>
-        </p:spPr>
-        <p:txBody>
-          <a:bodyPr vert="horz" lIns="91440" tIns="45720" rIns="91440" bIns="45720" rtlCol="0" anchor="ctr">
-            <a:noAutofit/>
-          </a:bodyPr>
-          <a:lstStyle>
-            <a:lvl1pPr algn="l" defTabSz="914400" rtl="0" eaLnBrk="1" latinLnBrk="0" hangingPunct="1">
-              <a:lnSpc>
-                <a:spcPct val="90000"/>
-              </a:lnSpc>
-              <a:spcBef>
-                <a:spcPct val="0"/>
-              </a:spcBef>
-              <a:buNone/>
-              <a:defRPr kumimoji="1" sz="1400" kern="1200">
-                <a:solidFill>
-                  <a:schemeClr val="tx1"/>
-                </a:solidFill>
-                <a:latin typeface="+mj-lt"/>
-                <a:ea typeface="+mj-ea"/>
-                <a:cs typeface="+mj-cs"/>
-              </a:defRPr>
-            </a:lvl1pPr>
-          </a:lstStyle>
-          <a:p>
-            <a:r>
-              <a:rPr lang="ja-JP" altLang="en-US" dirty="0"/>
-              <a:t>目次内のタイトル名そのまま</a:t>
-            </a:r>
-            <a:endParaRPr lang="en-US" altLang="ja-JP" dirty="0"/>
-          </a:p>
-        </p:txBody>
-      </p:sp>
-      <p:sp>
-        <p:nvSpPr>
-          <p:cNvPr id="8" name="正方形/長方形 7">
-            <a:extLst>
-              <a:ext uri="{FF2B5EF4-FFF2-40B4-BE49-F238E27FC236}">
-                <a16:creationId xmlns:a16="http://schemas.microsoft.com/office/drawing/2014/main" id="{B09E6ED9-C4F4-17FA-E179-8AAA42DCBBB1}"/>
-              </a:ext>
-            </a:extLst>
-          </p:cNvPr>
-          <p:cNvSpPr/>
-          <p:nvPr/>
-        </p:nvSpPr>
-        <p:spPr>
-          <a:xfrm>
-            <a:off x="433792" y="2891065"/>
-            <a:ext cx="465108" cy="3416735"/>
-          </a:xfrm>
-          <a:prstGeom prst="rect">
-            <a:avLst/>
-          </a:prstGeom>
-          <a:solidFill>
-            <a:schemeClr val="accent1">
-              <a:lumMod val="20000"/>
-              <a:lumOff val="80000"/>
-            </a:schemeClr>
-          </a:solidFill>
-          <a:ln w="12700">
-            <a:solidFill>
-              <a:schemeClr val="tx1">
-                <a:lumMod val="75000"/>
-              </a:schemeClr>
-            </a:solidFill>
-          </a:ln>
-        </p:spPr>
-        <p:style>
-          <a:lnRef idx="2">
-            <a:schemeClr val="accent1">
-              <a:shade val="15000"/>
-            </a:schemeClr>
-          </a:lnRef>
-          <a:fillRef idx="1">
-            <a:schemeClr val="accent1"/>
-          </a:fillRef>
-          <a:effectRef idx="0">
-            <a:schemeClr val="accent1"/>
-          </a:effectRef>
-          <a:fontRef idx="minor">
-            <a:schemeClr val="lt1"/>
-          </a:fontRef>
-        </p:style>
-        <p:txBody>
-          <a:bodyPr rtlCol="0" anchor="ctr" anchorCtr="1"/>
-          <a:lstStyle/>
-          <a:p>
-            <a:pPr algn="ctr"/>
-            <a:r>
-              <a:rPr kumimoji="1" lang="ja-JP" altLang="en-US" dirty="0">
-                <a:solidFill>
-                  <a:schemeClr val="tx1">
-                    <a:lumMod val="75000"/>
-                  </a:schemeClr>
-                </a:solidFill>
-              </a:rPr>
-              <a:t>洞察</a:t>
-            </a:r>
-            <a:endParaRPr kumimoji="1" lang="ja-JP" altLang="en-US" dirty="0"/>
-          </a:p>
-        </p:txBody>
-      </p:sp>
-      <p:sp>
-        <p:nvSpPr>
-          <p:cNvPr id="14" name="正方形/長方形 13">
-            <a:extLst>
-              <a:ext uri="{FF2B5EF4-FFF2-40B4-BE49-F238E27FC236}">
-                <a16:creationId xmlns:a16="http://schemas.microsoft.com/office/drawing/2014/main" id="{E67DA372-9D93-00A1-7A23-29A0FAF2CFC0}"/>
-              </a:ext>
-            </a:extLst>
-          </p:cNvPr>
-          <p:cNvSpPr/>
-          <p:nvPr/>
-        </p:nvSpPr>
-        <p:spPr>
-          <a:xfrm>
-            <a:off x="436524" y="2520619"/>
-            <a:ext cx="1841725" cy="304327"/>
-          </a:xfrm>
-          <a:prstGeom prst="rect">
-            <a:avLst/>
-          </a:prstGeom>
-          <a:noFill/>
-          <a:ln>
-            <a:solidFill>
-              <a:schemeClr val="tx1">
-                <a:lumMod val="75000"/>
-              </a:schemeClr>
-            </a:solidFill>
-          </a:ln>
-        </p:spPr>
-        <p:style>
-          <a:lnRef idx="2">
-            <a:schemeClr val="accent1">
-              <a:shade val="15000"/>
-            </a:schemeClr>
-          </a:lnRef>
-          <a:fillRef idx="1">
-            <a:schemeClr val="accent1"/>
-          </a:fillRef>
-          <a:effectRef idx="0">
-            <a:schemeClr val="accent1"/>
-          </a:effectRef>
-          <a:fontRef idx="minor">
-            <a:schemeClr val="lt1"/>
-          </a:fontRef>
-        </p:style>
-        <p:txBody>
-          <a:bodyPr rtlCol="0" anchor="ctr"/>
-          <a:lstStyle/>
-          <a:p>
-            <a:pPr algn="ctr"/>
-            <a:r>
-              <a:rPr kumimoji="1" lang="en-US" altLang="ja-JP" dirty="0">
-                <a:solidFill>
-                  <a:schemeClr val="tx1">
-                    <a:lumMod val="75000"/>
-                  </a:schemeClr>
-                </a:solidFill>
-              </a:rPr>
-              <a:t>Input</a:t>
-            </a:r>
-            <a:endParaRPr kumimoji="1" lang="ja-JP" altLang="en-US" dirty="0">
-              <a:solidFill>
-                <a:schemeClr val="tx1">
-                  <a:lumMod val="75000"/>
-                </a:schemeClr>
-              </a:solidFill>
-            </a:endParaRPr>
-          </a:p>
-        </p:txBody>
-      </p:sp>
-      <p:sp>
-        <p:nvSpPr>
-          <p:cNvPr id="5" name="正方形/長方形 4">
-            <a:extLst>
-              <a:ext uri="{FF2B5EF4-FFF2-40B4-BE49-F238E27FC236}">
-                <a16:creationId xmlns:a16="http://schemas.microsoft.com/office/drawing/2014/main" id="{BDDFAE33-7064-E978-BDE5-8B0A5A613C59}"/>
-              </a:ext>
-            </a:extLst>
-          </p:cNvPr>
-          <p:cNvSpPr/>
-          <p:nvPr/>
-        </p:nvSpPr>
-        <p:spPr>
-          <a:xfrm>
-            <a:off x="436525" y="6373896"/>
-            <a:ext cx="1841724" cy="304326"/>
-          </a:xfrm>
-          <a:prstGeom prst="rect">
-            <a:avLst/>
-          </a:prstGeom>
-          <a:noFill/>
-          <a:ln>
-            <a:solidFill>
-              <a:schemeClr val="tx1">
-                <a:lumMod val="75000"/>
-              </a:schemeClr>
-            </a:solidFill>
-          </a:ln>
-        </p:spPr>
-        <p:style>
-          <a:lnRef idx="2">
-            <a:schemeClr val="accent1">
-              <a:shade val="15000"/>
-            </a:schemeClr>
-          </a:lnRef>
-          <a:fillRef idx="1">
-            <a:schemeClr val="accent1"/>
-          </a:fillRef>
-          <a:effectRef idx="0">
-            <a:schemeClr val="accent1"/>
-          </a:effectRef>
-          <a:fontRef idx="minor">
-            <a:schemeClr val="lt1"/>
-          </a:fontRef>
-        </p:style>
-        <p:txBody>
-          <a:bodyPr rtlCol="0" anchor="ctr"/>
-          <a:lstStyle/>
-          <a:p>
-            <a:pPr algn="ctr"/>
-            <a:r>
-              <a:rPr lang="en-US" altLang="ja-JP" dirty="0">
-                <a:solidFill>
-                  <a:schemeClr val="tx1">
-                    <a:lumMod val="75000"/>
-                  </a:schemeClr>
-                </a:solidFill>
-              </a:rPr>
-              <a:t>Out</a:t>
-            </a:r>
-            <a:r>
-              <a:rPr kumimoji="1" lang="en-US" altLang="ja-JP" dirty="0">
-                <a:solidFill>
-                  <a:schemeClr val="tx1">
-                    <a:lumMod val="75000"/>
-                  </a:schemeClr>
-                </a:solidFill>
-              </a:rPr>
-              <a:t>put</a:t>
-            </a:r>
-            <a:endParaRPr kumimoji="1" lang="ja-JP" altLang="en-US" dirty="0">
-              <a:solidFill>
-                <a:schemeClr val="tx1">
-                  <a:lumMod val="75000"/>
-                </a:schemeClr>
-              </a:solidFill>
-            </a:endParaRPr>
-          </a:p>
-        </p:txBody>
-      </p:sp>
-      <p:sp>
-        <p:nvSpPr>
-          <p:cNvPr id="7" name="正方形/長方形 6">
-            <a:extLst>
-              <a:ext uri="{FF2B5EF4-FFF2-40B4-BE49-F238E27FC236}">
-                <a16:creationId xmlns:a16="http://schemas.microsoft.com/office/drawing/2014/main" id="{D59428F2-7D30-91B9-0216-4582EEE1A01C}"/>
-              </a:ext>
-            </a:extLst>
-          </p:cNvPr>
-          <p:cNvSpPr/>
-          <p:nvPr/>
-        </p:nvSpPr>
-        <p:spPr>
-          <a:xfrm>
-            <a:off x="1131375" y="2891064"/>
-            <a:ext cx="1146874" cy="952516"/>
-          </a:xfrm>
-          <a:prstGeom prst="rect">
-            <a:avLst/>
-          </a:prstGeom>
-          <a:solidFill>
-            <a:schemeClr val="accent1">
-              <a:lumMod val="20000"/>
-              <a:lumOff val="80000"/>
-            </a:schemeClr>
-          </a:solidFill>
-        </p:spPr>
-        <p:style>
-          <a:lnRef idx="2">
-            <a:schemeClr val="accent1">
-              <a:shade val="15000"/>
-            </a:schemeClr>
-          </a:lnRef>
-          <a:fillRef idx="1">
-            <a:schemeClr val="accent1"/>
-          </a:fillRef>
-          <a:effectRef idx="0">
-            <a:schemeClr val="accent1"/>
-          </a:effectRef>
-          <a:fontRef idx="minor">
-            <a:schemeClr val="lt1"/>
-          </a:fontRef>
-        </p:style>
-        <p:txBody>
-          <a:bodyPr rtlCol="0" anchor="ctr"/>
-          <a:lstStyle/>
-          <a:p>
-            <a:pPr algn="ctr"/>
-            <a:r>
-              <a:rPr kumimoji="1" lang="ja-JP" altLang="en-US" dirty="0">
-                <a:solidFill>
-                  <a:schemeClr val="tx1">
-                    <a:lumMod val="75000"/>
-                  </a:schemeClr>
-                </a:solidFill>
-              </a:rPr>
-              <a:t>整理整頓</a:t>
-            </a:r>
-          </a:p>
-        </p:txBody>
-      </p:sp>
-      <p:sp>
-        <p:nvSpPr>
-          <p:cNvPr id="16" name="正方形/長方形 15">
-            <a:extLst>
-              <a:ext uri="{FF2B5EF4-FFF2-40B4-BE49-F238E27FC236}">
-                <a16:creationId xmlns:a16="http://schemas.microsoft.com/office/drawing/2014/main" id="{50F46E8A-8156-E4C6-99E2-CAF97CC54475}"/>
-              </a:ext>
-            </a:extLst>
-          </p:cNvPr>
-          <p:cNvSpPr/>
-          <p:nvPr/>
-        </p:nvSpPr>
-        <p:spPr>
-          <a:xfrm>
-            <a:off x="1131375" y="4123163"/>
-            <a:ext cx="1146874" cy="952516"/>
-          </a:xfrm>
-          <a:prstGeom prst="rect">
-            <a:avLst/>
-          </a:prstGeom>
-          <a:solidFill>
-            <a:schemeClr val="accent1">
-              <a:lumMod val="20000"/>
-              <a:lumOff val="80000"/>
-            </a:schemeClr>
-          </a:solidFill>
-        </p:spPr>
-        <p:style>
-          <a:lnRef idx="2">
-            <a:schemeClr val="accent1">
-              <a:shade val="15000"/>
-            </a:schemeClr>
-          </a:lnRef>
-          <a:fillRef idx="1">
-            <a:schemeClr val="accent1"/>
-          </a:fillRef>
-          <a:effectRef idx="0">
-            <a:schemeClr val="accent1"/>
-          </a:effectRef>
-          <a:fontRef idx="minor">
-            <a:schemeClr val="lt1"/>
-          </a:fontRef>
-        </p:style>
-        <p:txBody>
-          <a:bodyPr rtlCol="0" anchor="ctr"/>
-          <a:lstStyle/>
-          <a:p>
-            <a:pPr algn="ctr"/>
-            <a:r>
-              <a:rPr kumimoji="1" lang="ja-JP" altLang="en-US" dirty="0">
-                <a:solidFill>
-                  <a:schemeClr val="tx1">
-                    <a:lumMod val="75000"/>
-                  </a:schemeClr>
-                </a:solidFill>
-              </a:rPr>
-              <a:t>抽出</a:t>
-            </a:r>
-          </a:p>
-        </p:txBody>
-      </p:sp>
-      <p:sp>
-        <p:nvSpPr>
-          <p:cNvPr id="17" name="正方形/長方形 16">
-            <a:extLst>
-              <a:ext uri="{FF2B5EF4-FFF2-40B4-BE49-F238E27FC236}">
-                <a16:creationId xmlns:a16="http://schemas.microsoft.com/office/drawing/2014/main" id="{7C742F23-8601-ACD2-F335-E3A5F91CD28B}"/>
-              </a:ext>
-            </a:extLst>
-          </p:cNvPr>
-          <p:cNvSpPr/>
-          <p:nvPr/>
-        </p:nvSpPr>
-        <p:spPr>
-          <a:xfrm>
-            <a:off x="1131375" y="5355262"/>
-            <a:ext cx="1146874" cy="952516"/>
-          </a:xfrm>
-          <a:prstGeom prst="rect">
-            <a:avLst/>
-          </a:prstGeom>
-          <a:solidFill>
-            <a:schemeClr val="accent1">
-              <a:lumMod val="20000"/>
-              <a:lumOff val="80000"/>
-            </a:schemeClr>
-          </a:solidFill>
-        </p:spPr>
-        <p:style>
-          <a:lnRef idx="2">
-            <a:schemeClr val="accent1">
-              <a:shade val="15000"/>
-            </a:schemeClr>
-          </a:lnRef>
-          <a:fillRef idx="1">
-            <a:schemeClr val="accent1"/>
-          </a:fillRef>
-          <a:effectRef idx="0">
-            <a:schemeClr val="accent1"/>
-          </a:effectRef>
-          <a:fontRef idx="minor">
-            <a:schemeClr val="lt1"/>
-          </a:fontRef>
-        </p:style>
-        <p:txBody>
-          <a:bodyPr rtlCol="0" anchor="ctr"/>
-          <a:lstStyle/>
-          <a:p>
-            <a:pPr algn="ctr"/>
-            <a:r>
-              <a:rPr kumimoji="1" lang="ja-JP" altLang="en-US" dirty="0">
-                <a:solidFill>
-                  <a:schemeClr val="tx1">
-                    <a:lumMod val="75000"/>
-                  </a:schemeClr>
-                </a:solidFill>
-              </a:rPr>
-              <a:t>示唆化</a:t>
-            </a:r>
-          </a:p>
-        </p:txBody>
-      </p:sp>
-      <p:sp>
-        <p:nvSpPr>
-          <p:cNvPr id="18" name="フローチャート: 他ページ結合子 17">
-            <a:extLst>
-              <a:ext uri="{FF2B5EF4-FFF2-40B4-BE49-F238E27FC236}">
-                <a16:creationId xmlns:a16="http://schemas.microsoft.com/office/drawing/2014/main" id="{ABABD34D-D65B-8DE5-0476-92F06D74B0E2}"/>
-              </a:ext>
-            </a:extLst>
-          </p:cNvPr>
-          <p:cNvSpPr/>
-          <p:nvPr/>
-        </p:nvSpPr>
-        <p:spPr>
-          <a:xfrm rot="16200000">
-            <a:off x="3841306" y="844498"/>
-            <a:ext cx="304326" cy="2861874"/>
-          </a:xfrm>
-          <a:prstGeom prst="flowChartOffpageConnector">
-            <a:avLst/>
-          </a:prstGeom>
-          <a:solidFill>
-            <a:schemeClr val="accent1">
-              <a:lumMod val="20000"/>
-              <a:lumOff val="80000"/>
-            </a:schemeClr>
-          </a:solidFill>
-          <a:ln>
-            <a:noFill/>
-          </a:ln>
-        </p:spPr>
-        <p:style>
-          <a:lnRef idx="2">
-            <a:schemeClr val="accent1">
-              <a:shade val="15000"/>
-            </a:schemeClr>
-          </a:lnRef>
-          <a:fillRef idx="1">
-            <a:schemeClr val="accent1"/>
-          </a:fillRef>
-          <a:effectRef idx="0">
-            <a:schemeClr val="accent1"/>
-          </a:effectRef>
-          <a:fontRef idx="minor">
-            <a:schemeClr val="lt1"/>
-          </a:fontRef>
-        </p:style>
-        <p:txBody>
-          <a:bodyPr vert="eaVert" rtlCol="0" anchor="ctr" anchorCtr="1"/>
-          <a:lstStyle/>
-          <a:p>
-            <a:pPr algn="ctr"/>
-            <a:r>
-              <a:rPr lang="en-US" altLang="ja-JP" sz="1400" dirty="0">
-                <a:solidFill>
-                  <a:schemeClr val="tx1">
-                    <a:lumMod val="75000"/>
-                  </a:schemeClr>
-                </a:solidFill>
-              </a:rPr>
-              <a:t>Ⅰ.</a:t>
-            </a:r>
-            <a:r>
-              <a:rPr lang="ja-JP" altLang="en-US" sz="1400" dirty="0">
-                <a:solidFill>
-                  <a:schemeClr val="tx1">
-                    <a:lumMod val="75000"/>
-                  </a:schemeClr>
-                </a:solidFill>
-              </a:rPr>
-              <a:t>現状の把握</a:t>
-            </a:r>
-            <a:endParaRPr lang="en-US" altLang="ja-JP" sz="1400" dirty="0">
-              <a:solidFill>
-                <a:schemeClr val="tx1">
-                  <a:lumMod val="75000"/>
-                </a:schemeClr>
-              </a:solidFill>
-            </a:endParaRPr>
-          </a:p>
-        </p:txBody>
-      </p:sp>
-      <p:sp>
-        <p:nvSpPr>
-          <p:cNvPr id="19" name="フローチャート: 他ページ結合子 18">
-            <a:extLst>
-              <a:ext uri="{FF2B5EF4-FFF2-40B4-BE49-F238E27FC236}">
-                <a16:creationId xmlns:a16="http://schemas.microsoft.com/office/drawing/2014/main" id="{822F2098-6DEA-561E-2E42-FE979A777ED9}"/>
-              </a:ext>
-            </a:extLst>
-          </p:cNvPr>
-          <p:cNvSpPr/>
-          <p:nvPr/>
-        </p:nvSpPr>
-        <p:spPr>
-          <a:xfrm rot="16200000">
-            <a:off x="6987463" y="844498"/>
-            <a:ext cx="304326" cy="2861874"/>
-          </a:xfrm>
-          <a:prstGeom prst="flowChartOffpageConnector">
-            <a:avLst/>
-          </a:prstGeom>
-          <a:solidFill>
-            <a:schemeClr val="accent1">
-              <a:lumMod val="20000"/>
-              <a:lumOff val="80000"/>
-            </a:schemeClr>
-          </a:solidFill>
-          <a:ln>
-            <a:noFill/>
-          </a:ln>
-        </p:spPr>
-        <p:style>
-          <a:lnRef idx="2">
-            <a:schemeClr val="accent1">
-              <a:shade val="15000"/>
-            </a:schemeClr>
-          </a:lnRef>
-          <a:fillRef idx="1">
-            <a:schemeClr val="accent1"/>
-          </a:fillRef>
-          <a:effectRef idx="0">
-            <a:schemeClr val="accent1"/>
-          </a:effectRef>
-          <a:fontRef idx="minor">
-            <a:schemeClr val="lt1"/>
-          </a:fontRef>
-        </p:style>
-        <p:txBody>
-          <a:bodyPr vert="eaVert" rtlCol="0" anchor="ctr" anchorCtr="1"/>
-          <a:lstStyle/>
-          <a:p>
-            <a:pPr algn="ctr"/>
-            <a:r>
-              <a:rPr lang="en-US" altLang="ja-JP" sz="1400" dirty="0">
-                <a:solidFill>
-                  <a:schemeClr val="tx1">
-                    <a:lumMod val="75000"/>
-                  </a:schemeClr>
-                </a:solidFill>
-              </a:rPr>
-              <a:t>Ⅱ.</a:t>
-            </a:r>
-            <a:r>
-              <a:rPr lang="ja-JP" altLang="en-US" sz="1400" dirty="0">
-                <a:solidFill>
-                  <a:schemeClr val="tx1">
-                    <a:lumMod val="75000"/>
-                  </a:schemeClr>
-                </a:solidFill>
-              </a:rPr>
-              <a:t>実現したい状態の</a:t>
-            </a:r>
-            <a:endParaRPr lang="en-US" altLang="ja-JP" sz="1400" dirty="0">
-              <a:solidFill>
-                <a:schemeClr val="tx1">
-                  <a:lumMod val="75000"/>
-                </a:schemeClr>
-              </a:solidFill>
-            </a:endParaRPr>
-          </a:p>
-          <a:p>
-            <a:pPr algn="ctr"/>
-            <a:r>
-              <a:rPr lang="ja-JP" altLang="en-US" sz="1400" dirty="0">
-                <a:solidFill>
-                  <a:schemeClr val="tx1">
-                    <a:lumMod val="75000"/>
-                  </a:schemeClr>
-                </a:solidFill>
-              </a:rPr>
-              <a:t>明確化</a:t>
-            </a:r>
-            <a:endParaRPr lang="en-US" altLang="ja-JP" sz="1400" dirty="0">
-              <a:solidFill>
-                <a:schemeClr val="tx1">
-                  <a:lumMod val="75000"/>
-                </a:schemeClr>
-              </a:solidFill>
-            </a:endParaRPr>
-          </a:p>
-        </p:txBody>
-      </p:sp>
-      <p:sp>
-        <p:nvSpPr>
-          <p:cNvPr id="20" name="フローチャート: 他ページ結合子 19">
-            <a:extLst>
-              <a:ext uri="{FF2B5EF4-FFF2-40B4-BE49-F238E27FC236}">
-                <a16:creationId xmlns:a16="http://schemas.microsoft.com/office/drawing/2014/main" id="{DD88FA71-992B-7D55-835F-A369119D2A71}"/>
-              </a:ext>
-            </a:extLst>
-          </p:cNvPr>
-          <p:cNvSpPr/>
-          <p:nvPr/>
-        </p:nvSpPr>
-        <p:spPr>
-          <a:xfrm rot="16200000">
-            <a:off x="10133621" y="844497"/>
-            <a:ext cx="304324" cy="2861874"/>
-          </a:xfrm>
-          <a:prstGeom prst="flowChartOffpageConnector">
-            <a:avLst/>
-          </a:prstGeom>
-          <a:solidFill>
-            <a:schemeClr val="accent1">
-              <a:lumMod val="20000"/>
-              <a:lumOff val="80000"/>
-            </a:schemeClr>
-          </a:solidFill>
-          <a:ln>
-            <a:noFill/>
-          </a:ln>
-        </p:spPr>
-        <p:style>
-          <a:lnRef idx="2">
-            <a:schemeClr val="accent1">
-              <a:shade val="15000"/>
-            </a:schemeClr>
-          </a:lnRef>
-          <a:fillRef idx="1">
-            <a:schemeClr val="accent1"/>
-          </a:fillRef>
-          <a:effectRef idx="0">
-            <a:schemeClr val="accent1"/>
-          </a:effectRef>
-          <a:fontRef idx="minor">
-            <a:schemeClr val="lt1"/>
-          </a:fontRef>
-        </p:style>
-        <p:txBody>
-          <a:bodyPr vert="eaVert" rtlCol="0" anchor="ctr" anchorCtr="1"/>
-          <a:lstStyle/>
-          <a:p>
-            <a:pPr algn="ctr"/>
-            <a:r>
-              <a:rPr lang="en-US" altLang="ja-JP" sz="1400" dirty="0">
-                <a:solidFill>
-                  <a:schemeClr val="tx1">
-                    <a:lumMod val="75000"/>
-                  </a:schemeClr>
-                </a:solidFill>
-              </a:rPr>
-              <a:t>Ⅲ.</a:t>
-            </a:r>
-            <a:r>
-              <a:rPr lang="ja-JP" altLang="en-US" sz="1400" dirty="0">
-                <a:solidFill>
-                  <a:schemeClr val="tx1">
-                    <a:lumMod val="75000"/>
-                  </a:schemeClr>
-                </a:solidFill>
-              </a:rPr>
-              <a:t>打ち手の策定</a:t>
-            </a:r>
-            <a:endParaRPr lang="en-US" altLang="ja-JP" sz="1400" dirty="0">
-              <a:solidFill>
-                <a:schemeClr val="tx1">
-                  <a:lumMod val="75000"/>
-                </a:schemeClr>
-              </a:solidFill>
-            </a:endParaRPr>
-          </a:p>
-        </p:txBody>
-      </p:sp>
-      <p:sp>
-        <p:nvSpPr>
-          <p:cNvPr id="21" name="正方形/長方形 20">
-            <a:extLst>
-              <a:ext uri="{FF2B5EF4-FFF2-40B4-BE49-F238E27FC236}">
-                <a16:creationId xmlns:a16="http://schemas.microsoft.com/office/drawing/2014/main" id="{51060E12-0AA4-641B-C18A-859BADCC9E3F}"/>
-              </a:ext>
-            </a:extLst>
-          </p:cNvPr>
-          <p:cNvSpPr/>
-          <p:nvPr/>
-        </p:nvSpPr>
-        <p:spPr>
-          <a:xfrm>
-            <a:off x="2562532" y="2891064"/>
-            <a:ext cx="2861874" cy="952516"/>
-          </a:xfrm>
-          <a:prstGeom prst="rect">
-            <a:avLst/>
-          </a:prstGeom>
-          <a:noFill/>
-          <a:ln>
-            <a:solidFill>
-              <a:schemeClr val="tx1">
-                <a:lumMod val="75000"/>
-              </a:schemeClr>
-            </a:solidFill>
-          </a:ln>
-        </p:spPr>
-        <p:style>
-          <a:lnRef idx="2">
-            <a:schemeClr val="accent1">
-              <a:shade val="15000"/>
-            </a:schemeClr>
-          </a:lnRef>
-          <a:fillRef idx="1">
-            <a:schemeClr val="accent1"/>
-          </a:fillRef>
-          <a:effectRef idx="0">
-            <a:schemeClr val="accent1"/>
-          </a:effectRef>
-          <a:fontRef idx="minor">
-            <a:schemeClr val="lt1"/>
-          </a:fontRef>
-        </p:style>
-        <p:txBody>
-          <a:bodyPr rtlCol="0" anchor="t" anchorCtr="0"/>
-          <a:lstStyle/>
-          <a:p>
-            <a:pPr marL="285750" indent="-285750">
-              <a:buFont typeface="Wingdings" panose="05000000000000000000" pitchFamily="2" charset="2"/>
-              <a:buChar char="ü"/>
-            </a:pPr>
-            <a:r>
-              <a:rPr lang="en-US" altLang="ja-JP" dirty="0">
-                <a:solidFill>
-                  <a:schemeClr val="tx1">
-                    <a:lumMod val="75000"/>
-                  </a:schemeClr>
-                </a:solidFill>
-              </a:rPr>
-              <a:t>Input</a:t>
-            </a:r>
-            <a:r>
-              <a:rPr lang="ja-JP" altLang="en-US" dirty="0">
-                <a:solidFill>
-                  <a:schemeClr val="tx1">
-                    <a:lumMod val="75000"/>
-                  </a:schemeClr>
-                </a:solidFill>
-              </a:rPr>
-              <a:t>情報の整理</a:t>
-            </a:r>
-            <a:endParaRPr lang="en-US" altLang="ja-JP" dirty="0">
-              <a:solidFill>
-                <a:schemeClr val="tx1">
-                  <a:lumMod val="75000"/>
-                </a:schemeClr>
-              </a:solidFill>
-            </a:endParaRPr>
-          </a:p>
-          <a:p>
-            <a:pPr marL="285750" indent="-285750">
-              <a:buFont typeface="Wingdings" panose="05000000000000000000" pitchFamily="2" charset="2"/>
-              <a:buChar char="ü"/>
-            </a:pPr>
-            <a:r>
-              <a:rPr kumimoji="1" lang="ja-JP" altLang="en-US" dirty="0">
-                <a:solidFill>
-                  <a:schemeClr val="tx1">
-                    <a:lumMod val="75000"/>
-                  </a:schemeClr>
-                </a:solidFill>
-              </a:rPr>
-              <a:t>疑わしきは捨てる</a:t>
-            </a:r>
-            <a:endParaRPr kumimoji="1" lang="en-US" altLang="ja-JP" dirty="0">
-              <a:solidFill>
-                <a:schemeClr val="tx1">
-                  <a:lumMod val="75000"/>
-                </a:schemeClr>
-              </a:solidFill>
-            </a:endParaRPr>
-          </a:p>
-          <a:p>
-            <a:pPr marL="285750" indent="-285750">
-              <a:buFont typeface="Wingdings" panose="05000000000000000000" pitchFamily="2" charset="2"/>
-              <a:buChar char="ü"/>
-            </a:pPr>
-            <a:r>
-              <a:rPr lang="ja-JP" altLang="en-US" dirty="0">
-                <a:solidFill>
-                  <a:schemeClr val="tx1">
-                    <a:lumMod val="75000"/>
-                  </a:schemeClr>
-                </a:solidFill>
-              </a:rPr>
-              <a:t>不足を補う</a:t>
-            </a:r>
-            <a:r>
-              <a:rPr lang="en-US" altLang="ja-JP" dirty="0">
-                <a:solidFill>
-                  <a:schemeClr val="tx1">
-                    <a:lumMod val="75000"/>
-                  </a:schemeClr>
-                </a:solidFill>
-              </a:rPr>
-              <a:t>/</a:t>
-            </a:r>
-            <a:r>
-              <a:rPr lang="ja-JP" altLang="en-US" dirty="0">
-                <a:solidFill>
-                  <a:schemeClr val="tx1">
-                    <a:lumMod val="75000"/>
-                  </a:schemeClr>
-                </a:solidFill>
-              </a:rPr>
-              <a:t>類推する</a:t>
-            </a:r>
-            <a:endParaRPr kumimoji="1" lang="ja-JP" altLang="en-US" dirty="0">
-              <a:solidFill>
-                <a:schemeClr val="tx1">
-                  <a:lumMod val="75000"/>
-                </a:schemeClr>
-              </a:solidFill>
-            </a:endParaRPr>
-          </a:p>
-        </p:txBody>
-      </p:sp>
-      <p:sp>
-        <p:nvSpPr>
-          <p:cNvPr id="22" name="正方形/長方形 21">
-            <a:extLst>
-              <a:ext uri="{FF2B5EF4-FFF2-40B4-BE49-F238E27FC236}">
-                <a16:creationId xmlns:a16="http://schemas.microsoft.com/office/drawing/2014/main" id="{D78E396F-6C59-B388-1301-A13C2CB69551}"/>
-              </a:ext>
-            </a:extLst>
-          </p:cNvPr>
-          <p:cNvSpPr/>
-          <p:nvPr/>
-        </p:nvSpPr>
-        <p:spPr>
-          <a:xfrm>
-            <a:off x="2562532" y="4123163"/>
-            <a:ext cx="2861874" cy="952516"/>
-          </a:xfrm>
-          <a:prstGeom prst="rect">
-            <a:avLst/>
-          </a:prstGeom>
-          <a:noFill/>
-          <a:ln>
-            <a:solidFill>
-              <a:schemeClr val="tx1">
-                <a:lumMod val="75000"/>
-              </a:schemeClr>
-            </a:solidFill>
-          </a:ln>
-        </p:spPr>
-        <p:style>
-          <a:lnRef idx="2">
-            <a:schemeClr val="accent1">
-              <a:shade val="15000"/>
-            </a:schemeClr>
-          </a:lnRef>
-          <a:fillRef idx="1">
-            <a:schemeClr val="accent1"/>
-          </a:fillRef>
-          <a:effectRef idx="0">
-            <a:schemeClr val="accent1"/>
-          </a:effectRef>
-          <a:fontRef idx="minor">
-            <a:schemeClr val="lt1"/>
-          </a:fontRef>
-        </p:style>
-        <p:txBody>
-          <a:bodyPr rtlCol="0" anchor="t" anchorCtr="0"/>
-          <a:lstStyle/>
-          <a:p>
-            <a:pPr marL="285750" indent="-285750">
-              <a:buFont typeface="Wingdings" panose="05000000000000000000" pitchFamily="2" charset="2"/>
-              <a:buChar char="ü"/>
-            </a:pPr>
-            <a:r>
-              <a:rPr lang="ja-JP" altLang="en-US" dirty="0">
-                <a:solidFill>
-                  <a:schemeClr val="tx1">
-                    <a:lumMod val="75000"/>
-                  </a:schemeClr>
-                </a:solidFill>
-              </a:rPr>
-              <a:t>情報をもとに本質を抽出</a:t>
-            </a:r>
-            <a:endParaRPr kumimoji="1" lang="ja-JP" altLang="en-US" dirty="0">
-              <a:solidFill>
-                <a:schemeClr val="tx1">
-                  <a:lumMod val="75000"/>
-                </a:schemeClr>
-              </a:solidFill>
-            </a:endParaRPr>
-          </a:p>
-        </p:txBody>
-      </p:sp>
-      <p:sp>
-        <p:nvSpPr>
-          <p:cNvPr id="23" name="正方形/長方形 22">
-            <a:extLst>
-              <a:ext uri="{FF2B5EF4-FFF2-40B4-BE49-F238E27FC236}">
-                <a16:creationId xmlns:a16="http://schemas.microsoft.com/office/drawing/2014/main" id="{A87CF794-258E-A1A1-6D51-3B0090157DB8}"/>
-              </a:ext>
-            </a:extLst>
-          </p:cNvPr>
-          <p:cNvSpPr/>
-          <p:nvPr/>
-        </p:nvSpPr>
-        <p:spPr>
-          <a:xfrm>
-            <a:off x="2562532" y="5355262"/>
-            <a:ext cx="2861874" cy="952516"/>
-          </a:xfrm>
-          <a:prstGeom prst="rect">
-            <a:avLst/>
-          </a:prstGeom>
-          <a:noFill/>
-          <a:ln>
-            <a:solidFill>
-              <a:schemeClr val="tx1">
-                <a:lumMod val="75000"/>
-              </a:schemeClr>
-            </a:solidFill>
-          </a:ln>
-        </p:spPr>
-        <p:style>
-          <a:lnRef idx="2">
-            <a:schemeClr val="accent1">
-              <a:shade val="15000"/>
-            </a:schemeClr>
-          </a:lnRef>
-          <a:fillRef idx="1">
-            <a:schemeClr val="accent1"/>
-          </a:fillRef>
-          <a:effectRef idx="0">
-            <a:schemeClr val="accent1"/>
-          </a:effectRef>
-          <a:fontRef idx="minor">
-            <a:schemeClr val="lt1"/>
-          </a:fontRef>
-        </p:style>
-        <p:txBody>
-          <a:bodyPr rtlCol="0" anchor="t" anchorCtr="0"/>
-          <a:lstStyle/>
-          <a:p>
-            <a:pPr marL="285750" indent="-285750">
-              <a:buFont typeface="Wingdings" panose="05000000000000000000" pitchFamily="2" charset="2"/>
-              <a:buChar char="ü"/>
-            </a:pPr>
-            <a:r>
-              <a:rPr lang="ja-JP" altLang="en-US" dirty="0">
-                <a:solidFill>
-                  <a:schemeClr val="tx1">
-                    <a:lumMod val="75000"/>
-                  </a:schemeClr>
-                </a:solidFill>
-              </a:rPr>
-              <a:t>本質から「主体にとっての意味」を導出</a:t>
-            </a:r>
-            <a:endParaRPr kumimoji="1" lang="ja-JP" altLang="en-US" dirty="0">
-              <a:solidFill>
-                <a:schemeClr val="tx1">
-                  <a:lumMod val="75000"/>
-                </a:schemeClr>
-              </a:solidFill>
-            </a:endParaRPr>
-          </a:p>
-        </p:txBody>
-      </p:sp>
-      <p:sp>
-        <p:nvSpPr>
-          <p:cNvPr id="27" name="正方形/長方形 26">
-            <a:extLst>
-              <a:ext uri="{FF2B5EF4-FFF2-40B4-BE49-F238E27FC236}">
-                <a16:creationId xmlns:a16="http://schemas.microsoft.com/office/drawing/2014/main" id="{F075CE55-A7AD-B36B-E7AB-8DC2D026D211}"/>
-              </a:ext>
-            </a:extLst>
-          </p:cNvPr>
-          <p:cNvSpPr/>
-          <p:nvPr/>
-        </p:nvSpPr>
-        <p:spPr>
-          <a:xfrm>
-            <a:off x="5708689" y="2891064"/>
-            <a:ext cx="2861874" cy="952516"/>
-          </a:xfrm>
-          <a:prstGeom prst="rect">
-            <a:avLst/>
-          </a:prstGeom>
-          <a:noFill/>
-          <a:ln>
-            <a:solidFill>
-              <a:schemeClr val="tx1">
-                <a:lumMod val="75000"/>
-              </a:schemeClr>
-            </a:solidFill>
-          </a:ln>
-        </p:spPr>
-        <p:style>
-          <a:lnRef idx="2">
-            <a:schemeClr val="accent1">
-              <a:shade val="15000"/>
-            </a:schemeClr>
-          </a:lnRef>
-          <a:fillRef idx="1">
-            <a:schemeClr val="accent1"/>
-          </a:fillRef>
-          <a:effectRef idx="0">
-            <a:schemeClr val="accent1"/>
-          </a:effectRef>
-          <a:fontRef idx="minor">
-            <a:schemeClr val="lt1"/>
-          </a:fontRef>
-        </p:style>
-        <p:txBody>
-          <a:bodyPr rtlCol="0" anchor="t" anchorCtr="0"/>
-          <a:lstStyle/>
-          <a:p>
-            <a:pPr marL="285750" indent="-285750">
-              <a:buFont typeface="Wingdings" panose="05000000000000000000" pitchFamily="2" charset="2"/>
-              <a:buChar char="ü"/>
-            </a:pPr>
-            <a:r>
-              <a:rPr lang="ja-JP" altLang="en-US" dirty="0">
-                <a:solidFill>
-                  <a:schemeClr val="tx1">
-                    <a:lumMod val="75000"/>
-                  </a:schemeClr>
-                </a:solidFill>
-              </a:rPr>
-              <a:t>客観情報の整理</a:t>
-            </a:r>
-            <a:endParaRPr lang="en-US" altLang="ja-JP" dirty="0">
-              <a:solidFill>
-                <a:schemeClr val="tx1">
-                  <a:lumMod val="75000"/>
-                </a:schemeClr>
-              </a:solidFill>
-            </a:endParaRPr>
-          </a:p>
-          <a:p>
-            <a:pPr marL="285750" indent="-285750">
-              <a:buFont typeface="Wingdings" panose="05000000000000000000" pitchFamily="2" charset="2"/>
-              <a:buChar char="ü"/>
-            </a:pPr>
-            <a:r>
-              <a:rPr kumimoji="1" lang="ja-JP" altLang="en-US" dirty="0">
-                <a:solidFill>
-                  <a:schemeClr val="tx1">
-                    <a:lumMod val="75000"/>
-                  </a:schemeClr>
-                </a:solidFill>
-              </a:rPr>
-              <a:t>主観情報の優先順位付け</a:t>
-            </a:r>
-          </a:p>
-        </p:txBody>
-      </p:sp>
-      <p:sp>
-        <p:nvSpPr>
-          <p:cNvPr id="28" name="正方形/長方形 27">
-            <a:extLst>
-              <a:ext uri="{FF2B5EF4-FFF2-40B4-BE49-F238E27FC236}">
-                <a16:creationId xmlns:a16="http://schemas.microsoft.com/office/drawing/2014/main" id="{C72096DA-7549-92E8-616F-1E72F34C76EF}"/>
-              </a:ext>
-            </a:extLst>
-          </p:cNvPr>
-          <p:cNvSpPr/>
-          <p:nvPr/>
-        </p:nvSpPr>
-        <p:spPr>
-          <a:xfrm>
-            <a:off x="5708689" y="4123163"/>
-            <a:ext cx="2861874" cy="952516"/>
-          </a:xfrm>
-          <a:prstGeom prst="rect">
-            <a:avLst/>
-          </a:prstGeom>
-          <a:noFill/>
-          <a:ln>
-            <a:solidFill>
-              <a:schemeClr val="tx1">
-                <a:lumMod val="75000"/>
-              </a:schemeClr>
-            </a:solidFill>
-          </a:ln>
-        </p:spPr>
-        <p:style>
-          <a:lnRef idx="2">
-            <a:schemeClr val="accent1">
-              <a:shade val="15000"/>
-            </a:schemeClr>
-          </a:lnRef>
-          <a:fillRef idx="1">
-            <a:schemeClr val="accent1"/>
-          </a:fillRef>
-          <a:effectRef idx="0">
-            <a:schemeClr val="accent1"/>
-          </a:effectRef>
-          <a:fontRef idx="minor">
-            <a:schemeClr val="lt1"/>
-          </a:fontRef>
-        </p:style>
-        <p:txBody>
-          <a:bodyPr rtlCol="0" anchor="t" anchorCtr="0"/>
-          <a:lstStyle/>
-          <a:p>
-            <a:pPr marL="285750" indent="-285750">
-              <a:buFont typeface="Wingdings" panose="05000000000000000000" pitchFamily="2" charset="2"/>
-              <a:buChar char="ü"/>
-            </a:pPr>
-            <a:r>
-              <a:rPr lang="ja-JP" altLang="en-US" dirty="0">
-                <a:solidFill>
-                  <a:schemeClr val="tx1">
-                    <a:lumMod val="75000"/>
-                  </a:schemeClr>
-                </a:solidFill>
-              </a:rPr>
-              <a:t>客観情報を用いて、仮説的構造を抽出</a:t>
-            </a:r>
-            <a:endParaRPr kumimoji="1" lang="ja-JP" altLang="en-US" dirty="0">
-              <a:solidFill>
-                <a:schemeClr val="tx1">
-                  <a:lumMod val="75000"/>
-                </a:schemeClr>
-              </a:solidFill>
-            </a:endParaRPr>
-          </a:p>
-        </p:txBody>
-      </p:sp>
-      <p:sp>
-        <p:nvSpPr>
-          <p:cNvPr id="29" name="正方形/長方形 28">
-            <a:extLst>
-              <a:ext uri="{FF2B5EF4-FFF2-40B4-BE49-F238E27FC236}">
-                <a16:creationId xmlns:a16="http://schemas.microsoft.com/office/drawing/2014/main" id="{A04816CA-60DB-5C68-179E-286AE194D8DC}"/>
-              </a:ext>
-            </a:extLst>
-          </p:cNvPr>
-          <p:cNvSpPr/>
-          <p:nvPr/>
-        </p:nvSpPr>
-        <p:spPr>
-          <a:xfrm>
-            <a:off x="5708689" y="5355262"/>
-            <a:ext cx="2861874" cy="952516"/>
-          </a:xfrm>
-          <a:prstGeom prst="rect">
-            <a:avLst/>
-          </a:prstGeom>
-          <a:noFill/>
-          <a:ln>
-            <a:solidFill>
-              <a:schemeClr val="tx1">
-                <a:lumMod val="75000"/>
-              </a:schemeClr>
-            </a:solidFill>
-          </a:ln>
-        </p:spPr>
-        <p:style>
-          <a:lnRef idx="2">
-            <a:schemeClr val="accent1">
-              <a:shade val="15000"/>
-            </a:schemeClr>
-          </a:lnRef>
-          <a:fillRef idx="1">
-            <a:schemeClr val="accent1"/>
-          </a:fillRef>
-          <a:effectRef idx="0">
-            <a:schemeClr val="accent1"/>
-          </a:effectRef>
-          <a:fontRef idx="minor">
-            <a:schemeClr val="lt1"/>
-          </a:fontRef>
-        </p:style>
-        <p:txBody>
-          <a:bodyPr rtlCol="0" anchor="t" anchorCtr="0"/>
-          <a:lstStyle/>
-          <a:p>
-            <a:pPr marL="285750" indent="-285750">
-              <a:buFont typeface="Wingdings" panose="05000000000000000000" pitchFamily="2" charset="2"/>
-              <a:buChar char="ü"/>
-            </a:pPr>
-            <a:r>
-              <a:rPr lang="ja-JP" altLang="en-US" dirty="0">
-                <a:solidFill>
-                  <a:schemeClr val="tx1">
-                    <a:lumMod val="75000"/>
-                  </a:schemeClr>
-                </a:solidFill>
-              </a:rPr>
-              <a:t>主観的情報と仮説的構造を組み合わせる</a:t>
-            </a:r>
-            <a:endParaRPr kumimoji="1" lang="ja-JP" altLang="en-US" dirty="0">
-              <a:solidFill>
-                <a:schemeClr val="tx1">
-                  <a:lumMod val="75000"/>
-                </a:schemeClr>
-              </a:solidFill>
-            </a:endParaRPr>
-          </a:p>
-        </p:txBody>
-      </p:sp>
-      <p:sp>
-        <p:nvSpPr>
-          <p:cNvPr id="30" name="正方形/長方形 29">
-            <a:extLst>
-              <a:ext uri="{FF2B5EF4-FFF2-40B4-BE49-F238E27FC236}">
-                <a16:creationId xmlns:a16="http://schemas.microsoft.com/office/drawing/2014/main" id="{CD3C1337-0A38-FE77-FCB6-D2806BB3051F}"/>
-              </a:ext>
-            </a:extLst>
-          </p:cNvPr>
-          <p:cNvSpPr/>
-          <p:nvPr/>
-        </p:nvSpPr>
-        <p:spPr>
-          <a:xfrm>
-            <a:off x="8854846" y="2891064"/>
-            <a:ext cx="2861874" cy="952516"/>
-          </a:xfrm>
-          <a:prstGeom prst="rect">
-            <a:avLst/>
-          </a:prstGeom>
-          <a:noFill/>
-          <a:ln>
-            <a:solidFill>
-              <a:schemeClr val="tx1">
-                <a:lumMod val="75000"/>
-              </a:schemeClr>
-            </a:solidFill>
-          </a:ln>
-        </p:spPr>
-        <p:style>
-          <a:lnRef idx="2">
-            <a:schemeClr val="accent1">
-              <a:shade val="15000"/>
-            </a:schemeClr>
-          </a:lnRef>
-          <a:fillRef idx="1">
-            <a:schemeClr val="accent1"/>
-          </a:fillRef>
-          <a:effectRef idx="0">
-            <a:schemeClr val="accent1"/>
-          </a:effectRef>
-          <a:fontRef idx="minor">
-            <a:schemeClr val="lt1"/>
-          </a:fontRef>
-        </p:style>
-        <p:txBody>
-          <a:bodyPr rtlCol="0" anchor="t" anchorCtr="0"/>
-          <a:lstStyle/>
-          <a:p>
-            <a:pPr marL="285750" indent="-285750">
-              <a:buFont typeface="Wingdings" panose="05000000000000000000" pitchFamily="2" charset="2"/>
-              <a:buChar char="ü"/>
-            </a:pPr>
-            <a:r>
-              <a:rPr lang="ja-JP" altLang="en-US" dirty="0">
-                <a:solidFill>
-                  <a:schemeClr val="tx1">
-                    <a:lumMod val="75000"/>
-                  </a:schemeClr>
-                </a:solidFill>
-              </a:rPr>
-              <a:t>打ち手オプションの</a:t>
-            </a:r>
-            <a:br>
-              <a:rPr lang="en-US" altLang="ja-JP" dirty="0">
-                <a:solidFill>
-                  <a:schemeClr val="tx1">
-                    <a:lumMod val="75000"/>
-                  </a:schemeClr>
-                </a:solidFill>
-              </a:rPr>
-            </a:br>
-            <a:r>
-              <a:rPr lang="ja-JP" altLang="en-US" dirty="0">
-                <a:solidFill>
-                  <a:schemeClr val="tx1">
-                    <a:lumMod val="75000"/>
-                  </a:schemeClr>
-                </a:solidFill>
-              </a:rPr>
-              <a:t>洗い出しと整理</a:t>
-            </a:r>
-            <a:endParaRPr kumimoji="1" lang="ja-JP" altLang="en-US" dirty="0">
-              <a:solidFill>
-                <a:schemeClr val="tx1">
-                  <a:lumMod val="75000"/>
-                </a:schemeClr>
-              </a:solidFill>
-            </a:endParaRPr>
-          </a:p>
-        </p:txBody>
-      </p:sp>
-      <p:sp>
-        <p:nvSpPr>
-          <p:cNvPr id="31" name="正方形/長方形 30">
-            <a:extLst>
-              <a:ext uri="{FF2B5EF4-FFF2-40B4-BE49-F238E27FC236}">
-                <a16:creationId xmlns:a16="http://schemas.microsoft.com/office/drawing/2014/main" id="{3E9BD067-5CE9-8668-C114-362EA88C0EC0}"/>
-              </a:ext>
-            </a:extLst>
-          </p:cNvPr>
-          <p:cNvSpPr/>
-          <p:nvPr/>
-        </p:nvSpPr>
-        <p:spPr>
-          <a:xfrm>
-            <a:off x="8854846" y="4123163"/>
-            <a:ext cx="2861874" cy="952516"/>
-          </a:xfrm>
-          <a:prstGeom prst="rect">
-            <a:avLst/>
-          </a:prstGeom>
-          <a:noFill/>
-          <a:ln>
-            <a:solidFill>
-              <a:schemeClr val="tx1">
-                <a:lumMod val="75000"/>
-              </a:schemeClr>
-            </a:solidFill>
-          </a:ln>
-        </p:spPr>
-        <p:style>
-          <a:lnRef idx="2">
-            <a:schemeClr val="accent1">
-              <a:shade val="15000"/>
-            </a:schemeClr>
-          </a:lnRef>
-          <a:fillRef idx="1">
-            <a:schemeClr val="accent1"/>
-          </a:fillRef>
-          <a:effectRef idx="0">
-            <a:schemeClr val="accent1"/>
-          </a:effectRef>
-          <a:fontRef idx="minor">
-            <a:schemeClr val="lt1"/>
-          </a:fontRef>
-        </p:style>
-        <p:txBody>
-          <a:bodyPr rtlCol="0" anchor="t" anchorCtr="0"/>
-          <a:lstStyle/>
-          <a:p>
-            <a:pPr marL="285750" indent="-285750">
-              <a:buFont typeface="Wingdings" panose="05000000000000000000" pitchFamily="2" charset="2"/>
-              <a:buChar char="ü"/>
-            </a:pPr>
-            <a:r>
-              <a:rPr lang="ja-JP" altLang="en-US" dirty="0">
-                <a:solidFill>
-                  <a:schemeClr val="tx1">
-                    <a:lumMod val="75000"/>
-                  </a:schemeClr>
-                </a:solidFill>
-              </a:rPr>
-              <a:t>真の制約条件抽出</a:t>
-            </a:r>
-            <a:endParaRPr kumimoji="1" lang="ja-JP" altLang="en-US" dirty="0">
-              <a:solidFill>
-                <a:schemeClr val="tx1">
-                  <a:lumMod val="75000"/>
-                </a:schemeClr>
-              </a:solidFill>
-            </a:endParaRPr>
-          </a:p>
-        </p:txBody>
-      </p:sp>
-      <p:sp>
-        <p:nvSpPr>
-          <p:cNvPr id="32" name="正方形/長方形 31">
-            <a:extLst>
-              <a:ext uri="{FF2B5EF4-FFF2-40B4-BE49-F238E27FC236}">
-                <a16:creationId xmlns:a16="http://schemas.microsoft.com/office/drawing/2014/main" id="{49B2A18B-1A12-170A-770C-1CA1AA3189A0}"/>
-              </a:ext>
-            </a:extLst>
-          </p:cNvPr>
-          <p:cNvSpPr/>
-          <p:nvPr/>
-        </p:nvSpPr>
-        <p:spPr>
-          <a:xfrm>
-            <a:off x="8854846" y="5355262"/>
-            <a:ext cx="2861874" cy="952516"/>
-          </a:xfrm>
-          <a:prstGeom prst="rect">
-            <a:avLst/>
-          </a:prstGeom>
-          <a:noFill/>
-          <a:ln>
-            <a:solidFill>
-              <a:schemeClr val="tx1">
-                <a:lumMod val="75000"/>
-              </a:schemeClr>
-            </a:solidFill>
-          </a:ln>
-        </p:spPr>
-        <p:style>
-          <a:lnRef idx="2">
-            <a:schemeClr val="accent1">
-              <a:shade val="15000"/>
-            </a:schemeClr>
-          </a:lnRef>
-          <a:fillRef idx="1">
-            <a:schemeClr val="accent1"/>
-          </a:fillRef>
-          <a:effectRef idx="0">
-            <a:schemeClr val="accent1"/>
-          </a:effectRef>
-          <a:fontRef idx="minor">
-            <a:schemeClr val="lt1"/>
-          </a:fontRef>
-        </p:style>
-        <p:txBody>
-          <a:bodyPr rtlCol="0" anchor="t" anchorCtr="0"/>
-          <a:lstStyle/>
-          <a:p>
-            <a:pPr marL="285750" indent="-285750">
-              <a:buFont typeface="Wingdings" panose="05000000000000000000" pitchFamily="2" charset="2"/>
-              <a:buChar char="ü"/>
-            </a:pPr>
-            <a:r>
-              <a:rPr lang="ja-JP" altLang="en-US" dirty="0">
-                <a:solidFill>
-                  <a:schemeClr val="tx1">
-                    <a:lumMod val="75000"/>
-                  </a:schemeClr>
-                </a:solidFill>
-              </a:rPr>
-              <a:t>主観的情報を交えたオプション評価</a:t>
-            </a:r>
-            <a:endParaRPr kumimoji="1" lang="ja-JP" altLang="en-US" dirty="0">
-              <a:solidFill>
-                <a:schemeClr val="tx1">
-                  <a:lumMod val="75000"/>
-                </a:schemeClr>
-              </a:solidFill>
-            </a:endParaRPr>
-          </a:p>
-        </p:txBody>
-      </p:sp>
-      <p:sp>
-        <p:nvSpPr>
-          <p:cNvPr id="34" name="正方形/長方形 33">
-            <a:extLst>
-              <a:ext uri="{FF2B5EF4-FFF2-40B4-BE49-F238E27FC236}">
-                <a16:creationId xmlns:a16="http://schemas.microsoft.com/office/drawing/2014/main" id="{584AEA9A-0390-CC7E-E101-D2B666DF5B38}"/>
-              </a:ext>
-            </a:extLst>
-          </p:cNvPr>
-          <p:cNvSpPr/>
-          <p:nvPr/>
-        </p:nvSpPr>
-        <p:spPr>
-          <a:xfrm>
-            <a:off x="2562532" y="2520619"/>
-            <a:ext cx="2861874" cy="304327"/>
-          </a:xfrm>
-          <a:prstGeom prst="rect">
-            <a:avLst/>
-          </a:prstGeom>
-          <a:noFill/>
-          <a:ln>
-            <a:solidFill>
-              <a:schemeClr val="tx1">
-                <a:lumMod val="75000"/>
-              </a:schemeClr>
-            </a:solidFill>
-          </a:ln>
-        </p:spPr>
-        <p:style>
-          <a:lnRef idx="2">
-            <a:schemeClr val="accent1">
-              <a:shade val="15000"/>
-            </a:schemeClr>
-          </a:lnRef>
-          <a:fillRef idx="1">
-            <a:schemeClr val="accent1"/>
-          </a:fillRef>
-          <a:effectRef idx="0">
-            <a:schemeClr val="accent1"/>
-          </a:effectRef>
-          <a:fontRef idx="minor">
-            <a:schemeClr val="lt1"/>
-          </a:fontRef>
-        </p:style>
-        <p:txBody>
-          <a:bodyPr rtlCol="0" anchor="ctr"/>
-          <a:lstStyle/>
-          <a:p>
-            <a:pPr marL="285750" indent="-285750" algn="ctr">
-              <a:buFont typeface="Wingdings" panose="05000000000000000000" pitchFamily="2" charset="2"/>
-              <a:buChar char="ü"/>
-            </a:pPr>
-            <a:r>
-              <a:rPr kumimoji="1" lang="ja-JP" altLang="en-US" dirty="0">
-                <a:solidFill>
-                  <a:schemeClr val="tx1">
-                    <a:lumMod val="75000"/>
-                  </a:schemeClr>
-                </a:solidFill>
-              </a:rPr>
-              <a:t>客観情報</a:t>
-            </a:r>
-          </a:p>
-        </p:txBody>
-      </p:sp>
-      <p:sp>
-        <p:nvSpPr>
-          <p:cNvPr id="35" name="正方形/長方形 34">
-            <a:extLst>
-              <a:ext uri="{FF2B5EF4-FFF2-40B4-BE49-F238E27FC236}">
-                <a16:creationId xmlns:a16="http://schemas.microsoft.com/office/drawing/2014/main" id="{1C50A700-36C2-CBF3-1481-3A7EA6894C67}"/>
-              </a:ext>
-            </a:extLst>
-          </p:cNvPr>
-          <p:cNvSpPr/>
-          <p:nvPr/>
-        </p:nvSpPr>
-        <p:spPr>
-          <a:xfrm>
-            <a:off x="5708689" y="2520619"/>
-            <a:ext cx="2861874" cy="304327"/>
-          </a:xfrm>
-          <a:prstGeom prst="rect">
-            <a:avLst/>
-          </a:prstGeom>
-          <a:noFill/>
-          <a:ln>
-            <a:solidFill>
-              <a:schemeClr val="tx1">
-                <a:lumMod val="75000"/>
-              </a:schemeClr>
-            </a:solidFill>
-          </a:ln>
-        </p:spPr>
-        <p:style>
-          <a:lnRef idx="2">
-            <a:schemeClr val="accent1">
-              <a:shade val="15000"/>
-            </a:schemeClr>
-          </a:lnRef>
-          <a:fillRef idx="1">
-            <a:schemeClr val="accent1"/>
-          </a:fillRef>
-          <a:effectRef idx="0">
-            <a:schemeClr val="accent1"/>
-          </a:effectRef>
-          <a:fontRef idx="minor">
-            <a:schemeClr val="lt1"/>
-          </a:fontRef>
-        </p:style>
-        <p:txBody>
-          <a:bodyPr rtlCol="0" anchor="ctr"/>
-          <a:lstStyle/>
-          <a:p>
-            <a:pPr marL="285750" indent="-285750" algn="ctr">
-              <a:buFont typeface="Wingdings" panose="05000000000000000000" pitchFamily="2" charset="2"/>
-              <a:buChar char="ü"/>
-            </a:pPr>
-            <a:r>
-              <a:rPr lang="ja-JP" altLang="en-US" dirty="0">
-                <a:solidFill>
-                  <a:schemeClr val="tx1">
-                    <a:lumMod val="75000"/>
-                  </a:schemeClr>
-                </a:solidFill>
-              </a:rPr>
-              <a:t>客観情報</a:t>
-            </a:r>
-            <a:r>
-              <a:rPr lang="en-US" altLang="ja-JP" dirty="0">
-                <a:solidFill>
-                  <a:schemeClr val="tx1">
-                    <a:lumMod val="75000"/>
-                  </a:schemeClr>
-                </a:solidFill>
-              </a:rPr>
-              <a:t>/</a:t>
-            </a:r>
-            <a:r>
-              <a:rPr lang="ja-JP" altLang="en-US" dirty="0">
-                <a:solidFill>
-                  <a:schemeClr val="tx1">
-                    <a:lumMod val="75000"/>
-                  </a:schemeClr>
-                </a:solidFill>
-              </a:rPr>
-              <a:t>主観情報</a:t>
-            </a:r>
-            <a:endParaRPr kumimoji="1" lang="ja-JP" altLang="en-US" dirty="0">
-              <a:solidFill>
-                <a:schemeClr val="tx1">
-                  <a:lumMod val="75000"/>
-                </a:schemeClr>
-              </a:solidFill>
-            </a:endParaRPr>
-          </a:p>
-        </p:txBody>
-      </p:sp>
-      <p:sp>
-        <p:nvSpPr>
-          <p:cNvPr id="36" name="正方形/長方形 35">
-            <a:extLst>
-              <a:ext uri="{FF2B5EF4-FFF2-40B4-BE49-F238E27FC236}">
-                <a16:creationId xmlns:a16="http://schemas.microsoft.com/office/drawing/2014/main" id="{2E8EF2A6-5A8C-8158-0174-D125F6A1BD9A}"/>
-              </a:ext>
-            </a:extLst>
-          </p:cNvPr>
-          <p:cNvSpPr/>
-          <p:nvPr/>
-        </p:nvSpPr>
-        <p:spPr>
-          <a:xfrm>
-            <a:off x="8854846" y="2520619"/>
-            <a:ext cx="2861874" cy="304327"/>
-          </a:xfrm>
-          <a:prstGeom prst="rect">
-            <a:avLst/>
-          </a:prstGeom>
-          <a:noFill/>
-          <a:ln>
-            <a:solidFill>
-              <a:schemeClr val="tx1">
-                <a:lumMod val="75000"/>
-              </a:schemeClr>
-            </a:solidFill>
-          </a:ln>
-        </p:spPr>
-        <p:style>
-          <a:lnRef idx="2">
-            <a:schemeClr val="accent1">
-              <a:shade val="15000"/>
-            </a:schemeClr>
-          </a:lnRef>
-          <a:fillRef idx="1">
-            <a:schemeClr val="accent1"/>
-          </a:fillRef>
-          <a:effectRef idx="0">
-            <a:schemeClr val="accent1"/>
-          </a:effectRef>
-          <a:fontRef idx="minor">
-            <a:schemeClr val="lt1"/>
-          </a:fontRef>
-        </p:style>
-        <p:txBody>
-          <a:bodyPr rtlCol="0" anchor="ctr"/>
-          <a:lstStyle/>
-          <a:p>
-            <a:pPr marL="285750" indent="-285750" algn="ctr">
-              <a:buFont typeface="Wingdings" panose="05000000000000000000" pitchFamily="2" charset="2"/>
-              <a:buChar char="ü"/>
-            </a:pPr>
-            <a:r>
-              <a:rPr lang="ja-JP" altLang="en-US" dirty="0">
-                <a:solidFill>
-                  <a:schemeClr val="tx1">
-                    <a:lumMod val="75000"/>
-                  </a:schemeClr>
-                </a:solidFill>
-              </a:rPr>
-              <a:t>課題</a:t>
-            </a:r>
-            <a:r>
-              <a:rPr lang="en-US" altLang="ja-JP" dirty="0">
-                <a:solidFill>
-                  <a:schemeClr val="tx1">
-                    <a:lumMod val="75000"/>
-                  </a:schemeClr>
-                </a:solidFill>
-              </a:rPr>
-              <a:t>/</a:t>
-            </a:r>
-            <a:r>
-              <a:rPr lang="ja-JP" altLang="en-US" dirty="0">
-                <a:solidFill>
-                  <a:schemeClr val="tx1">
-                    <a:lumMod val="75000"/>
-                  </a:schemeClr>
-                </a:solidFill>
-              </a:rPr>
-              <a:t>制約</a:t>
-            </a:r>
-            <a:endParaRPr kumimoji="1" lang="ja-JP" altLang="en-US" dirty="0">
-              <a:solidFill>
-                <a:schemeClr val="tx1">
-                  <a:lumMod val="75000"/>
-                </a:schemeClr>
-              </a:solidFill>
-            </a:endParaRPr>
-          </a:p>
-        </p:txBody>
-      </p:sp>
-      <p:sp>
-        <p:nvSpPr>
-          <p:cNvPr id="37" name="正方形/長方形 36">
-            <a:extLst>
-              <a:ext uri="{FF2B5EF4-FFF2-40B4-BE49-F238E27FC236}">
-                <a16:creationId xmlns:a16="http://schemas.microsoft.com/office/drawing/2014/main" id="{673C0BB2-3D5E-A9F4-BBFA-4294C61B8B2B}"/>
-              </a:ext>
-            </a:extLst>
-          </p:cNvPr>
-          <p:cNvSpPr/>
-          <p:nvPr/>
-        </p:nvSpPr>
-        <p:spPr>
-          <a:xfrm>
-            <a:off x="8854846" y="6373896"/>
-            <a:ext cx="2861874" cy="304327"/>
-          </a:xfrm>
-          <a:prstGeom prst="rect">
-            <a:avLst/>
-          </a:prstGeom>
-          <a:noFill/>
-          <a:ln>
-            <a:solidFill>
-              <a:schemeClr val="tx1">
-                <a:lumMod val="75000"/>
-              </a:schemeClr>
-            </a:solidFill>
-          </a:ln>
-        </p:spPr>
-        <p:style>
-          <a:lnRef idx="2">
-            <a:schemeClr val="accent1">
-              <a:shade val="15000"/>
-            </a:schemeClr>
-          </a:lnRef>
-          <a:fillRef idx="1">
-            <a:schemeClr val="accent1"/>
-          </a:fillRef>
-          <a:effectRef idx="0">
-            <a:schemeClr val="accent1"/>
-          </a:effectRef>
-          <a:fontRef idx="minor">
-            <a:schemeClr val="lt1"/>
-          </a:fontRef>
-        </p:style>
-        <p:txBody>
-          <a:bodyPr rtlCol="0" anchor="ctr"/>
-          <a:lstStyle/>
-          <a:p>
-            <a:pPr marL="285750" indent="-285750" algn="ctr">
-              <a:buFont typeface="Wingdings" panose="05000000000000000000" pitchFamily="2" charset="2"/>
-              <a:buChar char="ü"/>
-            </a:pPr>
-            <a:r>
-              <a:rPr kumimoji="1" lang="ja-JP" altLang="en-US" dirty="0">
-                <a:solidFill>
-                  <a:schemeClr val="tx1">
-                    <a:lumMod val="75000"/>
-                  </a:schemeClr>
-                </a:solidFill>
-              </a:rPr>
-              <a:t>課題解決のための行動</a:t>
-            </a:r>
-          </a:p>
-        </p:txBody>
-      </p:sp>
-      <p:sp>
-        <p:nvSpPr>
-          <p:cNvPr id="38" name="正方形/長方形 37">
-            <a:extLst>
-              <a:ext uri="{FF2B5EF4-FFF2-40B4-BE49-F238E27FC236}">
-                <a16:creationId xmlns:a16="http://schemas.microsoft.com/office/drawing/2014/main" id="{7FD9EF35-D8DF-A1C9-8FA9-24E1C9D7C236}"/>
-              </a:ext>
-            </a:extLst>
-          </p:cNvPr>
-          <p:cNvSpPr/>
-          <p:nvPr/>
-        </p:nvSpPr>
-        <p:spPr>
-          <a:xfrm>
-            <a:off x="5708689" y="6373896"/>
-            <a:ext cx="2861874" cy="304327"/>
-          </a:xfrm>
-          <a:prstGeom prst="rect">
-            <a:avLst/>
-          </a:prstGeom>
-          <a:noFill/>
-          <a:ln>
-            <a:solidFill>
-              <a:schemeClr val="tx1">
-                <a:lumMod val="75000"/>
-              </a:schemeClr>
-            </a:solidFill>
-          </a:ln>
-        </p:spPr>
-        <p:style>
-          <a:lnRef idx="2">
-            <a:schemeClr val="accent1">
-              <a:shade val="15000"/>
-            </a:schemeClr>
-          </a:lnRef>
-          <a:fillRef idx="1">
-            <a:schemeClr val="accent1"/>
-          </a:fillRef>
-          <a:effectRef idx="0">
-            <a:schemeClr val="accent1"/>
-          </a:effectRef>
-          <a:fontRef idx="minor">
-            <a:schemeClr val="lt1"/>
-          </a:fontRef>
-        </p:style>
-        <p:txBody>
-          <a:bodyPr rtlCol="0" anchor="ctr"/>
-          <a:lstStyle/>
-          <a:p>
-            <a:pPr marL="285750" indent="-285750" algn="ctr">
-              <a:buFont typeface="Wingdings" panose="05000000000000000000" pitchFamily="2" charset="2"/>
-              <a:buChar char="ü"/>
-            </a:pPr>
-            <a:r>
-              <a:rPr lang="ja-JP" altLang="en-US" dirty="0">
-                <a:solidFill>
-                  <a:schemeClr val="tx1">
-                    <a:lumMod val="75000"/>
-                  </a:schemeClr>
-                </a:solidFill>
-              </a:rPr>
-              <a:t>実現したい状態</a:t>
-            </a:r>
-            <a:endParaRPr kumimoji="1" lang="ja-JP" altLang="en-US" dirty="0">
-              <a:solidFill>
-                <a:schemeClr val="tx1">
-                  <a:lumMod val="75000"/>
-                </a:schemeClr>
-              </a:solidFill>
-            </a:endParaRPr>
-          </a:p>
-        </p:txBody>
-      </p:sp>
-      <p:sp>
-        <p:nvSpPr>
-          <p:cNvPr id="39" name="正方形/長方形 38">
-            <a:extLst>
-              <a:ext uri="{FF2B5EF4-FFF2-40B4-BE49-F238E27FC236}">
-                <a16:creationId xmlns:a16="http://schemas.microsoft.com/office/drawing/2014/main" id="{513C1AF8-7A9B-BA41-2AA0-DBA869146019}"/>
-              </a:ext>
-            </a:extLst>
-          </p:cNvPr>
-          <p:cNvSpPr/>
-          <p:nvPr/>
-        </p:nvSpPr>
-        <p:spPr>
-          <a:xfrm>
-            <a:off x="2562532" y="6373896"/>
-            <a:ext cx="2861874" cy="304327"/>
-          </a:xfrm>
-          <a:prstGeom prst="rect">
-            <a:avLst/>
-          </a:prstGeom>
-          <a:noFill/>
-          <a:ln>
-            <a:solidFill>
-              <a:schemeClr val="tx1">
-                <a:lumMod val="75000"/>
-              </a:schemeClr>
-            </a:solidFill>
-          </a:ln>
-        </p:spPr>
-        <p:style>
-          <a:lnRef idx="2">
-            <a:schemeClr val="accent1">
-              <a:shade val="15000"/>
-            </a:schemeClr>
-          </a:lnRef>
-          <a:fillRef idx="1">
-            <a:schemeClr val="accent1"/>
-          </a:fillRef>
-          <a:effectRef idx="0">
-            <a:schemeClr val="accent1"/>
-          </a:effectRef>
-          <a:fontRef idx="minor">
-            <a:schemeClr val="lt1"/>
-          </a:fontRef>
-        </p:style>
-        <p:txBody>
-          <a:bodyPr rtlCol="0" anchor="ctr"/>
-          <a:lstStyle/>
-          <a:p>
-            <a:pPr marL="285750" indent="-285750" algn="ctr">
-              <a:buFont typeface="Wingdings" panose="05000000000000000000" pitchFamily="2" charset="2"/>
-              <a:buChar char="ü"/>
-            </a:pPr>
-            <a:r>
-              <a:rPr kumimoji="1" lang="ja-JP" altLang="en-US" dirty="0">
-                <a:solidFill>
-                  <a:schemeClr val="tx1">
-                    <a:lumMod val="75000"/>
-                  </a:schemeClr>
-                </a:solidFill>
-              </a:rPr>
-              <a:t>現状の解釈</a:t>
-            </a:r>
-          </a:p>
-        </p:txBody>
-      </p:sp>
-    </p:spTree>
-    <p:extLst>
-      <p:ext uri="{BB962C8B-B14F-4D97-AF65-F5344CB8AC3E}">
-        <p14:creationId xmlns:p14="http://schemas.microsoft.com/office/powerpoint/2010/main" val="3758113492"/>
       </p:ext>
     </p:extLst>
   </p:cSld>
@@ -14810,14 +13259,14 @@
           <p:nvPr>
             <p:extLst>
               <p:ext uri="{D42A27DB-BD31-4B8C-83A1-F6EECF244321}">
-                <p14:modId xmlns:p14="http://schemas.microsoft.com/office/powerpoint/2010/main" val="2266935136"/>
+                <p14:modId xmlns:p14="http://schemas.microsoft.com/office/powerpoint/2010/main" val="3641497377"/>
               </p:ext>
             </p:extLst>
           </p:nvPr>
         </p:nvGraphicFramePr>
         <p:xfrm>
           <a:off x="323687" y="1276608"/>
-          <a:ext cx="11530057" cy="4855076"/>
+          <a:ext cx="11530057" cy="4763636"/>
         </p:xfrm>
         <a:graphic>
           <a:graphicData uri="http://schemas.openxmlformats.org/drawingml/2006/table">
@@ -14833,21 +13282,21 @@
                     </a:ext>
                   </a:extLst>
                 </a:gridCol>
-                <a:gridCol w="2726888">
+                <a:gridCol w="3072493">
                   <a:extLst>
                     <a:ext uri="{9D8B030D-6E8A-4147-A177-3AD203B41FA5}">
                       <a16:colId xmlns:a16="http://schemas.microsoft.com/office/drawing/2014/main" val="618744104"/>
                     </a:ext>
                   </a:extLst>
                 </a:gridCol>
-                <a:gridCol w="5177542">
+                <a:gridCol w="5110843">
                   <a:extLst>
                     <a:ext uri="{9D8B030D-6E8A-4147-A177-3AD203B41FA5}">
                       <a16:colId xmlns:a16="http://schemas.microsoft.com/office/drawing/2014/main" val="952234859"/>
                     </a:ext>
                   </a:extLst>
                 </a:gridCol>
-                <a:gridCol w="2882514">
+                <a:gridCol w="2603608">
                   <a:extLst>
                     <a:ext uri="{9D8B030D-6E8A-4147-A177-3AD203B41FA5}">
                       <a16:colId xmlns:a16="http://schemas.microsoft.com/office/drawing/2014/main" val="2162630281"/>
@@ -15071,7 +13520,10 @@
                     <a:bodyPr/>
                     <a:lstStyle/>
                     <a:p>
-                      <a:endParaRPr kumimoji="1" lang="ja-JP" altLang="en-US" dirty="0"/>
+                      <a:r>
+                        <a:rPr kumimoji="1" lang="ja-JP" altLang="en-US" dirty="0"/>
+                        <a:t>「複雑性」という概念について</a:t>
+                      </a:r>
                     </a:p>
                   </a:txBody>
                   <a:tcPr>
@@ -15106,6 +13558,13 @@
                   <a:txBody>
                     <a:bodyPr/>
                     <a:lstStyle/>
+                    <a:p>
+                      <a:r>
+                        <a:rPr kumimoji="1" lang="ja-JP" altLang="en-US" dirty="0"/>
+                        <a:t>システム設計における結合と複雑性の関連</a:t>
+                      </a:r>
+                      <a:endParaRPr kumimoji="1" lang="en-US" altLang="ja-JP" dirty="0"/>
+                    </a:p>
                     <a:p>
                       <a:endParaRPr kumimoji="1" lang="ja-JP" altLang="en-US" dirty="0"/>
                     </a:p>
@@ -15228,7 +13687,10 @@
                     <a:bodyPr/>
                     <a:lstStyle/>
                     <a:p>
-                      <a:endParaRPr kumimoji="1" lang="ja-JP" altLang="en-US"/>
+                      <a:r>
+                        <a:rPr kumimoji="1" lang="ja-JP" altLang="en-US" dirty="0"/>
+                        <a:t>主観としての「複雑性」</a:t>
+                      </a:r>
                     </a:p>
                   </a:txBody>
                   <a:tcPr>
@@ -15264,7 +13726,14 @@
                     <a:bodyPr/>
                     <a:lstStyle/>
                     <a:p>
-                      <a:endParaRPr kumimoji="1" lang="ja-JP" altLang="en-US"/>
+                      <a:r>
+                        <a:rPr kumimoji="1" lang="ja-JP" altLang="en-US" dirty="0"/>
+                        <a:t>複雑性は、絶対的ではなくて自分がどのように認識するかによって変わる</a:t>
+                      </a:r>
+                      <a:endParaRPr kumimoji="1" lang="en-US" altLang="ja-JP" dirty="0"/>
+                    </a:p>
+                    <a:p>
+                      <a:endParaRPr kumimoji="1" lang="ja-JP" altLang="en-US" dirty="0"/>
                     </a:p>
                   </a:txBody>
                   <a:tcPr>
@@ -15385,7 +13854,18 @@
                     <a:bodyPr/>
                     <a:lstStyle/>
                     <a:p>
-                      <a:endParaRPr kumimoji="1" lang="ja-JP" altLang="en-US" dirty="0"/>
+                      <a:r>
+                        <a:rPr kumimoji="1" lang="ja-JP" altLang="en-US" dirty="0"/>
+                        <a:t>「複雑性」の</a:t>
+                      </a:r>
+                      <a:r>
+                        <a:rPr kumimoji="1" lang="en-US" altLang="ja-JP" dirty="0"/>
+                        <a:t>5</a:t>
+                      </a:r>
+                      <a:r>
+                        <a:rPr kumimoji="1" lang="ja-JP" altLang="en-US" dirty="0"/>
+                        <a:t>段階</a:t>
+                      </a:r>
                     </a:p>
                   </a:txBody>
                   <a:tcPr>
@@ -15420,6 +13900,21 @@
                   <a:txBody>
                     <a:bodyPr/>
                     <a:lstStyle/>
+                    <a:p>
+                      <a:r>
+                        <a:rPr kumimoji="1" lang="ja-JP" altLang="en-US" dirty="0"/>
+                        <a:t>複雑性は、その状況により</a:t>
+                      </a:r>
+                      <a:r>
+                        <a:rPr kumimoji="1" lang="en-US" altLang="ja-JP" dirty="0"/>
+                        <a:t>5</a:t>
+                      </a:r>
+                      <a:r>
+                        <a:rPr kumimoji="1" lang="ja-JP" altLang="en-US" dirty="0"/>
+                        <a:t>段階に分類することができる</a:t>
+                      </a:r>
+                      <a:endParaRPr kumimoji="1" lang="en-US" altLang="ja-JP" dirty="0"/>
+                    </a:p>
                     <a:p>
                       <a:endParaRPr kumimoji="1" lang="ja-JP" altLang="en-US" dirty="0"/>
                     </a:p>
@@ -15542,6 +14037,13 @@
                     <a:bodyPr/>
                     <a:lstStyle/>
                     <a:p>
+                      <a:r>
+                        <a:rPr kumimoji="1" lang="ja-JP" altLang="en-US" dirty="0"/>
+                        <a:t>それぞれの段階でできる対処</a:t>
+                      </a:r>
+                      <a:endParaRPr kumimoji="1" lang="en-US" altLang="ja-JP" dirty="0"/>
+                    </a:p>
+                    <a:p>
                       <a:endParaRPr kumimoji="1" lang="ja-JP" altLang="en-US" dirty="0"/>
                     </a:p>
                   </a:txBody>
@@ -15578,7 +14080,14 @@
                     <a:bodyPr/>
                     <a:lstStyle/>
                     <a:p>
-                      <a:endParaRPr kumimoji="1" lang="ja-JP" altLang="en-US" dirty="0"/>
+                      <a:r>
+                        <a:rPr kumimoji="1" lang="en-US" altLang="ja-JP" dirty="0"/>
+                        <a:t>5</a:t>
+                      </a:r>
+                      <a:r>
+                        <a:rPr kumimoji="1" lang="ja-JP" altLang="en-US" dirty="0"/>
+                        <a:t>段階それぞれで実施できる対処が異なる</a:t>
+                      </a:r>
                     </a:p>
                   </a:txBody>
                   <a:tcPr>
@@ -15699,7 +14208,50 @@
                     <a:bodyPr/>
                     <a:lstStyle/>
                     <a:p>
-                      <a:endParaRPr kumimoji="1" lang="ja-JP" altLang="en-US" dirty="0"/>
+                      <a:r>
+                        <a:rPr kumimoji="1" lang="ja-JP" altLang="en-US" dirty="0"/>
+                        <a:t>まとめ</a:t>
+                      </a:r>
+                    </a:p>
+                  </a:txBody>
+                  <a:tcPr>
+                    <a:lnL w="12700" cmpd="sng">
+                      <a:noFill/>
+                    </a:lnL>
+                    <a:lnR w="12700" cmpd="sng">
+                      <a:noFill/>
+                    </a:lnR>
+                    <a:lnT w="12700" cmpd="sng">
+                      <a:noFill/>
+                    </a:lnT>
+                    <a:lnB w="12700" cmpd="sng">
+                      <a:noFill/>
+                    </a:lnB>
+                    <a:lnTlToBr w="12700" cmpd="sng">
+                      <a:noFill/>
+                      <a:prstDash val="solid"/>
+                    </a:lnTlToBr>
+                    <a:lnBlToTr w="12700" cmpd="sng">
+                      <a:noFill/>
+                      <a:prstDash val="solid"/>
+                    </a:lnBlToTr>
+                    <a:solidFill>
+                      <a:schemeClr val="bg1">
+                        <a:lumMod val="95000"/>
+                      </a:schemeClr>
+                    </a:solidFill>
+                  </a:tcPr>
+                </a:tc>
+                <a:tc>
+                  <a:txBody>
+                    <a:bodyPr/>
+                    <a:lstStyle/>
+                    <a:p>
+                      <a:pPr algn="l"/>
+                      <a:r>
+                        <a:rPr kumimoji="1" lang="ja-JP" altLang="en-US" dirty="0"/>
+                        <a:t>問題を解くには、問題文を読まなければいけない</a:t>
+                      </a:r>
                     </a:p>
                   </a:txBody>
                   <a:tcPr>
@@ -15767,234 +14319,9 @@
                     </a:solidFill>
                   </a:tcPr>
                 </a:tc>
-                <a:tc>
-                  <a:txBody>
-                    <a:bodyPr/>
-                    <a:lstStyle/>
-                    <a:p>
-                      <a:pPr algn="ctr"/>
-                      <a:endParaRPr kumimoji="1" lang="ja-JP" altLang="en-US" dirty="0"/>
-                    </a:p>
-                  </a:txBody>
-                  <a:tcPr>
-                    <a:lnL w="12700" cmpd="sng">
-                      <a:noFill/>
-                    </a:lnL>
-                    <a:lnR w="12700" cmpd="sng">
-                      <a:noFill/>
-                    </a:lnR>
-                    <a:lnT w="12700" cmpd="sng">
-                      <a:noFill/>
-                    </a:lnT>
-                    <a:lnB w="12700" cmpd="sng">
-                      <a:noFill/>
-                    </a:lnB>
-                    <a:lnTlToBr w="12700" cmpd="sng">
-                      <a:noFill/>
-                      <a:prstDash val="solid"/>
-                    </a:lnTlToBr>
-                    <a:lnBlToTr w="12700" cmpd="sng">
-                      <a:noFill/>
-                      <a:prstDash val="solid"/>
-                    </a:lnBlToTr>
-                    <a:solidFill>
-                      <a:schemeClr val="bg1">
-                        <a:lumMod val="95000"/>
-                      </a:schemeClr>
-                    </a:solidFill>
-                  </a:tcPr>
-                </a:tc>
                 <a:extLst>
                   <a:ext uri="{0D108BD9-81ED-4DB2-BD59-A6C34878D82A}">
                     <a16:rowId xmlns:a16="http://schemas.microsoft.com/office/drawing/2014/main" val="1902554559"/>
-                  </a:ext>
-                </a:extLst>
-              </a:tr>
-              <a:tr h="507298">
-                <a:tc>
-                  <a:txBody>
-                    <a:bodyPr/>
-                    <a:lstStyle/>
-                    <a:p>
-                      <a:endParaRPr kumimoji="1" lang="ja-JP" altLang="en-US" dirty="0"/>
-                    </a:p>
-                  </a:txBody>
-                  <a:tcPr>
-                    <a:lnL w="12700" cmpd="sng">
-                      <a:noFill/>
-                    </a:lnL>
-                    <a:lnR w="12700" cmpd="sng">
-                      <a:noFill/>
-                    </a:lnR>
-                    <a:lnT w="12700" cmpd="sng">
-                      <a:noFill/>
-                    </a:lnT>
-                    <a:lnB w="12700" cmpd="sng">
-                      <a:noFill/>
-                    </a:lnB>
-                    <a:lnTlToBr w="12700" cmpd="sng">
-                      <a:noFill/>
-                      <a:prstDash val="solid"/>
-                    </a:lnTlToBr>
-                    <a:lnBlToTr w="12700" cmpd="sng">
-                      <a:noFill/>
-                      <a:prstDash val="solid"/>
-                    </a:lnBlToTr>
-                    <a:solidFill>
-                      <a:schemeClr val="bg1">
-                        <a:lumMod val="95000"/>
-                      </a:schemeClr>
-                    </a:solidFill>
-                  </a:tcPr>
-                </a:tc>
-                <a:tc>
-                  <a:txBody>
-                    <a:bodyPr/>
-                    <a:lstStyle/>
-                    <a:p>
-                      <a:pPr marL="0" marR="0" lvl="0" indent="0" algn="l" defTabSz="914400" rtl="0" eaLnBrk="1" fontAlgn="auto" latinLnBrk="0" hangingPunct="1">
-                        <a:lnSpc>
-                          <a:spcPct val="100000"/>
-                        </a:lnSpc>
-                        <a:spcBef>
-                          <a:spcPts val="0"/>
-                        </a:spcBef>
-                        <a:spcAft>
-                          <a:spcPts val="0"/>
-                        </a:spcAft>
-                        <a:buClrTx/>
-                        <a:buSzTx/>
-                        <a:buFontTx/>
-                        <a:buNone/>
-                        <a:tabLst/>
-                        <a:defRPr/>
-                      </a:pPr>
-                      <a:r>
-                        <a:rPr kumimoji="1" lang="en-US" altLang="ja-JP" dirty="0"/>
-                        <a:t>Appendix</a:t>
-                      </a:r>
-                      <a:r>
-                        <a:rPr kumimoji="1" lang="ja-JP" altLang="en-US" dirty="0"/>
-                        <a:t>②</a:t>
-                      </a:r>
-                    </a:p>
-                    <a:p>
-                      <a:endParaRPr kumimoji="1" lang="ja-JP" altLang="en-US" dirty="0"/>
-                    </a:p>
-                  </a:txBody>
-                  <a:tcPr>
-                    <a:lnL w="12700" cmpd="sng">
-                      <a:noFill/>
-                    </a:lnL>
-                    <a:lnR w="12700" cmpd="sng">
-                      <a:noFill/>
-                    </a:lnR>
-                    <a:lnT w="12700" cmpd="sng">
-                      <a:noFill/>
-                    </a:lnT>
-                    <a:lnB w="12700" cmpd="sng">
-                      <a:noFill/>
-                    </a:lnB>
-                    <a:lnTlToBr w="12700" cmpd="sng">
-                      <a:noFill/>
-                      <a:prstDash val="solid"/>
-                    </a:lnTlToBr>
-                    <a:lnBlToTr w="12700" cmpd="sng">
-                      <a:noFill/>
-                      <a:prstDash val="solid"/>
-                    </a:lnBlToTr>
-                    <a:solidFill>
-                      <a:schemeClr val="bg1">
-                        <a:lumMod val="95000"/>
-                      </a:schemeClr>
-                    </a:solidFill>
-                  </a:tcPr>
-                </a:tc>
-                <a:tc>
-                  <a:txBody>
-                    <a:bodyPr/>
-                    <a:lstStyle/>
-                    <a:p>
-                      <a:pPr algn="ctr"/>
-                      <a:r>
-                        <a:rPr kumimoji="1" lang="en-US" altLang="ja-JP" dirty="0"/>
-                        <a:t>-</a:t>
-                      </a:r>
-                      <a:endParaRPr kumimoji="1" lang="ja-JP" altLang="en-US" dirty="0"/>
-                    </a:p>
-                  </a:txBody>
-                  <a:tcPr>
-                    <a:lnL w="12700" cmpd="sng">
-                      <a:noFill/>
-                    </a:lnL>
-                    <a:lnR w="12700" cmpd="sng">
-                      <a:noFill/>
-                    </a:lnR>
-                    <a:lnT w="12700" cmpd="sng">
-                      <a:noFill/>
-                    </a:lnT>
-                    <a:lnB w="12700" cmpd="sng">
-                      <a:noFill/>
-                    </a:lnB>
-                    <a:lnTlToBr w="12700" cmpd="sng">
-                      <a:noFill/>
-                      <a:prstDash val="solid"/>
-                    </a:lnTlToBr>
-                    <a:lnBlToTr w="12700" cmpd="sng">
-                      <a:noFill/>
-                      <a:prstDash val="solid"/>
-                    </a:lnBlToTr>
-                    <a:solidFill>
-                      <a:schemeClr val="bg1">
-                        <a:lumMod val="95000"/>
-                      </a:schemeClr>
-                    </a:solidFill>
-                  </a:tcPr>
-                </a:tc>
-                <a:tc>
-                  <a:txBody>
-                    <a:bodyPr/>
-                    <a:lstStyle/>
-                    <a:p>
-                      <a:pPr algn="ctr"/>
-                      <a:r>
-                        <a:rPr kumimoji="1" lang="en-US" altLang="ja-JP" dirty="0"/>
-                        <a:t>-</a:t>
-                      </a:r>
-                      <a:endParaRPr kumimoji="1" lang="ja-JP" altLang="en-US" dirty="0"/>
-                    </a:p>
-                  </a:txBody>
-                  <a:tcPr>
-                    <a:lnL w="12700" cmpd="sng">
-                      <a:noFill/>
-                    </a:lnL>
-                    <a:lnR w="12700" cmpd="sng">
-                      <a:noFill/>
-                    </a:lnR>
-                    <a:lnT w="12700" cmpd="sng">
-                      <a:noFill/>
-                    </a:lnT>
-                    <a:lnB w="12700" cmpd="sng">
-                      <a:noFill/>
-                    </a:lnB>
-                    <a:lnTlToBr w="12700" cmpd="sng">
-                      <a:noFill/>
-                      <a:prstDash val="solid"/>
-                    </a:lnTlToBr>
-                    <a:lnBlToTr w="12700" cmpd="sng">
-                      <a:noFill/>
-                      <a:prstDash val="solid"/>
-                    </a:lnBlToTr>
-                    <a:solidFill>
-                      <a:schemeClr val="bg1">
-                        <a:lumMod val="95000"/>
-                      </a:schemeClr>
-                    </a:solidFill>
-                  </a:tcPr>
-                </a:tc>
-                <a:extLst>
-                  <a:ext uri="{0D108BD9-81ED-4DB2-BD59-A6C34878D82A}">
-                    <a16:rowId xmlns:a16="http://schemas.microsoft.com/office/drawing/2014/main" val="3454851187"/>
                   </a:ext>
                 </a:extLst>
               </a:tr>
@@ -16187,7 +14514,7 @@
         <p:cNvPr id="1" name="">
           <a:extLst>
             <a:ext uri="{FF2B5EF4-FFF2-40B4-BE49-F238E27FC236}">
-              <a16:creationId xmlns:a16="http://schemas.microsoft.com/office/drawing/2014/main" id="{FAA26451-EDAF-F374-F32C-667DD3F5BF56}"/>
+              <a16:creationId xmlns:a16="http://schemas.microsoft.com/office/drawing/2014/main" id="{C4BDF32A-D3EE-4ED4-C8A8-96BE9F9863EF}"/>
             </a:ext>
           </a:extLst>
         </p:cNvPr>
@@ -16207,7 +14534,7 @@
           <p:cNvPr id="2" name="直線コネクタ 1">
             <a:extLst>
               <a:ext uri="{FF2B5EF4-FFF2-40B4-BE49-F238E27FC236}">
-                <a16:creationId xmlns:a16="http://schemas.microsoft.com/office/drawing/2014/main" id="{D8FA9EAF-83FD-807E-AB80-24F97FED9F20}"/>
+                <a16:creationId xmlns:a16="http://schemas.microsoft.com/office/drawing/2014/main" id="{8D983B16-5F4F-75CE-3266-3067313572C4}"/>
               </a:ext>
             </a:extLst>
           </p:cNvPr>
@@ -16246,7 +14573,7 @@
           <p:cNvPr id="3" name="タイトル プレースホルダー 1">
             <a:extLst>
               <a:ext uri="{FF2B5EF4-FFF2-40B4-BE49-F238E27FC236}">
-                <a16:creationId xmlns:a16="http://schemas.microsoft.com/office/drawing/2014/main" id="{F1118C2A-E9FE-756E-4BD5-609B9D3D8215}"/>
+                <a16:creationId xmlns:a16="http://schemas.microsoft.com/office/drawing/2014/main" id="{F23457F6-6102-AE36-8337-65DB91D42569}"/>
               </a:ext>
             </a:extLst>
           </p:cNvPr>
@@ -16312,7 +14639,7 @@
           <p:cNvPr id="4" name="タイトル プレースホルダー 1">
             <a:extLst>
               <a:ext uri="{FF2B5EF4-FFF2-40B4-BE49-F238E27FC236}">
-                <a16:creationId xmlns:a16="http://schemas.microsoft.com/office/drawing/2014/main" id="{189A4DE8-4BA7-6ED8-4438-AE0E65FEBFE8}"/>
+                <a16:creationId xmlns:a16="http://schemas.microsoft.com/office/drawing/2014/main" id="{0FDBCE1D-31E9-0332-4904-671FB573ABDB}"/>
               </a:ext>
             </a:extLst>
           </p:cNvPr>
@@ -16364,6 +14691,2865 @@
       </p:sp>
       <p:sp>
         <p:nvSpPr>
+          <p:cNvPr id="8" name="正方形/長方形 7">
+            <a:extLst>
+              <a:ext uri="{FF2B5EF4-FFF2-40B4-BE49-F238E27FC236}">
+                <a16:creationId xmlns:a16="http://schemas.microsoft.com/office/drawing/2014/main" id="{5D8CE1ED-9AEF-00EA-B35A-1DB0B4FEDD6F}"/>
+              </a:ext>
+            </a:extLst>
+          </p:cNvPr>
+          <p:cNvSpPr/>
+          <p:nvPr/>
+        </p:nvSpPr>
+        <p:spPr>
+          <a:xfrm>
+            <a:off x="371800" y="2457442"/>
+            <a:ext cx="5546400" cy="1771658"/>
+          </a:xfrm>
+          <a:prstGeom prst="rect">
+            <a:avLst/>
+          </a:prstGeom>
+          <a:solidFill>
+            <a:schemeClr val="bg1"/>
+          </a:solidFill>
+          <a:ln w="12700">
+            <a:solidFill>
+              <a:schemeClr val="tx1">
+                <a:lumMod val="75000"/>
+              </a:schemeClr>
+            </a:solidFill>
+          </a:ln>
+        </p:spPr>
+        <p:style>
+          <a:lnRef idx="2">
+            <a:schemeClr val="accent1">
+              <a:shade val="15000"/>
+            </a:schemeClr>
+          </a:lnRef>
+          <a:fillRef idx="1">
+            <a:schemeClr val="accent1"/>
+          </a:fillRef>
+          <a:effectRef idx="0">
+            <a:schemeClr val="accent1"/>
+          </a:effectRef>
+          <a:fontRef idx="minor">
+            <a:schemeClr val="lt1"/>
+          </a:fontRef>
+        </p:style>
+        <p:txBody>
+          <a:bodyPr rtlCol="0" anchor="t" anchorCtr="0"/>
+          <a:lstStyle/>
+          <a:p>
+            <a:pPr algn="ctr"/>
+            <a:endParaRPr kumimoji="1" lang="ja-JP" altLang="en-US"/>
+          </a:p>
+        </p:txBody>
+      </p:sp>
+      <p:sp>
+        <p:nvSpPr>
+          <p:cNvPr id="6" name="正方形/長方形 5">
+            <a:extLst>
+              <a:ext uri="{FF2B5EF4-FFF2-40B4-BE49-F238E27FC236}">
+                <a16:creationId xmlns:a16="http://schemas.microsoft.com/office/drawing/2014/main" id="{530B7CFD-2B24-743C-E1E3-8C932E01CAF8}"/>
+              </a:ext>
+            </a:extLst>
+          </p:cNvPr>
+          <p:cNvSpPr/>
+          <p:nvPr/>
+        </p:nvSpPr>
+        <p:spPr>
+          <a:xfrm>
+            <a:off x="355600" y="2159001"/>
+            <a:ext cx="5582416" cy="301599"/>
+          </a:xfrm>
+          <a:prstGeom prst="rect">
+            <a:avLst/>
+          </a:prstGeom>
+          <a:ln>
+            <a:noFill/>
+          </a:ln>
+        </p:spPr>
+        <p:style>
+          <a:lnRef idx="2">
+            <a:schemeClr val="accent1">
+              <a:shade val="15000"/>
+            </a:schemeClr>
+          </a:lnRef>
+          <a:fillRef idx="1">
+            <a:schemeClr val="accent1"/>
+          </a:fillRef>
+          <a:effectRef idx="0">
+            <a:schemeClr val="accent1"/>
+          </a:effectRef>
+          <a:fontRef idx="minor">
+            <a:schemeClr val="lt1"/>
+          </a:fontRef>
+        </p:style>
+        <p:txBody>
+          <a:bodyPr rtlCol="0" anchor="ctr"/>
+          <a:lstStyle/>
+          <a:p>
+            <a:pPr algn="ctr"/>
+            <a:r>
+              <a:rPr kumimoji="1" lang="en-US" altLang="ja-JP" dirty="0">
+                <a:solidFill>
+                  <a:schemeClr val="tx1">
+                    <a:lumMod val="75000"/>
+                  </a:schemeClr>
+                </a:solidFill>
+              </a:rPr>
+              <a:t>A</a:t>
+            </a:r>
+            <a:endParaRPr kumimoji="1" lang="ja-JP" altLang="en-US" dirty="0">
+              <a:solidFill>
+                <a:schemeClr val="tx1">
+                  <a:lumMod val="75000"/>
+                </a:schemeClr>
+              </a:solidFill>
+            </a:endParaRPr>
+          </a:p>
+        </p:txBody>
+      </p:sp>
+      <p:sp>
+        <p:nvSpPr>
+          <p:cNvPr id="9" name="正方形/長方形 8">
+            <a:extLst>
+              <a:ext uri="{FF2B5EF4-FFF2-40B4-BE49-F238E27FC236}">
+                <a16:creationId xmlns:a16="http://schemas.microsoft.com/office/drawing/2014/main" id="{F74551BA-7C54-8597-74DC-8ACC5D994FAF}"/>
+              </a:ext>
+            </a:extLst>
+          </p:cNvPr>
+          <p:cNvSpPr/>
+          <p:nvPr/>
+        </p:nvSpPr>
+        <p:spPr>
+          <a:xfrm>
+            <a:off x="371800" y="4825982"/>
+            <a:ext cx="5546400" cy="1771658"/>
+          </a:xfrm>
+          <a:prstGeom prst="rect">
+            <a:avLst/>
+          </a:prstGeom>
+          <a:solidFill>
+            <a:schemeClr val="bg1"/>
+          </a:solidFill>
+          <a:ln w="12700">
+            <a:solidFill>
+              <a:schemeClr val="tx1">
+                <a:lumMod val="75000"/>
+              </a:schemeClr>
+            </a:solidFill>
+          </a:ln>
+        </p:spPr>
+        <p:style>
+          <a:lnRef idx="2">
+            <a:schemeClr val="accent1">
+              <a:shade val="15000"/>
+            </a:schemeClr>
+          </a:lnRef>
+          <a:fillRef idx="1">
+            <a:schemeClr val="accent1"/>
+          </a:fillRef>
+          <a:effectRef idx="0">
+            <a:schemeClr val="accent1"/>
+          </a:effectRef>
+          <a:fontRef idx="minor">
+            <a:schemeClr val="lt1"/>
+          </a:fontRef>
+        </p:style>
+        <p:txBody>
+          <a:bodyPr rtlCol="0" anchor="t" anchorCtr="0"/>
+          <a:lstStyle/>
+          <a:p>
+            <a:pPr algn="ctr"/>
+            <a:endParaRPr kumimoji="1" lang="ja-JP" altLang="en-US"/>
+          </a:p>
+        </p:txBody>
+      </p:sp>
+      <p:sp>
+        <p:nvSpPr>
+          <p:cNvPr id="10" name="正方形/長方形 9">
+            <a:extLst>
+              <a:ext uri="{FF2B5EF4-FFF2-40B4-BE49-F238E27FC236}">
+                <a16:creationId xmlns:a16="http://schemas.microsoft.com/office/drawing/2014/main" id="{27A8DA5C-2519-379C-09FD-16DE8DA18FF3}"/>
+              </a:ext>
+            </a:extLst>
+          </p:cNvPr>
+          <p:cNvSpPr/>
+          <p:nvPr/>
+        </p:nvSpPr>
+        <p:spPr>
+          <a:xfrm>
+            <a:off x="355600" y="4527541"/>
+            <a:ext cx="5582416" cy="301599"/>
+          </a:xfrm>
+          <a:prstGeom prst="rect">
+            <a:avLst/>
+          </a:prstGeom>
+          <a:ln>
+            <a:noFill/>
+          </a:ln>
+        </p:spPr>
+        <p:style>
+          <a:lnRef idx="2">
+            <a:schemeClr val="accent1">
+              <a:shade val="15000"/>
+            </a:schemeClr>
+          </a:lnRef>
+          <a:fillRef idx="1">
+            <a:schemeClr val="accent1"/>
+          </a:fillRef>
+          <a:effectRef idx="0">
+            <a:schemeClr val="accent1"/>
+          </a:effectRef>
+          <a:fontRef idx="minor">
+            <a:schemeClr val="lt1"/>
+          </a:fontRef>
+        </p:style>
+        <p:txBody>
+          <a:bodyPr rtlCol="0" anchor="ctr"/>
+          <a:lstStyle/>
+          <a:p>
+            <a:pPr algn="ctr"/>
+            <a:r>
+              <a:rPr lang="en-US" altLang="ja-JP" dirty="0">
+                <a:solidFill>
+                  <a:schemeClr val="tx1">
+                    <a:lumMod val="75000"/>
+                  </a:schemeClr>
+                </a:solidFill>
+              </a:rPr>
+              <a:t>B</a:t>
+            </a:r>
+            <a:endParaRPr kumimoji="1" lang="ja-JP" altLang="en-US" dirty="0">
+              <a:solidFill>
+                <a:schemeClr val="tx1">
+                  <a:lumMod val="75000"/>
+                </a:schemeClr>
+              </a:solidFill>
+            </a:endParaRPr>
+          </a:p>
+        </p:txBody>
+      </p:sp>
+      <p:sp>
+        <p:nvSpPr>
+          <p:cNvPr id="11" name="正方形/長方形 10">
+            <a:extLst>
+              <a:ext uri="{FF2B5EF4-FFF2-40B4-BE49-F238E27FC236}">
+                <a16:creationId xmlns:a16="http://schemas.microsoft.com/office/drawing/2014/main" id="{16BD3C59-EDFD-F7E1-7F79-49C3738BB4E1}"/>
+              </a:ext>
+            </a:extLst>
+          </p:cNvPr>
+          <p:cNvSpPr/>
+          <p:nvPr/>
+        </p:nvSpPr>
+        <p:spPr>
+          <a:xfrm>
+            <a:off x="6295584" y="4825982"/>
+            <a:ext cx="5546400" cy="1771658"/>
+          </a:xfrm>
+          <a:prstGeom prst="rect">
+            <a:avLst/>
+          </a:prstGeom>
+          <a:solidFill>
+            <a:schemeClr val="bg1"/>
+          </a:solidFill>
+          <a:ln w="12700">
+            <a:solidFill>
+              <a:schemeClr val="tx1">
+                <a:lumMod val="75000"/>
+              </a:schemeClr>
+            </a:solidFill>
+          </a:ln>
+        </p:spPr>
+        <p:style>
+          <a:lnRef idx="2">
+            <a:schemeClr val="accent1">
+              <a:shade val="15000"/>
+            </a:schemeClr>
+          </a:lnRef>
+          <a:fillRef idx="1">
+            <a:schemeClr val="accent1"/>
+          </a:fillRef>
+          <a:effectRef idx="0">
+            <a:schemeClr val="accent1"/>
+          </a:effectRef>
+          <a:fontRef idx="minor">
+            <a:schemeClr val="lt1"/>
+          </a:fontRef>
+        </p:style>
+        <p:txBody>
+          <a:bodyPr rtlCol="0" anchor="t" anchorCtr="0"/>
+          <a:lstStyle/>
+          <a:p>
+            <a:pPr algn="ctr"/>
+            <a:endParaRPr kumimoji="1" lang="ja-JP" altLang="en-US"/>
+          </a:p>
+        </p:txBody>
+      </p:sp>
+      <p:sp>
+        <p:nvSpPr>
+          <p:cNvPr id="12" name="正方形/長方形 11">
+            <a:extLst>
+              <a:ext uri="{FF2B5EF4-FFF2-40B4-BE49-F238E27FC236}">
+                <a16:creationId xmlns:a16="http://schemas.microsoft.com/office/drawing/2014/main" id="{8F33359A-5AD4-1402-E636-562D036FC009}"/>
+              </a:ext>
+            </a:extLst>
+          </p:cNvPr>
+          <p:cNvSpPr/>
+          <p:nvPr/>
+        </p:nvSpPr>
+        <p:spPr>
+          <a:xfrm>
+            <a:off x="6279384" y="4527541"/>
+            <a:ext cx="5582416" cy="301599"/>
+          </a:xfrm>
+          <a:prstGeom prst="rect">
+            <a:avLst/>
+          </a:prstGeom>
+          <a:ln>
+            <a:noFill/>
+          </a:ln>
+        </p:spPr>
+        <p:style>
+          <a:lnRef idx="2">
+            <a:schemeClr val="accent1">
+              <a:shade val="15000"/>
+            </a:schemeClr>
+          </a:lnRef>
+          <a:fillRef idx="1">
+            <a:schemeClr val="accent1"/>
+          </a:fillRef>
+          <a:effectRef idx="0">
+            <a:schemeClr val="accent1"/>
+          </a:effectRef>
+          <a:fontRef idx="minor">
+            <a:schemeClr val="lt1"/>
+          </a:fontRef>
+        </p:style>
+        <p:txBody>
+          <a:bodyPr rtlCol="0" anchor="ctr"/>
+          <a:lstStyle/>
+          <a:p>
+            <a:pPr algn="ctr"/>
+            <a:r>
+              <a:rPr lang="en-US" altLang="ja-JP" dirty="0">
+                <a:solidFill>
+                  <a:schemeClr val="tx1">
+                    <a:lumMod val="75000"/>
+                  </a:schemeClr>
+                </a:solidFill>
+              </a:rPr>
+              <a:t>D</a:t>
+            </a:r>
+            <a:endParaRPr kumimoji="1" lang="ja-JP" altLang="en-US" dirty="0">
+              <a:solidFill>
+                <a:schemeClr val="tx1">
+                  <a:lumMod val="75000"/>
+                </a:schemeClr>
+              </a:solidFill>
+            </a:endParaRPr>
+          </a:p>
+        </p:txBody>
+      </p:sp>
+      <p:sp>
+        <p:nvSpPr>
+          <p:cNvPr id="13" name="正方形/長方形 12">
+            <a:extLst>
+              <a:ext uri="{FF2B5EF4-FFF2-40B4-BE49-F238E27FC236}">
+                <a16:creationId xmlns:a16="http://schemas.microsoft.com/office/drawing/2014/main" id="{02FE350C-2066-BCBF-8BE5-C00B86DECC1C}"/>
+              </a:ext>
+            </a:extLst>
+          </p:cNvPr>
+          <p:cNvSpPr/>
+          <p:nvPr/>
+        </p:nvSpPr>
+        <p:spPr>
+          <a:xfrm>
+            <a:off x="6295584" y="2478100"/>
+            <a:ext cx="5546400" cy="1771658"/>
+          </a:xfrm>
+          <a:prstGeom prst="rect">
+            <a:avLst/>
+          </a:prstGeom>
+          <a:solidFill>
+            <a:schemeClr val="bg1"/>
+          </a:solidFill>
+          <a:ln w="12700">
+            <a:solidFill>
+              <a:schemeClr val="tx1">
+                <a:lumMod val="75000"/>
+              </a:schemeClr>
+            </a:solidFill>
+          </a:ln>
+        </p:spPr>
+        <p:style>
+          <a:lnRef idx="2">
+            <a:schemeClr val="accent1">
+              <a:shade val="15000"/>
+            </a:schemeClr>
+          </a:lnRef>
+          <a:fillRef idx="1">
+            <a:schemeClr val="accent1"/>
+          </a:fillRef>
+          <a:effectRef idx="0">
+            <a:schemeClr val="accent1"/>
+          </a:effectRef>
+          <a:fontRef idx="minor">
+            <a:schemeClr val="lt1"/>
+          </a:fontRef>
+        </p:style>
+        <p:txBody>
+          <a:bodyPr rtlCol="0" anchor="t" anchorCtr="0"/>
+          <a:lstStyle/>
+          <a:p>
+            <a:pPr algn="ctr"/>
+            <a:endParaRPr kumimoji="1" lang="ja-JP" altLang="en-US"/>
+          </a:p>
+        </p:txBody>
+      </p:sp>
+      <p:sp>
+        <p:nvSpPr>
+          <p:cNvPr id="14" name="正方形/長方形 13">
+            <a:extLst>
+              <a:ext uri="{FF2B5EF4-FFF2-40B4-BE49-F238E27FC236}">
+                <a16:creationId xmlns:a16="http://schemas.microsoft.com/office/drawing/2014/main" id="{867519F8-B1FC-A730-E5C1-01A8C6017141}"/>
+              </a:ext>
+            </a:extLst>
+          </p:cNvPr>
+          <p:cNvSpPr/>
+          <p:nvPr/>
+        </p:nvSpPr>
+        <p:spPr>
+          <a:xfrm>
+            <a:off x="6279384" y="2179659"/>
+            <a:ext cx="5582416" cy="301599"/>
+          </a:xfrm>
+          <a:prstGeom prst="rect">
+            <a:avLst/>
+          </a:prstGeom>
+          <a:ln>
+            <a:noFill/>
+          </a:ln>
+        </p:spPr>
+        <p:style>
+          <a:lnRef idx="2">
+            <a:schemeClr val="accent1">
+              <a:shade val="15000"/>
+            </a:schemeClr>
+          </a:lnRef>
+          <a:fillRef idx="1">
+            <a:schemeClr val="accent1"/>
+          </a:fillRef>
+          <a:effectRef idx="0">
+            <a:schemeClr val="accent1"/>
+          </a:effectRef>
+          <a:fontRef idx="minor">
+            <a:schemeClr val="lt1"/>
+          </a:fontRef>
+        </p:style>
+        <p:txBody>
+          <a:bodyPr rtlCol="0" anchor="ctr"/>
+          <a:lstStyle/>
+          <a:p>
+            <a:pPr algn="ctr"/>
+            <a:r>
+              <a:rPr lang="en-US" altLang="ja-JP" dirty="0">
+                <a:solidFill>
+                  <a:schemeClr val="tx1">
+                    <a:lumMod val="75000"/>
+                  </a:schemeClr>
+                </a:solidFill>
+              </a:rPr>
+              <a:t>C</a:t>
+            </a:r>
+            <a:endParaRPr kumimoji="1" lang="ja-JP" altLang="en-US" dirty="0">
+              <a:solidFill>
+                <a:schemeClr val="tx1">
+                  <a:lumMod val="75000"/>
+                </a:schemeClr>
+              </a:solidFill>
+            </a:endParaRPr>
+          </a:p>
+        </p:txBody>
+      </p:sp>
+      <p:sp>
+        <p:nvSpPr>
+          <p:cNvPr id="15" name="楕円 14">
+            <a:extLst>
+              <a:ext uri="{FF2B5EF4-FFF2-40B4-BE49-F238E27FC236}">
+                <a16:creationId xmlns:a16="http://schemas.microsoft.com/office/drawing/2014/main" id="{B3D7A379-A8F3-A935-E402-A7B1E524F242}"/>
+              </a:ext>
+            </a:extLst>
+          </p:cNvPr>
+          <p:cNvSpPr/>
+          <p:nvPr/>
+        </p:nvSpPr>
+        <p:spPr>
+          <a:xfrm>
+            <a:off x="5237984" y="3616313"/>
+            <a:ext cx="1625600" cy="1625600"/>
+          </a:xfrm>
+          <a:prstGeom prst="ellipse">
+            <a:avLst/>
+          </a:prstGeom>
+          <a:solidFill>
+            <a:schemeClr val="accent1">
+              <a:lumMod val="20000"/>
+              <a:lumOff val="80000"/>
+            </a:schemeClr>
+          </a:solidFill>
+          <a:ln>
+            <a:noFill/>
+          </a:ln>
+        </p:spPr>
+        <p:style>
+          <a:lnRef idx="2">
+            <a:schemeClr val="accent1">
+              <a:shade val="15000"/>
+            </a:schemeClr>
+          </a:lnRef>
+          <a:fillRef idx="1">
+            <a:schemeClr val="accent1"/>
+          </a:fillRef>
+          <a:effectRef idx="0">
+            <a:schemeClr val="accent1"/>
+          </a:effectRef>
+          <a:fontRef idx="minor">
+            <a:schemeClr val="lt1"/>
+          </a:fontRef>
+        </p:style>
+        <p:txBody>
+          <a:bodyPr rtlCol="0" anchor="ctr"/>
+          <a:lstStyle/>
+          <a:p>
+            <a:pPr algn="ctr"/>
+            <a:r>
+              <a:rPr lang="ja-JP" altLang="en-US" dirty="0">
+                <a:solidFill>
+                  <a:schemeClr val="tx1">
+                    <a:lumMod val="75000"/>
+                  </a:schemeClr>
+                </a:solidFill>
+              </a:rPr>
+              <a:t>なにに</a:t>
+            </a:r>
+            <a:endParaRPr lang="en-US" altLang="ja-JP" dirty="0">
+              <a:solidFill>
+                <a:schemeClr val="tx1">
+                  <a:lumMod val="75000"/>
+                </a:schemeClr>
+              </a:solidFill>
+            </a:endParaRPr>
+          </a:p>
+          <a:p>
+            <a:pPr algn="ctr"/>
+            <a:r>
+              <a:rPr lang="ja-JP" altLang="en-US" dirty="0">
+                <a:solidFill>
+                  <a:schemeClr val="tx1">
+                    <a:lumMod val="75000"/>
+                  </a:schemeClr>
+                </a:solidFill>
+              </a:rPr>
+              <a:t>ついての</a:t>
+            </a:r>
+            <a:endParaRPr lang="en-US" altLang="ja-JP" dirty="0">
+              <a:solidFill>
+                <a:schemeClr val="tx1">
+                  <a:lumMod val="75000"/>
+                </a:schemeClr>
+              </a:solidFill>
+            </a:endParaRPr>
+          </a:p>
+          <a:p>
+            <a:pPr algn="ctr"/>
+            <a:r>
+              <a:rPr kumimoji="1" lang="ja-JP" altLang="en-US" dirty="0">
+                <a:solidFill>
+                  <a:schemeClr val="tx1">
+                    <a:lumMod val="75000"/>
+                  </a:schemeClr>
+                </a:solidFill>
+              </a:rPr>
+              <a:t>分割？</a:t>
+            </a:r>
+          </a:p>
+        </p:txBody>
+      </p:sp>
+    </p:spTree>
+    <p:extLst>
+      <p:ext uri="{BB962C8B-B14F-4D97-AF65-F5344CB8AC3E}">
+        <p14:creationId xmlns:p14="http://schemas.microsoft.com/office/powerpoint/2010/main" val="3714738854"/>
+      </p:ext>
+    </p:extLst>
+  </p:cSld>
+  <p:clrMapOvr>
+    <a:masterClrMapping/>
+  </p:clrMapOvr>
+</p:sld>
+</file>
+
+<file path=ppt/slides/slide21.xml><?xml version="1.0" encoding="utf-8"?>
+<p:sld xmlns:a="http://schemas.openxmlformats.org/drawingml/2006/main" xmlns:r="http://schemas.openxmlformats.org/officeDocument/2006/relationships" xmlns:p="http://schemas.openxmlformats.org/presentationml/2006/main">
+  <p:cSld>
+    <p:spTree>
+      <p:nvGrpSpPr>
+        <p:cNvPr id="1" name="">
+          <a:extLst>
+            <a:ext uri="{FF2B5EF4-FFF2-40B4-BE49-F238E27FC236}">
+              <a16:creationId xmlns:a16="http://schemas.microsoft.com/office/drawing/2014/main" id="{977577BA-2D60-D6EB-32E0-C3BBCB0228F9}"/>
+            </a:ext>
+          </a:extLst>
+        </p:cNvPr>
+        <p:cNvGrpSpPr/>
+        <p:nvPr/>
+      </p:nvGrpSpPr>
+      <p:grpSpPr>
+        <a:xfrm>
+          <a:off x="0" y="0"/>
+          <a:ext cx="0" cy="0"/>
+          <a:chOff x="0" y="0"/>
+          <a:chExt cx="0" cy="0"/>
+        </a:xfrm>
+      </p:grpSpPr>
+      <p:cxnSp>
+        <p:nvCxnSpPr>
+          <p:cNvPr id="2" name="直線コネクタ 1">
+            <a:extLst>
+              <a:ext uri="{FF2B5EF4-FFF2-40B4-BE49-F238E27FC236}">
+                <a16:creationId xmlns:a16="http://schemas.microsoft.com/office/drawing/2014/main" id="{A111E20A-D56F-CC97-2496-C398D8AB7AB5}"/>
+              </a:ext>
+            </a:extLst>
+          </p:cNvPr>
+          <p:cNvCxnSpPr>
+            <a:cxnSpLocks/>
+          </p:cNvCxnSpPr>
+          <p:nvPr/>
+        </p:nvCxnSpPr>
+        <p:spPr>
+          <a:xfrm>
+            <a:off x="0" y="1993900"/>
+            <a:ext cx="12192000" cy="0"/>
+          </a:xfrm>
+          <a:prstGeom prst="line">
+            <a:avLst/>
+          </a:prstGeom>
+          <a:ln w="38100"/>
+        </p:spPr>
+        <p:style>
+          <a:lnRef idx="2">
+            <a:schemeClr val="accent1"/>
+          </a:lnRef>
+          <a:fillRef idx="0">
+            <a:schemeClr val="accent1"/>
+          </a:fillRef>
+          <a:effectRef idx="1">
+            <a:schemeClr val="accent1"/>
+          </a:effectRef>
+          <a:fontRef idx="minor">
+            <a:schemeClr val="tx1"/>
+          </a:fontRef>
+        </p:style>
+      </p:cxnSp>
+      <p:sp>
+        <p:nvSpPr>
+          <p:cNvPr id="3" name="タイトル プレースホルダー 1">
+            <a:extLst>
+              <a:ext uri="{FF2B5EF4-FFF2-40B4-BE49-F238E27FC236}">
+                <a16:creationId xmlns:a16="http://schemas.microsoft.com/office/drawing/2014/main" id="{BA9946CA-FED8-9568-3AD1-3A10EDD5BED1}"/>
+              </a:ext>
+            </a:extLst>
+          </p:cNvPr>
+          <p:cNvSpPr txBox="1">
+            <a:spLocks/>
+          </p:cNvSpPr>
+          <p:nvPr/>
+        </p:nvSpPr>
+        <p:spPr>
+          <a:xfrm>
+            <a:off x="355600" y="1108076"/>
+            <a:ext cx="11506200" cy="812797"/>
+          </a:xfrm>
+          <a:prstGeom prst="rect">
+            <a:avLst/>
+          </a:prstGeom>
+        </p:spPr>
+        <p:txBody>
+          <a:bodyPr vert="horz" lIns="91440" tIns="45720" rIns="91440" bIns="45720" rtlCol="0" anchor="ctr">
+            <a:noAutofit/>
+          </a:bodyPr>
+          <a:lstStyle>
+            <a:lvl1pPr algn="l" defTabSz="914400" rtl="0" eaLnBrk="1" latinLnBrk="0" hangingPunct="1">
+              <a:lnSpc>
+                <a:spcPct val="90000"/>
+              </a:lnSpc>
+              <a:spcBef>
+                <a:spcPct val="0"/>
+              </a:spcBef>
+              <a:buNone/>
+              <a:defRPr kumimoji="1" sz="1400" kern="1200">
+                <a:solidFill>
+                  <a:schemeClr val="tx1"/>
+                </a:solidFill>
+                <a:latin typeface="+mj-lt"/>
+                <a:ea typeface="+mj-ea"/>
+                <a:cs typeface="+mj-cs"/>
+              </a:defRPr>
+            </a:lvl1pPr>
+          </a:lstStyle>
+          <a:p>
+            <a:r>
+              <a:rPr lang="ja-JP" altLang="en-US" sz="2800" dirty="0"/>
+              <a:t>洞察のプロセス</a:t>
+            </a:r>
+            <a:endParaRPr lang="en-US" altLang="ja-JP" sz="2800" dirty="0"/>
+          </a:p>
+        </p:txBody>
+      </p:sp>
+      <p:sp>
+        <p:nvSpPr>
+          <p:cNvPr id="4" name="タイトル プレースホルダー 1">
+            <a:extLst>
+              <a:ext uri="{FF2B5EF4-FFF2-40B4-BE49-F238E27FC236}">
+                <a16:creationId xmlns:a16="http://schemas.microsoft.com/office/drawing/2014/main" id="{5D47A94B-E5AE-3CB9-5AED-3000070C4F3C}"/>
+              </a:ext>
+            </a:extLst>
+          </p:cNvPr>
+          <p:cNvSpPr txBox="1">
+            <a:spLocks/>
+          </p:cNvSpPr>
+          <p:nvPr/>
+        </p:nvSpPr>
+        <p:spPr>
+          <a:xfrm>
+            <a:off x="355600" y="546100"/>
+            <a:ext cx="11506200" cy="488949"/>
+          </a:xfrm>
+          <a:prstGeom prst="rect">
+            <a:avLst/>
+          </a:prstGeom>
+        </p:spPr>
+        <p:txBody>
+          <a:bodyPr vert="horz" lIns="91440" tIns="45720" rIns="91440" bIns="45720" rtlCol="0" anchor="ctr">
+            <a:noAutofit/>
+          </a:bodyPr>
+          <a:lstStyle>
+            <a:lvl1pPr algn="l" defTabSz="914400" rtl="0" eaLnBrk="1" latinLnBrk="0" hangingPunct="1">
+              <a:lnSpc>
+                <a:spcPct val="90000"/>
+              </a:lnSpc>
+              <a:spcBef>
+                <a:spcPct val="0"/>
+              </a:spcBef>
+              <a:buNone/>
+              <a:defRPr kumimoji="1" sz="1400" kern="1200">
+                <a:solidFill>
+                  <a:schemeClr val="tx1"/>
+                </a:solidFill>
+                <a:latin typeface="+mj-lt"/>
+                <a:ea typeface="+mj-ea"/>
+                <a:cs typeface="+mj-cs"/>
+              </a:defRPr>
+            </a:lvl1pPr>
+          </a:lstStyle>
+          <a:p>
+            <a:r>
+              <a:rPr lang="ja-JP" altLang="en-US" dirty="0"/>
+              <a:t>目次内のタイトル名そのまま</a:t>
+            </a:r>
+            <a:endParaRPr lang="en-US" altLang="ja-JP" dirty="0"/>
+          </a:p>
+        </p:txBody>
+      </p:sp>
+      <p:sp>
+        <p:nvSpPr>
+          <p:cNvPr id="8" name="正方形/長方形 7">
+            <a:extLst>
+              <a:ext uri="{FF2B5EF4-FFF2-40B4-BE49-F238E27FC236}">
+                <a16:creationId xmlns:a16="http://schemas.microsoft.com/office/drawing/2014/main" id="{B09E6ED9-C4F4-17FA-E179-8AAA42DCBBB1}"/>
+              </a:ext>
+            </a:extLst>
+          </p:cNvPr>
+          <p:cNvSpPr/>
+          <p:nvPr/>
+        </p:nvSpPr>
+        <p:spPr>
+          <a:xfrm>
+            <a:off x="433792" y="2891065"/>
+            <a:ext cx="465108" cy="3416735"/>
+          </a:xfrm>
+          <a:prstGeom prst="rect">
+            <a:avLst/>
+          </a:prstGeom>
+          <a:solidFill>
+            <a:schemeClr val="accent1">
+              <a:lumMod val="20000"/>
+              <a:lumOff val="80000"/>
+            </a:schemeClr>
+          </a:solidFill>
+          <a:ln w="12700">
+            <a:solidFill>
+              <a:schemeClr val="tx1">
+                <a:lumMod val="75000"/>
+              </a:schemeClr>
+            </a:solidFill>
+          </a:ln>
+        </p:spPr>
+        <p:style>
+          <a:lnRef idx="2">
+            <a:schemeClr val="accent1">
+              <a:shade val="15000"/>
+            </a:schemeClr>
+          </a:lnRef>
+          <a:fillRef idx="1">
+            <a:schemeClr val="accent1"/>
+          </a:fillRef>
+          <a:effectRef idx="0">
+            <a:schemeClr val="accent1"/>
+          </a:effectRef>
+          <a:fontRef idx="minor">
+            <a:schemeClr val="lt1"/>
+          </a:fontRef>
+        </p:style>
+        <p:txBody>
+          <a:bodyPr rtlCol="0" anchor="ctr" anchorCtr="1"/>
+          <a:lstStyle/>
+          <a:p>
+            <a:pPr algn="ctr"/>
+            <a:r>
+              <a:rPr kumimoji="1" lang="ja-JP" altLang="en-US" dirty="0">
+                <a:solidFill>
+                  <a:schemeClr val="tx1">
+                    <a:lumMod val="75000"/>
+                  </a:schemeClr>
+                </a:solidFill>
+              </a:rPr>
+              <a:t>洞察</a:t>
+            </a:r>
+            <a:endParaRPr kumimoji="1" lang="ja-JP" altLang="en-US" dirty="0"/>
+          </a:p>
+        </p:txBody>
+      </p:sp>
+      <p:sp>
+        <p:nvSpPr>
+          <p:cNvPr id="14" name="正方形/長方形 13">
+            <a:extLst>
+              <a:ext uri="{FF2B5EF4-FFF2-40B4-BE49-F238E27FC236}">
+                <a16:creationId xmlns:a16="http://schemas.microsoft.com/office/drawing/2014/main" id="{E67DA372-9D93-00A1-7A23-29A0FAF2CFC0}"/>
+              </a:ext>
+            </a:extLst>
+          </p:cNvPr>
+          <p:cNvSpPr/>
+          <p:nvPr/>
+        </p:nvSpPr>
+        <p:spPr>
+          <a:xfrm>
+            <a:off x="436524" y="2520619"/>
+            <a:ext cx="1841725" cy="304327"/>
+          </a:xfrm>
+          <a:prstGeom prst="rect">
+            <a:avLst/>
+          </a:prstGeom>
+          <a:noFill/>
+          <a:ln>
+            <a:solidFill>
+              <a:schemeClr val="tx1">
+                <a:lumMod val="75000"/>
+              </a:schemeClr>
+            </a:solidFill>
+          </a:ln>
+        </p:spPr>
+        <p:style>
+          <a:lnRef idx="2">
+            <a:schemeClr val="accent1">
+              <a:shade val="15000"/>
+            </a:schemeClr>
+          </a:lnRef>
+          <a:fillRef idx="1">
+            <a:schemeClr val="accent1"/>
+          </a:fillRef>
+          <a:effectRef idx="0">
+            <a:schemeClr val="accent1"/>
+          </a:effectRef>
+          <a:fontRef idx="minor">
+            <a:schemeClr val="lt1"/>
+          </a:fontRef>
+        </p:style>
+        <p:txBody>
+          <a:bodyPr rtlCol="0" anchor="ctr"/>
+          <a:lstStyle/>
+          <a:p>
+            <a:pPr algn="ctr"/>
+            <a:r>
+              <a:rPr kumimoji="1" lang="en-US" altLang="ja-JP" dirty="0">
+                <a:solidFill>
+                  <a:schemeClr val="tx1">
+                    <a:lumMod val="75000"/>
+                  </a:schemeClr>
+                </a:solidFill>
+              </a:rPr>
+              <a:t>Input</a:t>
+            </a:r>
+            <a:endParaRPr kumimoji="1" lang="ja-JP" altLang="en-US" dirty="0">
+              <a:solidFill>
+                <a:schemeClr val="tx1">
+                  <a:lumMod val="75000"/>
+                </a:schemeClr>
+              </a:solidFill>
+            </a:endParaRPr>
+          </a:p>
+        </p:txBody>
+      </p:sp>
+      <p:sp>
+        <p:nvSpPr>
+          <p:cNvPr id="5" name="正方形/長方形 4">
+            <a:extLst>
+              <a:ext uri="{FF2B5EF4-FFF2-40B4-BE49-F238E27FC236}">
+                <a16:creationId xmlns:a16="http://schemas.microsoft.com/office/drawing/2014/main" id="{BDDFAE33-7064-E978-BDE5-8B0A5A613C59}"/>
+              </a:ext>
+            </a:extLst>
+          </p:cNvPr>
+          <p:cNvSpPr/>
+          <p:nvPr/>
+        </p:nvSpPr>
+        <p:spPr>
+          <a:xfrm>
+            <a:off x="436525" y="6373896"/>
+            <a:ext cx="1841724" cy="304326"/>
+          </a:xfrm>
+          <a:prstGeom prst="rect">
+            <a:avLst/>
+          </a:prstGeom>
+          <a:noFill/>
+          <a:ln>
+            <a:solidFill>
+              <a:schemeClr val="tx1">
+                <a:lumMod val="75000"/>
+              </a:schemeClr>
+            </a:solidFill>
+          </a:ln>
+        </p:spPr>
+        <p:style>
+          <a:lnRef idx="2">
+            <a:schemeClr val="accent1">
+              <a:shade val="15000"/>
+            </a:schemeClr>
+          </a:lnRef>
+          <a:fillRef idx="1">
+            <a:schemeClr val="accent1"/>
+          </a:fillRef>
+          <a:effectRef idx="0">
+            <a:schemeClr val="accent1"/>
+          </a:effectRef>
+          <a:fontRef idx="minor">
+            <a:schemeClr val="lt1"/>
+          </a:fontRef>
+        </p:style>
+        <p:txBody>
+          <a:bodyPr rtlCol="0" anchor="ctr"/>
+          <a:lstStyle/>
+          <a:p>
+            <a:pPr algn="ctr"/>
+            <a:r>
+              <a:rPr lang="en-US" altLang="ja-JP" dirty="0">
+                <a:solidFill>
+                  <a:schemeClr val="tx1">
+                    <a:lumMod val="75000"/>
+                  </a:schemeClr>
+                </a:solidFill>
+              </a:rPr>
+              <a:t>Out</a:t>
+            </a:r>
+            <a:r>
+              <a:rPr kumimoji="1" lang="en-US" altLang="ja-JP" dirty="0">
+                <a:solidFill>
+                  <a:schemeClr val="tx1">
+                    <a:lumMod val="75000"/>
+                  </a:schemeClr>
+                </a:solidFill>
+              </a:rPr>
+              <a:t>put</a:t>
+            </a:r>
+            <a:endParaRPr kumimoji="1" lang="ja-JP" altLang="en-US" dirty="0">
+              <a:solidFill>
+                <a:schemeClr val="tx1">
+                  <a:lumMod val="75000"/>
+                </a:schemeClr>
+              </a:solidFill>
+            </a:endParaRPr>
+          </a:p>
+        </p:txBody>
+      </p:sp>
+      <p:sp>
+        <p:nvSpPr>
+          <p:cNvPr id="7" name="正方形/長方形 6">
+            <a:extLst>
+              <a:ext uri="{FF2B5EF4-FFF2-40B4-BE49-F238E27FC236}">
+                <a16:creationId xmlns:a16="http://schemas.microsoft.com/office/drawing/2014/main" id="{D59428F2-7D30-91B9-0216-4582EEE1A01C}"/>
+              </a:ext>
+            </a:extLst>
+          </p:cNvPr>
+          <p:cNvSpPr/>
+          <p:nvPr/>
+        </p:nvSpPr>
+        <p:spPr>
+          <a:xfrm>
+            <a:off x="1131375" y="2891064"/>
+            <a:ext cx="1146874" cy="952516"/>
+          </a:xfrm>
+          <a:prstGeom prst="rect">
+            <a:avLst/>
+          </a:prstGeom>
+          <a:solidFill>
+            <a:schemeClr val="accent1">
+              <a:lumMod val="20000"/>
+              <a:lumOff val="80000"/>
+            </a:schemeClr>
+          </a:solidFill>
+        </p:spPr>
+        <p:style>
+          <a:lnRef idx="2">
+            <a:schemeClr val="accent1">
+              <a:shade val="15000"/>
+            </a:schemeClr>
+          </a:lnRef>
+          <a:fillRef idx="1">
+            <a:schemeClr val="accent1"/>
+          </a:fillRef>
+          <a:effectRef idx="0">
+            <a:schemeClr val="accent1"/>
+          </a:effectRef>
+          <a:fontRef idx="minor">
+            <a:schemeClr val="lt1"/>
+          </a:fontRef>
+        </p:style>
+        <p:txBody>
+          <a:bodyPr rtlCol="0" anchor="ctr"/>
+          <a:lstStyle/>
+          <a:p>
+            <a:pPr algn="ctr"/>
+            <a:r>
+              <a:rPr kumimoji="1" lang="ja-JP" altLang="en-US" dirty="0">
+                <a:solidFill>
+                  <a:schemeClr val="tx1">
+                    <a:lumMod val="75000"/>
+                  </a:schemeClr>
+                </a:solidFill>
+              </a:rPr>
+              <a:t>整理整頓</a:t>
+            </a:r>
+          </a:p>
+        </p:txBody>
+      </p:sp>
+      <p:sp>
+        <p:nvSpPr>
+          <p:cNvPr id="16" name="正方形/長方形 15">
+            <a:extLst>
+              <a:ext uri="{FF2B5EF4-FFF2-40B4-BE49-F238E27FC236}">
+                <a16:creationId xmlns:a16="http://schemas.microsoft.com/office/drawing/2014/main" id="{50F46E8A-8156-E4C6-99E2-CAF97CC54475}"/>
+              </a:ext>
+            </a:extLst>
+          </p:cNvPr>
+          <p:cNvSpPr/>
+          <p:nvPr/>
+        </p:nvSpPr>
+        <p:spPr>
+          <a:xfrm>
+            <a:off x="1131375" y="4123163"/>
+            <a:ext cx="1146874" cy="952516"/>
+          </a:xfrm>
+          <a:prstGeom prst="rect">
+            <a:avLst/>
+          </a:prstGeom>
+          <a:solidFill>
+            <a:schemeClr val="accent1">
+              <a:lumMod val="20000"/>
+              <a:lumOff val="80000"/>
+            </a:schemeClr>
+          </a:solidFill>
+        </p:spPr>
+        <p:style>
+          <a:lnRef idx="2">
+            <a:schemeClr val="accent1">
+              <a:shade val="15000"/>
+            </a:schemeClr>
+          </a:lnRef>
+          <a:fillRef idx="1">
+            <a:schemeClr val="accent1"/>
+          </a:fillRef>
+          <a:effectRef idx="0">
+            <a:schemeClr val="accent1"/>
+          </a:effectRef>
+          <a:fontRef idx="minor">
+            <a:schemeClr val="lt1"/>
+          </a:fontRef>
+        </p:style>
+        <p:txBody>
+          <a:bodyPr rtlCol="0" anchor="ctr"/>
+          <a:lstStyle/>
+          <a:p>
+            <a:pPr algn="ctr"/>
+            <a:r>
+              <a:rPr kumimoji="1" lang="ja-JP" altLang="en-US" dirty="0">
+                <a:solidFill>
+                  <a:schemeClr val="tx1">
+                    <a:lumMod val="75000"/>
+                  </a:schemeClr>
+                </a:solidFill>
+              </a:rPr>
+              <a:t>抽出</a:t>
+            </a:r>
+          </a:p>
+        </p:txBody>
+      </p:sp>
+      <p:sp>
+        <p:nvSpPr>
+          <p:cNvPr id="17" name="正方形/長方形 16">
+            <a:extLst>
+              <a:ext uri="{FF2B5EF4-FFF2-40B4-BE49-F238E27FC236}">
+                <a16:creationId xmlns:a16="http://schemas.microsoft.com/office/drawing/2014/main" id="{7C742F23-8601-ACD2-F335-E3A5F91CD28B}"/>
+              </a:ext>
+            </a:extLst>
+          </p:cNvPr>
+          <p:cNvSpPr/>
+          <p:nvPr/>
+        </p:nvSpPr>
+        <p:spPr>
+          <a:xfrm>
+            <a:off x="1131375" y="5355262"/>
+            <a:ext cx="1146874" cy="952516"/>
+          </a:xfrm>
+          <a:prstGeom prst="rect">
+            <a:avLst/>
+          </a:prstGeom>
+          <a:solidFill>
+            <a:schemeClr val="accent1">
+              <a:lumMod val="20000"/>
+              <a:lumOff val="80000"/>
+            </a:schemeClr>
+          </a:solidFill>
+        </p:spPr>
+        <p:style>
+          <a:lnRef idx="2">
+            <a:schemeClr val="accent1">
+              <a:shade val="15000"/>
+            </a:schemeClr>
+          </a:lnRef>
+          <a:fillRef idx="1">
+            <a:schemeClr val="accent1"/>
+          </a:fillRef>
+          <a:effectRef idx="0">
+            <a:schemeClr val="accent1"/>
+          </a:effectRef>
+          <a:fontRef idx="minor">
+            <a:schemeClr val="lt1"/>
+          </a:fontRef>
+        </p:style>
+        <p:txBody>
+          <a:bodyPr rtlCol="0" anchor="ctr"/>
+          <a:lstStyle/>
+          <a:p>
+            <a:pPr algn="ctr"/>
+            <a:r>
+              <a:rPr kumimoji="1" lang="ja-JP" altLang="en-US" dirty="0">
+                <a:solidFill>
+                  <a:schemeClr val="tx1">
+                    <a:lumMod val="75000"/>
+                  </a:schemeClr>
+                </a:solidFill>
+              </a:rPr>
+              <a:t>示唆化</a:t>
+            </a:r>
+          </a:p>
+        </p:txBody>
+      </p:sp>
+      <p:sp>
+        <p:nvSpPr>
+          <p:cNvPr id="18" name="フローチャート: 他ページ結合子 17">
+            <a:extLst>
+              <a:ext uri="{FF2B5EF4-FFF2-40B4-BE49-F238E27FC236}">
+                <a16:creationId xmlns:a16="http://schemas.microsoft.com/office/drawing/2014/main" id="{ABABD34D-D65B-8DE5-0476-92F06D74B0E2}"/>
+              </a:ext>
+            </a:extLst>
+          </p:cNvPr>
+          <p:cNvSpPr/>
+          <p:nvPr/>
+        </p:nvSpPr>
+        <p:spPr>
+          <a:xfrm rot="16200000">
+            <a:off x="3841306" y="844498"/>
+            <a:ext cx="304326" cy="2861874"/>
+          </a:xfrm>
+          <a:prstGeom prst="flowChartOffpageConnector">
+            <a:avLst/>
+          </a:prstGeom>
+          <a:solidFill>
+            <a:schemeClr val="accent1">
+              <a:lumMod val="20000"/>
+              <a:lumOff val="80000"/>
+            </a:schemeClr>
+          </a:solidFill>
+          <a:ln>
+            <a:noFill/>
+          </a:ln>
+        </p:spPr>
+        <p:style>
+          <a:lnRef idx="2">
+            <a:schemeClr val="accent1">
+              <a:shade val="15000"/>
+            </a:schemeClr>
+          </a:lnRef>
+          <a:fillRef idx="1">
+            <a:schemeClr val="accent1"/>
+          </a:fillRef>
+          <a:effectRef idx="0">
+            <a:schemeClr val="accent1"/>
+          </a:effectRef>
+          <a:fontRef idx="minor">
+            <a:schemeClr val="lt1"/>
+          </a:fontRef>
+        </p:style>
+        <p:txBody>
+          <a:bodyPr vert="eaVert" rtlCol="0" anchor="ctr" anchorCtr="1"/>
+          <a:lstStyle/>
+          <a:p>
+            <a:pPr algn="ctr"/>
+            <a:r>
+              <a:rPr lang="en-US" altLang="ja-JP" sz="1400" dirty="0">
+                <a:solidFill>
+                  <a:schemeClr val="tx1">
+                    <a:lumMod val="75000"/>
+                  </a:schemeClr>
+                </a:solidFill>
+              </a:rPr>
+              <a:t>Ⅰ.</a:t>
+            </a:r>
+            <a:r>
+              <a:rPr lang="ja-JP" altLang="en-US" sz="1400" dirty="0">
+                <a:solidFill>
+                  <a:schemeClr val="tx1">
+                    <a:lumMod val="75000"/>
+                  </a:schemeClr>
+                </a:solidFill>
+              </a:rPr>
+              <a:t>現状の把握</a:t>
+            </a:r>
+            <a:endParaRPr lang="en-US" altLang="ja-JP" sz="1400" dirty="0">
+              <a:solidFill>
+                <a:schemeClr val="tx1">
+                  <a:lumMod val="75000"/>
+                </a:schemeClr>
+              </a:solidFill>
+            </a:endParaRPr>
+          </a:p>
+        </p:txBody>
+      </p:sp>
+      <p:sp>
+        <p:nvSpPr>
+          <p:cNvPr id="19" name="フローチャート: 他ページ結合子 18">
+            <a:extLst>
+              <a:ext uri="{FF2B5EF4-FFF2-40B4-BE49-F238E27FC236}">
+                <a16:creationId xmlns:a16="http://schemas.microsoft.com/office/drawing/2014/main" id="{822F2098-6DEA-561E-2E42-FE979A777ED9}"/>
+              </a:ext>
+            </a:extLst>
+          </p:cNvPr>
+          <p:cNvSpPr/>
+          <p:nvPr/>
+        </p:nvSpPr>
+        <p:spPr>
+          <a:xfrm rot="16200000">
+            <a:off x="6987463" y="844498"/>
+            <a:ext cx="304326" cy="2861874"/>
+          </a:xfrm>
+          <a:prstGeom prst="flowChartOffpageConnector">
+            <a:avLst/>
+          </a:prstGeom>
+          <a:solidFill>
+            <a:schemeClr val="accent1">
+              <a:lumMod val="20000"/>
+              <a:lumOff val="80000"/>
+            </a:schemeClr>
+          </a:solidFill>
+          <a:ln>
+            <a:noFill/>
+          </a:ln>
+        </p:spPr>
+        <p:style>
+          <a:lnRef idx="2">
+            <a:schemeClr val="accent1">
+              <a:shade val="15000"/>
+            </a:schemeClr>
+          </a:lnRef>
+          <a:fillRef idx="1">
+            <a:schemeClr val="accent1"/>
+          </a:fillRef>
+          <a:effectRef idx="0">
+            <a:schemeClr val="accent1"/>
+          </a:effectRef>
+          <a:fontRef idx="minor">
+            <a:schemeClr val="lt1"/>
+          </a:fontRef>
+        </p:style>
+        <p:txBody>
+          <a:bodyPr vert="eaVert" rtlCol="0" anchor="ctr" anchorCtr="1"/>
+          <a:lstStyle/>
+          <a:p>
+            <a:pPr algn="ctr"/>
+            <a:r>
+              <a:rPr lang="en-US" altLang="ja-JP" sz="1400" dirty="0">
+                <a:solidFill>
+                  <a:schemeClr val="tx1">
+                    <a:lumMod val="75000"/>
+                  </a:schemeClr>
+                </a:solidFill>
+              </a:rPr>
+              <a:t>Ⅱ.</a:t>
+            </a:r>
+            <a:r>
+              <a:rPr lang="ja-JP" altLang="en-US" sz="1400" dirty="0">
+                <a:solidFill>
+                  <a:schemeClr val="tx1">
+                    <a:lumMod val="75000"/>
+                  </a:schemeClr>
+                </a:solidFill>
+              </a:rPr>
+              <a:t>実現したい状態の</a:t>
+            </a:r>
+            <a:endParaRPr lang="en-US" altLang="ja-JP" sz="1400" dirty="0">
+              <a:solidFill>
+                <a:schemeClr val="tx1">
+                  <a:lumMod val="75000"/>
+                </a:schemeClr>
+              </a:solidFill>
+            </a:endParaRPr>
+          </a:p>
+          <a:p>
+            <a:pPr algn="ctr"/>
+            <a:r>
+              <a:rPr lang="ja-JP" altLang="en-US" sz="1400" dirty="0">
+                <a:solidFill>
+                  <a:schemeClr val="tx1">
+                    <a:lumMod val="75000"/>
+                  </a:schemeClr>
+                </a:solidFill>
+              </a:rPr>
+              <a:t>明確化</a:t>
+            </a:r>
+            <a:endParaRPr lang="en-US" altLang="ja-JP" sz="1400" dirty="0">
+              <a:solidFill>
+                <a:schemeClr val="tx1">
+                  <a:lumMod val="75000"/>
+                </a:schemeClr>
+              </a:solidFill>
+            </a:endParaRPr>
+          </a:p>
+        </p:txBody>
+      </p:sp>
+      <p:sp>
+        <p:nvSpPr>
+          <p:cNvPr id="20" name="フローチャート: 他ページ結合子 19">
+            <a:extLst>
+              <a:ext uri="{FF2B5EF4-FFF2-40B4-BE49-F238E27FC236}">
+                <a16:creationId xmlns:a16="http://schemas.microsoft.com/office/drawing/2014/main" id="{DD88FA71-992B-7D55-835F-A369119D2A71}"/>
+              </a:ext>
+            </a:extLst>
+          </p:cNvPr>
+          <p:cNvSpPr/>
+          <p:nvPr/>
+        </p:nvSpPr>
+        <p:spPr>
+          <a:xfrm rot="16200000">
+            <a:off x="10133621" y="844497"/>
+            <a:ext cx="304324" cy="2861874"/>
+          </a:xfrm>
+          <a:prstGeom prst="flowChartOffpageConnector">
+            <a:avLst/>
+          </a:prstGeom>
+          <a:solidFill>
+            <a:schemeClr val="accent1">
+              <a:lumMod val="20000"/>
+              <a:lumOff val="80000"/>
+            </a:schemeClr>
+          </a:solidFill>
+          <a:ln>
+            <a:noFill/>
+          </a:ln>
+        </p:spPr>
+        <p:style>
+          <a:lnRef idx="2">
+            <a:schemeClr val="accent1">
+              <a:shade val="15000"/>
+            </a:schemeClr>
+          </a:lnRef>
+          <a:fillRef idx="1">
+            <a:schemeClr val="accent1"/>
+          </a:fillRef>
+          <a:effectRef idx="0">
+            <a:schemeClr val="accent1"/>
+          </a:effectRef>
+          <a:fontRef idx="minor">
+            <a:schemeClr val="lt1"/>
+          </a:fontRef>
+        </p:style>
+        <p:txBody>
+          <a:bodyPr vert="eaVert" rtlCol="0" anchor="ctr" anchorCtr="1"/>
+          <a:lstStyle/>
+          <a:p>
+            <a:pPr algn="ctr"/>
+            <a:r>
+              <a:rPr lang="en-US" altLang="ja-JP" sz="1400" dirty="0">
+                <a:solidFill>
+                  <a:schemeClr val="tx1">
+                    <a:lumMod val="75000"/>
+                  </a:schemeClr>
+                </a:solidFill>
+              </a:rPr>
+              <a:t>Ⅲ.</a:t>
+            </a:r>
+            <a:r>
+              <a:rPr lang="ja-JP" altLang="en-US" sz="1400" dirty="0">
+                <a:solidFill>
+                  <a:schemeClr val="tx1">
+                    <a:lumMod val="75000"/>
+                  </a:schemeClr>
+                </a:solidFill>
+              </a:rPr>
+              <a:t>打ち手の策定</a:t>
+            </a:r>
+            <a:endParaRPr lang="en-US" altLang="ja-JP" sz="1400" dirty="0">
+              <a:solidFill>
+                <a:schemeClr val="tx1">
+                  <a:lumMod val="75000"/>
+                </a:schemeClr>
+              </a:solidFill>
+            </a:endParaRPr>
+          </a:p>
+        </p:txBody>
+      </p:sp>
+      <p:sp>
+        <p:nvSpPr>
+          <p:cNvPr id="21" name="正方形/長方形 20">
+            <a:extLst>
+              <a:ext uri="{FF2B5EF4-FFF2-40B4-BE49-F238E27FC236}">
+                <a16:creationId xmlns:a16="http://schemas.microsoft.com/office/drawing/2014/main" id="{51060E12-0AA4-641B-C18A-859BADCC9E3F}"/>
+              </a:ext>
+            </a:extLst>
+          </p:cNvPr>
+          <p:cNvSpPr/>
+          <p:nvPr/>
+        </p:nvSpPr>
+        <p:spPr>
+          <a:xfrm>
+            <a:off x="2562532" y="2891064"/>
+            <a:ext cx="2861874" cy="952516"/>
+          </a:xfrm>
+          <a:prstGeom prst="rect">
+            <a:avLst/>
+          </a:prstGeom>
+          <a:noFill/>
+          <a:ln>
+            <a:solidFill>
+              <a:schemeClr val="tx1">
+                <a:lumMod val="75000"/>
+              </a:schemeClr>
+            </a:solidFill>
+          </a:ln>
+        </p:spPr>
+        <p:style>
+          <a:lnRef idx="2">
+            <a:schemeClr val="accent1">
+              <a:shade val="15000"/>
+            </a:schemeClr>
+          </a:lnRef>
+          <a:fillRef idx="1">
+            <a:schemeClr val="accent1"/>
+          </a:fillRef>
+          <a:effectRef idx="0">
+            <a:schemeClr val="accent1"/>
+          </a:effectRef>
+          <a:fontRef idx="minor">
+            <a:schemeClr val="lt1"/>
+          </a:fontRef>
+        </p:style>
+        <p:txBody>
+          <a:bodyPr rtlCol="0" anchor="t" anchorCtr="0"/>
+          <a:lstStyle/>
+          <a:p>
+            <a:pPr marL="285750" indent="-285750">
+              <a:buFont typeface="Wingdings" panose="05000000000000000000" pitchFamily="2" charset="2"/>
+              <a:buChar char="ü"/>
+            </a:pPr>
+            <a:r>
+              <a:rPr lang="en-US" altLang="ja-JP" dirty="0">
+                <a:solidFill>
+                  <a:schemeClr val="tx1">
+                    <a:lumMod val="75000"/>
+                  </a:schemeClr>
+                </a:solidFill>
+              </a:rPr>
+              <a:t>Input</a:t>
+            </a:r>
+            <a:r>
+              <a:rPr lang="ja-JP" altLang="en-US" dirty="0">
+                <a:solidFill>
+                  <a:schemeClr val="tx1">
+                    <a:lumMod val="75000"/>
+                  </a:schemeClr>
+                </a:solidFill>
+              </a:rPr>
+              <a:t>情報の整理</a:t>
+            </a:r>
+            <a:endParaRPr lang="en-US" altLang="ja-JP" dirty="0">
+              <a:solidFill>
+                <a:schemeClr val="tx1">
+                  <a:lumMod val="75000"/>
+                </a:schemeClr>
+              </a:solidFill>
+            </a:endParaRPr>
+          </a:p>
+          <a:p>
+            <a:pPr marL="285750" indent="-285750">
+              <a:buFont typeface="Wingdings" panose="05000000000000000000" pitchFamily="2" charset="2"/>
+              <a:buChar char="ü"/>
+            </a:pPr>
+            <a:r>
+              <a:rPr kumimoji="1" lang="ja-JP" altLang="en-US" dirty="0">
+                <a:solidFill>
+                  <a:schemeClr val="tx1">
+                    <a:lumMod val="75000"/>
+                  </a:schemeClr>
+                </a:solidFill>
+              </a:rPr>
+              <a:t>疑わしきは捨てる</a:t>
+            </a:r>
+            <a:endParaRPr kumimoji="1" lang="en-US" altLang="ja-JP" dirty="0">
+              <a:solidFill>
+                <a:schemeClr val="tx1">
+                  <a:lumMod val="75000"/>
+                </a:schemeClr>
+              </a:solidFill>
+            </a:endParaRPr>
+          </a:p>
+          <a:p>
+            <a:pPr marL="285750" indent="-285750">
+              <a:buFont typeface="Wingdings" panose="05000000000000000000" pitchFamily="2" charset="2"/>
+              <a:buChar char="ü"/>
+            </a:pPr>
+            <a:r>
+              <a:rPr lang="ja-JP" altLang="en-US" dirty="0">
+                <a:solidFill>
+                  <a:schemeClr val="tx1">
+                    <a:lumMod val="75000"/>
+                  </a:schemeClr>
+                </a:solidFill>
+              </a:rPr>
+              <a:t>不足を補う</a:t>
+            </a:r>
+            <a:r>
+              <a:rPr lang="en-US" altLang="ja-JP" dirty="0">
+                <a:solidFill>
+                  <a:schemeClr val="tx1">
+                    <a:lumMod val="75000"/>
+                  </a:schemeClr>
+                </a:solidFill>
+              </a:rPr>
+              <a:t>/</a:t>
+            </a:r>
+            <a:r>
+              <a:rPr lang="ja-JP" altLang="en-US" dirty="0">
+                <a:solidFill>
+                  <a:schemeClr val="tx1">
+                    <a:lumMod val="75000"/>
+                  </a:schemeClr>
+                </a:solidFill>
+              </a:rPr>
+              <a:t>類推する</a:t>
+            </a:r>
+            <a:endParaRPr kumimoji="1" lang="ja-JP" altLang="en-US" dirty="0">
+              <a:solidFill>
+                <a:schemeClr val="tx1">
+                  <a:lumMod val="75000"/>
+                </a:schemeClr>
+              </a:solidFill>
+            </a:endParaRPr>
+          </a:p>
+        </p:txBody>
+      </p:sp>
+      <p:sp>
+        <p:nvSpPr>
+          <p:cNvPr id="22" name="正方形/長方形 21">
+            <a:extLst>
+              <a:ext uri="{FF2B5EF4-FFF2-40B4-BE49-F238E27FC236}">
+                <a16:creationId xmlns:a16="http://schemas.microsoft.com/office/drawing/2014/main" id="{D78E396F-6C59-B388-1301-A13C2CB69551}"/>
+              </a:ext>
+            </a:extLst>
+          </p:cNvPr>
+          <p:cNvSpPr/>
+          <p:nvPr/>
+        </p:nvSpPr>
+        <p:spPr>
+          <a:xfrm>
+            <a:off x="2562532" y="4123163"/>
+            <a:ext cx="2861874" cy="952516"/>
+          </a:xfrm>
+          <a:prstGeom prst="rect">
+            <a:avLst/>
+          </a:prstGeom>
+          <a:noFill/>
+          <a:ln>
+            <a:solidFill>
+              <a:schemeClr val="tx1">
+                <a:lumMod val="75000"/>
+              </a:schemeClr>
+            </a:solidFill>
+          </a:ln>
+        </p:spPr>
+        <p:style>
+          <a:lnRef idx="2">
+            <a:schemeClr val="accent1">
+              <a:shade val="15000"/>
+            </a:schemeClr>
+          </a:lnRef>
+          <a:fillRef idx="1">
+            <a:schemeClr val="accent1"/>
+          </a:fillRef>
+          <a:effectRef idx="0">
+            <a:schemeClr val="accent1"/>
+          </a:effectRef>
+          <a:fontRef idx="minor">
+            <a:schemeClr val="lt1"/>
+          </a:fontRef>
+        </p:style>
+        <p:txBody>
+          <a:bodyPr rtlCol="0" anchor="t" anchorCtr="0"/>
+          <a:lstStyle/>
+          <a:p>
+            <a:pPr marL="285750" indent="-285750">
+              <a:buFont typeface="Wingdings" panose="05000000000000000000" pitchFamily="2" charset="2"/>
+              <a:buChar char="ü"/>
+            </a:pPr>
+            <a:r>
+              <a:rPr lang="ja-JP" altLang="en-US" dirty="0">
+                <a:solidFill>
+                  <a:schemeClr val="tx1">
+                    <a:lumMod val="75000"/>
+                  </a:schemeClr>
+                </a:solidFill>
+              </a:rPr>
+              <a:t>情報をもとに本質を抽出</a:t>
+            </a:r>
+            <a:endParaRPr kumimoji="1" lang="ja-JP" altLang="en-US" dirty="0">
+              <a:solidFill>
+                <a:schemeClr val="tx1">
+                  <a:lumMod val="75000"/>
+                </a:schemeClr>
+              </a:solidFill>
+            </a:endParaRPr>
+          </a:p>
+        </p:txBody>
+      </p:sp>
+      <p:sp>
+        <p:nvSpPr>
+          <p:cNvPr id="23" name="正方形/長方形 22">
+            <a:extLst>
+              <a:ext uri="{FF2B5EF4-FFF2-40B4-BE49-F238E27FC236}">
+                <a16:creationId xmlns:a16="http://schemas.microsoft.com/office/drawing/2014/main" id="{A87CF794-258E-A1A1-6D51-3B0090157DB8}"/>
+              </a:ext>
+            </a:extLst>
+          </p:cNvPr>
+          <p:cNvSpPr/>
+          <p:nvPr/>
+        </p:nvSpPr>
+        <p:spPr>
+          <a:xfrm>
+            <a:off x="2562532" y="5355262"/>
+            <a:ext cx="2861874" cy="952516"/>
+          </a:xfrm>
+          <a:prstGeom prst="rect">
+            <a:avLst/>
+          </a:prstGeom>
+          <a:noFill/>
+          <a:ln>
+            <a:solidFill>
+              <a:schemeClr val="tx1">
+                <a:lumMod val="75000"/>
+              </a:schemeClr>
+            </a:solidFill>
+          </a:ln>
+        </p:spPr>
+        <p:style>
+          <a:lnRef idx="2">
+            <a:schemeClr val="accent1">
+              <a:shade val="15000"/>
+            </a:schemeClr>
+          </a:lnRef>
+          <a:fillRef idx="1">
+            <a:schemeClr val="accent1"/>
+          </a:fillRef>
+          <a:effectRef idx="0">
+            <a:schemeClr val="accent1"/>
+          </a:effectRef>
+          <a:fontRef idx="minor">
+            <a:schemeClr val="lt1"/>
+          </a:fontRef>
+        </p:style>
+        <p:txBody>
+          <a:bodyPr rtlCol="0" anchor="t" anchorCtr="0"/>
+          <a:lstStyle/>
+          <a:p>
+            <a:pPr marL="285750" indent="-285750">
+              <a:buFont typeface="Wingdings" panose="05000000000000000000" pitchFamily="2" charset="2"/>
+              <a:buChar char="ü"/>
+            </a:pPr>
+            <a:r>
+              <a:rPr lang="ja-JP" altLang="en-US" dirty="0">
+                <a:solidFill>
+                  <a:schemeClr val="tx1">
+                    <a:lumMod val="75000"/>
+                  </a:schemeClr>
+                </a:solidFill>
+              </a:rPr>
+              <a:t>本質から「主体にとっての意味」を導出</a:t>
+            </a:r>
+            <a:endParaRPr kumimoji="1" lang="ja-JP" altLang="en-US" dirty="0">
+              <a:solidFill>
+                <a:schemeClr val="tx1">
+                  <a:lumMod val="75000"/>
+                </a:schemeClr>
+              </a:solidFill>
+            </a:endParaRPr>
+          </a:p>
+        </p:txBody>
+      </p:sp>
+      <p:sp>
+        <p:nvSpPr>
+          <p:cNvPr id="27" name="正方形/長方形 26">
+            <a:extLst>
+              <a:ext uri="{FF2B5EF4-FFF2-40B4-BE49-F238E27FC236}">
+                <a16:creationId xmlns:a16="http://schemas.microsoft.com/office/drawing/2014/main" id="{F075CE55-A7AD-B36B-E7AB-8DC2D026D211}"/>
+              </a:ext>
+            </a:extLst>
+          </p:cNvPr>
+          <p:cNvSpPr/>
+          <p:nvPr/>
+        </p:nvSpPr>
+        <p:spPr>
+          <a:xfrm>
+            <a:off x="5708689" y="2891064"/>
+            <a:ext cx="2861874" cy="952516"/>
+          </a:xfrm>
+          <a:prstGeom prst="rect">
+            <a:avLst/>
+          </a:prstGeom>
+          <a:noFill/>
+          <a:ln>
+            <a:solidFill>
+              <a:schemeClr val="tx1">
+                <a:lumMod val="75000"/>
+              </a:schemeClr>
+            </a:solidFill>
+          </a:ln>
+        </p:spPr>
+        <p:style>
+          <a:lnRef idx="2">
+            <a:schemeClr val="accent1">
+              <a:shade val="15000"/>
+            </a:schemeClr>
+          </a:lnRef>
+          <a:fillRef idx="1">
+            <a:schemeClr val="accent1"/>
+          </a:fillRef>
+          <a:effectRef idx="0">
+            <a:schemeClr val="accent1"/>
+          </a:effectRef>
+          <a:fontRef idx="minor">
+            <a:schemeClr val="lt1"/>
+          </a:fontRef>
+        </p:style>
+        <p:txBody>
+          <a:bodyPr rtlCol="0" anchor="t" anchorCtr="0"/>
+          <a:lstStyle/>
+          <a:p>
+            <a:pPr marL="285750" indent="-285750">
+              <a:buFont typeface="Wingdings" panose="05000000000000000000" pitchFamily="2" charset="2"/>
+              <a:buChar char="ü"/>
+            </a:pPr>
+            <a:r>
+              <a:rPr lang="ja-JP" altLang="en-US" dirty="0">
+                <a:solidFill>
+                  <a:schemeClr val="tx1">
+                    <a:lumMod val="75000"/>
+                  </a:schemeClr>
+                </a:solidFill>
+              </a:rPr>
+              <a:t>客観情報の整理</a:t>
+            </a:r>
+            <a:endParaRPr lang="en-US" altLang="ja-JP" dirty="0">
+              <a:solidFill>
+                <a:schemeClr val="tx1">
+                  <a:lumMod val="75000"/>
+                </a:schemeClr>
+              </a:solidFill>
+            </a:endParaRPr>
+          </a:p>
+          <a:p>
+            <a:pPr marL="285750" indent="-285750">
+              <a:buFont typeface="Wingdings" panose="05000000000000000000" pitchFamily="2" charset="2"/>
+              <a:buChar char="ü"/>
+            </a:pPr>
+            <a:r>
+              <a:rPr kumimoji="1" lang="ja-JP" altLang="en-US" dirty="0">
+                <a:solidFill>
+                  <a:schemeClr val="tx1">
+                    <a:lumMod val="75000"/>
+                  </a:schemeClr>
+                </a:solidFill>
+              </a:rPr>
+              <a:t>主観情報の優先順位付け</a:t>
+            </a:r>
+          </a:p>
+        </p:txBody>
+      </p:sp>
+      <p:sp>
+        <p:nvSpPr>
+          <p:cNvPr id="28" name="正方形/長方形 27">
+            <a:extLst>
+              <a:ext uri="{FF2B5EF4-FFF2-40B4-BE49-F238E27FC236}">
+                <a16:creationId xmlns:a16="http://schemas.microsoft.com/office/drawing/2014/main" id="{C72096DA-7549-92E8-616F-1E72F34C76EF}"/>
+              </a:ext>
+            </a:extLst>
+          </p:cNvPr>
+          <p:cNvSpPr/>
+          <p:nvPr/>
+        </p:nvSpPr>
+        <p:spPr>
+          <a:xfrm>
+            <a:off x="5708689" y="4123163"/>
+            <a:ext cx="2861874" cy="952516"/>
+          </a:xfrm>
+          <a:prstGeom prst="rect">
+            <a:avLst/>
+          </a:prstGeom>
+          <a:noFill/>
+          <a:ln>
+            <a:solidFill>
+              <a:schemeClr val="tx1">
+                <a:lumMod val="75000"/>
+              </a:schemeClr>
+            </a:solidFill>
+          </a:ln>
+        </p:spPr>
+        <p:style>
+          <a:lnRef idx="2">
+            <a:schemeClr val="accent1">
+              <a:shade val="15000"/>
+            </a:schemeClr>
+          </a:lnRef>
+          <a:fillRef idx="1">
+            <a:schemeClr val="accent1"/>
+          </a:fillRef>
+          <a:effectRef idx="0">
+            <a:schemeClr val="accent1"/>
+          </a:effectRef>
+          <a:fontRef idx="minor">
+            <a:schemeClr val="lt1"/>
+          </a:fontRef>
+        </p:style>
+        <p:txBody>
+          <a:bodyPr rtlCol="0" anchor="t" anchorCtr="0"/>
+          <a:lstStyle/>
+          <a:p>
+            <a:pPr marL="285750" indent="-285750">
+              <a:buFont typeface="Wingdings" panose="05000000000000000000" pitchFamily="2" charset="2"/>
+              <a:buChar char="ü"/>
+            </a:pPr>
+            <a:r>
+              <a:rPr lang="ja-JP" altLang="en-US" dirty="0">
+                <a:solidFill>
+                  <a:schemeClr val="tx1">
+                    <a:lumMod val="75000"/>
+                  </a:schemeClr>
+                </a:solidFill>
+              </a:rPr>
+              <a:t>客観情報を用いて、仮説的構造を抽出</a:t>
+            </a:r>
+            <a:endParaRPr kumimoji="1" lang="ja-JP" altLang="en-US" dirty="0">
+              <a:solidFill>
+                <a:schemeClr val="tx1">
+                  <a:lumMod val="75000"/>
+                </a:schemeClr>
+              </a:solidFill>
+            </a:endParaRPr>
+          </a:p>
+        </p:txBody>
+      </p:sp>
+      <p:sp>
+        <p:nvSpPr>
+          <p:cNvPr id="29" name="正方形/長方形 28">
+            <a:extLst>
+              <a:ext uri="{FF2B5EF4-FFF2-40B4-BE49-F238E27FC236}">
+                <a16:creationId xmlns:a16="http://schemas.microsoft.com/office/drawing/2014/main" id="{A04816CA-60DB-5C68-179E-286AE194D8DC}"/>
+              </a:ext>
+            </a:extLst>
+          </p:cNvPr>
+          <p:cNvSpPr/>
+          <p:nvPr/>
+        </p:nvSpPr>
+        <p:spPr>
+          <a:xfrm>
+            <a:off x="5708689" y="5355262"/>
+            <a:ext cx="2861874" cy="952516"/>
+          </a:xfrm>
+          <a:prstGeom prst="rect">
+            <a:avLst/>
+          </a:prstGeom>
+          <a:noFill/>
+          <a:ln>
+            <a:solidFill>
+              <a:schemeClr val="tx1">
+                <a:lumMod val="75000"/>
+              </a:schemeClr>
+            </a:solidFill>
+          </a:ln>
+        </p:spPr>
+        <p:style>
+          <a:lnRef idx="2">
+            <a:schemeClr val="accent1">
+              <a:shade val="15000"/>
+            </a:schemeClr>
+          </a:lnRef>
+          <a:fillRef idx="1">
+            <a:schemeClr val="accent1"/>
+          </a:fillRef>
+          <a:effectRef idx="0">
+            <a:schemeClr val="accent1"/>
+          </a:effectRef>
+          <a:fontRef idx="minor">
+            <a:schemeClr val="lt1"/>
+          </a:fontRef>
+        </p:style>
+        <p:txBody>
+          <a:bodyPr rtlCol="0" anchor="t" anchorCtr="0"/>
+          <a:lstStyle/>
+          <a:p>
+            <a:pPr marL="285750" indent="-285750">
+              <a:buFont typeface="Wingdings" panose="05000000000000000000" pitchFamily="2" charset="2"/>
+              <a:buChar char="ü"/>
+            </a:pPr>
+            <a:r>
+              <a:rPr lang="ja-JP" altLang="en-US" dirty="0">
+                <a:solidFill>
+                  <a:schemeClr val="tx1">
+                    <a:lumMod val="75000"/>
+                  </a:schemeClr>
+                </a:solidFill>
+              </a:rPr>
+              <a:t>主観的情報と仮説的構造を組み合わせる</a:t>
+            </a:r>
+            <a:endParaRPr kumimoji="1" lang="ja-JP" altLang="en-US" dirty="0">
+              <a:solidFill>
+                <a:schemeClr val="tx1">
+                  <a:lumMod val="75000"/>
+                </a:schemeClr>
+              </a:solidFill>
+            </a:endParaRPr>
+          </a:p>
+        </p:txBody>
+      </p:sp>
+      <p:sp>
+        <p:nvSpPr>
+          <p:cNvPr id="30" name="正方形/長方形 29">
+            <a:extLst>
+              <a:ext uri="{FF2B5EF4-FFF2-40B4-BE49-F238E27FC236}">
+                <a16:creationId xmlns:a16="http://schemas.microsoft.com/office/drawing/2014/main" id="{CD3C1337-0A38-FE77-FCB6-D2806BB3051F}"/>
+              </a:ext>
+            </a:extLst>
+          </p:cNvPr>
+          <p:cNvSpPr/>
+          <p:nvPr/>
+        </p:nvSpPr>
+        <p:spPr>
+          <a:xfrm>
+            <a:off x="8854846" y="2891064"/>
+            <a:ext cx="2861874" cy="952516"/>
+          </a:xfrm>
+          <a:prstGeom prst="rect">
+            <a:avLst/>
+          </a:prstGeom>
+          <a:noFill/>
+          <a:ln>
+            <a:solidFill>
+              <a:schemeClr val="tx1">
+                <a:lumMod val="75000"/>
+              </a:schemeClr>
+            </a:solidFill>
+          </a:ln>
+        </p:spPr>
+        <p:style>
+          <a:lnRef idx="2">
+            <a:schemeClr val="accent1">
+              <a:shade val="15000"/>
+            </a:schemeClr>
+          </a:lnRef>
+          <a:fillRef idx="1">
+            <a:schemeClr val="accent1"/>
+          </a:fillRef>
+          <a:effectRef idx="0">
+            <a:schemeClr val="accent1"/>
+          </a:effectRef>
+          <a:fontRef idx="minor">
+            <a:schemeClr val="lt1"/>
+          </a:fontRef>
+        </p:style>
+        <p:txBody>
+          <a:bodyPr rtlCol="0" anchor="t" anchorCtr="0"/>
+          <a:lstStyle/>
+          <a:p>
+            <a:pPr marL="285750" indent="-285750">
+              <a:buFont typeface="Wingdings" panose="05000000000000000000" pitchFamily="2" charset="2"/>
+              <a:buChar char="ü"/>
+            </a:pPr>
+            <a:r>
+              <a:rPr lang="ja-JP" altLang="en-US" dirty="0">
+                <a:solidFill>
+                  <a:schemeClr val="tx1">
+                    <a:lumMod val="75000"/>
+                  </a:schemeClr>
+                </a:solidFill>
+              </a:rPr>
+              <a:t>打ち手オプションの</a:t>
+            </a:r>
+            <a:br>
+              <a:rPr lang="en-US" altLang="ja-JP" dirty="0">
+                <a:solidFill>
+                  <a:schemeClr val="tx1">
+                    <a:lumMod val="75000"/>
+                  </a:schemeClr>
+                </a:solidFill>
+              </a:rPr>
+            </a:br>
+            <a:r>
+              <a:rPr lang="ja-JP" altLang="en-US" dirty="0">
+                <a:solidFill>
+                  <a:schemeClr val="tx1">
+                    <a:lumMod val="75000"/>
+                  </a:schemeClr>
+                </a:solidFill>
+              </a:rPr>
+              <a:t>洗い出しと整理</a:t>
+            </a:r>
+            <a:endParaRPr kumimoji="1" lang="ja-JP" altLang="en-US" dirty="0">
+              <a:solidFill>
+                <a:schemeClr val="tx1">
+                  <a:lumMod val="75000"/>
+                </a:schemeClr>
+              </a:solidFill>
+            </a:endParaRPr>
+          </a:p>
+        </p:txBody>
+      </p:sp>
+      <p:sp>
+        <p:nvSpPr>
+          <p:cNvPr id="31" name="正方形/長方形 30">
+            <a:extLst>
+              <a:ext uri="{FF2B5EF4-FFF2-40B4-BE49-F238E27FC236}">
+                <a16:creationId xmlns:a16="http://schemas.microsoft.com/office/drawing/2014/main" id="{3E9BD067-5CE9-8668-C114-362EA88C0EC0}"/>
+              </a:ext>
+            </a:extLst>
+          </p:cNvPr>
+          <p:cNvSpPr/>
+          <p:nvPr/>
+        </p:nvSpPr>
+        <p:spPr>
+          <a:xfrm>
+            <a:off x="8854846" y="4123163"/>
+            <a:ext cx="2861874" cy="952516"/>
+          </a:xfrm>
+          <a:prstGeom prst="rect">
+            <a:avLst/>
+          </a:prstGeom>
+          <a:noFill/>
+          <a:ln>
+            <a:solidFill>
+              <a:schemeClr val="tx1">
+                <a:lumMod val="75000"/>
+              </a:schemeClr>
+            </a:solidFill>
+          </a:ln>
+        </p:spPr>
+        <p:style>
+          <a:lnRef idx="2">
+            <a:schemeClr val="accent1">
+              <a:shade val="15000"/>
+            </a:schemeClr>
+          </a:lnRef>
+          <a:fillRef idx="1">
+            <a:schemeClr val="accent1"/>
+          </a:fillRef>
+          <a:effectRef idx="0">
+            <a:schemeClr val="accent1"/>
+          </a:effectRef>
+          <a:fontRef idx="minor">
+            <a:schemeClr val="lt1"/>
+          </a:fontRef>
+        </p:style>
+        <p:txBody>
+          <a:bodyPr rtlCol="0" anchor="t" anchorCtr="0"/>
+          <a:lstStyle/>
+          <a:p>
+            <a:pPr marL="285750" indent="-285750">
+              <a:buFont typeface="Wingdings" panose="05000000000000000000" pitchFamily="2" charset="2"/>
+              <a:buChar char="ü"/>
+            </a:pPr>
+            <a:r>
+              <a:rPr lang="ja-JP" altLang="en-US" dirty="0">
+                <a:solidFill>
+                  <a:schemeClr val="tx1">
+                    <a:lumMod val="75000"/>
+                  </a:schemeClr>
+                </a:solidFill>
+              </a:rPr>
+              <a:t>真の制約条件抽出</a:t>
+            </a:r>
+            <a:endParaRPr kumimoji="1" lang="ja-JP" altLang="en-US" dirty="0">
+              <a:solidFill>
+                <a:schemeClr val="tx1">
+                  <a:lumMod val="75000"/>
+                </a:schemeClr>
+              </a:solidFill>
+            </a:endParaRPr>
+          </a:p>
+        </p:txBody>
+      </p:sp>
+      <p:sp>
+        <p:nvSpPr>
+          <p:cNvPr id="32" name="正方形/長方形 31">
+            <a:extLst>
+              <a:ext uri="{FF2B5EF4-FFF2-40B4-BE49-F238E27FC236}">
+                <a16:creationId xmlns:a16="http://schemas.microsoft.com/office/drawing/2014/main" id="{49B2A18B-1A12-170A-770C-1CA1AA3189A0}"/>
+              </a:ext>
+            </a:extLst>
+          </p:cNvPr>
+          <p:cNvSpPr/>
+          <p:nvPr/>
+        </p:nvSpPr>
+        <p:spPr>
+          <a:xfrm>
+            <a:off x="8854846" y="5355262"/>
+            <a:ext cx="2861874" cy="952516"/>
+          </a:xfrm>
+          <a:prstGeom prst="rect">
+            <a:avLst/>
+          </a:prstGeom>
+          <a:noFill/>
+          <a:ln>
+            <a:solidFill>
+              <a:schemeClr val="tx1">
+                <a:lumMod val="75000"/>
+              </a:schemeClr>
+            </a:solidFill>
+          </a:ln>
+        </p:spPr>
+        <p:style>
+          <a:lnRef idx="2">
+            <a:schemeClr val="accent1">
+              <a:shade val="15000"/>
+            </a:schemeClr>
+          </a:lnRef>
+          <a:fillRef idx="1">
+            <a:schemeClr val="accent1"/>
+          </a:fillRef>
+          <a:effectRef idx="0">
+            <a:schemeClr val="accent1"/>
+          </a:effectRef>
+          <a:fontRef idx="minor">
+            <a:schemeClr val="lt1"/>
+          </a:fontRef>
+        </p:style>
+        <p:txBody>
+          <a:bodyPr rtlCol="0" anchor="t" anchorCtr="0"/>
+          <a:lstStyle/>
+          <a:p>
+            <a:pPr marL="285750" indent="-285750">
+              <a:buFont typeface="Wingdings" panose="05000000000000000000" pitchFamily="2" charset="2"/>
+              <a:buChar char="ü"/>
+            </a:pPr>
+            <a:r>
+              <a:rPr lang="ja-JP" altLang="en-US" dirty="0">
+                <a:solidFill>
+                  <a:schemeClr val="tx1">
+                    <a:lumMod val="75000"/>
+                  </a:schemeClr>
+                </a:solidFill>
+              </a:rPr>
+              <a:t>主観的情報を交えたオプション評価</a:t>
+            </a:r>
+            <a:endParaRPr kumimoji="1" lang="ja-JP" altLang="en-US" dirty="0">
+              <a:solidFill>
+                <a:schemeClr val="tx1">
+                  <a:lumMod val="75000"/>
+                </a:schemeClr>
+              </a:solidFill>
+            </a:endParaRPr>
+          </a:p>
+        </p:txBody>
+      </p:sp>
+      <p:sp>
+        <p:nvSpPr>
+          <p:cNvPr id="34" name="正方形/長方形 33">
+            <a:extLst>
+              <a:ext uri="{FF2B5EF4-FFF2-40B4-BE49-F238E27FC236}">
+                <a16:creationId xmlns:a16="http://schemas.microsoft.com/office/drawing/2014/main" id="{584AEA9A-0390-CC7E-E101-D2B666DF5B38}"/>
+              </a:ext>
+            </a:extLst>
+          </p:cNvPr>
+          <p:cNvSpPr/>
+          <p:nvPr/>
+        </p:nvSpPr>
+        <p:spPr>
+          <a:xfrm>
+            <a:off x="2562532" y="2520619"/>
+            <a:ext cx="2861874" cy="304327"/>
+          </a:xfrm>
+          <a:prstGeom prst="rect">
+            <a:avLst/>
+          </a:prstGeom>
+          <a:noFill/>
+          <a:ln>
+            <a:solidFill>
+              <a:schemeClr val="tx1">
+                <a:lumMod val="75000"/>
+              </a:schemeClr>
+            </a:solidFill>
+          </a:ln>
+        </p:spPr>
+        <p:style>
+          <a:lnRef idx="2">
+            <a:schemeClr val="accent1">
+              <a:shade val="15000"/>
+            </a:schemeClr>
+          </a:lnRef>
+          <a:fillRef idx="1">
+            <a:schemeClr val="accent1"/>
+          </a:fillRef>
+          <a:effectRef idx="0">
+            <a:schemeClr val="accent1"/>
+          </a:effectRef>
+          <a:fontRef idx="minor">
+            <a:schemeClr val="lt1"/>
+          </a:fontRef>
+        </p:style>
+        <p:txBody>
+          <a:bodyPr rtlCol="0" anchor="ctr"/>
+          <a:lstStyle/>
+          <a:p>
+            <a:pPr marL="285750" indent="-285750" algn="ctr">
+              <a:buFont typeface="Wingdings" panose="05000000000000000000" pitchFamily="2" charset="2"/>
+              <a:buChar char="ü"/>
+            </a:pPr>
+            <a:r>
+              <a:rPr kumimoji="1" lang="ja-JP" altLang="en-US" dirty="0">
+                <a:solidFill>
+                  <a:schemeClr val="tx1">
+                    <a:lumMod val="75000"/>
+                  </a:schemeClr>
+                </a:solidFill>
+              </a:rPr>
+              <a:t>客観情報</a:t>
+            </a:r>
+          </a:p>
+        </p:txBody>
+      </p:sp>
+      <p:sp>
+        <p:nvSpPr>
+          <p:cNvPr id="35" name="正方形/長方形 34">
+            <a:extLst>
+              <a:ext uri="{FF2B5EF4-FFF2-40B4-BE49-F238E27FC236}">
+                <a16:creationId xmlns:a16="http://schemas.microsoft.com/office/drawing/2014/main" id="{1C50A700-36C2-CBF3-1481-3A7EA6894C67}"/>
+              </a:ext>
+            </a:extLst>
+          </p:cNvPr>
+          <p:cNvSpPr/>
+          <p:nvPr/>
+        </p:nvSpPr>
+        <p:spPr>
+          <a:xfrm>
+            <a:off x="5708689" y="2520619"/>
+            <a:ext cx="2861874" cy="304327"/>
+          </a:xfrm>
+          <a:prstGeom prst="rect">
+            <a:avLst/>
+          </a:prstGeom>
+          <a:noFill/>
+          <a:ln>
+            <a:solidFill>
+              <a:schemeClr val="tx1">
+                <a:lumMod val="75000"/>
+              </a:schemeClr>
+            </a:solidFill>
+          </a:ln>
+        </p:spPr>
+        <p:style>
+          <a:lnRef idx="2">
+            <a:schemeClr val="accent1">
+              <a:shade val="15000"/>
+            </a:schemeClr>
+          </a:lnRef>
+          <a:fillRef idx="1">
+            <a:schemeClr val="accent1"/>
+          </a:fillRef>
+          <a:effectRef idx="0">
+            <a:schemeClr val="accent1"/>
+          </a:effectRef>
+          <a:fontRef idx="minor">
+            <a:schemeClr val="lt1"/>
+          </a:fontRef>
+        </p:style>
+        <p:txBody>
+          <a:bodyPr rtlCol="0" anchor="ctr"/>
+          <a:lstStyle/>
+          <a:p>
+            <a:pPr marL="285750" indent="-285750" algn="ctr">
+              <a:buFont typeface="Wingdings" panose="05000000000000000000" pitchFamily="2" charset="2"/>
+              <a:buChar char="ü"/>
+            </a:pPr>
+            <a:r>
+              <a:rPr lang="ja-JP" altLang="en-US" dirty="0">
+                <a:solidFill>
+                  <a:schemeClr val="tx1">
+                    <a:lumMod val="75000"/>
+                  </a:schemeClr>
+                </a:solidFill>
+              </a:rPr>
+              <a:t>客観情報</a:t>
+            </a:r>
+            <a:r>
+              <a:rPr lang="en-US" altLang="ja-JP" dirty="0">
+                <a:solidFill>
+                  <a:schemeClr val="tx1">
+                    <a:lumMod val="75000"/>
+                  </a:schemeClr>
+                </a:solidFill>
+              </a:rPr>
+              <a:t>/</a:t>
+            </a:r>
+            <a:r>
+              <a:rPr lang="ja-JP" altLang="en-US" dirty="0">
+                <a:solidFill>
+                  <a:schemeClr val="tx1">
+                    <a:lumMod val="75000"/>
+                  </a:schemeClr>
+                </a:solidFill>
+              </a:rPr>
+              <a:t>主観情報</a:t>
+            </a:r>
+            <a:endParaRPr kumimoji="1" lang="ja-JP" altLang="en-US" dirty="0">
+              <a:solidFill>
+                <a:schemeClr val="tx1">
+                  <a:lumMod val="75000"/>
+                </a:schemeClr>
+              </a:solidFill>
+            </a:endParaRPr>
+          </a:p>
+        </p:txBody>
+      </p:sp>
+      <p:sp>
+        <p:nvSpPr>
+          <p:cNvPr id="36" name="正方形/長方形 35">
+            <a:extLst>
+              <a:ext uri="{FF2B5EF4-FFF2-40B4-BE49-F238E27FC236}">
+                <a16:creationId xmlns:a16="http://schemas.microsoft.com/office/drawing/2014/main" id="{2E8EF2A6-5A8C-8158-0174-D125F6A1BD9A}"/>
+              </a:ext>
+            </a:extLst>
+          </p:cNvPr>
+          <p:cNvSpPr/>
+          <p:nvPr/>
+        </p:nvSpPr>
+        <p:spPr>
+          <a:xfrm>
+            <a:off x="8854846" y="2520619"/>
+            <a:ext cx="2861874" cy="304327"/>
+          </a:xfrm>
+          <a:prstGeom prst="rect">
+            <a:avLst/>
+          </a:prstGeom>
+          <a:noFill/>
+          <a:ln>
+            <a:solidFill>
+              <a:schemeClr val="tx1">
+                <a:lumMod val="75000"/>
+              </a:schemeClr>
+            </a:solidFill>
+          </a:ln>
+        </p:spPr>
+        <p:style>
+          <a:lnRef idx="2">
+            <a:schemeClr val="accent1">
+              <a:shade val="15000"/>
+            </a:schemeClr>
+          </a:lnRef>
+          <a:fillRef idx="1">
+            <a:schemeClr val="accent1"/>
+          </a:fillRef>
+          <a:effectRef idx="0">
+            <a:schemeClr val="accent1"/>
+          </a:effectRef>
+          <a:fontRef idx="minor">
+            <a:schemeClr val="lt1"/>
+          </a:fontRef>
+        </p:style>
+        <p:txBody>
+          <a:bodyPr rtlCol="0" anchor="ctr"/>
+          <a:lstStyle/>
+          <a:p>
+            <a:pPr marL="285750" indent="-285750" algn="ctr">
+              <a:buFont typeface="Wingdings" panose="05000000000000000000" pitchFamily="2" charset="2"/>
+              <a:buChar char="ü"/>
+            </a:pPr>
+            <a:r>
+              <a:rPr lang="ja-JP" altLang="en-US" dirty="0">
+                <a:solidFill>
+                  <a:schemeClr val="tx1">
+                    <a:lumMod val="75000"/>
+                  </a:schemeClr>
+                </a:solidFill>
+              </a:rPr>
+              <a:t>課題</a:t>
+            </a:r>
+            <a:r>
+              <a:rPr lang="en-US" altLang="ja-JP" dirty="0">
+                <a:solidFill>
+                  <a:schemeClr val="tx1">
+                    <a:lumMod val="75000"/>
+                  </a:schemeClr>
+                </a:solidFill>
+              </a:rPr>
+              <a:t>/</a:t>
+            </a:r>
+            <a:r>
+              <a:rPr lang="ja-JP" altLang="en-US" dirty="0">
+                <a:solidFill>
+                  <a:schemeClr val="tx1">
+                    <a:lumMod val="75000"/>
+                  </a:schemeClr>
+                </a:solidFill>
+              </a:rPr>
+              <a:t>制約</a:t>
+            </a:r>
+            <a:endParaRPr kumimoji="1" lang="ja-JP" altLang="en-US" dirty="0">
+              <a:solidFill>
+                <a:schemeClr val="tx1">
+                  <a:lumMod val="75000"/>
+                </a:schemeClr>
+              </a:solidFill>
+            </a:endParaRPr>
+          </a:p>
+        </p:txBody>
+      </p:sp>
+      <p:sp>
+        <p:nvSpPr>
+          <p:cNvPr id="37" name="正方形/長方形 36">
+            <a:extLst>
+              <a:ext uri="{FF2B5EF4-FFF2-40B4-BE49-F238E27FC236}">
+                <a16:creationId xmlns:a16="http://schemas.microsoft.com/office/drawing/2014/main" id="{673C0BB2-3D5E-A9F4-BBFA-4294C61B8B2B}"/>
+              </a:ext>
+            </a:extLst>
+          </p:cNvPr>
+          <p:cNvSpPr/>
+          <p:nvPr/>
+        </p:nvSpPr>
+        <p:spPr>
+          <a:xfrm>
+            <a:off x="8854846" y="6373896"/>
+            <a:ext cx="2861874" cy="304327"/>
+          </a:xfrm>
+          <a:prstGeom prst="rect">
+            <a:avLst/>
+          </a:prstGeom>
+          <a:noFill/>
+          <a:ln>
+            <a:solidFill>
+              <a:schemeClr val="tx1">
+                <a:lumMod val="75000"/>
+              </a:schemeClr>
+            </a:solidFill>
+          </a:ln>
+        </p:spPr>
+        <p:style>
+          <a:lnRef idx="2">
+            <a:schemeClr val="accent1">
+              <a:shade val="15000"/>
+            </a:schemeClr>
+          </a:lnRef>
+          <a:fillRef idx="1">
+            <a:schemeClr val="accent1"/>
+          </a:fillRef>
+          <a:effectRef idx="0">
+            <a:schemeClr val="accent1"/>
+          </a:effectRef>
+          <a:fontRef idx="minor">
+            <a:schemeClr val="lt1"/>
+          </a:fontRef>
+        </p:style>
+        <p:txBody>
+          <a:bodyPr rtlCol="0" anchor="ctr"/>
+          <a:lstStyle/>
+          <a:p>
+            <a:pPr marL="285750" indent="-285750" algn="ctr">
+              <a:buFont typeface="Wingdings" panose="05000000000000000000" pitchFamily="2" charset="2"/>
+              <a:buChar char="ü"/>
+            </a:pPr>
+            <a:r>
+              <a:rPr kumimoji="1" lang="ja-JP" altLang="en-US" dirty="0">
+                <a:solidFill>
+                  <a:schemeClr val="tx1">
+                    <a:lumMod val="75000"/>
+                  </a:schemeClr>
+                </a:solidFill>
+              </a:rPr>
+              <a:t>課題解決のための行動</a:t>
+            </a:r>
+          </a:p>
+        </p:txBody>
+      </p:sp>
+      <p:sp>
+        <p:nvSpPr>
+          <p:cNvPr id="38" name="正方形/長方形 37">
+            <a:extLst>
+              <a:ext uri="{FF2B5EF4-FFF2-40B4-BE49-F238E27FC236}">
+                <a16:creationId xmlns:a16="http://schemas.microsoft.com/office/drawing/2014/main" id="{7FD9EF35-D8DF-A1C9-8FA9-24E1C9D7C236}"/>
+              </a:ext>
+            </a:extLst>
+          </p:cNvPr>
+          <p:cNvSpPr/>
+          <p:nvPr/>
+        </p:nvSpPr>
+        <p:spPr>
+          <a:xfrm>
+            <a:off x="5708689" y="6373896"/>
+            <a:ext cx="2861874" cy="304327"/>
+          </a:xfrm>
+          <a:prstGeom prst="rect">
+            <a:avLst/>
+          </a:prstGeom>
+          <a:noFill/>
+          <a:ln>
+            <a:solidFill>
+              <a:schemeClr val="tx1">
+                <a:lumMod val="75000"/>
+              </a:schemeClr>
+            </a:solidFill>
+          </a:ln>
+        </p:spPr>
+        <p:style>
+          <a:lnRef idx="2">
+            <a:schemeClr val="accent1">
+              <a:shade val="15000"/>
+            </a:schemeClr>
+          </a:lnRef>
+          <a:fillRef idx="1">
+            <a:schemeClr val="accent1"/>
+          </a:fillRef>
+          <a:effectRef idx="0">
+            <a:schemeClr val="accent1"/>
+          </a:effectRef>
+          <a:fontRef idx="minor">
+            <a:schemeClr val="lt1"/>
+          </a:fontRef>
+        </p:style>
+        <p:txBody>
+          <a:bodyPr rtlCol="0" anchor="ctr"/>
+          <a:lstStyle/>
+          <a:p>
+            <a:pPr marL="285750" indent="-285750" algn="ctr">
+              <a:buFont typeface="Wingdings" panose="05000000000000000000" pitchFamily="2" charset="2"/>
+              <a:buChar char="ü"/>
+            </a:pPr>
+            <a:r>
+              <a:rPr lang="ja-JP" altLang="en-US" dirty="0">
+                <a:solidFill>
+                  <a:schemeClr val="tx1">
+                    <a:lumMod val="75000"/>
+                  </a:schemeClr>
+                </a:solidFill>
+              </a:rPr>
+              <a:t>実現したい状態</a:t>
+            </a:r>
+            <a:endParaRPr kumimoji="1" lang="ja-JP" altLang="en-US" dirty="0">
+              <a:solidFill>
+                <a:schemeClr val="tx1">
+                  <a:lumMod val="75000"/>
+                </a:schemeClr>
+              </a:solidFill>
+            </a:endParaRPr>
+          </a:p>
+        </p:txBody>
+      </p:sp>
+      <p:sp>
+        <p:nvSpPr>
+          <p:cNvPr id="39" name="正方形/長方形 38">
+            <a:extLst>
+              <a:ext uri="{FF2B5EF4-FFF2-40B4-BE49-F238E27FC236}">
+                <a16:creationId xmlns:a16="http://schemas.microsoft.com/office/drawing/2014/main" id="{513C1AF8-7A9B-BA41-2AA0-DBA869146019}"/>
+              </a:ext>
+            </a:extLst>
+          </p:cNvPr>
+          <p:cNvSpPr/>
+          <p:nvPr/>
+        </p:nvSpPr>
+        <p:spPr>
+          <a:xfrm>
+            <a:off x="2562532" y="6373896"/>
+            <a:ext cx="2861874" cy="304327"/>
+          </a:xfrm>
+          <a:prstGeom prst="rect">
+            <a:avLst/>
+          </a:prstGeom>
+          <a:noFill/>
+          <a:ln>
+            <a:solidFill>
+              <a:schemeClr val="tx1">
+                <a:lumMod val="75000"/>
+              </a:schemeClr>
+            </a:solidFill>
+          </a:ln>
+        </p:spPr>
+        <p:style>
+          <a:lnRef idx="2">
+            <a:schemeClr val="accent1">
+              <a:shade val="15000"/>
+            </a:schemeClr>
+          </a:lnRef>
+          <a:fillRef idx="1">
+            <a:schemeClr val="accent1"/>
+          </a:fillRef>
+          <a:effectRef idx="0">
+            <a:schemeClr val="accent1"/>
+          </a:effectRef>
+          <a:fontRef idx="minor">
+            <a:schemeClr val="lt1"/>
+          </a:fontRef>
+        </p:style>
+        <p:txBody>
+          <a:bodyPr rtlCol="0" anchor="ctr"/>
+          <a:lstStyle/>
+          <a:p>
+            <a:pPr marL="285750" indent="-285750" algn="ctr">
+              <a:buFont typeface="Wingdings" panose="05000000000000000000" pitchFamily="2" charset="2"/>
+              <a:buChar char="ü"/>
+            </a:pPr>
+            <a:r>
+              <a:rPr kumimoji="1" lang="ja-JP" altLang="en-US" dirty="0">
+                <a:solidFill>
+                  <a:schemeClr val="tx1">
+                    <a:lumMod val="75000"/>
+                  </a:schemeClr>
+                </a:solidFill>
+              </a:rPr>
+              <a:t>現状の解釈</a:t>
+            </a:r>
+          </a:p>
+        </p:txBody>
+      </p:sp>
+    </p:spTree>
+    <p:extLst>
+      <p:ext uri="{BB962C8B-B14F-4D97-AF65-F5344CB8AC3E}">
+        <p14:creationId xmlns:p14="http://schemas.microsoft.com/office/powerpoint/2010/main" val="3758113492"/>
+      </p:ext>
+    </p:extLst>
+  </p:cSld>
+  <p:clrMapOvr>
+    <a:masterClrMapping/>
+  </p:clrMapOvr>
+</p:sld>
+</file>
+
+<file path=ppt/slides/slide22.xml><?xml version="1.0" encoding="utf-8"?>
+<p:sld xmlns:a="http://schemas.openxmlformats.org/drawingml/2006/main" xmlns:r="http://schemas.openxmlformats.org/officeDocument/2006/relationships" xmlns:p="http://schemas.openxmlformats.org/presentationml/2006/main">
+  <p:cSld>
+    <p:spTree>
+      <p:nvGrpSpPr>
+        <p:cNvPr id="1" name="">
+          <a:extLst>
+            <a:ext uri="{FF2B5EF4-FFF2-40B4-BE49-F238E27FC236}">
+              <a16:creationId xmlns:a16="http://schemas.microsoft.com/office/drawing/2014/main" id="{FAA26451-EDAF-F374-F32C-667DD3F5BF56}"/>
+            </a:ext>
+          </a:extLst>
+        </p:cNvPr>
+        <p:cNvGrpSpPr/>
+        <p:nvPr/>
+      </p:nvGrpSpPr>
+      <p:grpSpPr>
+        <a:xfrm>
+          <a:off x="0" y="0"/>
+          <a:ext cx="0" cy="0"/>
+          <a:chOff x="0" y="0"/>
+          <a:chExt cx="0" cy="0"/>
+        </a:xfrm>
+      </p:grpSpPr>
+      <p:cxnSp>
+        <p:nvCxnSpPr>
+          <p:cNvPr id="2" name="直線コネクタ 1">
+            <a:extLst>
+              <a:ext uri="{FF2B5EF4-FFF2-40B4-BE49-F238E27FC236}">
+                <a16:creationId xmlns:a16="http://schemas.microsoft.com/office/drawing/2014/main" id="{D8FA9EAF-83FD-807E-AB80-24F97FED9F20}"/>
+              </a:ext>
+            </a:extLst>
+          </p:cNvPr>
+          <p:cNvCxnSpPr>
+            <a:cxnSpLocks/>
+          </p:cNvCxnSpPr>
+          <p:nvPr/>
+        </p:nvCxnSpPr>
+        <p:spPr>
+          <a:xfrm>
+            <a:off x="0" y="1993900"/>
+            <a:ext cx="12192000" cy="0"/>
+          </a:xfrm>
+          <a:prstGeom prst="line">
+            <a:avLst/>
+          </a:prstGeom>
+          <a:ln w="38100"/>
+        </p:spPr>
+        <p:style>
+          <a:lnRef idx="2">
+            <a:schemeClr val="accent1"/>
+          </a:lnRef>
+          <a:fillRef idx="0">
+            <a:schemeClr val="accent1"/>
+          </a:fillRef>
+          <a:effectRef idx="1">
+            <a:schemeClr val="accent1"/>
+          </a:effectRef>
+          <a:fontRef idx="minor">
+            <a:schemeClr val="tx1"/>
+          </a:fontRef>
+        </p:style>
+      </p:cxnSp>
+      <p:sp>
+        <p:nvSpPr>
+          <p:cNvPr id="3" name="タイトル プレースホルダー 1">
+            <a:extLst>
+              <a:ext uri="{FF2B5EF4-FFF2-40B4-BE49-F238E27FC236}">
+                <a16:creationId xmlns:a16="http://schemas.microsoft.com/office/drawing/2014/main" id="{F1118C2A-E9FE-756E-4BD5-609B9D3D8215}"/>
+              </a:ext>
+            </a:extLst>
+          </p:cNvPr>
+          <p:cNvSpPr txBox="1">
+            <a:spLocks/>
+          </p:cNvSpPr>
+          <p:nvPr/>
+        </p:nvSpPr>
+        <p:spPr>
+          <a:xfrm>
+            <a:off x="355600" y="1108076"/>
+            <a:ext cx="11506200" cy="812797"/>
+          </a:xfrm>
+          <a:prstGeom prst="rect">
+            <a:avLst/>
+          </a:prstGeom>
+        </p:spPr>
+        <p:txBody>
+          <a:bodyPr vert="horz" lIns="91440" tIns="45720" rIns="91440" bIns="45720" rtlCol="0" anchor="ctr">
+            <a:noAutofit/>
+          </a:bodyPr>
+          <a:lstStyle>
+            <a:lvl1pPr algn="l" defTabSz="914400" rtl="0" eaLnBrk="1" latinLnBrk="0" hangingPunct="1">
+              <a:lnSpc>
+                <a:spcPct val="90000"/>
+              </a:lnSpc>
+              <a:spcBef>
+                <a:spcPct val="0"/>
+              </a:spcBef>
+              <a:buNone/>
+              <a:defRPr kumimoji="1" sz="1400" kern="1200">
+                <a:solidFill>
+                  <a:schemeClr val="tx1"/>
+                </a:solidFill>
+                <a:latin typeface="+mj-lt"/>
+                <a:ea typeface="+mj-ea"/>
+                <a:cs typeface="+mj-cs"/>
+              </a:defRPr>
+            </a:lvl1pPr>
+          </a:lstStyle>
+          <a:p>
+            <a:r>
+              <a:rPr lang="ja-JP" altLang="en-US" sz="2800" dirty="0"/>
+              <a:t>リード文</a:t>
+            </a:r>
+            <a:endParaRPr lang="en-US" altLang="ja-JP" sz="2800" dirty="0"/>
+          </a:p>
+          <a:p>
+            <a:r>
+              <a:rPr lang="en-US" altLang="ja-JP" sz="2800" dirty="0"/>
+              <a:t>2</a:t>
+            </a:r>
+            <a:r>
+              <a:rPr lang="ja-JP" altLang="en-US" sz="2800" dirty="0"/>
+              <a:t>行に収まる程度で</a:t>
+            </a:r>
+            <a:endParaRPr lang="en-US" altLang="ja-JP" sz="2800" dirty="0"/>
+          </a:p>
+        </p:txBody>
+      </p:sp>
+      <p:sp>
+        <p:nvSpPr>
+          <p:cNvPr id="4" name="タイトル プレースホルダー 1">
+            <a:extLst>
+              <a:ext uri="{FF2B5EF4-FFF2-40B4-BE49-F238E27FC236}">
+                <a16:creationId xmlns:a16="http://schemas.microsoft.com/office/drawing/2014/main" id="{189A4DE8-4BA7-6ED8-4438-AE0E65FEBFE8}"/>
+              </a:ext>
+            </a:extLst>
+          </p:cNvPr>
+          <p:cNvSpPr txBox="1">
+            <a:spLocks/>
+          </p:cNvSpPr>
+          <p:nvPr/>
+        </p:nvSpPr>
+        <p:spPr>
+          <a:xfrm>
+            <a:off x="355600" y="546100"/>
+            <a:ext cx="11506200" cy="488949"/>
+          </a:xfrm>
+          <a:prstGeom prst="rect">
+            <a:avLst/>
+          </a:prstGeom>
+        </p:spPr>
+        <p:txBody>
+          <a:bodyPr vert="horz" lIns="91440" tIns="45720" rIns="91440" bIns="45720" rtlCol="0" anchor="ctr">
+            <a:noAutofit/>
+          </a:bodyPr>
+          <a:lstStyle>
+            <a:lvl1pPr algn="l" defTabSz="914400" rtl="0" eaLnBrk="1" latinLnBrk="0" hangingPunct="1">
+              <a:lnSpc>
+                <a:spcPct val="90000"/>
+              </a:lnSpc>
+              <a:spcBef>
+                <a:spcPct val="0"/>
+              </a:spcBef>
+              <a:buNone/>
+              <a:defRPr kumimoji="1" sz="1400" kern="1200">
+                <a:solidFill>
+                  <a:schemeClr val="tx1"/>
+                </a:solidFill>
+                <a:latin typeface="+mj-lt"/>
+                <a:ea typeface="+mj-ea"/>
+                <a:cs typeface="+mj-cs"/>
+              </a:defRPr>
+            </a:lvl1pPr>
+          </a:lstStyle>
+          <a:p>
+            <a:r>
+              <a:rPr lang="ja-JP" altLang="en-US" dirty="0"/>
+              <a:t>目次内のタイトル名そのまま</a:t>
+            </a:r>
+            <a:endParaRPr lang="en-US" altLang="ja-JP" dirty="0"/>
+          </a:p>
+        </p:txBody>
+      </p:sp>
+      <p:sp>
+        <p:nvSpPr>
           <p:cNvPr id="5" name="タイトル プレースホルダー 1">
             <a:extLst>
               <a:ext uri="{FF2B5EF4-FFF2-40B4-BE49-F238E27FC236}">
@@ -16576,7 +17762,7 @@
 </p:sld>
 </file>
 
-<file path=ppt/slides/slide21.xml><?xml version="1.0" encoding="utf-8"?>
+<file path=ppt/slides/slide23.xml><?xml version="1.0" encoding="utf-8"?>
 <p:sld xmlns:a="http://schemas.openxmlformats.org/drawingml/2006/main" xmlns:r="http://schemas.openxmlformats.org/officeDocument/2006/relationships" xmlns:p="http://schemas.openxmlformats.org/presentationml/2006/main">
   <p:cSld>
     <p:spTree>
@@ -16660,7 +17846,7 @@
 </p:sld>
 </file>
 
-<file path=ppt/slides/slide22.xml><?xml version="1.0" encoding="utf-8"?>
+<file path=ppt/slides/slide24.xml><?xml version="1.0" encoding="utf-8"?>
 <p:sld xmlns:a="http://schemas.openxmlformats.org/drawingml/2006/main" xmlns:r="http://schemas.openxmlformats.org/officeDocument/2006/relationships" xmlns:p="http://schemas.openxmlformats.org/presentationml/2006/main">
   <p:cSld>
     <p:spTree>
@@ -17536,83 +18722,6 @@
     <p:extLst>
       <p:ext uri="{BB962C8B-B14F-4D97-AF65-F5344CB8AC3E}">
         <p14:creationId xmlns:p14="http://schemas.microsoft.com/office/powerpoint/2010/main" val="3600593824"/>
-      </p:ext>
-    </p:extLst>
-  </p:cSld>
-  <p:clrMapOvr>
-    <a:masterClrMapping/>
-  </p:clrMapOvr>
-</p:sld>
-</file>
-
-<file path=ppt/slides/slide23.xml><?xml version="1.0" encoding="utf-8"?>
-<p:sld xmlns:a="http://schemas.openxmlformats.org/drawingml/2006/main" xmlns:r="http://schemas.openxmlformats.org/officeDocument/2006/relationships" xmlns:p="http://schemas.openxmlformats.org/presentationml/2006/main">
-  <p:cSld>
-    <p:spTree>
-      <p:nvGrpSpPr>
-        <p:cNvPr id="1" name="">
-          <a:extLst>
-            <a:ext uri="{FF2B5EF4-FFF2-40B4-BE49-F238E27FC236}">
-              <a16:creationId xmlns:a16="http://schemas.microsoft.com/office/drawing/2014/main" id="{74C5A7E9-4920-8842-B617-91CF7D81539C}"/>
-            </a:ext>
-          </a:extLst>
-        </p:cNvPr>
-        <p:cNvGrpSpPr/>
-        <p:nvPr/>
-      </p:nvGrpSpPr>
-      <p:grpSpPr>
-        <a:xfrm>
-          <a:off x="0" y="0"/>
-          <a:ext cx="0" cy="0"/>
-          <a:chOff x="0" y="0"/>
-          <a:chExt cx="0" cy="0"/>
-        </a:xfrm>
-      </p:grpSpPr>
-      <p:sp>
-        <p:nvSpPr>
-          <p:cNvPr id="2" name="タイトル 1">
-            <a:extLst>
-              <a:ext uri="{FF2B5EF4-FFF2-40B4-BE49-F238E27FC236}">
-                <a16:creationId xmlns:a16="http://schemas.microsoft.com/office/drawing/2014/main" id="{2E22CEBB-BB4E-2706-E846-5F2EF1226059}"/>
-              </a:ext>
-            </a:extLst>
-          </p:cNvPr>
-          <p:cNvSpPr>
-            <a:spLocks noGrp="1"/>
-          </p:cNvSpPr>
-          <p:nvPr>
-            <p:ph type="title" idx="4294967295"/>
-          </p:nvPr>
-        </p:nvSpPr>
-        <p:spPr>
-          <a:xfrm>
-            <a:off x="336389" y="3128963"/>
-            <a:ext cx="11517355" cy="600075"/>
-          </a:xfrm>
-        </p:spPr>
-        <p:txBody>
-          <a:bodyPr anchor="t" anchorCtr="0">
-            <a:noAutofit/>
-          </a:bodyPr>
-          <a:lstStyle/>
-          <a:p>
-            <a:r>
-              <a:rPr kumimoji="1" lang="ja-JP" altLang="en-US" sz="6000" b="1" dirty="0">
-                <a:solidFill>
-                  <a:schemeClr val="bg1">
-                    <a:lumMod val="65000"/>
-                  </a:schemeClr>
-                </a:solidFill>
-              </a:rPr>
-              <a:t>参考文献</a:t>
-            </a:r>
-          </a:p>
-        </p:txBody>
-      </p:sp>
-    </p:spTree>
-    <p:extLst>
-      <p:ext uri="{BB962C8B-B14F-4D97-AF65-F5344CB8AC3E}">
-        <p14:creationId xmlns:p14="http://schemas.microsoft.com/office/powerpoint/2010/main" val="2781909537"/>
       </p:ext>
     </p:extLst>
   </p:cSld>
@@ -18671,7 +19780,84 @@
         <p:cNvPr id="1" name="">
           <a:extLst>
             <a:ext uri="{FF2B5EF4-FFF2-40B4-BE49-F238E27FC236}">
-              <a16:creationId xmlns:a16="http://schemas.microsoft.com/office/drawing/2014/main" id="{19D82631-C86D-7880-1221-3897CA0E3CEA}"/>
+              <a16:creationId xmlns:a16="http://schemas.microsoft.com/office/drawing/2014/main" id="{74C5A7E9-4920-8842-B617-91CF7D81539C}"/>
+            </a:ext>
+          </a:extLst>
+        </p:cNvPr>
+        <p:cNvGrpSpPr/>
+        <p:nvPr/>
+      </p:nvGrpSpPr>
+      <p:grpSpPr>
+        <a:xfrm>
+          <a:off x="0" y="0"/>
+          <a:ext cx="0" cy="0"/>
+          <a:chOff x="0" y="0"/>
+          <a:chExt cx="0" cy="0"/>
+        </a:xfrm>
+      </p:grpSpPr>
+      <p:sp>
+        <p:nvSpPr>
+          <p:cNvPr id="2" name="タイトル 1">
+            <a:extLst>
+              <a:ext uri="{FF2B5EF4-FFF2-40B4-BE49-F238E27FC236}">
+                <a16:creationId xmlns:a16="http://schemas.microsoft.com/office/drawing/2014/main" id="{2E22CEBB-BB4E-2706-E846-5F2EF1226059}"/>
+              </a:ext>
+            </a:extLst>
+          </p:cNvPr>
+          <p:cNvSpPr>
+            <a:spLocks noGrp="1"/>
+          </p:cNvSpPr>
+          <p:nvPr>
+            <p:ph type="title" idx="4294967295"/>
+          </p:nvPr>
+        </p:nvSpPr>
+        <p:spPr>
+          <a:xfrm>
+            <a:off x="336389" y="3128963"/>
+            <a:ext cx="11517355" cy="600075"/>
+          </a:xfrm>
+        </p:spPr>
+        <p:txBody>
+          <a:bodyPr anchor="t" anchorCtr="0">
+            <a:noAutofit/>
+          </a:bodyPr>
+          <a:lstStyle/>
+          <a:p>
+            <a:r>
+              <a:rPr kumimoji="1" lang="ja-JP" altLang="en-US" sz="6000" b="1" dirty="0">
+                <a:solidFill>
+                  <a:schemeClr val="bg1">
+                    <a:lumMod val="65000"/>
+                  </a:schemeClr>
+                </a:solidFill>
+              </a:rPr>
+              <a:t>参考文献</a:t>
+            </a:r>
+          </a:p>
+        </p:txBody>
+      </p:sp>
+    </p:spTree>
+    <p:extLst>
+      <p:ext uri="{BB962C8B-B14F-4D97-AF65-F5344CB8AC3E}">
+        <p14:creationId xmlns:p14="http://schemas.microsoft.com/office/powerpoint/2010/main" val="2781909537"/>
+      </p:ext>
+    </p:extLst>
+  </p:cSld>
+  <p:clrMapOvr>
+    <a:masterClrMapping/>
+  </p:clrMapOvr>
+</p:sld>
+</file>
+
+<file path=ppt/slides/slide7.xml><?xml version="1.0" encoding="utf-8"?>
+<p:sld xmlns:a="http://schemas.openxmlformats.org/drawingml/2006/main" xmlns:r="http://schemas.openxmlformats.org/officeDocument/2006/relationships" xmlns:p="http://schemas.openxmlformats.org/presentationml/2006/main">
+  <p:cSld>
+    <p:spTree>
+      <p:nvGrpSpPr>
+        <p:cNvPr id="1" name="">
+          <a:extLst>
+            <a:ext uri="{FF2B5EF4-FFF2-40B4-BE49-F238E27FC236}">
+              <a16:creationId xmlns:a16="http://schemas.microsoft.com/office/drawing/2014/main" id="{C8D43924-18DE-C2D9-0034-82C2E8D3A511}"/>
             </a:ext>
           </a:extLst>
         </p:cNvPr>
@@ -18691,7 +19877,7 @@
           <p:cNvPr id="2" name="直線コネクタ 1">
             <a:extLst>
               <a:ext uri="{FF2B5EF4-FFF2-40B4-BE49-F238E27FC236}">
-                <a16:creationId xmlns:a16="http://schemas.microsoft.com/office/drawing/2014/main" id="{E8A06A2F-CB9B-CA58-C287-E9DD2D8FC2F8}"/>
+                <a16:creationId xmlns:a16="http://schemas.microsoft.com/office/drawing/2014/main" id="{656EF945-5EDD-730E-30FF-054654AFE145}"/>
               </a:ext>
             </a:extLst>
           </p:cNvPr>
@@ -18730,7 +19916,7 @@
           <p:cNvPr id="3" name="タイトル プレースホルダー 1">
             <a:extLst>
               <a:ext uri="{FF2B5EF4-FFF2-40B4-BE49-F238E27FC236}">
-                <a16:creationId xmlns:a16="http://schemas.microsoft.com/office/drawing/2014/main" id="{4F293823-B077-DF97-E7C1-A46FB3038F92}"/>
+                <a16:creationId xmlns:a16="http://schemas.microsoft.com/office/drawing/2014/main" id="{AE9D3C0C-FB32-9171-ED63-195CF64DC019}"/>
               </a:ext>
             </a:extLst>
           </p:cNvPr>
@@ -18774,21 +19960,10 @@
           <a:p>
             <a:r>
               <a:rPr lang="ja-JP" altLang="en-US" sz="2800" dirty="0"/>
-              <a:t>リード文</a:t>
+              <a:t>システム設計に関する書籍はたくさんあるが、今回は一冊の内容にのみ注目した</a:t>
             </a:r>
             <a:endParaRPr lang="en-US" altLang="ja-JP" sz="2800" dirty="0"/>
           </a:p>
-          <a:p>
-            <a:r>
-              <a:rPr lang="en-US" altLang="ja-JP" sz="2800" dirty="0"/>
-              <a:t>2</a:t>
-            </a:r>
-            <a:r>
-              <a:rPr lang="ja-JP" altLang="en-US" sz="2800" dirty="0"/>
-              <a:t>行に収まる程度で</a:t>
-            </a:r>
-            <a:endParaRPr lang="en-US" altLang="ja-JP" sz="2800" dirty="0"/>
-          </a:p>
         </p:txBody>
       </p:sp>
       <p:sp>
@@ -18796,7 +19971,7 @@
           <p:cNvPr id="4" name="タイトル プレースホルダー 1">
             <a:extLst>
               <a:ext uri="{FF2B5EF4-FFF2-40B4-BE49-F238E27FC236}">
-                <a16:creationId xmlns:a16="http://schemas.microsoft.com/office/drawing/2014/main" id="{489FA472-DE0B-9C11-7074-251D2B33E68D}"/>
+                <a16:creationId xmlns:a16="http://schemas.microsoft.com/office/drawing/2014/main" id="{B33E923D-9915-CF30-C162-7D73F3AC88AD}"/>
               </a:ext>
             </a:extLst>
           </p:cNvPr>
@@ -18840,7 +20015,7 @@
           <a:p>
             <a:r>
               <a:rPr lang="ja-JP" altLang="en-US" dirty="0"/>
-              <a:t>ツリー</a:t>
+              <a:t>参考文献</a:t>
             </a:r>
             <a:endParaRPr lang="en-US" altLang="ja-JP" dirty="0"/>
           </a:p>
@@ -18851,7 +20026,7 @@
           <p:cNvPr id="5" name="タイトル プレースホルダー 1">
             <a:extLst>
               <a:ext uri="{FF2B5EF4-FFF2-40B4-BE49-F238E27FC236}">
-                <a16:creationId xmlns:a16="http://schemas.microsoft.com/office/drawing/2014/main" id="{C06EAEDA-0E19-FEF0-681E-3BA0927BCE89}"/>
+                <a16:creationId xmlns:a16="http://schemas.microsoft.com/office/drawing/2014/main" id="{9E1BFE6D-A9D8-2084-91CF-BE0CFEB37994}"/>
               </a:ext>
             </a:extLst>
           </p:cNvPr>
@@ -18862,8 +20037,8 @@
         </p:nvSpPr>
         <p:spPr>
           <a:xfrm>
-            <a:off x="7541442" y="2146304"/>
-            <a:ext cx="4320357" cy="4165584"/>
+            <a:off x="355600" y="2146304"/>
+            <a:ext cx="11506200" cy="4165584"/>
           </a:xfrm>
           <a:prstGeom prst="rect">
             <a:avLst/>
@@ -18898,6 +20073,362 @@
               <a:buChar char="•"/>
             </a:pPr>
             <a:r>
+              <a:rPr lang="en-US" altLang="ja-JP" sz="1800" dirty="0"/>
+              <a:t>Vlad </a:t>
+            </a:r>
+            <a:r>
+              <a:rPr lang="en-US" altLang="ja-JP" sz="1800" dirty="0" err="1"/>
+              <a:t>Khononv</a:t>
+            </a:r>
+            <a:r>
+              <a:rPr lang="en-US" altLang="ja-JP" sz="1800" dirty="0"/>
+              <a:t> = </a:t>
+            </a:r>
+            <a:r>
+              <a:rPr lang="ja-JP" altLang="en-US" sz="1800" dirty="0"/>
+              <a:t>著</a:t>
+            </a:r>
+            <a:r>
+              <a:rPr lang="en-US" altLang="ja-JP" sz="1800" dirty="0"/>
+              <a:t>,</a:t>
+            </a:r>
+            <a:r>
+              <a:rPr lang="ja-JP" altLang="en-US" sz="1800" dirty="0"/>
+              <a:t>　島田 浩二 </a:t>
+            </a:r>
+            <a:r>
+              <a:rPr lang="en-US" altLang="ja-JP" sz="1800" dirty="0"/>
+              <a:t>= </a:t>
+            </a:r>
+            <a:r>
+              <a:rPr lang="ja-JP" altLang="en-US" sz="1800" dirty="0"/>
+              <a:t>訳</a:t>
+            </a:r>
+            <a:r>
+              <a:rPr lang="en-US" altLang="ja-JP" sz="1800" dirty="0"/>
+              <a:t>, 『</a:t>
+            </a:r>
+            <a:r>
+              <a:rPr lang="ja-JP" altLang="en-US" sz="1800" dirty="0"/>
+              <a:t>ソフトウェア設計の結合バランス</a:t>
+            </a:r>
+            <a:r>
+              <a:rPr lang="en-US" altLang="ja-JP" sz="1800" dirty="0"/>
+              <a:t>』, </a:t>
+            </a:r>
+            <a:r>
+              <a:rPr lang="ja-JP" altLang="en-US" sz="1800" dirty="0"/>
+              <a:t>株式会社インプレス</a:t>
+            </a:r>
+            <a:br>
+              <a:rPr lang="en-US" altLang="ja-JP" sz="1800" dirty="0"/>
+            </a:br>
+            <a:r>
+              <a:rPr lang="ja-JP" altLang="ja-JP" sz="1800" dirty="0">
+                <a:hlinkClick r:id="rId2"/>
+              </a:rPr>
+              <a:t>ソフトウェア設計の結合バランス　持続可能な成長を支えるモジュール化の原則 - インプレスブックス</a:t>
+            </a:r>
+            <a:endParaRPr lang="en-US" altLang="ja-JP" sz="1800" dirty="0"/>
+          </a:p>
+          <a:p>
+            <a:endParaRPr lang="en-US" altLang="ja-JP" sz="1800" dirty="0"/>
+          </a:p>
+          <a:p>
+            <a:endParaRPr lang="en-US" altLang="ja-JP" sz="1800" dirty="0"/>
+          </a:p>
+          <a:p>
+            <a:endParaRPr lang="en-US" altLang="ja-JP" sz="1800" dirty="0"/>
+          </a:p>
+          <a:p>
+            <a:endParaRPr lang="en-US" altLang="ja-JP" sz="1800" dirty="0"/>
+          </a:p>
+          <a:p>
+            <a:endParaRPr lang="en-US" altLang="ja-JP" sz="1800" dirty="0"/>
+          </a:p>
+          <a:p>
+            <a:endParaRPr lang="en-US" altLang="ja-JP" sz="1800" dirty="0"/>
+          </a:p>
+        </p:txBody>
+      </p:sp>
+      <p:pic>
+        <p:nvPicPr>
+          <p:cNvPr id="7" name="図 6">
+            <a:extLst>
+              <a:ext uri="{FF2B5EF4-FFF2-40B4-BE49-F238E27FC236}">
+                <a16:creationId xmlns:a16="http://schemas.microsoft.com/office/drawing/2014/main" id="{372BFA89-8419-2834-D5E2-5D9740B54239}"/>
+              </a:ext>
+            </a:extLst>
+          </p:cNvPr>
+          <p:cNvPicPr>
+            <a:picLocks noChangeAspect="1"/>
+          </p:cNvPicPr>
+          <p:nvPr/>
+        </p:nvPicPr>
+        <p:blipFill>
+          <a:blip r:embed="rId3"/>
+          <a:stretch>
+            <a:fillRect/>
+          </a:stretch>
+        </p:blipFill>
+        <p:spPr>
+          <a:xfrm>
+            <a:off x="4730680" y="2879724"/>
+            <a:ext cx="2730640" cy="3302170"/>
+          </a:xfrm>
+          <a:prstGeom prst="rect">
+            <a:avLst/>
+          </a:prstGeom>
+        </p:spPr>
+      </p:pic>
+    </p:spTree>
+    <p:extLst>
+      <p:ext uri="{BB962C8B-B14F-4D97-AF65-F5344CB8AC3E}">
+        <p14:creationId xmlns:p14="http://schemas.microsoft.com/office/powerpoint/2010/main" val="3518933521"/>
+      </p:ext>
+    </p:extLst>
+  </p:cSld>
+  <p:clrMapOvr>
+    <a:masterClrMapping/>
+  </p:clrMapOvr>
+</p:sld>
+</file>
+
+<file path=ppt/slides/slide8.xml><?xml version="1.0" encoding="utf-8"?>
+<p:sld xmlns:a="http://schemas.openxmlformats.org/drawingml/2006/main" xmlns:r="http://schemas.openxmlformats.org/officeDocument/2006/relationships" xmlns:p="http://schemas.openxmlformats.org/presentationml/2006/main">
+  <p:cSld>
+    <p:spTree>
+      <p:nvGrpSpPr>
+        <p:cNvPr id="1" name="">
+          <a:extLst>
+            <a:ext uri="{FF2B5EF4-FFF2-40B4-BE49-F238E27FC236}">
+              <a16:creationId xmlns:a16="http://schemas.microsoft.com/office/drawing/2014/main" id="{19D82631-C86D-7880-1221-3897CA0E3CEA}"/>
+            </a:ext>
+          </a:extLst>
+        </p:cNvPr>
+        <p:cNvGrpSpPr/>
+        <p:nvPr/>
+      </p:nvGrpSpPr>
+      <p:grpSpPr>
+        <a:xfrm>
+          <a:off x="0" y="0"/>
+          <a:ext cx="0" cy="0"/>
+          <a:chOff x="0" y="0"/>
+          <a:chExt cx="0" cy="0"/>
+        </a:xfrm>
+      </p:grpSpPr>
+      <p:cxnSp>
+        <p:nvCxnSpPr>
+          <p:cNvPr id="2" name="直線コネクタ 1">
+            <a:extLst>
+              <a:ext uri="{FF2B5EF4-FFF2-40B4-BE49-F238E27FC236}">
+                <a16:creationId xmlns:a16="http://schemas.microsoft.com/office/drawing/2014/main" id="{E8A06A2F-CB9B-CA58-C287-E9DD2D8FC2F8}"/>
+              </a:ext>
+            </a:extLst>
+          </p:cNvPr>
+          <p:cNvCxnSpPr>
+            <a:cxnSpLocks/>
+          </p:cNvCxnSpPr>
+          <p:nvPr/>
+        </p:nvCxnSpPr>
+        <p:spPr>
+          <a:xfrm>
+            <a:off x="0" y="1993900"/>
+            <a:ext cx="12192000" cy="0"/>
+          </a:xfrm>
+          <a:prstGeom prst="line">
+            <a:avLst/>
+          </a:prstGeom>
+          <a:ln w="38100"/>
+        </p:spPr>
+        <p:style>
+          <a:lnRef idx="2">
+            <a:schemeClr val="accent1"/>
+          </a:lnRef>
+          <a:fillRef idx="0">
+            <a:schemeClr val="accent1"/>
+          </a:fillRef>
+          <a:effectRef idx="1">
+            <a:schemeClr val="accent1"/>
+          </a:effectRef>
+          <a:fontRef idx="minor">
+            <a:schemeClr val="tx1"/>
+          </a:fontRef>
+        </p:style>
+      </p:cxnSp>
+      <p:sp>
+        <p:nvSpPr>
+          <p:cNvPr id="3" name="タイトル プレースホルダー 1">
+            <a:extLst>
+              <a:ext uri="{FF2B5EF4-FFF2-40B4-BE49-F238E27FC236}">
+                <a16:creationId xmlns:a16="http://schemas.microsoft.com/office/drawing/2014/main" id="{4F293823-B077-DF97-E7C1-A46FB3038F92}"/>
+              </a:ext>
+            </a:extLst>
+          </p:cNvPr>
+          <p:cNvSpPr txBox="1">
+            <a:spLocks/>
+          </p:cNvSpPr>
+          <p:nvPr/>
+        </p:nvSpPr>
+        <p:spPr>
+          <a:xfrm>
+            <a:off x="355600" y="1108076"/>
+            <a:ext cx="11506200" cy="812797"/>
+          </a:xfrm>
+          <a:prstGeom prst="rect">
+            <a:avLst/>
+          </a:prstGeom>
+        </p:spPr>
+        <p:txBody>
+          <a:bodyPr vert="horz" lIns="91440" tIns="45720" rIns="91440" bIns="45720" rtlCol="0" anchor="ctr">
+            <a:noAutofit/>
+          </a:bodyPr>
+          <a:lstStyle>
+            <a:lvl1pPr algn="l" defTabSz="914400" rtl="0" eaLnBrk="1" latinLnBrk="0" hangingPunct="1">
+              <a:lnSpc>
+                <a:spcPct val="90000"/>
+              </a:lnSpc>
+              <a:spcBef>
+                <a:spcPct val="0"/>
+              </a:spcBef>
+              <a:buNone/>
+              <a:defRPr kumimoji="1" sz="1400" kern="1200">
+                <a:solidFill>
+                  <a:schemeClr val="tx1"/>
+                </a:solidFill>
+                <a:latin typeface="+mj-lt"/>
+                <a:ea typeface="+mj-ea"/>
+                <a:cs typeface="+mj-cs"/>
+              </a:defRPr>
+            </a:lvl1pPr>
+          </a:lstStyle>
+          <a:p>
+            <a:r>
+              <a:rPr lang="ja-JP" altLang="en-US" sz="2800" dirty="0"/>
+              <a:t>リード文</a:t>
+            </a:r>
+            <a:endParaRPr lang="en-US" altLang="ja-JP" sz="2800" dirty="0"/>
+          </a:p>
+          <a:p>
+            <a:r>
+              <a:rPr lang="en-US" altLang="ja-JP" sz="2800" dirty="0"/>
+              <a:t>2</a:t>
+            </a:r>
+            <a:r>
+              <a:rPr lang="ja-JP" altLang="en-US" sz="2800" dirty="0"/>
+              <a:t>行に収まる程度で</a:t>
+            </a:r>
+            <a:endParaRPr lang="en-US" altLang="ja-JP" sz="2800" dirty="0"/>
+          </a:p>
+        </p:txBody>
+      </p:sp>
+      <p:sp>
+        <p:nvSpPr>
+          <p:cNvPr id="4" name="タイトル プレースホルダー 1">
+            <a:extLst>
+              <a:ext uri="{FF2B5EF4-FFF2-40B4-BE49-F238E27FC236}">
+                <a16:creationId xmlns:a16="http://schemas.microsoft.com/office/drawing/2014/main" id="{489FA472-DE0B-9C11-7074-251D2B33E68D}"/>
+              </a:ext>
+            </a:extLst>
+          </p:cNvPr>
+          <p:cNvSpPr txBox="1">
+            <a:spLocks/>
+          </p:cNvSpPr>
+          <p:nvPr/>
+        </p:nvSpPr>
+        <p:spPr>
+          <a:xfrm>
+            <a:off x="355600" y="546100"/>
+            <a:ext cx="11506200" cy="488949"/>
+          </a:xfrm>
+          <a:prstGeom prst="rect">
+            <a:avLst/>
+          </a:prstGeom>
+        </p:spPr>
+        <p:txBody>
+          <a:bodyPr vert="horz" lIns="91440" tIns="45720" rIns="91440" bIns="45720" rtlCol="0" anchor="ctr">
+            <a:noAutofit/>
+          </a:bodyPr>
+          <a:lstStyle>
+            <a:lvl1pPr algn="l" defTabSz="914400" rtl="0" eaLnBrk="1" latinLnBrk="0" hangingPunct="1">
+              <a:lnSpc>
+                <a:spcPct val="90000"/>
+              </a:lnSpc>
+              <a:spcBef>
+                <a:spcPct val="0"/>
+              </a:spcBef>
+              <a:buNone/>
+              <a:defRPr kumimoji="1" sz="1400" kern="1200">
+                <a:solidFill>
+                  <a:schemeClr val="tx1"/>
+                </a:solidFill>
+                <a:latin typeface="+mj-lt"/>
+                <a:ea typeface="+mj-ea"/>
+                <a:cs typeface="+mj-cs"/>
+              </a:defRPr>
+            </a:lvl1pPr>
+          </a:lstStyle>
+          <a:p>
+            <a:r>
+              <a:rPr lang="ja-JP" altLang="en-US" dirty="0"/>
+              <a:t>ツリー</a:t>
+            </a:r>
+            <a:endParaRPr lang="en-US" altLang="ja-JP" dirty="0"/>
+          </a:p>
+        </p:txBody>
+      </p:sp>
+      <p:sp>
+        <p:nvSpPr>
+          <p:cNvPr id="5" name="タイトル プレースホルダー 1">
+            <a:extLst>
+              <a:ext uri="{FF2B5EF4-FFF2-40B4-BE49-F238E27FC236}">
+                <a16:creationId xmlns:a16="http://schemas.microsoft.com/office/drawing/2014/main" id="{C06EAEDA-0E19-FEF0-681E-3BA0927BCE89}"/>
+              </a:ext>
+            </a:extLst>
+          </p:cNvPr>
+          <p:cNvSpPr txBox="1">
+            <a:spLocks/>
+          </p:cNvSpPr>
+          <p:nvPr/>
+        </p:nvSpPr>
+        <p:spPr>
+          <a:xfrm>
+            <a:off x="7541442" y="2146304"/>
+            <a:ext cx="4320357" cy="4165584"/>
+          </a:xfrm>
+          <a:prstGeom prst="rect">
+            <a:avLst/>
+          </a:prstGeom>
+        </p:spPr>
+        <p:txBody>
+          <a:bodyPr vert="horz" lIns="91440" tIns="45720" rIns="91440" bIns="45720" rtlCol="0" anchor="t" anchorCtr="0">
+            <a:noAutofit/>
+          </a:bodyPr>
+          <a:lstStyle>
+            <a:lvl1pPr algn="l" defTabSz="914400" rtl="0" eaLnBrk="1" latinLnBrk="0" hangingPunct="1">
+              <a:lnSpc>
+                <a:spcPct val="90000"/>
+              </a:lnSpc>
+              <a:spcBef>
+                <a:spcPct val="0"/>
+              </a:spcBef>
+              <a:buNone/>
+              <a:defRPr kumimoji="1" sz="1400" kern="1200">
+                <a:solidFill>
+                  <a:schemeClr val="tx1"/>
+                </a:solidFill>
+                <a:latin typeface="+mj-lt"/>
+                <a:ea typeface="+mj-ea"/>
+                <a:cs typeface="+mj-cs"/>
+              </a:defRPr>
+            </a:lvl1pPr>
+          </a:lstStyle>
+          <a:p>
+            <a:pPr marL="285750" indent="-285750">
+              <a:buFont typeface="Arial" panose="020B0604020202020204" pitchFamily="34" charset="0"/>
+              <a:buChar char="•"/>
+            </a:pPr>
+            <a:r>
               <a:rPr lang="ja-JP" altLang="en-US" sz="1800" dirty="0"/>
               <a:t>課題・施策の分解</a:t>
             </a:r>
@@ -19848,7 +21379,7 @@
 </p:sld>
 </file>
 
-<file path=ppt/slides/slide7.xml><?xml version="1.0" encoding="utf-8"?>
+<file path=ppt/slides/slide9.xml><?xml version="1.0" encoding="utf-8"?>
 <p:sld xmlns:a="http://schemas.openxmlformats.org/drawingml/2006/main" xmlns:r="http://schemas.openxmlformats.org/officeDocument/2006/relationships" xmlns:p="http://schemas.openxmlformats.org/presentationml/2006/main">
   <p:cSld>
     <p:spTree>
@@ -20282,1308 +21813,6 @@
     <p:extLst>
       <p:ext uri="{BB962C8B-B14F-4D97-AF65-F5344CB8AC3E}">
         <p14:creationId xmlns:p14="http://schemas.microsoft.com/office/powerpoint/2010/main" val="11201252"/>
-      </p:ext>
-    </p:extLst>
-  </p:cSld>
-  <p:clrMapOvr>
-    <a:masterClrMapping/>
-  </p:clrMapOvr>
-</p:sld>
-</file>
-
-<file path=ppt/slides/slide8.xml><?xml version="1.0" encoding="utf-8"?>
-<p:sld xmlns:a="http://schemas.openxmlformats.org/drawingml/2006/main" xmlns:r="http://schemas.openxmlformats.org/officeDocument/2006/relationships" xmlns:p="http://schemas.openxmlformats.org/presentationml/2006/main">
-  <p:cSld>
-    <p:spTree>
-      <p:nvGrpSpPr>
-        <p:cNvPr id="1" name="">
-          <a:extLst>
-            <a:ext uri="{FF2B5EF4-FFF2-40B4-BE49-F238E27FC236}">
-              <a16:creationId xmlns:a16="http://schemas.microsoft.com/office/drawing/2014/main" id="{2C420F8D-7D6F-BCB1-D834-4BE64B402FEC}"/>
-            </a:ext>
-          </a:extLst>
-        </p:cNvPr>
-        <p:cNvGrpSpPr/>
-        <p:nvPr/>
-      </p:nvGrpSpPr>
-      <p:grpSpPr>
-        <a:xfrm>
-          <a:off x="0" y="0"/>
-          <a:ext cx="0" cy="0"/>
-          <a:chOff x="0" y="0"/>
-          <a:chExt cx="0" cy="0"/>
-        </a:xfrm>
-      </p:grpSpPr>
-      <p:cxnSp>
-        <p:nvCxnSpPr>
-          <p:cNvPr id="2" name="直線コネクタ 1">
-            <a:extLst>
-              <a:ext uri="{FF2B5EF4-FFF2-40B4-BE49-F238E27FC236}">
-                <a16:creationId xmlns:a16="http://schemas.microsoft.com/office/drawing/2014/main" id="{312A614B-B7E1-66F3-93FC-7C68EADC4B92}"/>
-              </a:ext>
-            </a:extLst>
-          </p:cNvPr>
-          <p:cNvCxnSpPr>
-            <a:cxnSpLocks/>
-          </p:cNvCxnSpPr>
-          <p:nvPr/>
-        </p:nvCxnSpPr>
-        <p:spPr>
-          <a:xfrm>
-            <a:off x="0" y="1993900"/>
-            <a:ext cx="12192000" cy="0"/>
-          </a:xfrm>
-          <a:prstGeom prst="line">
-            <a:avLst/>
-          </a:prstGeom>
-          <a:ln w="38100"/>
-        </p:spPr>
-        <p:style>
-          <a:lnRef idx="2">
-            <a:schemeClr val="accent1"/>
-          </a:lnRef>
-          <a:fillRef idx="0">
-            <a:schemeClr val="accent1"/>
-          </a:fillRef>
-          <a:effectRef idx="1">
-            <a:schemeClr val="accent1"/>
-          </a:effectRef>
-          <a:fontRef idx="minor">
-            <a:schemeClr val="tx1"/>
-          </a:fontRef>
-        </p:style>
-      </p:cxnSp>
-      <p:sp>
-        <p:nvSpPr>
-          <p:cNvPr id="3" name="タイトル プレースホルダー 1">
-            <a:extLst>
-              <a:ext uri="{FF2B5EF4-FFF2-40B4-BE49-F238E27FC236}">
-                <a16:creationId xmlns:a16="http://schemas.microsoft.com/office/drawing/2014/main" id="{4EC22920-18AF-5F05-1FBD-345A4F58CB6A}"/>
-              </a:ext>
-            </a:extLst>
-          </p:cNvPr>
-          <p:cNvSpPr txBox="1">
-            <a:spLocks/>
-          </p:cNvSpPr>
-          <p:nvPr/>
-        </p:nvSpPr>
-        <p:spPr>
-          <a:xfrm>
-            <a:off x="355600" y="1108076"/>
-            <a:ext cx="11506200" cy="812797"/>
-          </a:xfrm>
-          <a:prstGeom prst="rect">
-            <a:avLst/>
-          </a:prstGeom>
-        </p:spPr>
-        <p:txBody>
-          <a:bodyPr vert="horz" lIns="91440" tIns="45720" rIns="91440" bIns="45720" rtlCol="0" anchor="ctr">
-            <a:noAutofit/>
-          </a:bodyPr>
-          <a:lstStyle>
-            <a:lvl1pPr algn="l" defTabSz="914400" rtl="0" eaLnBrk="1" latinLnBrk="0" hangingPunct="1">
-              <a:lnSpc>
-                <a:spcPct val="90000"/>
-              </a:lnSpc>
-              <a:spcBef>
-                <a:spcPct val="0"/>
-              </a:spcBef>
-              <a:buNone/>
-              <a:defRPr kumimoji="1" sz="1400" kern="1200">
-                <a:solidFill>
-                  <a:schemeClr val="tx1"/>
-                </a:solidFill>
-                <a:latin typeface="+mj-lt"/>
-                <a:ea typeface="+mj-ea"/>
-                <a:cs typeface="+mj-cs"/>
-              </a:defRPr>
-            </a:lvl1pPr>
-          </a:lstStyle>
-          <a:p>
-            <a:r>
-              <a:rPr lang="ja-JP" altLang="en-US" sz="2800" dirty="0"/>
-              <a:t>リード文</a:t>
-            </a:r>
-            <a:endParaRPr lang="en-US" altLang="ja-JP" sz="2800" dirty="0"/>
-          </a:p>
-          <a:p>
-            <a:r>
-              <a:rPr lang="en-US" altLang="ja-JP" sz="2800" dirty="0"/>
-              <a:t>2</a:t>
-            </a:r>
-            <a:r>
-              <a:rPr lang="ja-JP" altLang="en-US" sz="2800" dirty="0"/>
-              <a:t>行に収まる程度で</a:t>
-            </a:r>
-            <a:endParaRPr lang="en-US" altLang="ja-JP" sz="2800" dirty="0"/>
-          </a:p>
-        </p:txBody>
-      </p:sp>
-      <p:sp>
-        <p:nvSpPr>
-          <p:cNvPr id="4" name="タイトル プレースホルダー 1">
-            <a:extLst>
-              <a:ext uri="{FF2B5EF4-FFF2-40B4-BE49-F238E27FC236}">
-                <a16:creationId xmlns:a16="http://schemas.microsoft.com/office/drawing/2014/main" id="{95AD810E-CD8B-A60F-D611-073BB01B4C10}"/>
-              </a:ext>
-            </a:extLst>
-          </p:cNvPr>
-          <p:cNvSpPr txBox="1">
-            <a:spLocks/>
-          </p:cNvSpPr>
-          <p:nvPr/>
-        </p:nvSpPr>
-        <p:spPr>
-          <a:xfrm>
-            <a:off x="355600" y="546100"/>
-            <a:ext cx="11506200" cy="488949"/>
-          </a:xfrm>
-          <a:prstGeom prst="rect">
-            <a:avLst/>
-          </a:prstGeom>
-        </p:spPr>
-        <p:txBody>
-          <a:bodyPr vert="horz" lIns="91440" tIns="45720" rIns="91440" bIns="45720" rtlCol="0" anchor="ctr">
-            <a:noAutofit/>
-          </a:bodyPr>
-          <a:lstStyle>
-            <a:lvl1pPr algn="l" defTabSz="914400" rtl="0" eaLnBrk="1" latinLnBrk="0" hangingPunct="1">
-              <a:lnSpc>
-                <a:spcPct val="90000"/>
-              </a:lnSpc>
-              <a:spcBef>
-                <a:spcPct val="0"/>
-              </a:spcBef>
-              <a:buNone/>
-              <a:defRPr kumimoji="1" sz="1400" kern="1200">
-                <a:solidFill>
-                  <a:schemeClr val="tx1"/>
-                </a:solidFill>
-                <a:latin typeface="+mj-lt"/>
-                <a:ea typeface="+mj-ea"/>
-                <a:cs typeface="+mj-cs"/>
-              </a:defRPr>
-            </a:lvl1pPr>
-          </a:lstStyle>
-          <a:p>
-            <a:r>
-              <a:rPr lang="ja-JP" altLang="en-US" dirty="0"/>
-              <a:t>目次内のタイトル名そのまま</a:t>
-            </a:r>
-            <a:endParaRPr lang="en-US" altLang="ja-JP" dirty="0"/>
-          </a:p>
-        </p:txBody>
-      </p:sp>
-      <p:sp>
-        <p:nvSpPr>
-          <p:cNvPr id="6" name="タイトル プレースホルダー 1">
-            <a:extLst>
-              <a:ext uri="{FF2B5EF4-FFF2-40B4-BE49-F238E27FC236}">
-                <a16:creationId xmlns:a16="http://schemas.microsoft.com/office/drawing/2014/main" id="{1A28CD4B-8D98-6C58-B926-910BBD3D40C2}"/>
-              </a:ext>
-            </a:extLst>
-          </p:cNvPr>
-          <p:cNvSpPr txBox="1">
-            <a:spLocks/>
-          </p:cNvSpPr>
-          <p:nvPr/>
-        </p:nvSpPr>
-        <p:spPr>
-          <a:xfrm>
-            <a:off x="7541442" y="2146304"/>
-            <a:ext cx="4320357" cy="4165584"/>
-          </a:xfrm>
-          <a:prstGeom prst="rect">
-            <a:avLst/>
-          </a:prstGeom>
-        </p:spPr>
-        <p:txBody>
-          <a:bodyPr vert="horz" lIns="91440" tIns="45720" rIns="91440" bIns="45720" rtlCol="0" anchor="t" anchorCtr="0">
-            <a:noAutofit/>
-          </a:bodyPr>
-          <a:lstStyle>
-            <a:lvl1pPr algn="l" defTabSz="914400" rtl="0" eaLnBrk="1" latinLnBrk="0" hangingPunct="1">
-              <a:lnSpc>
-                <a:spcPct val="90000"/>
-              </a:lnSpc>
-              <a:spcBef>
-                <a:spcPct val="0"/>
-              </a:spcBef>
-              <a:buNone/>
-              <a:defRPr kumimoji="1" sz="1400" kern="1200">
-                <a:solidFill>
-                  <a:schemeClr val="tx1"/>
-                </a:solidFill>
-                <a:latin typeface="+mj-lt"/>
-                <a:ea typeface="+mj-ea"/>
-                <a:cs typeface="+mj-cs"/>
-              </a:defRPr>
-            </a:lvl1pPr>
-          </a:lstStyle>
-          <a:p>
-            <a:pPr marL="285750" indent="-285750">
-              <a:buFont typeface="Arial" panose="020B0604020202020204" pitchFamily="34" charset="0"/>
-              <a:buChar char="•"/>
-            </a:pPr>
-            <a:r>
-              <a:rPr lang="ja-JP" altLang="en-US" sz="1800" dirty="0"/>
-              <a:t>課題・施策分解</a:t>
-            </a:r>
-            <a:br>
-              <a:rPr lang="en-US" altLang="ja-JP" sz="1800" dirty="0"/>
-            </a:br>
-            <a:r>
-              <a:rPr lang="ja-JP" altLang="en-US" sz="1800" dirty="0"/>
-              <a:t>（因果関係があるとき）</a:t>
-            </a:r>
-            <a:endParaRPr lang="en-US" altLang="ja-JP" sz="1800" dirty="0"/>
-          </a:p>
-          <a:p>
-            <a:endParaRPr lang="en-US" altLang="ja-JP" sz="1800" dirty="0"/>
-          </a:p>
-          <a:p>
-            <a:endParaRPr lang="en-US" altLang="ja-JP" sz="1800" dirty="0"/>
-          </a:p>
-          <a:p>
-            <a:endParaRPr lang="en-US" altLang="ja-JP" sz="1800" dirty="0"/>
-          </a:p>
-          <a:p>
-            <a:endParaRPr lang="en-US" altLang="ja-JP" sz="1800" dirty="0"/>
-          </a:p>
-        </p:txBody>
-      </p:sp>
-      <p:sp>
-        <p:nvSpPr>
-          <p:cNvPr id="7" name="正方形/長方形 6">
-            <a:extLst>
-              <a:ext uri="{FF2B5EF4-FFF2-40B4-BE49-F238E27FC236}">
-                <a16:creationId xmlns:a16="http://schemas.microsoft.com/office/drawing/2014/main" id="{8FBACA13-C4C3-ADA5-D958-247C482FF7CC}"/>
-              </a:ext>
-            </a:extLst>
-          </p:cNvPr>
-          <p:cNvSpPr/>
-          <p:nvPr/>
-        </p:nvSpPr>
-        <p:spPr>
-          <a:xfrm>
-            <a:off x="355599" y="3869639"/>
-            <a:ext cx="1605175" cy="718913"/>
-          </a:xfrm>
-          <a:prstGeom prst="rect">
-            <a:avLst/>
-          </a:prstGeom>
-          <a:solidFill>
-            <a:schemeClr val="accent1">
-              <a:lumMod val="20000"/>
-              <a:lumOff val="80000"/>
-            </a:schemeClr>
-          </a:solidFill>
-          <a:ln>
-            <a:noFill/>
-          </a:ln>
-        </p:spPr>
-        <p:style>
-          <a:lnRef idx="2">
-            <a:schemeClr val="accent1">
-              <a:shade val="15000"/>
-            </a:schemeClr>
-          </a:lnRef>
-          <a:fillRef idx="1">
-            <a:schemeClr val="accent1"/>
-          </a:fillRef>
-          <a:effectRef idx="0">
-            <a:schemeClr val="accent1"/>
-          </a:effectRef>
-          <a:fontRef idx="minor">
-            <a:schemeClr val="lt1"/>
-          </a:fontRef>
-        </p:style>
-        <p:txBody>
-          <a:bodyPr rtlCol="0" anchor="ctr"/>
-          <a:lstStyle/>
-          <a:p>
-            <a:pPr algn="ctr"/>
-            <a:r>
-              <a:rPr kumimoji="1" lang="ja-JP" altLang="en-US" sz="1400" dirty="0">
-                <a:solidFill>
-                  <a:schemeClr val="tx1">
-                    <a:lumMod val="75000"/>
-                  </a:schemeClr>
-                </a:solidFill>
-              </a:rPr>
-              <a:t>コメント</a:t>
-            </a:r>
-          </a:p>
-        </p:txBody>
-      </p:sp>
-      <p:sp>
-        <p:nvSpPr>
-          <p:cNvPr id="8" name="正方形/長方形 7">
-            <a:extLst>
-              <a:ext uri="{FF2B5EF4-FFF2-40B4-BE49-F238E27FC236}">
-                <a16:creationId xmlns:a16="http://schemas.microsoft.com/office/drawing/2014/main" id="{C1E093C0-7AB5-C963-456C-CE98FF74E293}"/>
-              </a:ext>
-            </a:extLst>
-          </p:cNvPr>
-          <p:cNvSpPr/>
-          <p:nvPr/>
-        </p:nvSpPr>
-        <p:spPr>
-          <a:xfrm>
-            <a:off x="2193826" y="2710087"/>
-            <a:ext cx="1605175" cy="718913"/>
-          </a:xfrm>
-          <a:prstGeom prst="rect">
-            <a:avLst/>
-          </a:prstGeom>
-          <a:solidFill>
-            <a:schemeClr val="accent1">
-              <a:lumMod val="20000"/>
-              <a:lumOff val="80000"/>
-            </a:schemeClr>
-          </a:solidFill>
-          <a:ln>
-            <a:noFill/>
-          </a:ln>
-        </p:spPr>
-        <p:style>
-          <a:lnRef idx="2">
-            <a:schemeClr val="accent1">
-              <a:shade val="15000"/>
-            </a:schemeClr>
-          </a:lnRef>
-          <a:fillRef idx="1">
-            <a:schemeClr val="accent1"/>
-          </a:fillRef>
-          <a:effectRef idx="0">
-            <a:schemeClr val="accent1"/>
-          </a:effectRef>
-          <a:fontRef idx="minor">
-            <a:schemeClr val="lt1"/>
-          </a:fontRef>
-        </p:style>
-        <p:txBody>
-          <a:bodyPr rtlCol="0" anchor="ctr"/>
-          <a:lstStyle/>
-          <a:p>
-            <a:pPr algn="ctr"/>
-            <a:r>
-              <a:rPr kumimoji="1" lang="ja-JP" altLang="en-US" sz="1400" dirty="0">
-                <a:solidFill>
-                  <a:schemeClr val="tx1">
-                    <a:lumMod val="75000"/>
-                  </a:schemeClr>
-                </a:solidFill>
-              </a:rPr>
-              <a:t>コメント</a:t>
-            </a:r>
-          </a:p>
-        </p:txBody>
-      </p:sp>
-      <p:sp>
-        <p:nvSpPr>
-          <p:cNvPr id="9" name="正方形/長方形 8">
-            <a:extLst>
-              <a:ext uri="{FF2B5EF4-FFF2-40B4-BE49-F238E27FC236}">
-                <a16:creationId xmlns:a16="http://schemas.microsoft.com/office/drawing/2014/main" id="{1510F148-CC65-E1B6-A1AD-621048BCA661}"/>
-              </a:ext>
-            </a:extLst>
-          </p:cNvPr>
-          <p:cNvSpPr/>
-          <p:nvPr/>
-        </p:nvSpPr>
-        <p:spPr>
-          <a:xfrm>
-            <a:off x="4220589" y="3869639"/>
-            <a:ext cx="1605175" cy="718913"/>
-          </a:xfrm>
-          <a:prstGeom prst="rect">
-            <a:avLst/>
-          </a:prstGeom>
-          <a:solidFill>
-            <a:schemeClr val="accent1">
-              <a:lumMod val="20000"/>
-              <a:lumOff val="80000"/>
-            </a:schemeClr>
-          </a:solidFill>
-          <a:ln>
-            <a:noFill/>
-          </a:ln>
-        </p:spPr>
-        <p:style>
-          <a:lnRef idx="2">
-            <a:schemeClr val="accent1">
-              <a:shade val="15000"/>
-            </a:schemeClr>
-          </a:lnRef>
-          <a:fillRef idx="1">
-            <a:schemeClr val="accent1"/>
-          </a:fillRef>
-          <a:effectRef idx="0">
-            <a:schemeClr val="accent1"/>
-          </a:effectRef>
-          <a:fontRef idx="minor">
-            <a:schemeClr val="lt1"/>
-          </a:fontRef>
-        </p:style>
-        <p:txBody>
-          <a:bodyPr rtlCol="0" anchor="ctr"/>
-          <a:lstStyle/>
-          <a:p>
-            <a:pPr algn="ctr"/>
-            <a:r>
-              <a:rPr kumimoji="1" lang="ja-JP" altLang="en-US" sz="1400" dirty="0">
-                <a:solidFill>
-                  <a:schemeClr val="tx1">
-                    <a:lumMod val="75000"/>
-                  </a:schemeClr>
-                </a:solidFill>
-              </a:rPr>
-              <a:t>コメント</a:t>
-            </a:r>
-          </a:p>
-        </p:txBody>
-      </p:sp>
-      <p:sp>
-        <p:nvSpPr>
-          <p:cNvPr id="10" name="正方形/長方形 9">
-            <a:extLst>
-              <a:ext uri="{FF2B5EF4-FFF2-40B4-BE49-F238E27FC236}">
-                <a16:creationId xmlns:a16="http://schemas.microsoft.com/office/drawing/2014/main" id="{7A6F9553-D4E5-65E4-38F5-AA12FDA2DD31}"/>
-              </a:ext>
-            </a:extLst>
-          </p:cNvPr>
-          <p:cNvSpPr/>
-          <p:nvPr/>
-        </p:nvSpPr>
-        <p:spPr>
-          <a:xfrm>
-            <a:off x="2193826" y="5151630"/>
-            <a:ext cx="1605175" cy="718913"/>
-          </a:xfrm>
-          <a:prstGeom prst="rect">
-            <a:avLst/>
-          </a:prstGeom>
-          <a:solidFill>
-            <a:schemeClr val="accent1">
-              <a:lumMod val="20000"/>
-              <a:lumOff val="80000"/>
-            </a:schemeClr>
-          </a:solidFill>
-          <a:ln>
-            <a:noFill/>
-          </a:ln>
-        </p:spPr>
-        <p:style>
-          <a:lnRef idx="2">
-            <a:schemeClr val="accent1">
-              <a:shade val="15000"/>
-            </a:schemeClr>
-          </a:lnRef>
-          <a:fillRef idx="1">
-            <a:schemeClr val="accent1"/>
-          </a:fillRef>
-          <a:effectRef idx="0">
-            <a:schemeClr val="accent1"/>
-          </a:effectRef>
-          <a:fontRef idx="minor">
-            <a:schemeClr val="lt1"/>
-          </a:fontRef>
-        </p:style>
-        <p:txBody>
-          <a:bodyPr rtlCol="0" anchor="ctr"/>
-          <a:lstStyle/>
-          <a:p>
-            <a:pPr algn="ctr"/>
-            <a:r>
-              <a:rPr kumimoji="1" lang="ja-JP" altLang="en-US" sz="1400" dirty="0">
-                <a:solidFill>
-                  <a:schemeClr val="tx1">
-                    <a:lumMod val="75000"/>
-                  </a:schemeClr>
-                </a:solidFill>
-              </a:rPr>
-              <a:t>コメント</a:t>
-            </a:r>
-          </a:p>
-        </p:txBody>
-      </p:sp>
-      <p:sp>
-        <p:nvSpPr>
-          <p:cNvPr id="11" name="正方形/長方形 10">
-            <a:extLst>
-              <a:ext uri="{FF2B5EF4-FFF2-40B4-BE49-F238E27FC236}">
-                <a16:creationId xmlns:a16="http://schemas.microsoft.com/office/drawing/2014/main" id="{399197AE-1B1E-ECF2-0D53-C4C96DDF5D1F}"/>
-              </a:ext>
-            </a:extLst>
-          </p:cNvPr>
-          <p:cNvSpPr/>
-          <p:nvPr/>
-        </p:nvSpPr>
-        <p:spPr>
-          <a:xfrm>
-            <a:off x="5332952" y="5255327"/>
-            <a:ext cx="1605175" cy="718913"/>
-          </a:xfrm>
-          <a:prstGeom prst="rect">
-            <a:avLst/>
-          </a:prstGeom>
-          <a:solidFill>
-            <a:schemeClr val="accent1">
-              <a:lumMod val="20000"/>
-              <a:lumOff val="80000"/>
-            </a:schemeClr>
-          </a:solidFill>
-          <a:ln>
-            <a:noFill/>
-          </a:ln>
-        </p:spPr>
-        <p:style>
-          <a:lnRef idx="2">
-            <a:schemeClr val="accent1">
-              <a:shade val="15000"/>
-            </a:schemeClr>
-          </a:lnRef>
-          <a:fillRef idx="1">
-            <a:schemeClr val="accent1"/>
-          </a:fillRef>
-          <a:effectRef idx="0">
-            <a:schemeClr val="accent1"/>
-          </a:effectRef>
-          <a:fontRef idx="minor">
-            <a:schemeClr val="lt1"/>
-          </a:fontRef>
-        </p:style>
-        <p:txBody>
-          <a:bodyPr rtlCol="0" anchor="ctr"/>
-          <a:lstStyle/>
-          <a:p>
-            <a:pPr algn="ctr"/>
-            <a:r>
-              <a:rPr kumimoji="1" lang="ja-JP" altLang="en-US" sz="1400" dirty="0">
-                <a:solidFill>
-                  <a:schemeClr val="tx1">
-                    <a:lumMod val="75000"/>
-                  </a:schemeClr>
-                </a:solidFill>
-              </a:rPr>
-              <a:t>コメント</a:t>
-            </a:r>
-          </a:p>
-        </p:txBody>
-      </p:sp>
-      <p:cxnSp>
-        <p:nvCxnSpPr>
-          <p:cNvPr id="13" name="コネクタ: カギ線 12">
-            <a:extLst>
-              <a:ext uri="{FF2B5EF4-FFF2-40B4-BE49-F238E27FC236}">
-                <a16:creationId xmlns:a16="http://schemas.microsoft.com/office/drawing/2014/main" id="{AD30A600-E26A-A185-3EB8-6F5D87B8AC18}"/>
-              </a:ext>
-            </a:extLst>
-          </p:cNvPr>
-          <p:cNvCxnSpPr>
-            <a:stCxn id="7" idx="0"/>
-            <a:endCxn id="8" idx="1"/>
-          </p:cNvCxnSpPr>
-          <p:nvPr/>
-        </p:nvCxnSpPr>
-        <p:spPr>
-          <a:xfrm rot="5400000" flipH="1" flipV="1">
-            <a:off x="1275959" y="2951773"/>
-            <a:ext cx="800095" cy="1035639"/>
-          </a:xfrm>
-          <a:prstGeom prst="bentConnector2">
-            <a:avLst/>
-          </a:prstGeom>
-          <a:ln>
-            <a:tailEnd type="triangle"/>
-          </a:ln>
-        </p:spPr>
-        <p:style>
-          <a:lnRef idx="2">
-            <a:schemeClr val="accent1"/>
-          </a:lnRef>
-          <a:fillRef idx="0">
-            <a:schemeClr val="accent1"/>
-          </a:fillRef>
-          <a:effectRef idx="1">
-            <a:schemeClr val="accent1"/>
-          </a:effectRef>
-          <a:fontRef idx="minor">
-            <a:schemeClr val="tx1"/>
-          </a:fontRef>
-        </p:style>
-      </p:cxnSp>
-      <p:cxnSp>
-        <p:nvCxnSpPr>
-          <p:cNvPr id="15" name="コネクタ: カギ線 14">
-            <a:extLst>
-              <a:ext uri="{FF2B5EF4-FFF2-40B4-BE49-F238E27FC236}">
-                <a16:creationId xmlns:a16="http://schemas.microsoft.com/office/drawing/2014/main" id="{D6935BB0-5E93-1FBF-00CE-5E78DCB80AAF}"/>
-              </a:ext>
-            </a:extLst>
-          </p:cNvPr>
-          <p:cNvCxnSpPr>
-            <a:stCxn id="8" idx="3"/>
-            <a:endCxn id="9" idx="0"/>
-          </p:cNvCxnSpPr>
-          <p:nvPr/>
-        </p:nvCxnSpPr>
-        <p:spPr>
-          <a:xfrm>
-            <a:off x="3799001" y="3069544"/>
-            <a:ext cx="1224176" cy="800095"/>
-          </a:xfrm>
-          <a:prstGeom prst="bentConnector2">
-            <a:avLst/>
-          </a:prstGeom>
-          <a:ln>
-            <a:tailEnd type="triangle"/>
-          </a:ln>
-        </p:spPr>
-        <p:style>
-          <a:lnRef idx="2">
-            <a:schemeClr val="accent1"/>
-          </a:lnRef>
-          <a:fillRef idx="0">
-            <a:schemeClr val="accent1"/>
-          </a:fillRef>
-          <a:effectRef idx="1">
-            <a:schemeClr val="accent1"/>
-          </a:effectRef>
-          <a:fontRef idx="minor">
-            <a:schemeClr val="tx1"/>
-          </a:fontRef>
-        </p:style>
-      </p:cxnSp>
-      <p:cxnSp>
-        <p:nvCxnSpPr>
-          <p:cNvPr id="17" name="コネクタ: カギ線 16">
-            <a:extLst>
-              <a:ext uri="{FF2B5EF4-FFF2-40B4-BE49-F238E27FC236}">
-                <a16:creationId xmlns:a16="http://schemas.microsoft.com/office/drawing/2014/main" id="{E5DED94B-2B7B-1C12-F9C9-6AEBD9651D68}"/>
-              </a:ext>
-            </a:extLst>
-          </p:cNvPr>
-          <p:cNvCxnSpPr>
-            <a:stCxn id="10" idx="1"/>
-            <a:endCxn id="7" idx="2"/>
-          </p:cNvCxnSpPr>
-          <p:nvPr/>
-        </p:nvCxnSpPr>
-        <p:spPr>
-          <a:xfrm rot="10800000">
-            <a:off x="1158188" y="4588553"/>
-            <a:ext cx="1035639" cy="922535"/>
-          </a:xfrm>
-          <a:prstGeom prst="bentConnector2">
-            <a:avLst/>
-          </a:prstGeom>
-          <a:ln>
-            <a:tailEnd type="triangle"/>
-          </a:ln>
-        </p:spPr>
-        <p:style>
-          <a:lnRef idx="2">
-            <a:schemeClr val="accent1"/>
-          </a:lnRef>
-          <a:fillRef idx="0">
-            <a:schemeClr val="accent1"/>
-          </a:fillRef>
-          <a:effectRef idx="1">
-            <a:schemeClr val="accent1"/>
-          </a:effectRef>
-          <a:fontRef idx="minor">
-            <a:schemeClr val="tx1"/>
-          </a:fontRef>
-        </p:style>
-      </p:cxnSp>
-      <p:cxnSp>
-        <p:nvCxnSpPr>
-          <p:cNvPr id="19" name="コネクタ: カギ線 18">
-            <a:extLst>
-              <a:ext uri="{FF2B5EF4-FFF2-40B4-BE49-F238E27FC236}">
-                <a16:creationId xmlns:a16="http://schemas.microsoft.com/office/drawing/2014/main" id="{64192DD3-D1F4-C045-168A-E3DDCC4CA542}"/>
-              </a:ext>
-            </a:extLst>
-          </p:cNvPr>
-          <p:cNvCxnSpPr>
-            <a:stCxn id="10" idx="3"/>
-            <a:endCxn id="9" idx="2"/>
-          </p:cNvCxnSpPr>
-          <p:nvPr/>
-        </p:nvCxnSpPr>
-        <p:spPr>
-          <a:xfrm flipV="1">
-            <a:off x="3799001" y="4588552"/>
-            <a:ext cx="1224176" cy="922535"/>
-          </a:xfrm>
-          <a:prstGeom prst="bentConnector2">
-            <a:avLst/>
-          </a:prstGeom>
-          <a:ln>
-            <a:tailEnd type="triangle"/>
-          </a:ln>
-        </p:spPr>
-        <p:style>
-          <a:lnRef idx="2">
-            <a:schemeClr val="accent1"/>
-          </a:lnRef>
-          <a:fillRef idx="0">
-            <a:schemeClr val="accent1"/>
-          </a:fillRef>
-          <a:effectRef idx="1">
-            <a:schemeClr val="accent1"/>
-          </a:effectRef>
-          <a:fontRef idx="minor">
-            <a:schemeClr val="tx1"/>
-          </a:fontRef>
-        </p:style>
-      </p:cxnSp>
-      <p:cxnSp>
-        <p:nvCxnSpPr>
-          <p:cNvPr id="21" name="コネクタ: カギ線 20">
-            <a:extLst>
-              <a:ext uri="{FF2B5EF4-FFF2-40B4-BE49-F238E27FC236}">
-                <a16:creationId xmlns:a16="http://schemas.microsoft.com/office/drawing/2014/main" id="{08F557FD-AD71-DEEE-AF2F-EDFEE78E6D1D}"/>
-              </a:ext>
-            </a:extLst>
-          </p:cNvPr>
-          <p:cNvCxnSpPr>
-            <a:stCxn id="9" idx="3"/>
-            <a:endCxn id="11" idx="0"/>
-          </p:cNvCxnSpPr>
-          <p:nvPr/>
-        </p:nvCxnSpPr>
-        <p:spPr>
-          <a:xfrm>
-            <a:off x="5825764" y="4229096"/>
-            <a:ext cx="309776" cy="1026231"/>
-          </a:xfrm>
-          <a:prstGeom prst="bentConnector2">
-            <a:avLst/>
-          </a:prstGeom>
-          <a:ln>
-            <a:tailEnd type="triangle"/>
-          </a:ln>
-        </p:spPr>
-        <p:style>
-          <a:lnRef idx="2">
-            <a:schemeClr val="accent1"/>
-          </a:lnRef>
-          <a:fillRef idx="0">
-            <a:schemeClr val="accent1"/>
-          </a:fillRef>
-          <a:effectRef idx="1">
-            <a:schemeClr val="accent1"/>
-          </a:effectRef>
-          <a:fontRef idx="minor">
-            <a:schemeClr val="tx1"/>
-          </a:fontRef>
-        </p:style>
-      </p:cxnSp>
-      <p:cxnSp>
-        <p:nvCxnSpPr>
-          <p:cNvPr id="23" name="コネクタ: カギ線 22">
-            <a:extLst>
-              <a:ext uri="{FF2B5EF4-FFF2-40B4-BE49-F238E27FC236}">
-                <a16:creationId xmlns:a16="http://schemas.microsoft.com/office/drawing/2014/main" id="{4C20A49C-14B3-C7C5-B82D-ED93CFFBD69E}"/>
-              </a:ext>
-            </a:extLst>
-          </p:cNvPr>
-          <p:cNvCxnSpPr>
-            <a:stCxn id="11" idx="2"/>
-            <a:endCxn id="10" idx="2"/>
-          </p:cNvCxnSpPr>
-          <p:nvPr/>
-        </p:nvCxnSpPr>
-        <p:spPr>
-          <a:xfrm rot="5400000" flipH="1">
-            <a:off x="4514128" y="4352829"/>
-            <a:ext cx="103697" cy="3139126"/>
-          </a:xfrm>
-          <a:prstGeom prst="bentConnector3">
-            <a:avLst>
-              <a:gd name="adj1" fmla="val -220450"/>
-            </a:avLst>
-          </a:prstGeom>
-          <a:ln>
-            <a:tailEnd type="triangle"/>
-          </a:ln>
-        </p:spPr>
-        <p:style>
-          <a:lnRef idx="2">
-            <a:schemeClr val="accent1"/>
-          </a:lnRef>
-          <a:fillRef idx="0">
-            <a:schemeClr val="accent1"/>
-          </a:fillRef>
-          <a:effectRef idx="1">
-            <a:schemeClr val="accent1"/>
-          </a:effectRef>
-          <a:fontRef idx="minor">
-            <a:schemeClr val="tx1"/>
-          </a:fontRef>
-        </p:style>
-      </p:cxnSp>
-    </p:spTree>
-    <p:extLst>
-      <p:ext uri="{BB962C8B-B14F-4D97-AF65-F5344CB8AC3E}">
-        <p14:creationId xmlns:p14="http://schemas.microsoft.com/office/powerpoint/2010/main" val="3458348416"/>
-      </p:ext>
-    </p:extLst>
-  </p:cSld>
-  <p:clrMapOvr>
-    <a:masterClrMapping/>
-  </p:clrMapOvr>
-</p:sld>
-</file>
-
-<file path=ppt/slides/slide9.xml><?xml version="1.0" encoding="utf-8"?>
-<p:sld xmlns:a="http://schemas.openxmlformats.org/drawingml/2006/main" xmlns:r="http://schemas.openxmlformats.org/officeDocument/2006/relationships" xmlns:p="http://schemas.openxmlformats.org/presentationml/2006/main">
-  <p:cSld>
-    <p:spTree>
-      <p:nvGrpSpPr>
-        <p:cNvPr id="1" name="">
-          <a:extLst>
-            <a:ext uri="{FF2B5EF4-FFF2-40B4-BE49-F238E27FC236}">
-              <a16:creationId xmlns:a16="http://schemas.microsoft.com/office/drawing/2014/main" id="{33E67403-11C8-0D97-203A-15722E330098}"/>
-            </a:ext>
-          </a:extLst>
-        </p:cNvPr>
-        <p:cNvGrpSpPr/>
-        <p:nvPr/>
-      </p:nvGrpSpPr>
-      <p:grpSpPr>
-        <a:xfrm>
-          <a:off x="0" y="0"/>
-          <a:ext cx="0" cy="0"/>
-          <a:chOff x="0" y="0"/>
-          <a:chExt cx="0" cy="0"/>
-        </a:xfrm>
-      </p:grpSpPr>
-      <p:cxnSp>
-        <p:nvCxnSpPr>
-          <p:cNvPr id="2" name="直線コネクタ 1">
-            <a:extLst>
-              <a:ext uri="{FF2B5EF4-FFF2-40B4-BE49-F238E27FC236}">
-                <a16:creationId xmlns:a16="http://schemas.microsoft.com/office/drawing/2014/main" id="{CC722927-7A2E-9706-0A62-B9E81E31BCB8}"/>
-              </a:ext>
-            </a:extLst>
-          </p:cNvPr>
-          <p:cNvCxnSpPr>
-            <a:cxnSpLocks/>
-          </p:cNvCxnSpPr>
-          <p:nvPr/>
-        </p:nvCxnSpPr>
-        <p:spPr>
-          <a:xfrm>
-            <a:off x="0" y="1993900"/>
-            <a:ext cx="12192000" cy="0"/>
-          </a:xfrm>
-          <a:prstGeom prst="line">
-            <a:avLst/>
-          </a:prstGeom>
-          <a:ln w="38100"/>
-        </p:spPr>
-        <p:style>
-          <a:lnRef idx="2">
-            <a:schemeClr val="accent1"/>
-          </a:lnRef>
-          <a:fillRef idx="0">
-            <a:schemeClr val="accent1"/>
-          </a:fillRef>
-          <a:effectRef idx="1">
-            <a:schemeClr val="accent1"/>
-          </a:effectRef>
-          <a:fontRef idx="minor">
-            <a:schemeClr val="tx1"/>
-          </a:fontRef>
-        </p:style>
-      </p:cxnSp>
-      <p:sp>
-        <p:nvSpPr>
-          <p:cNvPr id="3" name="タイトル プレースホルダー 1">
-            <a:extLst>
-              <a:ext uri="{FF2B5EF4-FFF2-40B4-BE49-F238E27FC236}">
-                <a16:creationId xmlns:a16="http://schemas.microsoft.com/office/drawing/2014/main" id="{F295E884-7C3B-2970-C074-28C2C533205D}"/>
-              </a:ext>
-            </a:extLst>
-          </p:cNvPr>
-          <p:cNvSpPr txBox="1">
-            <a:spLocks/>
-          </p:cNvSpPr>
-          <p:nvPr/>
-        </p:nvSpPr>
-        <p:spPr>
-          <a:xfrm>
-            <a:off x="355600" y="1129246"/>
-            <a:ext cx="11506200" cy="812797"/>
-          </a:xfrm>
-          <a:prstGeom prst="rect">
-            <a:avLst/>
-          </a:prstGeom>
-        </p:spPr>
-        <p:txBody>
-          <a:bodyPr vert="horz" lIns="91440" tIns="45720" rIns="91440" bIns="45720" rtlCol="0" anchor="ctr">
-            <a:noAutofit/>
-          </a:bodyPr>
-          <a:lstStyle>
-            <a:lvl1pPr algn="l" defTabSz="914400" rtl="0" eaLnBrk="1" latinLnBrk="0" hangingPunct="1">
-              <a:lnSpc>
-                <a:spcPct val="90000"/>
-              </a:lnSpc>
-              <a:spcBef>
-                <a:spcPct val="0"/>
-              </a:spcBef>
-              <a:buNone/>
-              <a:defRPr kumimoji="1" sz="1400" kern="1200">
-                <a:solidFill>
-                  <a:schemeClr val="tx1"/>
-                </a:solidFill>
-                <a:latin typeface="+mj-lt"/>
-                <a:ea typeface="+mj-ea"/>
-                <a:cs typeface="+mj-cs"/>
-              </a:defRPr>
-            </a:lvl1pPr>
-          </a:lstStyle>
-          <a:p>
-            <a:r>
-              <a:rPr lang="ja-JP" altLang="en-US" sz="2800" dirty="0"/>
-              <a:t>リード文</a:t>
-            </a:r>
-            <a:endParaRPr lang="en-US" altLang="ja-JP" sz="2800" dirty="0"/>
-          </a:p>
-          <a:p>
-            <a:r>
-              <a:rPr lang="en-US" altLang="ja-JP" sz="2800" dirty="0"/>
-              <a:t>2</a:t>
-            </a:r>
-            <a:r>
-              <a:rPr lang="ja-JP" altLang="en-US" sz="2800" dirty="0"/>
-              <a:t>行に収まる程度で</a:t>
-            </a:r>
-            <a:endParaRPr lang="en-US" altLang="ja-JP" sz="2800" dirty="0"/>
-          </a:p>
-        </p:txBody>
-      </p:sp>
-      <p:sp>
-        <p:nvSpPr>
-          <p:cNvPr id="4" name="タイトル プレースホルダー 1">
-            <a:extLst>
-              <a:ext uri="{FF2B5EF4-FFF2-40B4-BE49-F238E27FC236}">
-                <a16:creationId xmlns:a16="http://schemas.microsoft.com/office/drawing/2014/main" id="{21F6BFE7-6AF6-732F-0E21-B09BEA55FA73}"/>
-              </a:ext>
-            </a:extLst>
-          </p:cNvPr>
-          <p:cNvSpPr txBox="1">
-            <a:spLocks/>
-          </p:cNvSpPr>
-          <p:nvPr/>
-        </p:nvSpPr>
-        <p:spPr>
-          <a:xfrm>
-            <a:off x="355600" y="546100"/>
-            <a:ext cx="11506200" cy="488949"/>
-          </a:xfrm>
-          <a:prstGeom prst="rect">
-            <a:avLst/>
-          </a:prstGeom>
-        </p:spPr>
-        <p:txBody>
-          <a:bodyPr vert="horz" lIns="91440" tIns="45720" rIns="91440" bIns="45720" rtlCol="0" anchor="ctr">
-            <a:noAutofit/>
-          </a:bodyPr>
-          <a:lstStyle>
-            <a:lvl1pPr algn="l" defTabSz="914400" rtl="0" eaLnBrk="1" latinLnBrk="0" hangingPunct="1">
-              <a:lnSpc>
-                <a:spcPct val="90000"/>
-              </a:lnSpc>
-              <a:spcBef>
-                <a:spcPct val="0"/>
-              </a:spcBef>
-              <a:buNone/>
-              <a:defRPr kumimoji="1" sz="1400" kern="1200">
-                <a:solidFill>
-                  <a:schemeClr val="tx1"/>
-                </a:solidFill>
-                <a:latin typeface="+mj-lt"/>
-                <a:ea typeface="+mj-ea"/>
-                <a:cs typeface="+mj-cs"/>
-              </a:defRPr>
-            </a:lvl1pPr>
-          </a:lstStyle>
-          <a:p>
-            <a:r>
-              <a:rPr lang="ja-JP" altLang="en-US" dirty="0"/>
-              <a:t>目次内のタイトル名そのまま</a:t>
-            </a:r>
-            <a:endParaRPr lang="en-US" altLang="ja-JP" dirty="0"/>
-          </a:p>
-        </p:txBody>
-      </p:sp>
-      <p:sp>
-        <p:nvSpPr>
-          <p:cNvPr id="5" name="タイトル プレースホルダー 1">
-            <a:extLst>
-              <a:ext uri="{FF2B5EF4-FFF2-40B4-BE49-F238E27FC236}">
-                <a16:creationId xmlns:a16="http://schemas.microsoft.com/office/drawing/2014/main" id="{0720B534-751A-92B9-28C8-2102084B0E36}"/>
-              </a:ext>
-            </a:extLst>
-          </p:cNvPr>
-          <p:cNvSpPr txBox="1">
-            <a:spLocks/>
-          </p:cNvSpPr>
-          <p:nvPr/>
-        </p:nvSpPr>
-        <p:spPr>
-          <a:xfrm>
-            <a:off x="355600" y="2730500"/>
-            <a:ext cx="5448300" cy="3581387"/>
-          </a:xfrm>
-          <a:prstGeom prst="rect">
-            <a:avLst/>
-          </a:prstGeom>
-        </p:spPr>
-        <p:txBody>
-          <a:bodyPr vert="horz" lIns="91440" tIns="45720" rIns="91440" bIns="45720" rtlCol="0" anchor="t" anchorCtr="0">
-            <a:noAutofit/>
-          </a:bodyPr>
-          <a:lstStyle>
-            <a:lvl1pPr algn="l" defTabSz="914400" rtl="0" eaLnBrk="1" latinLnBrk="0" hangingPunct="1">
-              <a:lnSpc>
-                <a:spcPct val="90000"/>
-              </a:lnSpc>
-              <a:spcBef>
-                <a:spcPct val="0"/>
-              </a:spcBef>
-              <a:buNone/>
-              <a:defRPr kumimoji="1" sz="1400" kern="1200">
-                <a:solidFill>
-                  <a:schemeClr val="tx1"/>
-                </a:solidFill>
-                <a:latin typeface="+mj-lt"/>
-                <a:ea typeface="+mj-ea"/>
-                <a:cs typeface="+mj-cs"/>
-              </a:defRPr>
-            </a:lvl1pPr>
-          </a:lstStyle>
-          <a:p>
-            <a:r>
-              <a:rPr lang="ja-JP" altLang="en-US" sz="1800" dirty="0"/>
-              <a:t>本文</a:t>
-            </a:r>
-            <a:endParaRPr lang="en-US" altLang="ja-JP" sz="1800" dirty="0"/>
-          </a:p>
-          <a:p>
-            <a:r>
-              <a:rPr lang="ja-JP" altLang="en-US" sz="1800" dirty="0"/>
-              <a:t>冗長にならないように頑張る</a:t>
-            </a:r>
-            <a:endParaRPr lang="en-US" altLang="ja-JP" sz="1800" dirty="0"/>
-          </a:p>
-          <a:p>
-            <a:r>
-              <a:rPr lang="ja-JP" altLang="en-US" sz="1800" dirty="0"/>
-              <a:t>左右比較したいとき</a:t>
-            </a:r>
-            <a:endParaRPr lang="en-US" altLang="ja-JP" sz="1800" dirty="0"/>
-          </a:p>
-        </p:txBody>
-      </p:sp>
-      <p:sp>
-        <p:nvSpPr>
-          <p:cNvPr id="6" name="タイトル プレースホルダー 1">
-            <a:extLst>
-              <a:ext uri="{FF2B5EF4-FFF2-40B4-BE49-F238E27FC236}">
-                <a16:creationId xmlns:a16="http://schemas.microsoft.com/office/drawing/2014/main" id="{D024BB36-65A3-3218-10D1-283E5E6E05B9}"/>
-              </a:ext>
-            </a:extLst>
-          </p:cNvPr>
-          <p:cNvSpPr txBox="1">
-            <a:spLocks/>
-          </p:cNvSpPr>
-          <p:nvPr/>
-        </p:nvSpPr>
-        <p:spPr>
-          <a:xfrm>
-            <a:off x="6413500" y="2730500"/>
-            <a:ext cx="5448300" cy="3581387"/>
-          </a:xfrm>
-          <a:prstGeom prst="rect">
-            <a:avLst/>
-          </a:prstGeom>
-        </p:spPr>
-        <p:txBody>
-          <a:bodyPr vert="horz" lIns="91440" tIns="45720" rIns="91440" bIns="45720" rtlCol="0" anchor="t" anchorCtr="0">
-            <a:noAutofit/>
-          </a:bodyPr>
-          <a:lstStyle>
-            <a:lvl1pPr algn="l" defTabSz="914400" rtl="0" eaLnBrk="1" latinLnBrk="0" hangingPunct="1">
-              <a:lnSpc>
-                <a:spcPct val="90000"/>
-              </a:lnSpc>
-              <a:spcBef>
-                <a:spcPct val="0"/>
-              </a:spcBef>
-              <a:buNone/>
-              <a:defRPr kumimoji="1" sz="1400" kern="1200">
-                <a:solidFill>
-                  <a:schemeClr val="tx1"/>
-                </a:solidFill>
-                <a:latin typeface="+mj-lt"/>
-                <a:ea typeface="+mj-ea"/>
-                <a:cs typeface="+mj-cs"/>
-              </a:defRPr>
-            </a:lvl1pPr>
-          </a:lstStyle>
-          <a:p>
-            <a:r>
-              <a:rPr lang="ja-JP" altLang="en-US" sz="1800" dirty="0"/>
-              <a:t>本文</a:t>
-            </a:r>
-            <a:endParaRPr lang="en-US" altLang="ja-JP" sz="1800" dirty="0"/>
-          </a:p>
-          <a:p>
-            <a:r>
-              <a:rPr lang="ja-JP" altLang="en-US" sz="1800" dirty="0"/>
-              <a:t>冗長にならないように頑張る</a:t>
-            </a:r>
-            <a:endParaRPr lang="en-US" altLang="ja-JP" sz="1800" dirty="0"/>
-          </a:p>
-          <a:p>
-            <a:r>
-              <a:rPr lang="ja-JP" altLang="en-US" sz="1800" dirty="0"/>
-              <a:t>左右比較したいとき</a:t>
-            </a:r>
-            <a:endParaRPr lang="en-US" altLang="ja-JP" sz="1800" dirty="0"/>
-          </a:p>
-        </p:txBody>
-      </p:sp>
-      <p:sp>
-        <p:nvSpPr>
-          <p:cNvPr id="7" name="正方形/長方形 6">
-            <a:extLst>
-              <a:ext uri="{FF2B5EF4-FFF2-40B4-BE49-F238E27FC236}">
-                <a16:creationId xmlns:a16="http://schemas.microsoft.com/office/drawing/2014/main" id="{1D75A1B6-F70B-25E3-C42A-1400D60D9876}"/>
-              </a:ext>
-            </a:extLst>
-          </p:cNvPr>
-          <p:cNvSpPr/>
-          <p:nvPr/>
-        </p:nvSpPr>
-        <p:spPr>
-          <a:xfrm>
-            <a:off x="342900" y="2184400"/>
-            <a:ext cx="5435600" cy="432810"/>
-          </a:xfrm>
-          <a:prstGeom prst="rect">
-            <a:avLst/>
-          </a:prstGeom>
-          <a:ln>
-            <a:noFill/>
-          </a:ln>
-        </p:spPr>
-        <p:style>
-          <a:lnRef idx="2">
-            <a:schemeClr val="accent1">
-              <a:shade val="15000"/>
-            </a:schemeClr>
-          </a:lnRef>
-          <a:fillRef idx="1">
-            <a:schemeClr val="accent1"/>
-          </a:fillRef>
-          <a:effectRef idx="0">
-            <a:schemeClr val="accent1"/>
-          </a:effectRef>
-          <a:fontRef idx="minor">
-            <a:schemeClr val="lt1"/>
-          </a:fontRef>
-        </p:style>
-        <p:txBody>
-          <a:bodyPr rtlCol="0" anchor="ctr"/>
-          <a:lstStyle/>
-          <a:p>
-            <a:pPr algn="ctr"/>
-            <a:r>
-              <a:rPr kumimoji="1" lang="ja-JP" altLang="en-US" sz="2400" b="1" dirty="0">
-                <a:solidFill>
-                  <a:schemeClr val="bg1"/>
-                </a:solidFill>
-              </a:rPr>
-              <a:t>左側はなにを表す？</a:t>
-            </a:r>
-          </a:p>
-        </p:txBody>
-      </p:sp>
-      <p:sp>
-        <p:nvSpPr>
-          <p:cNvPr id="8" name="正方形/長方形 7">
-            <a:extLst>
-              <a:ext uri="{FF2B5EF4-FFF2-40B4-BE49-F238E27FC236}">
-                <a16:creationId xmlns:a16="http://schemas.microsoft.com/office/drawing/2014/main" id="{7702FE73-EF7E-6834-0827-2C67E6B5B983}"/>
-              </a:ext>
-            </a:extLst>
-          </p:cNvPr>
-          <p:cNvSpPr/>
-          <p:nvPr/>
-        </p:nvSpPr>
-        <p:spPr>
-          <a:xfrm>
-            <a:off x="6413500" y="2184400"/>
-            <a:ext cx="5435600" cy="432810"/>
-          </a:xfrm>
-          <a:prstGeom prst="rect">
-            <a:avLst/>
-          </a:prstGeom>
-          <a:ln>
-            <a:noFill/>
-          </a:ln>
-        </p:spPr>
-        <p:style>
-          <a:lnRef idx="2">
-            <a:schemeClr val="accent1">
-              <a:shade val="15000"/>
-            </a:schemeClr>
-          </a:lnRef>
-          <a:fillRef idx="1">
-            <a:schemeClr val="accent1"/>
-          </a:fillRef>
-          <a:effectRef idx="0">
-            <a:schemeClr val="accent1"/>
-          </a:effectRef>
-          <a:fontRef idx="minor">
-            <a:schemeClr val="lt1"/>
-          </a:fontRef>
-        </p:style>
-        <p:txBody>
-          <a:bodyPr rtlCol="0" anchor="ctr"/>
-          <a:lstStyle/>
-          <a:p>
-            <a:pPr algn="ctr"/>
-            <a:r>
-              <a:rPr lang="ja-JP" altLang="en-US" sz="2400" b="1" dirty="0">
-                <a:solidFill>
-                  <a:schemeClr val="bg1"/>
-                </a:solidFill>
-              </a:rPr>
-              <a:t>右</a:t>
-            </a:r>
-            <a:r>
-              <a:rPr kumimoji="1" lang="ja-JP" altLang="en-US" sz="2400" b="1" dirty="0">
-                <a:solidFill>
-                  <a:schemeClr val="bg1"/>
-                </a:solidFill>
-              </a:rPr>
-              <a:t>側はなにを表す？</a:t>
-            </a:r>
-          </a:p>
-        </p:txBody>
-      </p:sp>
-    </p:spTree>
-    <p:extLst>
-      <p:ext uri="{BB962C8B-B14F-4D97-AF65-F5344CB8AC3E}">
-        <p14:creationId xmlns:p14="http://schemas.microsoft.com/office/powerpoint/2010/main" val="3240422563"/>
       </p:ext>
     </p:extLst>
   </p:cSld>

--- a/Design/複雑性_5分類とそれぞれで可能な対処について.pptx
+++ b/Design/複雑性_5分類とそれぞれで可能な対処について.pptx
@@ -7,28 +7,29 @@
   <p:sldIdLst>
     <p:sldId id="256" r:id="rId2"/>
     <p:sldId id="259" r:id="rId3"/>
-    <p:sldId id="275" r:id="rId4"/>
-    <p:sldId id="261" r:id="rId5"/>
-    <p:sldId id="264" r:id="rId6"/>
-    <p:sldId id="269" r:id="rId7"/>
-    <p:sldId id="288" r:id="rId8"/>
-    <p:sldId id="284" r:id="rId9"/>
-    <p:sldId id="285" r:id="rId10"/>
-    <p:sldId id="286" r:id="rId11"/>
-    <p:sldId id="263" r:id="rId12"/>
-    <p:sldId id="287" r:id="rId13"/>
-    <p:sldId id="273" r:id="rId14"/>
-    <p:sldId id="272" r:id="rId15"/>
-    <p:sldId id="265" r:id="rId16"/>
-    <p:sldId id="266" r:id="rId17"/>
-    <p:sldId id="282" r:id="rId18"/>
-    <p:sldId id="283" r:id="rId19"/>
-    <p:sldId id="267" r:id="rId20"/>
-    <p:sldId id="270" r:id="rId21"/>
-    <p:sldId id="276" r:id="rId22"/>
-    <p:sldId id="271" r:id="rId23"/>
-    <p:sldId id="268" r:id="rId24"/>
-    <p:sldId id="274" r:id="rId25"/>
+    <p:sldId id="289" r:id="rId4"/>
+    <p:sldId id="275" r:id="rId5"/>
+    <p:sldId id="261" r:id="rId6"/>
+    <p:sldId id="264" r:id="rId7"/>
+    <p:sldId id="269" r:id="rId8"/>
+    <p:sldId id="288" r:id="rId9"/>
+    <p:sldId id="284" r:id="rId10"/>
+    <p:sldId id="285" r:id="rId11"/>
+    <p:sldId id="286" r:id="rId12"/>
+    <p:sldId id="263" r:id="rId13"/>
+    <p:sldId id="287" r:id="rId14"/>
+    <p:sldId id="273" r:id="rId15"/>
+    <p:sldId id="272" r:id="rId16"/>
+    <p:sldId id="265" r:id="rId17"/>
+    <p:sldId id="266" r:id="rId18"/>
+    <p:sldId id="282" r:id="rId19"/>
+    <p:sldId id="283" r:id="rId20"/>
+    <p:sldId id="267" r:id="rId21"/>
+    <p:sldId id="270" r:id="rId22"/>
+    <p:sldId id="276" r:id="rId23"/>
+    <p:sldId id="271" r:id="rId24"/>
+    <p:sldId id="268" r:id="rId25"/>
+    <p:sldId id="274" r:id="rId26"/>
   </p:sldIdLst>
   <p:sldSz cx="12192000" cy="6858000"/>
   <p:notesSz cx="6858000" cy="9144000"/>
@@ -142,6 +143,7 @@
         </p14:section>
         <p14:section name="Body" id="{CD149920-7D1D-4D4F-A605-2F04F020684B}">
           <p14:sldIdLst>
+            <p14:sldId id="289"/>
             <p14:sldId id="275"/>
             <p14:sldId id="261"/>
             <p14:sldId id="264"/>
@@ -198,7 +200,7 @@
     </p:ext>
     <p:ext uri="{EFAFB233-063F-42B5-8137-9DF3F51BA10A}">
       <p15:sldGuideLst xmlns:p15="http://schemas.microsoft.com/office/powerpoint/2012/main">
-        <p15:guide id="1" orient="horz" pos="2183" userDrawn="1">
+        <p15:guide id="1" orient="horz" pos="2160" userDrawn="1">
           <p15:clr>
             <a:srgbClr val="A4A3A4"/>
           </p15:clr>
@@ -1193,7 +1195,7 @@
           <a:p>
             <a:fld id="{715B6A4E-7C34-4A40-8B61-BB0C6AAC2A27}" type="datetimeFigureOut">
               <a:rPr kumimoji="1" lang="ja-JP" altLang="en-US" smtClean="0"/>
-              <a:t>2026/9/30</a:t>
+              <a:t>2026/10/1</a:t>
             </a:fld>
             <a:endParaRPr kumimoji="1" lang="ja-JP" altLang="en-US"/>
           </a:p>
@@ -1490,7 +1492,7 @@
           <a:p>
             <a:fld id="{715B6A4E-7C34-4A40-8B61-BB0C6AAC2A27}" type="datetimeFigureOut">
               <a:rPr kumimoji="1" lang="ja-JP" altLang="en-US" smtClean="0"/>
-              <a:t>2026/9/30</a:t>
+              <a:t>2026/10/1</a:t>
             </a:fld>
             <a:endParaRPr kumimoji="1" lang="ja-JP" altLang="en-US"/>
           </a:p>
@@ -1730,7 +1732,7 @@
           <a:p>
             <a:fld id="{715B6A4E-7C34-4A40-8B61-BB0C6AAC2A27}" type="datetimeFigureOut">
               <a:rPr kumimoji="1" lang="ja-JP" altLang="en-US" smtClean="0"/>
-              <a:t>2026/9/30</a:t>
+              <a:t>2026/10/1</a:t>
             </a:fld>
             <a:endParaRPr kumimoji="1" lang="ja-JP" altLang="en-US"/>
           </a:p>
@@ -1843,7 +1845,7 @@
           <a:p>
             <a:fld id="{715B6A4E-7C34-4A40-8B61-BB0C6AAC2A27}" type="datetimeFigureOut">
               <a:rPr kumimoji="1" lang="ja-JP" altLang="en-US" smtClean="0"/>
-              <a:t>2026/9/30</a:t>
+              <a:t>2026/10/1</a:t>
             </a:fld>
             <a:endParaRPr kumimoji="1" lang="ja-JP" altLang="en-US"/>
           </a:p>
@@ -2134,7 +2136,7 @@
           <a:p>
             <a:fld id="{715B6A4E-7C34-4A40-8B61-BB0C6AAC2A27}" type="datetimeFigureOut">
               <a:rPr kumimoji="1" lang="ja-JP" altLang="en-US" smtClean="0"/>
-              <a:t>2026/9/30</a:t>
+              <a:t>2026/10/1</a:t>
             </a:fld>
             <a:endParaRPr kumimoji="1" lang="ja-JP" altLang="en-US"/>
           </a:p>
@@ -2463,7 +2465,7 @@
           <a:p>
             <a:fld id="{715B6A4E-7C34-4A40-8B61-BB0C6AAC2A27}" type="datetimeFigureOut">
               <a:rPr kumimoji="1" lang="ja-JP" altLang="en-US" smtClean="0"/>
-              <a:t>2026/9/30</a:t>
+              <a:t>2026/10/1</a:t>
             </a:fld>
             <a:endParaRPr kumimoji="1" lang="ja-JP" altLang="en-US"/>
           </a:p>
@@ -2939,7 +2941,7 @@
           <a:p>
             <a:fld id="{715B6A4E-7C34-4A40-8B61-BB0C6AAC2A27}" type="datetimeFigureOut">
               <a:rPr kumimoji="1" lang="ja-JP" altLang="en-US" smtClean="0"/>
-              <a:t>2026/9/30</a:t>
+              <a:t>2026/10/1</a:t>
             </a:fld>
             <a:endParaRPr kumimoji="1" lang="ja-JP" altLang="en-US"/>
           </a:p>
@@ -3080,7 +3082,7 @@
           <a:p>
             <a:fld id="{715B6A4E-7C34-4A40-8B61-BB0C6AAC2A27}" type="datetimeFigureOut">
               <a:rPr kumimoji="1" lang="ja-JP" altLang="en-US" smtClean="0"/>
-              <a:t>2026/9/30</a:t>
+              <a:t>2026/10/1</a:t>
             </a:fld>
             <a:endParaRPr kumimoji="1" lang="ja-JP" altLang="en-US"/>
           </a:p>
@@ -3193,7 +3195,7 @@
           <a:p>
             <a:fld id="{715B6A4E-7C34-4A40-8B61-BB0C6AAC2A27}" type="datetimeFigureOut">
               <a:rPr kumimoji="1" lang="ja-JP" altLang="en-US" smtClean="0"/>
-              <a:t>2026/9/30</a:t>
+              <a:t>2026/10/1</a:t>
             </a:fld>
             <a:endParaRPr kumimoji="1" lang="ja-JP" altLang="en-US"/>
           </a:p>
@@ -3536,7 +3538,7 @@
           <a:p>
             <a:fld id="{715B6A4E-7C34-4A40-8B61-BB0C6AAC2A27}" type="datetimeFigureOut">
               <a:rPr kumimoji="1" lang="ja-JP" altLang="en-US" smtClean="0"/>
-              <a:t>2026/9/30</a:t>
+              <a:t>2026/10/1</a:t>
             </a:fld>
             <a:endParaRPr kumimoji="1" lang="ja-JP" altLang="en-US"/>
           </a:p>
@@ -3824,7 +3826,7 @@
           <a:p>
             <a:fld id="{715B6A4E-7C34-4A40-8B61-BB0C6AAC2A27}" type="datetimeFigureOut">
               <a:rPr kumimoji="1" lang="ja-JP" altLang="en-US" smtClean="0"/>
-              <a:t>2026/9/30</a:t>
+              <a:t>2026/10/1</a:t>
             </a:fld>
             <a:endParaRPr kumimoji="1" lang="ja-JP" altLang="en-US"/>
           </a:p>
@@ -4097,7 +4099,7 @@
           <a:p>
             <a:fld id="{715B6A4E-7C34-4A40-8B61-BB0C6AAC2A27}" type="datetimeFigureOut">
               <a:rPr kumimoji="1" lang="ja-JP" altLang="en-US" smtClean="0"/>
-              <a:t>2026/9/30</a:t>
+              <a:t>2026/10/1</a:t>
             </a:fld>
             <a:endParaRPr kumimoji="1" lang="ja-JP" altLang="en-US"/>
           </a:p>
@@ -4825,7 +4827,7 @@
         <p:cNvPr id="1" name="">
           <a:extLst>
             <a:ext uri="{FF2B5EF4-FFF2-40B4-BE49-F238E27FC236}">
-              <a16:creationId xmlns:a16="http://schemas.microsoft.com/office/drawing/2014/main" id="{2C420F8D-7D6F-BCB1-D834-4BE64B402FEC}"/>
+              <a16:creationId xmlns:a16="http://schemas.microsoft.com/office/drawing/2014/main" id="{533F68EE-1A46-3A03-3F0B-DCE71857E64A}"/>
             </a:ext>
           </a:extLst>
         </p:cNvPr>
@@ -4845,7 +4847,7 @@
           <p:cNvPr id="2" name="直線コネクタ 1">
             <a:extLst>
               <a:ext uri="{FF2B5EF4-FFF2-40B4-BE49-F238E27FC236}">
-                <a16:creationId xmlns:a16="http://schemas.microsoft.com/office/drawing/2014/main" id="{312A614B-B7E1-66F3-93FC-7C68EADC4B92}"/>
+                <a16:creationId xmlns:a16="http://schemas.microsoft.com/office/drawing/2014/main" id="{C3AA8E8F-8BDB-3C50-FC1B-8451ADE07263}"/>
               </a:ext>
             </a:extLst>
           </p:cNvPr>
@@ -4884,7 +4886,7 @@
           <p:cNvPr id="3" name="タイトル プレースホルダー 1">
             <a:extLst>
               <a:ext uri="{FF2B5EF4-FFF2-40B4-BE49-F238E27FC236}">
-                <a16:creationId xmlns:a16="http://schemas.microsoft.com/office/drawing/2014/main" id="{4EC22920-18AF-5F05-1FBD-345A4F58CB6A}"/>
+                <a16:creationId xmlns:a16="http://schemas.microsoft.com/office/drawing/2014/main" id="{A49EC5EB-AA31-B498-E7F6-5D67061A6814}"/>
               </a:ext>
             </a:extLst>
           </p:cNvPr>
@@ -4950,7 +4952,7 @@
           <p:cNvPr id="4" name="タイトル プレースホルダー 1">
             <a:extLst>
               <a:ext uri="{FF2B5EF4-FFF2-40B4-BE49-F238E27FC236}">
-                <a16:creationId xmlns:a16="http://schemas.microsoft.com/office/drawing/2014/main" id="{95AD810E-CD8B-A60F-D611-073BB01B4C10}"/>
+                <a16:creationId xmlns:a16="http://schemas.microsoft.com/office/drawing/2014/main" id="{E34C69B8-1CC7-7929-D7CF-4F0F7833D1B0}"/>
               </a:ext>
             </a:extLst>
           </p:cNvPr>
@@ -4994,7 +4996,7 @@
           <a:p>
             <a:r>
               <a:rPr lang="ja-JP" altLang="en-US" dirty="0"/>
-              <a:t>目次内のタイトル名そのまま</a:t>
+              <a:t>ステップ図</a:t>
             </a:r>
             <a:endParaRPr lang="en-US" altLang="ja-JP" dirty="0"/>
           </a:p>
@@ -5005,7 +5007,7 @@
           <p:cNvPr id="6" name="タイトル プレースホルダー 1">
             <a:extLst>
               <a:ext uri="{FF2B5EF4-FFF2-40B4-BE49-F238E27FC236}">
-                <a16:creationId xmlns:a16="http://schemas.microsoft.com/office/drawing/2014/main" id="{1A28CD4B-8D98-6C58-B926-910BBD3D40C2}"/>
+                <a16:creationId xmlns:a16="http://schemas.microsoft.com/office/drawing/2014/main" id="{1E917474-F5C8-9688-1FB7-23F9F8CC3DD9}"/>
               </a:ext>
             </a:extLst>
           </p:cNvPr>
@@ -5016,8 +5018,8 @@
         </p:nvSpPr>
         <p:spPr>
           <a:xfrm>
-            <a:off x="7541442" y="2146304"/>
-            <a:ext cx="4320357" cy="4165584"/>
+            <a:off x="355600" y="4937124"/>
+            <a:ext cx="11506199" cy="1374763"/>
           </a:xfrm>
           <a:prstGeom prst="rect">
             <a:avLst/>
@@ -5053,6 +5055,449 @@
             </a:pPr>
             <a:r>
               <a:rPr lang="ja-JP" altLang="en-US" sz="1800" dirty="0"/>
+              <a:t>バリューチェーン</a:t>
+            </a:r>
+            <a:endParaRPr lang="en-US" altLang="ja-JP" sz="1800" dirty="0"/>
+          </a:p>
+          <a:p>
+            <a:pPr marL="285750" indent="-285750">
+              <a:buFont typeface="Arial" panose="020B0604020202020204" pitchFamily="34" charset="0"/>
+              <a:buChar char="•"/>
+            </a:pPr>
+            <a:r>
+              <a:rPr lang="ja-JP" altLang="en-US" sz="1800" dirty="0"/>
+              <a:t>検討アプローチ</a:t>
+            </a:r>
+            <a:endParaRPr lang="en-US" altLang="ja-JP" sz="1800" dirty="0"/>
+          </a:p>
+          <a:p>
+            <a:endParaRPr lang="en-US" altLang="ja-JP" sz="1800" dirty="0"/>
+          </a:p>
+          <a:p>
+            <a:endParaRPr lang="en-US" altLang="ja-JP" sz="1800" dirty="0"/>
+          </a:p>
+          <a:p>
+            <a:endParaRPr lang="en-US" altLang="ja-JP" sz="1800" dirty="0"/>
+          </a:p>
+          <a:p>
+            <a:endParaRPr lang="en-US" altLang="ja-JP" sz="1800" dirty="0"/>
+          </a:p>
+        </p:txBody>
+      </p:sp>
+      <p:sp>
+        <p:nvSpPr>
+          <p:cNvPr id="7" name="矢印: 五方向 6">
+            <a:extLst>
+              <a:ext uri="{FF2B5EF4-FFF2-40B4-BE49-F238E27FC236}">
+                <a16:creationId xmlns:a16="http://schemas.microsoft.com/office/drawing/2014/main" id="{9D4F47B0-899C-DC8A-EBC0-814235BD8BE4}"/>
+              </a:ext>
+            </a:extLst>
+          </p:cNvPr>
+          <p:cNvSpPr/>
+          <p:nvPr/>
+        </p:nvSpPr>
+        <p:spPr>
+          <a:xfrm>
+            <a:off x="1650997" y="2669018"/>
+            <a:ext cx="2962635" cy="1592989"/>
+          </a:xfrm>
+          <a:prstGeom prst="homePlate">
+            <a:avLst/>
+          </a:prstGeom>
+          <a:solidFill>
+            <a:schemeClr val="accent1">
+              <a:lumMod val="20000"/>
+              <a:lumOff val="80000"/>
+            </a:schemeClr>
+          </a:solidFill>
+          <a:ln>
+            <a:noFill/>
+          </a:ln>
+        </p:spPr>
+        <p:style>
+          <a:lnRef idx="2">
+            <a:schemeClr val="accent1">
+              <a:shade val="15000"/>
+            </a:schemeClr>
+          </a:lnRef>
+          <a:fillRef idx="1">
+            <a:schemeClr val="accent1"/>
+          </a:fillRef>
+          <a:effectRef idx="0">
+            <a:schemeClr val="accent1"/>
+          </a:effectRef>
+          <a:fontRef idx="minor">
+            <a:schemeClr val="lt1"/>
+          </a:fontRef>
+        </p:style>
+        <p:txBody>
+          <a:bodyPr rtlCol="0" anchor="ctr"/>
+          <a:lstStyle/>
+          <a:p>
+            <a:pPr algn="ctr"/>
+            <a:endParaRPr kumimoji="1" lang="ja-JP" altLang="en-US"/>
+          </a:p>
+        </p:txBody>
+      </p:sp>
+      <p:sp>
+        <p:nvSpPr>
+          <p:cNvPr id="8" name="矢印: 五方向 7">
+            <a:extLst>
+              <a:ext uri="{FF2B5EF4-FFF2-40B4-BE49-F238E27FC236}">
+                <a16:creationId xmlns:a16="http://schemas.microsoft.com/office/drawing/2014/main" id="{0C36EA1A-89D2-F22A-3A35-6B130850FD8C}"/>
+              </a:ext>
+            </a:extLst>
+          </p:cNvPr>
+          <p:cNvSpPr/>
+          <p:nvPr/>
+        </p:nvSpPr>
+        <p:spPr>
+          <a:xfrm>
+            <a:off x="4705282" y="2669018"/>
+            <a:ext cx="2962635" cy="1592989"/>
+          </a:xfrm>
+          <a:prstGeom prst="homePlate">
+            <a:avLst/>
+          </a:prstGeom>
+          <a:solidFill>
+            <a:schemeClr val="accent1">
+              <a:lumMod val="20000"/>
+              <a:lumOff val="80000"/>
+            </a:schemeClr>
+          </a:solidFill>
+          <a:ln>
+            <a:noFill/>
+          </a:ln>
+        </p:spPr>
+        <p:style>
+          <a:lnRef idx="2">
+            <a:schemeClr val="accent1">
+              <a:shade val="15000"/>
+            </a:schemeClr>
+          </a:lnRef>
+          <a:fillRef idx="1">
+            <a:schemeClr val="accent1"/>
+          </a:fillRef>
+          <a:effectRef idx="0">
+            <a:schemeClr val="accent1"/>
+          </a:effectRef>
+          <a:fontRef idx="minor">
+            <a:schemeClr val="lt1"/>
+          </a:fontRef>
+        </p:style>
+        <p:txBody>
+          <a:bodyPr rtlCol="0" anchor="ctr"/>
+          <a:lstStyle/>
+          <a:p>
+            <a:pPr algn="ctr"/>
+            <a:endParaRPr kumimoji="1" lang="ja-JP" altLang="en-US"/>
+          </a:p>
+        </p:txBody>
+      </p:sp>
+      <p:sp>
+        <p:nvSpPr>
+          <p:cNvPr id="9" name="矢印: 五方向 8">
+            <a:extLst>
+              <a:ext uri="{FF2B5EF4-FFF2-40B4-BE49-F238E27FC236}">
+                <a16:creationId xmlns:a16="http://schemas.microsoft.com/office/drawing/2014/main" id="{D3B4CFBC-9A2D-087F-7C20-2940C4916562}"/>
+              </a:ext>
+            </a:extLst>
+          </p:cNvPr>
+          <p:cNvSpPr/>
+          <p:nvPr/>
+        </p:nvSpPr>
+        <p:spPr>
+          <a:xfrm>
+            <a:off x="7759567" y="2669018"/>
+            <a:ext cx="2962635" cy="1592989"/>
+          </a:xfrm>
+          <a:prstGeom prst="homePlate">
+            <a:avLst/>
+          </a:prstGeom>
+          <a:solidFill>
+            <a:schemeClr val="accent1">
+              <a:lumMod val="20000"/>
+              <a:lumOff val="80000"/>
+            </a:schemeClr>
+          </a:solidFill>
+          <a:ln>
+            <a:noFill/>
+          </a:ln>
+        </p:spPr>
+        <p:style>
+          <a:lnRef idx="2">
+            <a:schemeClr val="accent1">
+              <a:shade val="15000"/>
+            </a:schemeClr>
+          </a:lnRef>
+          <a:fillRef idx="1">
+            <a:schemeClr val="accent1"/>
+          </a:fillRef>
+          <a:effectRef idx="0">
+            <a:schemeClr val="accent1"/>
+          </a:effectRef>
+          <a:fontRef idx="minor">
+            <a:schemeClr val="lt1"/>
+          </a:fontRef>
+        </p:style>
+        <p:txBody>
+          <a:bodyPr rtlCol="0" anchor="ctr"/>
+          <a:lstStyle/>
+          <a:p>
+            <a:pPr algn="ctr"/>
+            <a:endParaRPr kumimoji="1" lang="ja-JP" altLang="en-US"/>
+          </a:p>
+        </p:txBody>
+      </p:sp>
+    </p:spTree>
+    <p:extLst>
+      <p:ext uri="{BB962C8B-B14F-4D97-AF65-F5344CB8AC3E}">
+        <p14:creationId xmlns:p14="http://schemas.microsoft.com/office/powerpoint/2010/main" val="11201252"/>
+      </p:ext>
+    </p:extLst>
+  </p:cSld>
+  <p:clrMapOvr>
+    <a:masterClrMapping/>
+  </p:clrMapOvr>
+</p:sld>
+</file>
+
+<file path=ppt/slides/slide11.xml><?xml version="1.0" encoding="utf-8"?>
+<p:sld xmlns:a="http://schemas.openxmlformats.org/drawingml/2006/main" xmlns:r="http://schemas.openxmlformats.org/officeDocument/2006/relationships" xmlns:p="http://schemas.openxmlformats.org/presentationml/2006/main">
+  <p:cSld>
+    <p:spTree>
+      <p:nvGrpSpPr>
+        <p:cNvPr id="1" name="">
+          <a:extLst>
+            <a:ext uri="{FF2B5EF4-FFF2-40B4-BE49-F238E27FC236}">
+              <a16:creationId xmlns:a16="http://schemas.microsoft.com/office/drawing/2014/main" id="{2C420F8D-7D6F-BCB1-D834-4BE64B402FEC}"/>
+            </a:ext>
+          </a:extLst>
+        </p:cNvPr>
+        <p:cNvGrpSpPr/>
+        <p:nvPr/>
+      </p:nvGrpSpPr>
+      <p:grpSpPr>
+        <a:xfrm>
+          <a:off x="0" y="0"/>
+          <a:ext cx="0" cy="0"/>
+          <a:chOff x="0" y="0"/>
+          <a:chExt cx="0" cy="0"/>
+        </a:xfrm>
+      </p:grpSpPr>
+      <p:cxnSp>
+        <p:nvCxnSpPr>
+          <p:cNvPr id="2" name="直線コネクタ 1">
+            <a:extLst>
+              <a:ext uri="{FF2B5EF4-FFF2-40B4-BE49-F238E27FC236}">
+                <a16:creationId xmlns:a16="http://schemas.microsoft.com/office/drawing/2014/main" id="{312A614B-B7E1-66F3-93FC-7C68EADC4B92}"/>
+              </a:ext>
+            </a:extLst>
+          </p:cNvPr>
+          <p:cNvCxnSpPr>
+            <a:cxnSpLocks/>
+          </p:cNvCxnSpPr>
+          <p:nvPr/>
+        </p:nvCxnSpPr>
+        <p:spPr>
+          <a:xfrm>
+            <a:off x="0" y="1993900"/>
+            <a:ext cx="12192000" cy="0"/>
+          </a:xfrm>
+          <a:prstGeom prst="line">
+            <a:avLst/>
+          </a:prstGeom>
+          <a:ln w="38100"/>
+        </p:spPr>
+        <p:style>
+          <a:lnRef idx="2">
+            <a:schemeClr val="accent1"/>
+          </a:lnRef>
+          <a:fillRef idx="0">
+            <a:schemeClr val="accent1"/>
+          </a:fillRef>
+          <a:effectRef idx="1">
+            <a:schemeClr val="accent1"/>
+          </a:effectRef>
+          <a:fontRef idx="minor">
+            <a:schemeClr val="tx1"/>
+          </a:fontRef>
+        </p:style>
+      </p:cxnSp>
+      <p:sp>
+        <p:nvSpPr>
+          <p:cNvPr id="3" name="タイトル プレースホルダー 1">
+            <a:extLst>
+              <a:ext uri="{FF2B5EF4-FFF2-40B4-BE49-F238E27FC236}">
+                <a16:creationId xmlns:a16="http://schemas.microsoft.com/office/drawing/2014/main" id="{4EC22920-18AF-5F05-1FBD-345A4F58CB6A}"/>
+              </a:ext>
+            </a:extLst>
+          </p:cNvPr>
+          <p:cNvSpPr txBox="1">
+            <a:spLocks/>
+          </p:cNvSpPr>
+          <p:nvPr/>
+        </p:nvSpPr>
+        <p:spPr>
+          <a:xfrm>
+            <a:off x="355600" y="1108076"/>
+            <a:ext cx="11506200" cy="812797"/>
+          </a:xfrm>
+          <a:prstGeom prst="rect">
+            <a:avLst/>
+          </a:prstGeom>
+        </p:spPr>
+        <p:txBody>
+          <a:bodyPr vert="horz" lIns="91440" tIns="45720" rIns="91440" bIns="45720" rtlCol="0" anchor="ctr">
+            <a:noAutofit/>
+          </a:bodyPr>
+          <a:lstStyle>
+            <a:lvl1pPr algn="l" defTabSz="914400" rtl="0" eaLnBrk="1" latinLnBrk="0" hangingPunct="1">
+              <a:lnSpc>
+                <a:spcPct val="90000"/>
+              </a:lnSpc>
+              <a:spcBef>
+                <a:spcPct val="0"/>
+              </a:spcBef>
+              <a:buNone/>
+              <a:defRPr kumimoji="1" sz="1400" kern="1200">
+                <a:solidFill>
+                  <a:schemeClr val="tx1"/>
+                </a:solidFill>
+                <a:latin typeface="+mj-lt"/>
+                <a:ea typeface="+mj-ea"/>
+                <a:cs typeface="+mj-cs"/>
+              </a:defRPr>
+            </a:lvl1pPr>
+          </a:lstStyle>
+          <a:p>
+            <a:r>
+              <a:rPr lang="ja-JP" altLang="en-US" sz="2800" dirty="0"/>
+              <a:t>リード文</a:t>
+            </a:r>
+            <a:endParaRPr lang="en-US" altLang="ja-JP" sz="2800" dirty="0"/>
+          </a:p>
+          <a:p>
+            <a:r>
+              <a:rPr lang="en-US" altLang="ja-JP" sz="2800" dirty="0"/>
+              <a:t>2</a:t>
+            </a:r>
+            <a:r>
+              <a:rPr lang="ja-JP" altLang="en-US" sz="2800" dirty="0"/>
+              <a:t>行に収まる程度で</a:t>
+            </a:r>
+            <a:endParaRPr lang="en-US" altLang="ja-JP" sz="2800" dirty="0"/>
+          </a:p>
+        </p:txBody>
+      </p:sp>
+      <p:sp>
+        <p:nvSpPr>
+          <p:cNvPr id="4" name="タイトル プレースホルダー 1">
+            <a:extLst>
+              <a:ext uri="{FF2B5EF4-FFF2-40B4-BE49-F238E27FC236}">
+                <a16:creationId xmlns:a16="http://schemas.microsoft.com/office/drawing/2014/main" id="{95AD810E-CD8B-A60F-D611-073BB01B4C10}"/>
+              </a:ext>
+            </a:extLst>
+          </p:cNvPr>
+          <p:cNvSpPr txBox="1">
+            <a:spLocks/>
+          </p:cNvSpPr>
+          <p:nvPr/>
+        </p:nvSpPr>
+        <p:spPr>
+          <a:xfrm>
+            <a:off x="355600" y="546100"/>
+            <a:ext cx="11506200" cy="488949"/>
+          </a:xfrm>
+          <a:prstGeom prst="rect">
+            <a:avLst/>
+          </a:prstGeom>
+        </p:spPr>
+        <p:txBody>
+          <a:bodyPr vert="horz" lIns="91440" tIns="45720" rIns="91440" bIns="45720" rtlCol="0" anchor="ctr">
+            <a:noAutofit/>
+          </a:bodyPr>
+          <a:lstStyle>
+            <a:lvl1pPr algn="l" defTabSz="914400" rtl="0" eaLnBrk="1" latinLnBrk="0" hangingPunct="1">
+              <a:lnSpc>
+                <a:spcPct val="90000"/>
+              </a:lnSpc>
+              <a:spcBef>
+                <a:spcPct val="0"/>
+              </a:spcBef>
+              <a:buNone/>
+              <a:defRPr kumimoji="1" sz="1400" kern="1200">
+                <a:solidFill>
+                  <a:schemeClr val="tx1"/>
+                </a:solidFill>
+                <a:latin typeface="+mj-lt"/>
+                <a:ea typeface="+mj-ea"/>
+                <a:cs typeface="+mj-cs"/>
+              </a:defRPr>
+            </a:lvl1pPr>
+          </a:lstStyle>
+          <a:p>
+            <a:r>
+              <a:rPr lang="ja-JP" altLang="en-US" dirty="0"/>
+              <a:t>目次内のタイトル名そのまま</a:t>
+            </a:r>
+            <a:endParaRPr lang="en-US" altLang="ja-JP" dirty="0"/>
+          </a:p>
+        </p:txBody>
+      </p:sp>
+      <p:sp>
+        <p:nvSpPr>
+          <p:cNvPr id="6" name="タイトル プレースホルダー 1">
+            <a:extLst>
+              <a:ext uri="{FF2B5EF4-FFF2-40B4-BE49-F238E27FC236}">
+                <a16:creationId xmlns:a16="http://schemas.microsoft.com/office/drawing/2014/main" id="{1A28CD4B-8D98-6C58-B926-910BBD3D40C2}"/>
+              </a:ext>
+            </a:extLst>
+          </p:cNvPr>
+          <p:cNvSpPr txBox="1">
+            <a:spLocks/>
+          </p:cNvSpPr>
+          <p:nvPr/>
+        </p:nvSpPr>
+        <p:spPr>
+          <a:xfrm>
+            <a:off x="7541442" y="2146304"/>
+            <a:ext cx="4320357" cy="4165584"/>
+          </a:xfrm>
+          <a:prstGeom prst="rect">
+            <a:avLst/>
+          </a:prstGeom>
+        </p:spPr>
+        <p:txBody>
+          <a:bodyPr vert="horz" lIns="91440" tIns="45720" rIns="91440" bIns="45720" rtlCol="0" anchor="t" anchorCtr="0">
+            <a:noAutofit/>
+          </a:bodyPr>
+          <a:lstStyle>
+            <a:lvl1pPr algn="l" defTabSz="914400" rtl="0" eaLnBrk="1" latinLnBrk="0" hangingPunct="1">
+              <a:lnSpc>
+                <a:spcPct val="90000"/>
+              </a:lnSpc>
+              <a:spcBef>
+                <a:spcPct val="0"/>
+              </a:spcBef>
+              <a:buNone/>
+              <a:defRPr kumimoji="1" sz="1400" kern="1200">
+                <a:solidFill>
+                  <a:schemeClr val="tx1"/>
+                </a:solidFill>
+                <a:latin typeface="+mj-lt"/>
+                <a:ea typeface="+mj-ea"/>
+                <a:cs typeface="+mj-cs"/>
+              </a:defRPr>
+            </a:lvl1pPr>
+          </a:lstStyle>
+          <a:p>
+            <a:pPr marL="285750" indent="-285750">
+              <a:buFont typeface="Arial" panose="020B0604020202020204" pitchFamily="34" charset="0"/>
+              <a:buChar char="•"/>
+            </a:pPr>
+            <a:r>
+              <a:rPr lang="ja-JP" altLang="en-US" sz="1800" dirty="0"/>
               <a:t>課題・施策分解</a:t>
             </a:r>
             <a:br>
@@ -5665,7 +6110,7 @@
 </p:sld>
 </file>
 
-<file path=ppt/slides/slide11.xml><?xml version="1.0" encoding="utf-8"?>
+<file path=ppt/slides/slide12.xml><?xml version="1.0" encoding="utf-8"?>
 <p:sld xmlns:a="http://schemas.openxmlformats.org/drawingml/2006/main" xmlns:r="http://schemas.openxmlformats.org/officeDocument/2006/relationships" xmlns:p="http://schemas.openxmlformats.org/presentationml/2006/main">
   <p:cSld>
     <p:spTree>
@@ -6119,7 +6564,7 @@
 </p:sld>
 </file>
 
-<file path=ppt/slides/slide12.xml><?xml version="1.0" encoding="utf-8"?>
+<file path=ppt/slides/slide13.xml><?xml version="1.0" encoding="utf-8"?>
 <p:sld xmlns:a="http://schemas.openxmlformats.org/drawingml/2006/main" xmlns:r="http://schemas.openxmlformats.org/officeDocument/2006/relationships" xmlns:p="http://schemas.openxmlformats.org/presentationml/2006/main">
   <p:cSld>
     <p:spTree>
@@ -7281,7 +7726,7 @@
 </p:sld>
 </file>
 
-<file path=ppt/slides/slide13.xml><?xml version="1.0" encoding="utf-8"?>
+<file path=ppt/slides/slide14.xml><?xml version="1.0" encoding="utf-8"?>
 <p:sld xmlns:a="http://schemas.openxmlformats.org/drawingml/2006/main" xmlns:r="http://schemas.openxmlformats.org/officeDocument/2006/relationships" xmlns:p="http://schemas.openxmlformats.org/presentationml/2006/main">
   <p:cSld>
     <p:spTree>
@@ -8231,7 +8676,7 @@
 </p:sld>
 </file>
 
-<file path=ppt/slides/slide14.xml><?xml version="1.0" encoding="utf-8"?>
+<file path=ppt/slides/slide15.xml><?xml version="1.0" encoding="utf-8"?>
 <p:sld xmlns:a="http://schemas.openxmlformats.org/drawingml/2006/main" xmlns:r="http://schemas.openxmlformats.org/officeDocument/2006/relationships" xmlns:p="http://schemas.openxmlformats.org/presentationml/2006/main">
   <p:cSld>
     <p:spTree>
@@ -8693,7 +9138,7 @@
 </p:sld>
 </file>
 
-<file path=ppt/slides/slide15.xml><?xml version="1.0" encoding="utf-8"?>
+<file path=ppt/slides/slide16.xml><?xml version="1.0" encoding="utf-8"?>
 <p:sld xmlns:a="http://schemas.openxmlformats.org/drawingml/2006/main" xmlns:r="http://schemas.openxmlformats.org/officeDocument/2006/relationships" xmlns:p="http://schemas.openxmlformats.org/presentationml/2006/main">
   <p:cSld>
     <p:spTree>
@@ -10228,7 +10673,7 @@
 </p:sld>
 </file>
 
-<file path=ppt/slides/slide16.xml><?xml version="1.0" encoding="utf-8"?>
+<file path=ppt/slides/slide17.xml><?xml version="1.0" encoding="utf-8"?>
 <p:sld xmlns:a="http://schemas.openxmlformats.org/drawingml/2006/main" xmlns:r="http://schemas.openxmlformats.org/officeDocument/2006/relationships" xmlns:p="http://schemas.openxmlformats.org/presentationml/2006/main">
   <p:cSld>
     <p:spTree>
@@ -10776,7 +11221,7 @@
 </p:sld>
 </file>
 
-<file path=ppt/slides/slide17.xml><?xml version="1.0" encoding="utf-8"?>
+<file path=ppt/slides/slide18.xml><?xml version="1.0" encoding="utf-8"?>
 <p:sld xmlns:a="http://schemas.openxmlformats.org/drawingml/2006/main" xmlns:r="http://schemas.openxmlformats.org/officeDocument/2006/relationships" xmlns:p="http://schemas.openxmlformats.org/presentationml/2006/main">
   <p:cSld>
     <p:spTree>
@@ -11670,7 +12115,7 @@
 </p:sld>
 </file>
 
-<file path=ppt/slides/slide18.xml><?xml version="1.0" encoding="utf-8"?>
+<file path=ppt/slides/slide19.xml><?xml version="1.0" encoding="utf-8"?>
 <p:sld xmlns:a="http://schemas.openxmlformats.org/drawingml/2006/main" xmlns:r="http://schemas.openxmlformats.org/officeDocument/2006/relationships" xmlns:p="http://schemas.openxmlformats.org/presentationml/2006/main">
   <p:cSld>
     <p:spTree>
@@ -12593,596 +13038,6 @@
     <p:extLst>
       <p:ext uri="{BB962C8B-B14F-4D97-AF65-F5344CB8AC3E}">
         <p14:creationId xmlns:p14="http://schemas.microsoft.com/office/powerpoint/2010/main" val="4194565185"/>
-      </p:ext>
-    </p:extLst>
-  </p:cSld>
-  <p:clrMapOvr>
-    <a:masterClrMapping/>
-  </p:clrMapOvr>
-</p:sld>
-</file>
-
-<file path=ppt/slides/slide19.xml><?xml version="1.0" encoding="utf-8"?>
-<p:sld xmlns:a="http://schemas.openxmlformats.org/drawingml/2006/main" xmlns:r="http://schemas.openxmlformats.org/officeDocument/2006/relationships" xmlns:p="http://schemas.openxmlformats.org/presentationml/2006/main">
-  <p:cSld>
-    <p:spTree>
-      <p:nvGrpSpPr>
-        <p:cNvPr id="1" name="">
-          <a:extLst>
-            <a:ext uri="{FF2B5EF4-FFF2-40B4-BE49-F238E27FC236}">
-              <a16:creationId xmlns:a16="http://schemas.microsoft.com/office/drawing/2014/main" id="{31585827-0CBA-5C00-8DD5-064044992320}"/>
-            </a:ext>
-          </a:extLst>
-        </p:cNvPr>
-        <p:cNvGrpSpPr/>
-        <p:nvPr/>
-      </p:nvGrpSpPr>
-      <p:grpSpPr>
-        <a:xfrm>
-          <a:off x="0" y="0"/>
-          <a:ext cx="0" cy="0"/>
-          <a:chOff x="0" y="0"/>
-          <a:chExt cx="0" cy="0"/>
-        </a:xfrm>
-      </p:grpSpPr>
-      <p:cxnSp>
-        <p:nvCxnSpPr>
-          <p:cNvPr id="2" name="直線コネクタ 1">
-            <a:extLst>
-              <a:ext uri="{FF2B5EF4-FFF2-40B4-BE49-F238E27FC236}">
-                <a16:creationId xmlns:a16="http://schemas.microsoft.com/office/drawing/2014/main" id="{24862859-1043-D3FF-BD05-4B83BEE8E8B7}"/>
-              </a:ext>
-            </a:extLst>
-          </p:cNvPr>
-          <p:cNvCxnSpPr>
-            <a:cxnSpLocks/>
-          </p:cNvCxnSpPr>
-          <p:nvPr/>
-        </p:nvCxnSpPr>
-        <p:spPr>
-          <a:xfrm>
-            <a:off x="0" y="1993900"/>
-            <a:ext cx="12192000" cy="0"/>
-          </a:xfrm>
-          <a:prstGeom prst="line">
-            <a:avLst/>
-          </a:prstGeom>
-          <a:ln w="38100"/>
-        </p:spPr>
-        <p:style>
-          <a:lnRef idx="2">
-            <a:schemeClr val="accent1"/>
-          </a:lnRef>
-          <a:fillRef idx="0">
-            <a:schemeClr val="accent1"/>
-          </a:fillRef>
-          <a:effectRef idx="1">
-            <a:schemeClr val="accent1"/>
-          </a:effectRef>
-          <a:fontRef idx="minor">
-            <a:schemeClr val="tx1"/>
-          </a:fontRef>
-        </p:style>
-      </p:cxnSp>
-      <p:sp>
-        <p:nvSpPr>
-          <p:cNvPr id="3" name="タイトル プレースホルダー 1">
-            <a:extLst>
-              <a:ext uri="{FF2B5EF4-FFF2-40B4-BE49-F238E27FC236}">
-                <a16:creationId xmlns:a16="http://schemas.microsoft.com/office/drawing/2014/main" id="{03EC2628-F3CA-6BA0-3B54-ABFCC7593F28}"/>
-              </a:ext>
-            </a:extLst>
-          </p:cNvPr>
-          <p:cNvSpPr txBox="1">
-            <a:spLocks/>
-          </p:cNvSpPr>
-          <p:nvPr/>
-        </p:nvSpPr>
-        <p:spPr>
-          <a:xfrm>
-            <a:off x="355600" y="1108076"/>
-            <a:ext cx="11506200" cy="812797"/>
-          </a:xfrm>
-          <a:prstGeom prst="rect">
-            <a:avLst/>
-          </a:prstGeom>
-        </p:spPr>
-        <p:txBody>
-          <a:bodyPr vert="horz" lIns="91440" tIns="45720" rIns="91440" bIns="45720" rtlCol="0" anchor="ctr">
-            <a:noAutofit/>
-          </a:bodyPr>
-          <a:lstStyle>
-            <a:lvl1pPr algn="l" defTabSz="914400" rtl="0" eaLnBrk="1" latinLnBrk="0" hangingPunct="1">
-              <a:lnSpc>
-                <a:spcPct val="90000"/>
-              </a:lnSpc>
-              <a:spcBef>
-                <a:spcPct val="0"/>
-              </a:spcBef>
-              <a:buNone/>
-              <a:defRPr kumimoji="1" sz="1400" kern="1200">
-                <a:solidFill>
-                  <a:schemeClr val="tx1"/>
-                </a:solidFill>
-                <a:latin typeface="+mj-lt"/>
-                <a:ea typeface="+mj-ea"/>
-                <a:cs typeface="+mj-cs"/>
-              </a:defRPr>
-            </a:lvl1pPr>
-          </a:lstStyle>
-          <a:p>
-            <a:r>
-              <a:rPr lang="ja-JP" altLang="en-US" sz="2800" dirty="0"/>
-              <a:t>リード文</a:t>
-            </a:r>
-            <a:endParaRPr lang="en-US" altLang="ja-JP" sz="2800" dirty="0"/>
-          </a:p>
-          <a:p>
-            <a:r>
-              <a:rPr lang="en-US" altLang="ja-JP" sz="2800" dirty="0"/>
-              <a:t>2</a:t>
-            </a:r>
-            <a:r>
-              <a:rPr lang="ja-JP" altLang="en-US" sz="2800" dirty="0"/>
-              <a:t>行に収まる程度で</a:t>
-            </a:r>
-            <a:endParaRPr lang="en-US" altLang="ja-JP" sz="2800" dirty="0"/>
-          </a:p>
-        </p:txBody>
-      </p:sp>
-      <p:sp>
-        <p:nvSpPr>
-          <p:cNvPr id="4" name="タイトル プレースホルダー 1">
-            <a:extLst>
-              <a:ext uri="{FF2B5EF4-FFF2-40B4-BE49-F238E27FC236}">
-                <a16:creationId xmlns:a16="http://schemas.microsoft.com/office/drawing/2014/main" id="{EB8DE72A-5D56-A0CF-055C-71C9B4758029}"/>
-              </a:ext>
-            </a:extLst>
-          </p:cNvPr>
-          <p:cNvSpPr txBox="1">
-            <a:spLocks/>
-          </p:cNvSpPr>
-          <p:nvPr/>
-        </p:nvSpPr>
-        <p:spPr>
-          <a:xfrm>
-            <a:off x="355600" y="546100"/>
-            <a:ext cx="11506200" cy="488949"/>
-          </a:xfrm>
-          <a:prstGeom prst="rect">
-            <a:avLst/>
-          </a:prstGeom>
-        </p:spPr>
-        <p:txBody>
-          <a:bodyPr vert="horz" lIns="91440" tIns="45720" rIns="91440" bIns="45720" rtlCol="0" anchor="ctr">
-            <a:noAutofit/>
-          </a:bodyPr>
-          <a:lstStyle>
-            <a:lvl1pPr algn="l" defTabSz="914400" rtl="0" eaLnBrk="1" latinLnBrk="0" hangingPunct="1">
-              <a:lnSpc>
-                <a:spcPct val="90000"/>
-              </a:lnSpc>
-              <a:spcBef>
-                <a:spcPct val="0"/>
-              </a:spcBef>
-              <a:buNone/>
-              <a:defRPr kumimoji="1" sz="1400" kern="1200">
-                <a:solidFill>
-                  <a:schemeClr val="tx1"/>
-                </a:solidFill>
-                <a:latin typeface="+mj-lt"/>
-                <a:ea typeface="+mj-ea"/>
-                <a:cs typeface="+mj-cs"/>
-              </a:defRPr>
-            </a:lvl1pPr>
-          </a:lstStyle>
-          <a:p>
-            <a:r>
-              <a:rPr lang="ja-JP" altLang="en-US" dirty="0"/>
-              <a:t>目次内のタイトル名そのまま　複数概念の説明をする</a:t>
-            </a:r>
-            <a:endParaRPr lang="en-US" altLang="ja-JP" dirty="0"/>
-          </a:p>
-        </p:txBody>
-      </p:sp>
-      <p:sp>
-        <p:nvSpPr>
-          <p:cNvPr id="11" name="正方形/長方形 10">
-            <a:extLst>
-              <a:ext uri="{FF2B5EF4-FFF2-40B4-BE49-F238E27FC236}">
-                <a16:creationId xmlns:a16="http://schemas.microsoft.com/office/drawing/2014/main" id="{B91DB15E-5863-A831-09BA-16FDD63736B4}"/>
-              </a:ext>
-            </a:extLst>
-          </p:cNvPr>
-          <p:cNvSpPr/>
-          <p:nvPr/>
-        </p:nvSpPr>
-        <p:spPr>
-          <a:xfrm>
-            <a:off x="355600" y="2279652"/>
-            <a:ext cx="1149346" cy="1149346"/>
-          </a:xfrm>
-          <a:prstGeom prst="rect">
-            <a:avLst/>
-          </a:prstGeom>
-          <a:solidFill>
-            <a:schemeClr val="tx1"/>
-          </a:solidFill>
-          <a:ln>
-            <a:noFill/>
-          </a:ln>
-        </p:spPr>
-        <p:style>
-          <a:lnRef idx="2">
-            <a:schemeClr val="accent1">
-              <a:shade val="15000"/>
-            </a:schemeClr>
-          </a:lnRef>
-          <a:fillRef idx="1">
-            <a:schemeClr val="accent1"/>
-          </a:fillRef>
-          <a:effectRef idx="0">
-            <a:schemeClr val="accent1"/>
-          </a:effectRef>
-          <a:fontRef idx="minor">
-            <a:schemeClr val="lt1"/>
-          </a:fontRef>
-        </p:style>
-        <p:txBody>
-          <a:bodyPr rtlCol="0" anchor="ctr"/>
-          <a:lstStyle/>
-          <a:p>
-            <a:pPr algn="ctr"/>
-            <a:r>
-              <a:rPr kumimoji="1" lang="ja-JP" altLang="en-US" b="1" dirty="0"/>
-              <a:t>ああ</a:t>
-            </a:r>
-          </a:p>
-        </p:txBody>
-      </p:sp>
-      <p:sp>
-        <p:nvSpPr>
-          <p:cNvPr id="12" name="正方形/長方形 11">
-            <a:extLst>
-              <a:ext uri="{FF2B5EF4-FFF2-40B4-BE49-F238E27FC236}">
-                <a16:creationId xmlns:a16="http://schemas.microsoft.com/office/drawing/2014/main" id="{8182A741-A4C7-1E32-86DE-927EB2E1A28B}"/>
-              </a:ext>
-            </a:extLst>
-          </p:cNvPr>
-          <p:cNvSpPr/>
-          <p:nvPr/>
-        </p:nvSpPr>
-        <p:spPr>
-          <a:xfrm>
-            <a:off x="355600" y="3714749"/>
-            <a:ext cx="1149346" cy="1149346"/>
-          </a:xfrm>
-          <a:prstGeom prst="rect">
-            <a:avLst/>
-          </a:prstGeom>
-          <a:solidFill>
-            <a:schemeClr val="tx1"/>
-          </a:solidFill>
-          <a:ln>
-            <a:noFill/>
-          </a:ln>
-        </p:spPr>
-        <p:style>
-          <a:lnRef idx="2">
-            <a:schemeClr val="accent1">
-              <a:shade val="15000"/>
-            </a:schemeClr>
-          </a:lnRef>
-          <a:fillRef idx="1">
-            <a:schemeClr val="accent1"/>
-          </a:fillRef>
-          <a:effectRef idx="0">
-            <a:schemeClr val="accent1"/>
-          </a:effectRef>
-          <a:fontRef idx="minor">
-            <a:schemeClr val="lt1"/>
-          </a:fontRef>
-        </p:style>
-        <p:txBody>
-          <a:bodyPr rtlCol="0" anchor="ctr"/>
-          <a:lstStyle/>
-          <a:p>
-            <a:pPr algn="ctr"/>
-            <a:r>
-              <a:rPr lang="ja-JP" altLang="en-US" b="1" dirty="0"/>
-              <a:t>いい</a:t>
-            </a:r>
-          </a:p>
-        </p:txBody>
-      </p:sp>
-      <p:sp>
-        <p:nvSpPr>
-          <p:cNvPr id="13" name="正方形/長方形 12">
-            <a:extLst>
-              <a:ext uri="{FF2B5EF4-FFF2-40B4-BE49-F238E27FC236}">
-                <a16:creationId xmlns:a16="http://schemas.microsoft.com/office/drawing/2014/main" id="{8C41F1C0-087D-C777-BC24-261F5C00824D}"/>
-              </a:ext>
-            </a:extLst>
-          </p:cNvPr>
-          <p:cNvSpPr/>
-          <p:nvPr/>
-        </p:nvSpPr>
-        <p:spPr>
-          <a:xfrm>
-            <a:off x="355600" y="5149846"/>
-            <a:ext cx="1149346" cy="1149346"/>
-          </a:xfrm>
-          <a:prstGeom prst="rect">
-            <a:avLst/>
-          </a:prstGeom>
-          <a:solidFill>
-            <a:schemeClr val="tx1"/>
-          </a:solidFill>
-          <a:ln>
-            <a:noFill/>
-          </a:ln>
-        </p:spPr>
-        <p:style>
-          <a:lnRef idx="2">
-            <a:schemeClr val="accent1">
-              <a:shade val="15000"/>
-            </a:schemeClr>
-          </a:lnRef>
-          <a:fillRef idx="1">
-            <a:schemeClr val="accent1"/>
-          </a:fillRef>
-          <a:effectRef idx="0">
-            <a:schemeClr val="accent1"/>
-          </a:effectRef>
-          <a:fontRef idx="minor">
-            <a:schemeClr val="lt1"/>
-          </a:fontRef>
-        </p:style>
-        <p:txBody>
-          <a:bodyPr rtlCol="0" anchor="ctr"/>
-          <a:lstStyle/>
-          <a:p>
-            <a:pPr algn="ctr"/>
-            <a:r>
-              <a:rPr lang="ja-JP" altLang="en-US" b="1" dirty="0"/>
-              <a:t>うう</a:t>
-            </a:r>
-          </a:p>
-        </p:txBody>
-      </p:sp>
-      <p:cxnSp>
-        <p:nvCxnSpPr>
-          <p:cNvPr id="16" name="直線コネクタ 15">
-            <a:extLst>
-              <a:ext uri="{FF2B5EF4-FFF2-40B4-BE49-F238E27FC236}">
-                <a16:creationId xmlns:a16="http://schemas.microsoft.com/office/drawing/2014/main" id="{A78DD1FB-6AAB-5E29-F612-BA6708D21C1F}"/>
-              </a:ext>
-            </a:extLst>
-          </p:cNvPr>
-          <p:cNvCxnSpPr>
-            <a:cxnSpLocks/>
-          </p:cNvCxnSpPr>
-          <p:nvPr/>
-        </p:nvCxnSpPr>
-        <p:spPr>
-          <a:xfrm>
-            <a:off x="355600" y="3568700"/>
-            <a:ext cx="11506200" cy="0"/>
-          </a:xfrm>
-          <a:prstGeom prst="line">
-            <a:avLst/>
-          </a:prstGeom>
-          <a:ln w="19050">
-            <a:solidFill>
-              <a:schemeClr val="tx1">
-                <a:lumMod val="60000"/>
-                <a:lumOff val="40000"/>
-              </a:schemeClr>
-            </a:solidFill>
-            <a:prstDash val="dash"/>
-          </a:ln>
-        </p:spPr>
-        <p:style>
-          <a:lnRef idx="2">
-            <a:schemeClr val="accent1"/>
-          </a:lnRef>
-          <a:fillRef idx="0">
-            <a:schemeClr val="accent1"/>
-          </a:fillRef>
-          <a:effectRef idx="1">
-            <a:schemeClr val="accent1"/>
-          </a:effectRef>
-          <a:fontRef idx="minor">
-            <a:schemeClr val="tx1"/>
-          </a:fontRef>
-        </p:style>
-      </p:cxnSp>
-      <p:cxnSp>
-        <p:nvCxnSpPr>
-          <p:cNvPr id="18" name="直線コネクタ 17">
-            <a:extLst>
-              <a:ext uri="{FF2B5EF4-FFF2-40B4-BE49-F238E27FC236}">
-                <a16:creationId xmlns:a16="http://schemas.microsoft.com/office/drawing/2014/main" id="{1DC66B67-0C2A-AA2C-876D-E0F419C335B4}"/>
-              </a:ext>
-            </a:extLst>
-          </p:cNvPr>
-          <p:cNvCxnSpPr>
-            <a:cxnSpLocks/>
-          </p:cNvCxnSpPr>
-          <p:nvPr/>
-        </p:nvCxnSpPr>
-        <p:spPr>
-          <a:xfrm>
-            <a:off x="355600" y="5003800"/>
-            <a:ext cx="11506200" cy="0"/>
-          </a:xfrm>
-          <a:prstGeom prst="line">
-            <a:avLst/>
-          </a:prstGeom>
-          <a:ln w="19050">
-            <a:solidFill>
-              <a:schemeClr val="tx1">
-                <a:lumMod val="60000"/>
-                <a:lumOff val="40000"/>
-              </a:schemeClr>
-            </a:solidFill>
-            <a:prstDash val="dash"/>
-          </a:ln>
-        </p:spPr>
-        <p:style>
-          <a:lnRef idx="2">
-            <a:schemeClr val="accent1"/>
-          </a:lnRef>
-          <a:fillRef idx="0">
-            <a:schemeClr val="accent1"/>
-          </a:fillRef>
-          <a:effectRef idx="1">
-            <a:schemeClr val="accent1"/>
-          </a:effectRef>
-          <a:fontRef idx="minor">
-            <a:schemeClr val="tx1"/>
-          </a:fontRef>
-        </p:style>
-      </p:cxnSp>
-      <p:sp>
-        <p:nvSpPr>
-          <p:cNvPr id="21" name="テキスト ボックス 20">
-            <a:extLst>
-              <a:ext uri="{FF2B5EF4-FFF2-40B4-BE49-F238E27FC236}">
-                <a16:creationId xmlns:a16="http://schemas.microsoft.com/office/drawing/2014/main" id="{5C910094-A8FE-5A9F-CED1-CE526034CC54}"/>
-              </a:ext>
-            </a:extLst>
-          </p:cNvPr>
-          <p:cNvSpPr txBox="1"/>
-          <p:nvPr/>
-        </p:nvSpPr>
-        <p:spPr>
-          <a:xfrm>
-            <a:off x="1752600" y="2279652"/>
-            <a:ext cx="10109200" cy="954107"/>
-          </a:xfrm>
-          <a:prstGeom prst="rect">
-            <a:avLst/>
-          </a:prstGeom>
-          <a:noFill/>
-        </p:spPr>
-        <p:txBody>
-          <a:bodyPr wrap="square" rtlCol="0">
-            <a:spAutoFit/>
-          </a:bodyPr>
-          <a:lstStyle/>
-          <a:p>
-            <a:r>
-              <a:rPr kumimoji="1" lang="ja-JP" altLang="en-US" sz="1400" dirty="0"/>
-              <a:t>あ</a:t>
-            </a:r>
-            <a:endParaRPr kumimoji="1" lang="en-US" altLang="ja-JP" sz="1400" dirty="0"/>
-          </a:p>
-          <a:p>
-            <a:endParaRPr kumimoji="1" lang="en-US" altLang="ja-JP" sz="1400" dirty="0"/>
-          </a:p>
-          <a:p>
-            <a:endParaRPr lang="en-US" altLang="ja-JP" sz="1400" dirty="0"/>
-          </a:p>
-          <a:p>
-            <a:endParaRPr kumimoji="1" lang="en-US" altLang="ja-JP" sz="1400" dirty="0"/>
-          </a:p>
-        </p:txBody>
-      </p:sp>
-      <p:sp>
-        <p:nvSpPr>
-          <p:cNvPr id="23" name="テキスト ボックス 22">
-            <a:extLst>
-              <a:ext uri="{FF2B5EF4-FFF2-40B4-BE49-F238E27FC236}">
-                <a16:creationId xmlns:a16="http://schemas.microsoft.com/office/drawing/2014/main" id="{833383A7-ADE2-840E-6291-1ED5315064E7}"/>
-              </a:ext>
-            </a:extLst>
-          </p:cNvPr>
-          <p:cNvSpPr txBox="1"/>
-          <p:nvPr/>
-        </p:nvSpPr>
-        <p:spPr>
-          <a:xfrm>
-            <a:off x="1752600" y="3714749"/>
-            <a:ext cx="10109200" cy="954107"/>
-          </a:xfrm>
-          <a:prstGeom prst="rect">
-            <a:avLst/>
-          </a:prstGeom>
-          <a:noFill/>
-        </p:spPr>
-        <p:txBody>
-          <a:bodyPr wrap="square" rtlCol="0">
-            <a:spAutoFit/>
-          </a:bodyPr>
-          <a:lstStyle/>
-          <a:p>
-            <a:r>
-              <a:rPr kumimoji="1" lang="ja-JP" altLang="en-US" sz="1400" dirty="0"/>
-              <a:t>あ</a:t>
-            </a:r>
-            <a:endParaRPr kumimoji="1" lang="en-US" altLang="ja-JP" sz="1400" dirty="0"/>
-          </a:p>
-          <a:p>
-            <a:endParaRPr kumimoji="1" lang="en-US" altLang="ja-JP" sz="1400" dirty="0"/>
-          </a:p>
-          <a:p>
-            <a:endParaRPr lang="en-US" altLang="ja-JP" sz="1400" dirty="0"/>
-          </a:p>
-          <a:p>
-            <a:endParaRPr kumimoji="1" lang="en-US" altLang="ja-JP" sz="1400" dirty="0"/>
-          </a:p>
-        </p:txBody>
-      </p:sp>
-      <p:sp>
-        <p:nvSpPr>
-          <p:cNvPr id="24" name="テキスト ボックス 23">
-            <a:extLst>
-              <a:ext uri="{FF2B5EF4-FFF2-40B4-BE49-F238E27FC236}">
-                <a16:creationId xmlns:a16="http://schemas.microsoft.com/office/drawing/2014/main" id="{3E1F5D7B-545E-FA6B-83D6-FBC2DAC73397}"/>
-              </a:ext>
-            </a:extLst>
-          </p:cNvPr>
-          <p:cNvSpPr txBox="1"/>
-          <p:nvPr/>
-        </p:nvSpPr>
-        <p:spPr>
-          <a:xfrm>
-            <a:off x="1752600" y="5149846"/>
-            <a:ext cx="10109200" cy="954107"/>
-          </a:xfrm>
-          <a:prstGeom prst="rect">
-            <a:avLst/>
-          </a:prstGeom>
-          <a:noFill/>
-        </p:spPr>
-        <p:txBody>
-          <a:bodyPr wrap="square" rtlCol="0">
-            <a:spAutoFit/>
-          </a:bodyPr>
-          <a:lstStyle/>
-          <a:p>
-            <a:r>
-              <a:rPr kumimoji="1" lang="ja-JP" altLang="en-US" sz="1400" dirty="0"/>
-              <a:t>あ</a:t>
-            </a:r>
-            <a:endParaRPr kumimoji="1" lang="en-US" altLang="ja-JP" sz="1400" dirty="0"/>
-          </a:p>
-          <a:p>
-            <a:endParaRPr kumimoji="1" lang="en-US" altLang="ja-JP" sz="1400" dirty="0"/>
-          </a:p>
-          <a:p>
-            <a:endParaRPr lang="en-US" altLang="ja-JP" sz="1400" dirty="0"/>
-          </a:p>
-          <a:p>
-            <a:endParaRPr kumimoji="1" lang="en-US" altLang="ja-JP" sz="1400" dirty="0"/>
-          </a:p>
-        </p:txBody>
-      </p:sp>
-    </p:spTree>
-    <p:extLst>
-      <p:ext uri="{BB962C8B-B14F-4D97-AF65-F5344CB8AC3E}">
-        <p14:creationId xmlns:p14="http://schemas.microsoft.com/office/powerpoint/2010/main" val="1155084605"/>
       </p:ext>
     </p:extLst>
   </p:cSld>
@@ -14514,7 +14369,7 @@
         <p:cNvPr id="1" name="">
           <a:extLst>
             <a:ext uri="{FF2B5EF4-FFF2-40B4-BE49-F238E27FC236}">
-              <a16:creationId xmlns:a16="http://schemas.microsoft.com/office/drawing/2014/main" id="{C4BDF32A-D3EE-4ED4-C8A8-96BE9F9863EF}"/>
+              <a16:creationId xmlns:a16="http://schemas.microsoft.com/office/drawing/2014/main" id="{31585827-0CBA-5C00-8DD5-064044992320}"/>
             </a:ext>
           </a:extLst>
         </p:cNvPr>
@@ -14534,7 +14389,7 @@
           <p:cNvPr id="2" name="直線コネクタ 1">
             <a:extLst>
               <a:ext uri="{FF2B5EF4-FFF2-40B4-BE49-F238E27FC236}">
-                <a16:creationId xmlns:a16="http://schemas.microsoft.com/office/drawing/2014/main" id="{8D983B16-5F4F-75CE-3266-3067313572C4}"/>
+                <a16:creationId xmlns:a16="http://schemas.microsoft.com/office/drawing/2014/main" id="{24862859-1043-D3FF-BD05-4B83BEE8E8B7}"/>
               </a:ext>
             </a:extLst>
           </p:cNvPr>
@@ -14573,7 +14428,7 @@
           <p:cNvPr id="3" name="タイトル プレースホルダー 1">
             <a:extLst>
               <a:ext uri="{FF2B5EF4-FFF2-40B4-BE49-F238E27FC236}">
-                <a16:creationId xmlns:a16="http://schemas.microsoft.com/office/drawing/2014/main" id="{F23457F6-6102-AE36-8337-65DB91D42569}"/>
+                <a16:creationId xmlns:a16="http://schemas.microsoft.com/office/drawing/2014/main" id="{03EC2628-F3CA-6BA0-3B54-ABFCC7593F28}"/>
               </a:ext>
             </a:extLst>
           </p:cNvPr>
@@ -14639,7 +14494,7 @@
           <p:cNvPr id="4" name="タイトル プレースホルダー 1">
             <a:extLst>
               <a:ext uri="{FF2B5EF4-FFF2-40B4-BE49-F238E27FC236}">
-                <a16:creationId xmlns:a16="http://schemas.microsoft.com/office/drawing/2014/main" id="{0FDBCE1D-31E9-0332-4904-671FB573ABDB}"/>
+                <a16:creationId xmlns:a16="http://schemas.microsoft.com/office/drawing/2014/main" id="{EB8DE72A-5D56-A0CF-055C-71C9B4758029}"/>
               </a:ext>
             </a:extLst>
           </p:cNvPr>
@@ -14683,6 +14538,596 @@
           <a:p>
             <a:r>
               <a:rPr lang="ja-JP" altLang="en-US" dirty="0"/>
+              <a:t>目次内のタイトル名そのまま　複数概念の説明をする</a:t>
+            </a:r>
+            <a:endParaRPr lang="en-US" altLang="ja-JP" dirty="0"/>
+          </a:p>
+        </p:txBody>
+      </p:sp>
+      <p:sp>
+        <p:nvSpPr>
+          <p:cNvPr id="11" name="正方形/長方形 10">
+            <a:extLst>
+              <a:ext uri="{FF2B5EF4-FFF2-40B4-BE49-F238E27FC236}">
+                <a16:creationId xmlns:a16="http://schemas.microsoft.com/office/drawing/2014/main" id="{B91DB15E-5863-A831-09BA-16FDD63736B4}"/>
+              </a:ext>
+            </a:extLst>
+          </p:cNvPr>
+          <p:cNvSpPr/>
+          <p:nvPr/>
+        </p:nvSpPr>
+        <p:spPr>
+          <a:xfrm>
+            <a:off x="355600" y="2279652"/>
+            <a:ext cx="1149346" cy="1149346"/>
+          </a:xfrm>
+          <a:prstGeom prst="rect">
+            <a:avLst/>
+          </a:prstGeom>
+          <a:solidFill>
+            <a:schemeClr val="tx1"/>
+          </a:solidFill>
+          <a:ln>
+            <a:noFill/>
+          </a:ln>
+        </p:spPr>
+        <p:style>
+          <a:lnRef idx="2">
+            <a:schemeClr val="accent1">
+              <a:shade val="15000"/>
+            </a:schemeClr>
+          </a:lnRef>
+          <a:fillRef idx="1">
+            <a:schemeClr val="accent1"/>
+          </a:fillRef>
+          <a:effectRef idx="0">
+            <a:schemeClr val="accent1"/>
+          </a:effectRef>
+          <a:fontRef idx="minor">
+            <a:schemeClr val="lt1"/>
+          </a:fontRef>
+        </p:style>
+        <p:txBody>
+          <a:bodyPr rtlCol="0" anchor="ctr"/>
+          <a:lstStyle/>
+          <a:p>
+            <a:pPr algn="ctr"/>
+            <a:r>
+              <a:rPr kumimoji="1" lang="ja-JP" altLang="en-US" b="1" dirty="0"/>
+              <a:t>ああ</a:t>
+            </a:r>
+          </a:p>
+        </p:txBody>
+      </p:sp>
+      <p:sp>
+        <p:nvSpPr>
+          <p:cNvPr id="12" name="正方形/長方形 11">
+            <a:extLst>
+              <a:ext uri="{FF2B5EF4-FFF2-40B4-BE49-F238E27FC236}">
+                <a16:creationId xmlns:a16="http://schemas.microsoft.com/office/drawing/2014/main" id="{8182A741-A4C7-1E32-86DE-927EB2E1A28B}"/>
+              </a:ext>
+            </a:extLst>
+          </p:cNvPr>
+          <p:cNvSpPr/>
+          <p:nvPr/>
+        </p:nvSpPr>
+        <p:spPr>
+          <a:xfrm>
+            <a:off x="355600" y="3714749"/>
+            <a:ext cx="1149346" cy="1149346"/>
+          </a:xfrm>
+          <a:prstGeom prst="rect">
+            <a:avLst/>
+          </a:prstGeom>
+          <a:solidFill>
+            <a:schemeClr val="tx1"/>
+          </a:solidFill>
+          <a:ln>
+            <a:noFill/>
+          </a:ln>
+        </p:spPr>
+        <p:style>
+          <a:lnRef idx="2">
+            <a:schemeClr val="accent1">
+              <a:shade val="15000"/>
+            </a:schemeClr>
+          </a:lnRef>
+          <a:fillRef idx="1">
+            <a:schemeClr val="accent1"/>
+          </a:fillRef>
+          <a:effectRef idx="0">
+            <a:schemeClr val="accent1"/>
+          </a:effectRef>
+          <a:fontRef idx="minor">
+            <a:schemeClr val="lt1"/>
+          </a:fontRef>
+        </p:style>
+        <p:txBody>
+          <a:bodyPr rtlCol="0" anchor="ctr"/>
+          <a:lstStyle/>
+          <a:p>
+            <a:pPr algn="ctr"/>
+            <a:r>
+              <a:rPr lang="ja-JP" altLang="en-US" b="1" dirty="0"/>
+              <a:t>いい</a:t>
+            </a:r>
+          </a:p>
+        </p:txBody>
+      </p:sp>
+      <p:sp>
+        <p:nvSpPr>
+          <p:cNvPr id="13" name="正方形/長方形 12">
+            <a:extLst>
+              <a:ext uri="{FF2B5EF4-FFF2-40B4-BE49-F238E27FC236}">
+                <a16:creationId xmlns:a16="http://schemas.microsoft.com/office/drawing/2014/main" id="{8C41F1C0-087D-C777-BC24-261F5C00824D}"/>
+              </a:ext>
+            </a:extLst>
+          </p:cNvPr>
+          <p:cNvSpPr/>
+          <p:nvPr/>
+        </p:nvSpPr>
+        <p:spPr>
+          <a:xfrm>
+            <a:off x="355600" y="5149846"/>
+            <a:ext cx="1149346" cy="1149346"/>
+          </a:xfrm>
+          <a:prstGeom prst="rect">
+            <a:avLst/>
+          </a:prstGeom>
+          <a:solidFill>
+            <a:schemeClr val="tx1"/>
+          </a:solidFill>
+          <a:ln>
+            <a:noFill/>
+          </a:ln>
+        </p:spPr>
+        <p:style>
+          <a:lnRef idx="2">
+            <a:schemeClr val="accent1">
+              <a:shade val="15000"/>
+            </a:schemeClr>
+          </a:lnRef>
+          <a:fillRef idx="1">
+            <a:schemeClr val="accent1"/>
+          </a:fillRef>
+          <a:effectRef idx="0">
+            <a:schemeClr val="accent1"/>
+          </a:effectRef>
+          <a:fontRef idx="minor">
+            <a:schemeClr val="lt1"/>
+          </a:fontRef>
+        </p:style>
+        <p:txBody>
+          <a:bodyPr rtlCol="0" anchor="ctr"/>
+          <a:lstStyle/>
+          <a:p>
+            <a:pPr algn="ctr"/>
+            <a:r>
+              <a:rPr lang="ja-JP" altLang="en-US" b="1" dirty="0"/>
+              <a:t>うう</a:t>
+            </a:r>
+          </a:p>
+        </p:txBody>
+      </p:sp>
+      <p:cxnSp>
+        <p:nvCxnSpPr>
+          <p:cNvPr id="16" name="直線コネクタ 15">
+            <a:extLst>
+              <a:ext uri="{FF2B5EF4-FFF2-40B4-BE49-F238E27FC236}">
+                <a16:creationId xmlns:a16="http://schemas.microsoft.com/office/drawing/2014/main" id="{A78DD1FB-6AAB-5E29-F612-BA6708D21C1F}"/>
+              </a:ext>
+            </a:extLst>
+          </p:cNvPr>
+          <p:cNvCxnSpPr>
+            <a:cxnSpLocks/>
+          </p:cNvCxnSpPr>
+          <p:nvPr/>
+        </p:nvCxnSpPr>
+        <p:spPr>
+          <a:xfrm>
+            <a:off x="355600" y="3568700"/>
+            <a:ext cx="11506200" cy="0"/>
+          </a:xfrm>
+          <a:prstGeom prst="line">
+            <a:avLst/>
+          </a:prstGeom>
+          <a:ln w="19050">
+            <a:solidFill>
+              <a:schemeClr val="tx1">
+                <a:lumMod val="60000"/>
+                <a:lumOff val="40000"/>
+              </a:schemeClr>
+            </a:solidFill>
+            <a:prstDash val="dash"/>
+          </a:ln>
+        </p:spPr>
+        <p:style>
+          <a:lnRef idx="2">
+            <a:schemeClr val="accent1"/>
+          </a:lnRef>
+          <a:fillRef idx="0">
+            <a:schemeClr val="accent1"/>
+          </a:fillRef>
+          <a:effectRef idx="1">
+            <a:schemeClr val="accent1"/>
+          </a:effectRef>
+          <a:fontRef idx="minor">
+            <a:schemeClr val="tx1"/>
+          </a:fontRef>
+        </p:style>
+      </p:cxnSp>
+      <p:cxnSp>
+        <p:nvCxnSpPr>
+          <p:cNvPr id="18" name="直線コネクタ 17">
+            <a:extLst>
+              <a:ext uri="{FF2B5EF4-FFF2-40B4-BE49-F238E27FC236}">
+                <a16:creationId xmlns:a16="http://schemas.microsoft.com/office/drawing/2014/main" id="{1DC66B67-0C2A-AA2C-876D-E0F419C335B4}"/>
+              </a:ext>
+            </a:extLst>
+          </p:cNvPr>
+          <p:cNvCxnSpPr>
+            <a:cxnSpLocks/>
+          </p:cNvCxnSpPr>
+          <p:nvPr/>
+        </p:nvCxnSpPr>
+        <p:spPr>
+          <a:xfrm>
+            <a:off x="355600" y="5003800"/>
+            <a:ext cx="11506200" cy="0"/>
+          </a:xfrm>
+          <a:prstGeom prst="line">
+            <a:avLst/>
+          </a:prstGeom>
+          <a:ln w="19050">
+            <a:solidFill>
+              <a:schemeClr val="tx1">
+                <a:lumMod val="60000"/>
+                <a:lumOff val="40000"/>
+              </a:schemeClr>
+            </a:solidFill>
+            <a:prstDash val="dash"/>
+          </a:ln>
+        </p:spPr>
+        <p:style>
+          <a:lnRef idx="2">
+            <a:schemeClr val="accent1"/>
+          </a:lnRef>
+          <a:fillRef idx="0">
+            <a:schemeClr val="accent1"/>
+          </a:fillRef>
+          <a:effectRef idx="1">
+            <a:schemeClr val="accent1"/>
+          </a:effectRef>
+          <a:fontRef idx="minor">
+            <a:schemeClr val="tx1"/>
+          </a:fontRef>
+        </p:style>
+      </p:cxnSp>
+      <p:sp>
+        <p:nvSpPr>
+          <p:cNvPr id="21" name="テキスト ボックス 20">
+            <a:extLst>
+              <a:ext uri="{FF2B5EF4-FFF2-40B4-BE49-F238E27FC236}">
+                <a16:creationId xmlns:a16="http://schemas.microsoft.com/office/drawing/2014/main" id="{5C910094-A8FE-5A9F-CED1-CE526034CC54}"/>
+              </a:ext>
+            </a:extLst>
+          </p:cNvPr>
+          <p:cNvSpPr txBox="1"/>
+          <p:nvPr/>
+        </p:nvSpPr>
+        <p:spPr>
+          <a:xfrm>
+            <a:off x="1752600" y="2279652"/>
+            <a:ext cx="10109200" cy="954107"/>
+          </a:xfrm>
+          <a:prstGeom prst="rect">
+            <a:avLst/>
+          </a:prstGeom>
+          <a:noFill/>
+        </p:spPr>
+        <p:txBody>
+          <a:bodyPr wrap="square" rtlCol="0">
+            <a:spAutoFit/>
+          </a:bodyPr>
+          <a:lstStyle/>
+          <a:p>
+            <a:r>
+              <a:rPr kumimoji="1" lang="ja-JP" altLang="en-US" sz="1400" dirty="0"/>
+              <a:t>あ</a:t>
+            </a:r>
+            <a:endParaRPr kumimoji="1" lang="en-US" altLang="ja-JP" sz="1400" dirty="0"/>
+          </a:p>
+          <a:p>
+            <a:endParaRPr kumimoji="1" lang="en-US" altLang="ja-JP" sz="1400" dirty="0"/>
+          </a:p>
+          <a:p>
+            <a:endParaRPr lang="en-US" altLang="ja-JP" sz="1400" dirty="0"/>
+          </a:p>
+          <a:p>
+            <a:endParaRPr kumimoji="1" lang="en-US" altLang="ja-JP" sz="1400" dirty="0"/>
+          </a:p>
+        </p:txBody>
+      </p:sp>
+      <p:sp>
+        <p:nvSpPr>
+          <p:cNvPr id="23" name="テキスト ボックス 22">
+            <a:extLst>
+              <a:ext uri="{FF2B5EF4-FFF2-40B4-BE49-F238E27FC236}">
+                <a16:creationId xmlns:a16="http://schemas.microsoft.com/office/drawing/2014/main" id="{833383A7-ADE2-840E-6291-1ED5315064E7}"/>
+              </a:ext>
+            </a:extLst>
+          </p:cNvPr>
+          <p:cNvSpPr txBox="1"/>
+          <p:nvPr/>
+        </p:nvSpPr>
+        <p:spPr>
+          <a:xfrm>
+            <a:off x="1752600" y="3714749"/>
+            <a:ext cx="10109200" cy="954107"/>
+          </a:xfrm>
+          <a:prstGeom prst="rect">
+            <a:avLst/>
+          </a:prstGeom>
+          <a:noFill/>
+        </p:spPr>
+        <p:txBody>
+          <a:bodyPr wrap="square" rtlCol="0">
+            <a:spAutoFit/>
+          </a:bodyPr>
+          <a:lstStyle/>
+          <a:p>
+            <a:r>
+              <a:rPr kumimoji="1" lang="ja-JP" altLang="en-US" sz="1400" dirty="0"/>
+              <a:t>あ</a:t>
+            </a:r>
+            <a:endParaRPr kumimoji="1" lang="en-US" altLang="ja-JP" sz="1400" dirty="0"/>
+          </a:p>
+          <a:p>
+            <a:endParaRPr kumimoji="1" lang="en-US" altLang="ja-JP" sz="1400" dirty="0"/>
+          </a:p>
+          <a:p>
+            <a:endParaRPr lang="en-US" altLang="ja-JP" sz="1400" dirty="0"/>
+          </a:p>
+          <a:p>
+            <a:endParaRPr kumimoji="1" lang="en-US" altLang="ja-JP" sz="1400" dirty="0"/>
+          </a:p>
+        </p:txBody>
+      </p:sp>
+      <p:sp>
+        <p:nvSpPr>
+          <p:cNvPr id="24" name="テキスト ボックス 23">
+            <a:extLst>
+              <a:ext uri="{FF2B5EF4-FFF2-40B4-BE49-F238E27FC236}">
+                <a16:creationId xmlns:a16="http://schemas.microsoft.com/office/drawing/2014/main" id="{3E1F5D7B-545E-FA6B-83D6-FBC2DAC73397}"/>
+              </a:ext>
+            </a:extLst>
+          </p:cNvPr>
+          <p:cNvSpPr txBox="1"/>
+          <p:nvPr/>
+        </p:nvSpPr>
+        <p:spPr>
+          <a:xfrm>
+            <a:off x="1752600" y="5149846"/>
+            <a:ext cx="10109200" cy="954107"/>
+          </a:xfrm>
+          <a:prstGeom prst="rect">
+            <a:avLst/>
+          </a:prstGeom>
+          <a:noFill/>
+        </p:spPr>
+        <p:txBody>
+          <a:bodyPr wrap="square" rtlCol="0">
+            <a:spAutoFit/>
+          </a:bodyPr>
+          <a:lstStyle/>
+          <a:p>
+            <a:r>
+              <a:rPr kumimoji="1" lang="ja-JP" altLang="en-US" sz="1400" dirty="0"/>
+              <a:t>あ</a:t>
+            </a:r>
+            <a:endParaRPr kumimoji="1" lang="en-US" altLang="ja-JP" sz="1400" dirty="0"/>
+          </a:p>
+          <a:p>
+            <a:endParaRPr kumimoji="1" lang="en-US" altLang="ja-JP" sz="1400" dirty="0"/>
+          </a:p>
+          <a:p>
+            <a:endParaRPr lang="en-US" altLang="ja-JP" sz="1400" dirty="0"/>
+          </a:p>
+          <a:p>
+            <a:endParaRPr kumimoji="1" lang="en-US" altLang="ja-JP" sz="1400" dirty="0"/>
+          </a:p>
+        </p:txBody>
+      </p:sp>
+    </p:spTree>
+    <p:extLst>
+      <p:ext uri="{BB962C8B-B14F-4D97-AF65-F5344CB8AC3E}">
+        <p14:creationId xmlns:p14="http://schemas.microsoft.com/office/powerpoint/2010/main" val="1155084605"/>
+      </p:ext>
+    </p:extLst>
+  </p:cSld>
+  <p:clrMapOvr>
+    <a:masterClrMapping/>
+  </p:clrMapOvr>
+</p:sld>
+</file>
+
+<file path=ppt/slides/slide21.xml><?xml version="1.0" encoding="utf-8"?>
+<p:sld xmlns:a="http://schemas.openxmlformats.org/drawingml/2006/main" xmlns:r="http://schemas.openxmlformats.org/officeDocument/2006/relationships" xmlns:p="http://schemas.openxmlformats.org/presentationml/2006/main">
+  <p:cSld>
+    <p:spTree>
+      <p:nvGrpSpPr>
+        <p:cNvPr id="1" name="">
+          <a:extLst>
+            <a:ext uri="{FF2B5EF4-FFF2-40B4-BE49-F238E27FC236}">
+              <a16:creationId xmlns:a16="http://schemas.microsoft.com/office/drawing/2014/main" id="{C4BDF32A-D3EE-4ED4-C8A8-96BE9F9863EF}"/>
+            </a:ext>
+          </a:extLst>
+        </p:cNvPr>
+        <p:cNvGrpSpPr/>
+        <p:nvPr/>
+      </p:nvGrpSpPr>
+      <p:grpSpPr>
+        <a:xfrm>
+          <a:off x="0" y="0"/>
+          <a:ext cx="0" cy="0"/>
+          <a:chOff x="0" y="0"/>
+          <a:chExt cx="0" cy="0"/>
+        </a:xfrm>
+      </p:grpSpPr>
+      <p:cxnSp>
+        <p:nvCxnSpPr>
+          <p:cNvPr id="2" name="直線コネクタ 1">
+            <a:extLst>
+              <a:ext uri="{FF2B5EF4-FFF2-40B4-BE49-F238E27FC236}">
+                <a16:creationId xmlns:a16="http://schemas.microsoft.com/office/drawing/2014/main" id="{8D983B16-5F4F-75CE-3266-3067313572C4}"/>
+              </a:ext>
+            </a:extLst>
+          </p:cNvPr>
+          <p:cNvCxnSpPr>
+            <a:cxnSpLocks/>
+          </p:cNvCxnSpPr>
+          <p:nvPr/>
+        </p:nvCxnSpPr>
+        <p:spPr>
+          <a:xfrm>
+            <a:off x="0" y="1993900"/>
+            <a:ext cx="12192000" cy="0"/>
+          </a:xfrm>
+          <a:prstGeom prst="line">
+            <a:avLst/>
+          </a:prstGeom>
+          <a:ln w="38100"/>
+        </p:spPr>
+        <p:style>
+          <a:lnRef idx="2">
+            <a:schemeClr val="accent1"/>
+          </a:lnRef>
+          <a:fillRef idx="0">
+            <a:schemeClr val="accent1"/>
+          </a:fillRef>
+          <a:effectRef idx="1">
+            <a:schemeClr val="accent1"/>
+          </a:effectRef>
+          <a:fontRef idx="minor">
+            <a:schemeClr val="tx1"/>
+          </a:fontRef>
+        </p:style>
+      </p:cxnSp>
+      <p:sp>
+        <p:nvSpPr>
+          <p:cNvPr id="3" name="タイトル プレースホルダー 1">
+            <a:extLst>
+              <a:ext uri="{FF2B5EF4-FFF2-40B4-BE49-F238E27FC236}">
+                <a16:creationId xmlns:a16="http://schemas.microsoft.com/office/drawing/2014/main" id="{F23457F6-6102-AE36-8337-65DB91D42569}"/>
+              </a:ext>
+            </a:extLst>
+          </p:cNvPr>
+          <p:cNvSpPr txBox="1">
+            <a:spLocks/>
+          </p:cNvSpPr>
+          <p:nvPr/>
+        </p:nvSpPr>
+        <p:spPr>
+          <a:xfrm>
+            <a:off x="355600" y="1108076"/>
+            <a:ext cx="11506200" cy="812797"/>
+          </a:xfrm>
+          <a:prstGeom prst="rect">
+            <a:avLst/>
+          </a:prstGeom>
+        </p:spPr>
+        <p:txBody>
+          <a:bodyPr vert="horz" lIns="91440" tIns="45720" rIns="91440" bIns="45720" rtlCol="0" anchor="ctr">
+            <a:noAutofit/>
+          </a:bodyPr>
+          <a:lstStyle>
+            <a:lvl1pPr algn="l" defTabSz="914400" rtl="0" eaLnBrk="1" latinLnBrk="0" hangingPunct="1">
+              <a:lnSpc>
+                <a:spcPct val="90000"/>
+              </a:lnSpc>
+              <a:spcBef>
+                <a:spcPct val="0"/>
+              </a:spcBef>
+              <a:buNone/>
+              <a:defRPr kumimoji="1" sz="1400" kern="1200">
+                <a:solidFill>
+                  <a:schemeClr val="tx1"/>
+                </a:solidFill>
+                <a:latin typeface="+mj-lt"/>
+                <a:ea typeface="+mj-ea"/>
+                <a:cs typeface="+mj-cs"/>
+              </a:defRPr>
+            </a:lvl1pPr>
+          </a:lstStyle>
+          <a:p>
+            <a:r>
+              <a:rPr lang="ja-JP" altLang="en-US" sz="2800" dirty="0"/>
+              <a:t>リード文</a:t>
+            </a:r>
+            <a:endParaRPr lang="en-US" altLang="ja-JP" sz="2800" dirty="0"/>
+          </a:p>
+          <a:p>
+            <a:r>
+              <a:rPr lang="en-US" altLang="ja-JP" sz="2800" dirty="0"/>
+              <a:t>2</a:t>
+            </a:r>
+            <a:r>
+              <a:rPr lang="ja-JP" altLang="en-US" sz="2800" dirty="0"/>
+              <a:t>行に収まる程度で</a:t>
+            </a:r>
+            <a:endParaRPr lang="en-US" altLang="ja-JP" sz="2800" dirty="0"/>
+          </a:p>
+        </p:txBody>
+      </p:sp>
+      <p:sp>
+        <p:nvSpPr>
+          <p:cNvPr id="4" name="タイトル プレースホルダー 1">
+            <a:extLst>
+              <a:ext uri="{FF2B5EF4-FFF2-40B4-BE49-F238E27FC236}">
+                <a16:creationId xmlns:a16="http://schemas.microsoft.com/office/drawing/2014/main" id="{0FDBCE1D-31E9-0332-4904-671FB573ABDB}"/>
+              </a:ext>
+            </a:extLst>
+          </p:cNvPr>
+          <p:cNvSpPr txBox="1">
+            <a:spLocks/>
+          </p:cNvSpPr>
+          <p:nvPr/>
+        </p:nvSpPr>
+        <p:spPr>
+          <a:xfrm>
+            <a:off x="355600" y="546100"/>
+            <a:ext cx="11506200" cy="488949"/>
+          </a:xfrm>
+          <a:prstGeom prst="rect">
+            <a:avLst/>
+          </a:prstGeom>
+        </p:spPr>
+        <p:txBody>
+          <a:bodyPr vert="horz" lIns="91440" tIns="45720" rIns="91440" bIns="45720" rtlCol="0" anchor="ctr">
+            <a:noAutofit/>
+          </a:bodyPr>
+          <a:lstStyle>
+            <a:lvl1pPr algn="l" defTabSz="914400" rtl="0" eaLnBrk="1" latinLnBrk="0" hangingPunct="1">
+              <a:lnSpc>
+                <a:spcPct val="90000"/>
+              </a:lnSpc>
+              <a:spcBef>
+                <a:spcPct val="0"/>
+              </a:spcBef>
+              <a:buNone/>
+              <a:defRPr kumimoji="1" sz="1400" kern="1200">
+                <a:solidFill>
+                  <a:schemeClr val="tx1"/>
+                </a:solidFill>
+                <a:latin typeface="+mj-lt"/>
+                <a:ea typeface="+mj-ea"/>
+                <a:cs typeface="+mj-cs"/>
+              </a:defRPr>
+            </a:lvl1pPr>
+          </a:lstStyle>
+          <a:p>
+            <a:r>
+              <a:rPr lang="ja-JP" altLang="en-US" dirty="0"/>
               <a:t>目次内のタイトル名そのまま</a:t>
             </a:r>
             <a:endParaRPr lang="en-US" altLang="ja-JP" dirty="0"/>
@@ -15290,7 +15735,7 @@
 </p:sld>
 </file>
 
-<file path=ppt/slides/slide21.xml><?xml version="1.0" encoding="utf-8"?>
+<file path=ppt/slides/slide22.xml><?xml version="1.0" encoding="utf-8"?>
 <p:sld xmlns:a="http://schemas.openxmlformats.org/drawingml/2006/main" xmlns:r="http://schemas.openxmlformats.org/officeDocument/2006/relationships" xmlns:p="http://schemas.openxmlformats.org/presentationml/2006/main">
   <p:cSld>
     <p:spTree>
@@ -17365,7 +17810,7 @@
 </p:sld>
 </file>
 
-<file path=ppt/slides/slide22.xml><?xml version="1.0" encoding="utf-8"?>
+<file path=ppt/slides/slide23.xml><?xml version="1.0" encoding="utf-8"?>
 <p:sld xmlns:a="http://schemas.openxmlformats.org/drawingml/2006/main" xmlns:r="http://schemas.openxmlformats.org/officeDocument/2006/relationships" xmlns:p="http://schemas.openxmlformats.org/presentationml/2006/main">
   <p:cSld>
     <p:spTree>
@@ -17762,7 +18207,7 @@
 </p:sld>
 </file>
 
-<file path=ppt/slides/slide23.xml><?xml version="1.0" encoding="utf-8"?>
+<file path=ppt/slides/slide24.xml><?xml version="1.0" encoding="utf-8"?>
 <p:sld xmlns:a="http://schemas.openxmlformats.org/drawingml/2006/main" xmlns:r="http://schemas.openxmlformats.org/officeDocument/2006/relationships" xmlns:p="http://schemas.openxmlformats.org/presentationml/2006/main">
   <p:cSld>
     <p:spTree>
@@ -17846,7 +18291,7 @@
 </p:sld>
 </file>
 
-<file path=ppt/slides/slide24.xml><?xml version="1.0" encoding="utf-8"?>
+<file path=ppt/slides/slide25.xml><?xml version="1.0" encoding="utf-8"?>
 <p:sld xmlns:a="http://schemas.openxmlformats.org/drawingml/2006/main" xmlns:r="http://schemas.openxmlformats.org/officeDocument/2006/relationships" xmlns:p="http://schemas.openxmlformats.org/presentationml/2006/main">
   <p:cSld>
     <p:spTree>
@@ -18739,7 +19184,7 @@
         <p:cNvPr id="1" name="">
           <a:extLst>
             <a:ext uri="{FF2B5EF4-FFF2-40B4-BE49-F238E27FC236}">
-              <a16:creationId xmlns:a16="http://schemas.microsoft.com/office/drawing/2014/main" id="{08533F67-3C10-6633-12BE-34F8F8A48A10}"/>
+              <a16:creationId xmlns:a16="http://schemas.microsoft.com/office/drawing/2014/main" id="{EAC6C4BD-EC86-5470-ABF7-73324851CA17}"/>
             </a:ext>
           </a:extLst>
         </p:cNvPr>
@@ -18759,7 +19204,7 @@
           <p:cNvPr id="2" name="直線コネクタ 1">
             <a:extLst>
               <a:ext uri="{FF2B5EF4-FFF2-40B4-BE49-F238E27FC236}">
-                <a16:creationId xmlns:a16="http://schemas.microsoft.com/office/drawing/2014/main" id="{9740C99E-8A60-EAC0-A89B-6836B6DF154F}"/>
+                <a16:creationId xmlns:a16="http://schemas.microsoft.com/office/drawing/2014/main" id="{331A3C11-65C9-F92B-1236-B075DB0444A7}"/>
               </a:ext>
             </a:extLst>
           </p:cNvPr>
@@ -18798,7 +19243,7 @@
           <p:cNvPr id="3" name="タイトル プレースホルダー 1">
             <a:extLst>
               <a:ext uri="{FF2B5EF4-FFF2-40B4-BE49-F238E27FC236}">
-                <a16:creationId xmlns:a16="http://schemas.microsoft.com/office/drawing/2014/main" id="{C7510BA4-7A54-A2C4-E89D-C4EF6C3509CC}"/>
+                <a16:creationId xmlns:a16="http://schemas.microsoft.com/office/drawing/2014/main" id="{0729D99A-440A-EE0B-A08E-79E0596E70A9}"/>
               </a:ext>
             </a:extLst>
           </p:cNvPr>
@@ -18841,8 +19286,12 @@
           </a:lstStyle>
           <a:p>
             <a:r>
+              <a:rPr lang="ja-JP" altLang="en-US" sz="2800" dirty="0"/>
+              <a:t>システムは、なにかとなにかが「結合」することで、</a:t>
+            </a:r>
+            <a:r>
               <a:rPr lang="ja-JP" altLang="en-US" sz="2800"/>
-              <a:t>～は、～により、～することを目的としている</a:t>
+              <a:t>成立するが、「結合」は「複雑性」を発生させる。</a:t>
             </a:r>
             <a:endParaRPr lang="en-US" altLang="ja-JP" sz="2800" dirty="0"/>
           </a:p>
@@ -18853,7 +19302,7 @@
           <p:cNvPr id="4" name="タイトル プレースホルダー 1">
             <a:extLst>
               <a:ext uri="{FF2B5EF4-FFF2-40B4-BE49-F238E27FC236}">
-                <a16:creationId xmlns:a16="http://schemas.microsoft.com/office/drawing/2014/main" id="{37A9D8E7-0DDA-4144-04F1-32E2E21FA926}"/>
+                <a16:creationId xmlns:a16="http://schemas.microsoft.com/office/drawing/2014/main" id="{8580AE27-D297-E327-4251-2AFF54AA5FB1}"/>
               </a:ext>
             </a:extLst>
           </p:cNvPr>
@@ -18897,7 +19346,7 @@
           <a:p>
             <a:r>
               <a:rPr lang="ja-JP" altLang="en-US" dirty="0"/>
-              <a:t>目次内のタイトル名そのまま</a:t>
+              <a:t>「複雑性」という概念について</a:t>
             </a:r>
             <a:endParaRPr lang="en-US" altLang="ja-JP" dirty="0"/>
           </a:p>
@@ -18905,10 +19354,76 @@
       </p:sp>
       <p:sp>
         <p:nvSpPr>
-          <p:cNvPr id="8" name="二等辺三角形 7">
-            <a:extLst>
-              <a:ext uri="{FF2B5EF4-FFF2-40B4-BE49-F238E27FC236}">
-                <a16:creationId xmlns:a16="http://schemas.microsoft.com/office/drawing/2014/main" id="{EB5AC460-77C4-3273-3AD4-F1611D15E829}"/>
+          <p:cNvPr id="5" name="タイトル プレースホルダー 1">
+            <a:extLst>
+              <a:ext uri="{FF2B5EF4-FFF2-40B4-BE49-F238E27FC236}">
+                <a16:creationId xmlns:a16="http://schemas.microsoft.com/office/drawing/2014/main" id="{5999C7C8-0242-8EEF-9FDD-8383BD58DC6B}"/>
+              </a:ext>
+            </a:extLst>
+          </p:cNvPr>
+          <p:cNvSpPr txBox="1">
+            <a:spLocks/>
+          </p:cNvSpPr>
+          <p:nvPr/>
+        </p:nvSpPr>
+        <p:spPr>
+          <a:xfrm>
+            <a:off x="355600" y="2146304"/>
+            <a:ext cx="11506200" cy="4165584"/>
+          </a:xfrm>
+          <a:prstGeom prst="rect">
+            <a:avLst/>
+          </a:prstGeom>
+        </p:spPr>
+        <p:txBody>
+          <a:bodyPr vert="horz" lIns="91440" tIns="45720" rIns="91440" bIns="45720" rtlCol="0" anchor="t" anchorCtr="0">
+            <a:noAutofit/>
+          </a:bodyPr>
+          <a:lstStyle>
+            <a:lvl1pPr algn="l" defTabSz="914400" rtl="0" eaLnBrk="1" latinLnBrk="0" hangingPunct="1">
+              <a:lnSpc>
+                <a:spcPct val="90000"/>
+              </a:lnSpc>
+              <a:spcBef>
+                <a:spcPct val="0"/>
+              </a:spcBef>
+              <a:buNone/>
+              <a:defRPr kumimoji="1" sz="1400" kern="1200">
+                <a:solidFill>
+                  <a:schemeClr val="tx1"/>
+                </a:solidFill>
+                <a:latin typeface="+mj-lt"/>
+                <a:ea typeface="+mj-ea"/>
+                <a:cs typeface="+mj-cs"/>
+              </a:defRPr>
+            </a:lvl1pPr>
+          </a:lstStyle>
+          <a:p>
+            <a:endParaRPr lang="en-US" altLang="ja-JP" sz="1800" dirty="0"/>
+          </a:p>
+          <a:p>
+            <a:endParaRPr lang="en-US" altLang="ja-JP" sz="1800" dirty="0"/>
+          </a:p>
+          <a:p>
+            <a:endParaRPr lang="en-US" altLang="ja-JP" sz="1800" dirty="0"/>
+          </a:p>
+          <a:p>
+            <a:endParaRPr lang="en-US" altLang="ja-JP" sz="1800" dirty="0"/>
+          </a:p>
+          <a:p>
+            <a:endParaRPr lang="en-US" altLang="ja-JP" sz="1800" dirty="0"/>
+          </a:p>
+          <a:p>
+            <a:endParaRPr lang="en-US" altLang="ja-JP" sz="1800" dirty="0"/>
+          </a:p>
+        </p:txBody>
+      </p:sp>
+      <p:sp>
+        <p:nvSpPr>
+          <p:cNvPr id="6" name="正方形/長方形 5">
+            <a:extLst>
+              <a:ext uri="{FF2B5EF4-FFF2-40B4-BE49-F238E27FC236}">
+                <a16:creationId xmlns:a16="http://schemas.microsoft.com/office/drawing/2014/main" id="{134BC567-78BF-77F2-7FE7-DE0358850CBC}"/>
               </a:ext>
             </a:extLst>
           </p:cNvPr>
@@ -18916,17 +19431,16 @@
           <p:nvPr/>
         </p:nvSpPr>
         <p:spPr>
-          <a:xfrm rot="5400000">
-            <a:off x="4329359" y="4369736"/>
-            <a:ext cx="3601016" cy="585679"/>
-          </a:xfrm>
-          <a:prstGeom prst="triangle">
+          <a:xfrm>
+            <a:off x="355600" y="2353582"/>
+            <a:ext cx="4612822" cy="3958305"/>
+          </a:xfrm>
+          <a:prstGeom prst="rect">
             <a:avLst/>
           </a:prstGeom>
           <a:solidFill>
-            <a:schemeClr val="tx1">
-              <a:lumMod val="40000"/>
-              <a:lumOff val="60000"/>
+            <a:schemeClr val="bg2">
+              <a:lumMod val="75000"/>
             </a:schemeClr>
           </a:solidFill>
           <a:ln>
@@ -18954,16 +19468,16 @@
           <a:lstStyle/>
           <a:p>
             <a:pPr algn="ctr"/>
-            <a:endParaRPr kumimoji="1" lang="ja-JP" altLang="en-US"/>
-          </a:p>
-        </p:txBody>
-      </p:sp>
-      <p:sp>
-        <p:nvSpPr>
-          <p:cNvPr id="9" name="正方形/長方形 8">
-            <a:extLst>
-              <a:ext uri="{FF2B5EF4-FFF2-40B4-BE49-F238E27FC236}">
-                <a16:creationId xmlns:a16="http://schemas.microsoft.com/office/drawing/2014/main" id="{BC118070-57E6-FC5D-24FC-51292E3ACB11}"/>
+            <a:endParaRPr kumimoji="1" lang="ja-JP" altLang="en-US" dirty="0"/>
+          </a:p>
+        </p:txBody>
+      </p:sp>
+      <p:sp>
+        <p:nvSpPr>
+          <p:cNvPr id="7" name="楕円 6">
+            <a:extLst>
+              <a:ext uri="{FF2B5EF4-FFF2-40B4-BE49-F238E27FC236}">
+                <a16:creationId xmlns:a16="http://schemas.microsoft.com/office/drawing/2014/main" id="{83DC1DFC-E4CA-3C13-7B09-B05E437ABCA6}"/>
               </a:ext>
             </a:extLst>
           </p:cNvPr>
@@ -18972,18 +19486,12 @@
         </p:nvSpPr>
         <p:spPr>
           <a:xfrm>
-            <a:off x="336024" y="2876616"/>
-            <a:ext cx="5015186" cy="3586466"/>
-          </a:xfrm>
-          <a:prstGeom prst="rect">
-            <a:avLst/>
-          </a:prstGeom>
-          <a:noFill/>
-          <a:ln w="28575">
-            <a:solidFill>
-              <a:srgbClr val="FFFF00"/>
-            </a:solidFill>
-          </a:ln>
+            <a:off x="1902732" y="2743198"/>
+            <a:ext cx="1518557" cy="938893"/>
+          </a:xfrm>
+          <a:prstGeom prst="ellipse">
+            <a:avLst/>
+          </a:prstGeom>
         </p:spPr>
         <p:style>
           <a:lnRef idx="2">
@@ -19002,13 +19510,495 @@
           </a:fontRef>
         </p:style>
         <p:txBody>
-          <a:bodyPr rtlCol="0" anchor="t" anchorCtr="0"/>
+          <a:bodyPr rtlCol="0" anchor="ctr"/>
           <a:lstStyle/>
           <a:p>
-            <a:pPr marL="285750" indent="-285750">
-              <a:buFont typeface="Wingdings" panose="05000000000000000000" pitchFamily="2" charset="2"/>
-              <a:buChar char="l"/>
-            </a:pPr>
+            <a:pPr algn="ctr"/>
+            <a:r>
+              <a:rPr lang="en-US" altLang="ja-JP" dirty="0">
+                <a:solidFill>
+                  <a:schemeClr val="tx1">
+                    <a:lumMod val="75000"/>
+                  </a:schemeClr>
+                </a:solidFill>
+              </a:rPr>
+              <a:t>LB</a:t>
+            </a:r>
+            <a:endParaRPr kumimoji="1" lang="ja-JP" altLang="en-US" dirty="0">
+              <a:solidFill>
+                <a:schemeClr val="tx1">
+                  <a:lumMod val="75000"/>
+                </a:schemeClr>
+              </a:solidFill>
+            </a:endParaRPr>
+          </a:p>
+        </p:txBody>
+      </p:sp>
+      <p:cxnSp>
+        <p:nvCxnSpPr>
+          <p:cNvPr id="9" name="直線矢印コネクタ 8">
+            <a:extLst>
+              <a:ext uri="{FF2B5EF4-FFF2-40B4-BE49-F238E27FC236}">
+                <a16:creationId xmlns:a16="http://schemas.microsoft.com/office/drawing/2014/main" id="{E9D18584-F348-8A65-DC97-397183AB337C}"/>
+              </a:ext>
+            </a:extLst>
+          </p:cNvPr>
+          <p:cNvCxnSpPr>
+            <a:cxnSpLocks/>
+            <a:stCxn id="7" idx="3"/>
+          </p:cNvCxnSpPr>
+          <p:nvPr/>
+        </p:nvCxnSpPr>
+        <p:spPr>
+          <a:xfrm flipH="1">
+            <a:off x="1404258" y="3544593"/>
+            <a:ext cx="720862" cy="963904"/>
+          </a:xfrm>
+          <a:prstGeom prst="straightConnector1">
+            <a:avLst/>
+          </a:prstGeom>
+          <a:ln>
+            <a:tailEnd type="triangle"/>
+          </a:ln>
+        </p:spPr>
+        <p:style>
+          <a:lnRef idx="2">
+            <a:schemeClr val="accent1"/>
+          </a:lnRef>
+          <a:fillRef idx="0">
+            <a:schemeClr val="accent1"/>
+          </a:fillRef>
+          <a:effectRef idx="1">
+            <a:schemeClr val="accent1"/>
+          </a:effectRef>
+          <a:fontRef idx="minor">
+            <a:schemeClr val="tx1"/>
+          </a:fontRef>
+        </p:style>
+      </p:cxnSp>
+      <p:cxnSp>
+        <p:nvCxnSpPr>
+          <p:cNvPr id="11" name="直線矢印コネクタ 10">
+            <a:extLst>
+              <a:ext uri="{FF2B5EF4-FFF2-40B4-BE49-F238E27FC236}">
+                <a16:creationId xmlns:a16="http://schemas.microsoft.com/office/drawing/2014/main" id="{F46744C6-18ED-D1AF-E57B-4FEF2C1D6648}"/>
+              </a:ext>
+            </a:extLst>
+          </p:cNvPr>
+          <p:cNvCxnSpPr>
+            <a:cxnSpLocks/>
+            <a:stCxn id="7" idx="4"/>
+          </p:cNvCxnSpPr>
+          <p:nvPr/>
+        </p:nvCxnSpPr>
+        <p:spPr>
+          <a:xfrm>
+            <a:off x="2662011" y="3682091"/>
+            <a:ext cx="0" cy="848109"/>
+          </a:xfrm>
+          <a:prstGeom prst="straightConnector1">
+            <a:avLst/>
+          </a:prstGeom>
+          <a:ln>
+            <a:tailEnd type="triangle"/>
+          </a:ln>
+        </p:spPr>
+        <p:style>
+          <a:lnRef idx="2">
+            <a:schemeClr val="accent1"/>
+          </a:lnRef>
+          <a:fillRef idx="0">
+            <a:schemeClr val="accent1"/>
+          </a:fillRef>
+          <a:effectRef idx="1">
+            <a:schemeClr val="accent1"/>
+          </a:effectRef>
+          <a:fontRef idx="minor">
+            <a:schemeClr val="tx1"/>
+          </a:fontRef>
+        </p:style>
+      </p:cxnSp>
+      <p:cxnSp>
+        <p:nvCxnSpPr>
+          <p:cNvPr id="14" name="直線矢印コネクタ 13">
+            <a:extLst>
+              <a:ext uri="{FF2B5EF4-FFF2-40B4-BE49-F238E27FC236}">
+                <a16:creationId xmlns:a16="http://schemas.microsoft.com/office/drawing/2014/main" id="{C8F2E21E-0BC2-57A9-D473-849786DA1154}"/>
+              </a:ext>
+            </a:extLst>
+          </p:cNvPr>
+          <p:cNvCxnSpPr>
+            <a:cxnSpLocks/>
+            <a:stCxn id="7" idx="5"/>
+          </p:cNvCxnSpPr>
+          <p:nvPr/>
+        </p:nvCxnSpPr>
+        <p:spPr>
+          <a:xfrm>
+            <a:off x="3198901" y="3544593"/>
+            <a:ext cx="759278" cy="938893"/>
+          </a:xfrm>
+          <a:prstGeom prst="straightConnector1">
+            <a:avLst/>
+          </a:prstGeom>
+          <a:ln>
+            <a:tailEnd type="triangle"/>
+          </a:ln>
+        </p:spPr>
+        <p:style>
+          <a:lnRef idx="2">
+            <a:schemeClr val="accent1"/>
+          </a:lnRef>
+          <a:fillRef idx="0">
+            <a:schemeClr val="accent1"/>
+          </a:fillRef>
+          <a:effectRef idx="1">
+            <a:schemeClr val="accent1"/>
+          </a:effectRef>
+          <a:fontRef idx="minor">
+            <a:schemeClr val="tx1"/>
+          </a:fontRef>
+        </p:style>
+      </p:cxnSp>
+      <p:sp>
+        <p:nvSpPr>
+          <p:cNvPr id="17" name="フローチャート: 処理 16">
+            <a:extLst>
+              <a:ext uri="{FF2B5EF4-FFF2-40B4-BE49-F238E27FC236}">
+                <a16:creationId xmlns:a16="http://schemas.microsoft.com/office/drawing/2014/main" id="{148937E3-FE21-71ED-C17B-CCF323E2A41E}"/>
+              </a:ext>
+            </a:extLst>
+          </p:cNvPr>
+          <p:cNvSpPr/>
+          <p:nvPr/>
+        </p:nvSpPr>
+        <p:spPr>
+          <a:xfrm>
+            <a:off x="733583" y="4530200"/>
+            <a:ext cx="1031106" cy="476635"/>
+          </a:xfrm>
+          <a:prstGeom prst="flowChartProcess">
+            <a:avLst/>
+          </a:prstGeom>
+        </p:spPr>
+        <p:style>
+          <a:lnRef idx="2">
+            <a:schemeClr val="accent1">
+              <a:shade val="15000"/>
+            </a:schemeClr>
+          </a:lnRef>
+          <a:fillRef idx="1">
+            <a:schemeClr val="accent1"/>
+          </a:fillRef>
+          <a:effectRef idx="0">
+            <a:schemeClr val="accent1"/>
+          </a:effectRef>
+          <a:fontRef idx="minor">
+            <a:schemeClr val="lt1"/>
+          </a:fontRef>
+        </p:style>
+        <p:txBody>
+          <a:bodyPr rtlCol="0" anchor="ctr"/>
+          <a:lstStyle/>
+          <a:p>
+            <a:pPr algn="ctr"/>
+            <a:r>
+              <a:rPr kumimoji="1" lang="en-US" altLang="ja-JP" dirty="0">
+                <a:solidFill>
+                  <a:schemeClr val="tx1">
+                    <a:lumMod val="75000"/>
+                  </a:schemeClr>
+                </a:solidFill>
+              </a:rPr>
+              <a:t>Server</a:t>
+            </a:r>
+            <a:endParaRPr kumimoji="1" lang="ja-JP" altLang="en-US" dirty="0">
+              <a:solidFill>
+                <a:schemeClr val="tx1">
+                  <a:lumMod val="75000"/>
+                </a:schemeClr>
+              </a:solidFill>
+            </a:endParaRPr>
+          </a:p>
+        </p:txBody>
+      </p:sp>
+      <p:sp>
+        <p:nvSpPr>
+          <p:cNvPr id="20" name="フローチャート: 処理 19">
+            <a:extLst>
+              <a:ext uri="{FF2B5EF4-FFF2-40B4-BE49-F238E27FC236}">
+                <a16:creationId xmlns:a16="http://schemas.microsoft.com/office/drawing/2014/main" id="{D2334AFF-D4D2-E3B8-9C9A-E54864C94287}"/>
+              </a:ext>
+            </a:extLst>
+          </p:cNvPr>
+          <p:cNvSpPr/>
+          <p:nvPr/>
+        </p:nvSpPr>
+        <p:spPr>
+          <a:xfrm>
+            <a:off x="2142672" y="4530200"/>
+            <a:ext cx="1031106" cy="476635"/>
+          </a:xfrm>
+          <a:prstGeom prst="flowChartProcess">
+            <a:avLst/>
+          </a:prstGeom>
+        </p:spPr>
+        <p:style>
+          <a:lnRef idx="2">
+            <a:schemeClr val="accent1">
+              <a:shade val="15000"/>
+            </a:schemeClr>
+          </a:lnRef>
+          <a:fillRef idx="1">
+            <a:schemeClr val="accent1"/>
+          </a:fillRef>
+          <a:effectRef idx="0">
+            <a:schemeClr val="accent1"/>
+          </a:effectRef>
+          <a:fontRef idx="minor">
+            <a:schemeClr val="lt1"/>
+          </a:fontRef>
+        </p:style>
+        <p:txBody>
+          <a:bodyPr rtlCol="0" anchor="ctr"/>
+          <a:lstStyle/>
+          <a:p>
+            <a:pPr algn="ctr"/>
+            <a:r>
+              <a:rPr lang="en-US" altLang="ja-JP" dirty="0">
+                <a:solidFill>
+                  <a:schemeClr val="tx1">
+                    <a:lumMod val="75000"/>
+                  </a:schemeClr>
+                </a:solidFill>
+              </a:rPr>
+              <a:t>Server</a:t>
+            </a:r>
+            <a:endParaRPr kumimoji="1" lang="ja-JP" altLang="en-US" dirty="0">
+              <a:solidFill>
+                <a:schemeClr val="tx1">
+                  <a:lumMod val="75000"/>
+                </a:schemeClr>
+              </a:solidFill>
+            </a:endParaRPr>
+          </a:p>
+        </p:txBody>
+      </p:sp>
+      <p:sp>
+        <p:nvSpPr>
+          <p:cNvPr id="21" name="フローチャート: 処理 20">
+            <a:extLst>
+              <a:ext uri="{FF2B5EF4-FFF2-40B4-BE49-F238E27FC236}">
+                <a16:creationId xmlns:a16="http://schemas.microsoft.com/office/drawing/2014/main" id="{A5FECD22-0AF0-B0AE-CDF9-1410061E748B}"/>
+              </a:ext>
+            </a:extLst>
+          </p:cNvPr>
+          <p:cNvSpPr/>
+          <p:nvPr/>
+        </p:nvSpPr>
+        <p:spPr>
+          <a:xfrm>
+            <a:off x="3551761" y="4530200"/>
+            <a:ext cx="1031106" cy="476635"/>
+          </a:xfrm>
+          <a:prstGeom prst="flowChartProcess">
+            <a:avLst/>
+          </a:prstGeom>
+        </p:spPr>
+        <p:style>
+          <a:lnRef idx="2">
+            <a:schemeClr val="accent1">
+              <a:shade val="15000"/>
+            </a:schemeClr>
+          </a:lnRef>
+          <a:fillRef idx="1">
+            <a:schemeClr val="accent1"/>
+          </a:fillRef>
+          <a:effectRef idx="0">
+            <a:schemeClr val="accent1"/>
+          </a:effectRef>
+          <a:fontRef idx="minor">
+            <a:schemeClr val="lt1"/>
+          </a:fontRef>
+        </p:style>
+        <p:txBody>
+          <a:bodyPr rtlCol="0" anchor="ctr"/>
+          <a:lstStyle/>
+          <a:p>
+            <a:pPr algn="ctr"/>
+            <a:r>
+              <a:rPr lang="en-US" altLang="ja-JP" dirty="0">
+                <a:solidFill>
+                  <a:schemeClr val="tx1">
+                    <a:lumMod val="75000"/>
+                  </a:schemeClr>
+                </a:solidFill>
+              </a:rPr>
+              <a:t>Server</a:t>
+            </a:r>
+            <a:endParaRPr kumimoji="1" lang="ja-JP" altLang="en-US" dirty="0">
+              <a:solidFill>
+                <a:schemeClr val="tx1">
+                  <a:lumMod val="75000"/>
+                </a:schemeClr>
+              </a:solidFill>
+            </a:endParaRPr>
+          </a:p>
+        </p:txBody>
+      </p:sp>
+      <p:cxnSp>
+        <p:nvCxnSpPr>
+          <p:cNvPr id="23" name="直線矢印コネクタ 22">
+            <a:extLst>
+              <a:ext uri="{FF2B5EF4-FFF2-40B4-BE49-F238E27FC236}">
+                <a16:creationId xmlns:a16="http://schemas.microsoft.com/office/drawing/2014/main" id="{D6AE3B2A-7D4C-6578-6A49-94876455E651}"/>
+              </a:ext>
+            </a:extLst>
+          </p:cNvPr>
+          <p:cNvCxnSpPr/>
+          <p:nvPr/>
+        </p:nvCxnSpPr>
+        <p:spPr>
+          <a:xfrm>
+            <a:off x="2658225" y="5006835"/>
+            <a:ext cx="0" cy="577536"/>
+          </a:xfrm>
+          <a:prstGeom prst="straightConnector1">
+            <a:avLst/>
+          </a:prstGeom>
+          <a:ln>
+            <a:headEnd type="triangle"/>
+            <a:tailEnd type="triangle"/>
+          </a:ln>
+        </p:spPr>
+        <p:style>
+          <a:lnRef idx="2">
+            <a:schemeClr val="accent1"/>
+          </a:lnRef>
+          <a:fillRef idx="0">
+            <a:schemeClr val="accent1"/>
+          </a:fillRef>
+          <a:effectRef idx="1">
+            <a:schemeClr val="accent1"/>
+          </a:effectRef>
+          <a:fontRef idx="minor">
+            <a:schemeClr val="tx1"/>
+          </a:fontRef>
+        </p:style>
+      </p:cxnSp>
+      <p:sp>
+        <p:nvSpPr>
+          <p:cNvPr id="24" name="フローチャート: 磁気ディスク 23">
+            <a:extLst>
+              <a:ext uri="{FF2B5EF4-FFF2-40B4-BE49-F238E27FC236}">
+                <a16:creationId xmlns:a16="http://schemas.microsoft.com/office/drawing/2014/main" id="{F33115F7-19D6-3000-9DAD-5F074B0CE0CE}"/>
+              </a:ext>
+            </a:extLst>
+          </p:cNvPr>
+          <p:cNvSpPr/>
+          <p:nvPr/>
+        </p:nvSpPr>
+        <p:spPr>
+          <a:xfrm>
+            <a:off x="2167799" y="5616626"/>
+            <a:ext cx="1031102" cy="476635"/>
+          </a:xfrm>
+          <a:prstGeom prst="flowChartMagneticDisk">
+            <a:avLst/>
+          </a:prstGeom>
+        </p:spPr>
+        <p:style>
+          <a:lnRef idx="2">
+            <a:schemeClr val="accent1">
+              <a:shade val="15000"/>
+            </a:schemeClr>
+          </a:lnRef>
+          <a:fillRef idx="1">
+            <a:schemeClr val="accent1"/>
+          </a:fillRef>
+          <a:effectRef idx="0">
+            <a:schemeClr val="accent1"/>
+          </a:effectRef>
+          <a:fontRef idx="minor">
+            <a:schemeClr val="lt1"/>
+          </a:fontRef>
+        </p:style>
+        <p:txBody>
+          <a:bodyPr rtlCol="0" anchor="ctr"/>
+          <a:lstStyle/>
+          <a:p>
+            <a:pPr algn="ctr"/>
+            <a:r>
+              <a:rPr kumimoji="1" lang="en-US" altLang="ja-JP" dirty="0">
+                <a:solidFill>
+                  <a:schemeClr val="tx1">
+                    <a:lumMod val="75000"/>
+                  </a:schemeClr>
+                </a:solidFill>
+              </a:rPr>
+              <a:t>DB</a:t>
+            </a:r>
+            <a:endParaRPr kumimoji="1" lang="ja-JP" altLang="en-US" dirty="0">
+              <a:solidFill>
+                <a:schemeClr val="tx1">
+                  <a:lumMod val="75000"/>
+                </a:schemeClr>
+              </a:solidFill>
+            </a:endParaRPr>
+          </a:p>
+        </p:txBody>
+      </p:sp>
+      <p:sp>
+        <p:nvSpPr>
+          <p:cNvPr id="25" name="フローチャート: 処理 24">
+            <a:extLst>
+              <a:ext uri="{FF2B5EF4-FFF2-40B4-BE49-F238E27FC236}">
+                <a16:creationId xmlns:a16="http://schemas.microsoft.com/office/drawing/2014/main" id="{8764A24F-C790-A256-C755-61B044DB6CFA}"/>
+              </a:ext>
+            </a:extLst>
+          </p:cNvPr>
+          <p:cNvSpPr/>
+          <p:nvPr/>
+        </p:nvSpPr>
+        <p:spPr>
+          <a:xfrm>
+            <a:off x="355599" y="2352513"/>
+            <a:ext cx="1345607" cy="426455"/>
+          </a:xfrm>
+          <a:prstGeom prst="flowChartProcess">
+            <a:avLst/>
+          </a:prstGeom>
+          <a:solidFill>
+            <a:schemeClr val="accent1">
+              <a:lumMod val="20000"/>
+              <a:lumOff val="80000"/>
+            </a:schemeClr>
+          </a:solidFill>
+          <a:ln>
+            <a:noFill/>
+          </a:ln>
+        </p:spPr>
+        <p:style>
+          <a:lnRef idx="2">
+            <a:schemeClr val="accent1">
+              <a:shade val="15000"/>
+            </a:schemeClr>
+          </a:lnRef>
+          <a:fillRef idx="1">
+            <a:schemeClr val="accent1"/>
+          </a:fillRef>
+          <a:effectRef idx="0">
+            <a:schemeClr val="accent1"/>
+          </a:effectRef>
+          <a:fontRef idx="minor">
+            <a:schemeClr val="lt1"/>
+          </a:fontRef>
+        </p:style>
+        <p:txBody>
+          <a:bodyPr rtlCol="0" anchor="ctr"/>
+          <a:lstStyle/>
+          <a:p>
+            <a:pPr algn="ctr"/>
             <a:r>
               <a:rPr kumimoji="1" lang="ja-JP" altLang="en-US" dirty="0">
                 <a:solidFill>
@@ -19017,209 +20007,278 @@
                   </a:schemeClr>
                 </a:solidFill>
               </a:rPr>
-              <a:t>ああ</a:t>
-            </a:r>
-          </a:p>
-        </p:txBody>
-      </p:sp>
-      <p:sp>
-        <p:nvSpPr>
-          <p:cNvPr id="10" name="正方形/長方形 9">
-            <a:extLst>
-              <a:ext uri="{FF2B5EF4-FFF2-40B4-BE49-F238E27FC236}">
-                <a16:creationId xmlns:a16="http://schemas.microsoft.com/office/drawing/2014/main" id="{A5DD0F5F-F7DD-E0B3-E8B8-43DC8378525E}"/>
-              </a:ext>
-            </a:extLst>
-          </p:cNvPr>
-          <p:cNvSpPr/>
-          <p:nvPr/>
-        </p:nvSpPr>
-        <p:spPr>
-          <a:xfrm>
-            <a:off x="6821214" y="2876616"/>
-            <a:ext cx="5015186" cy="3586466"/>
+              <a:t>システム</a:t>
+            </a:r>
+          </a:p>
+        </p:txBody>
+      </p:sp>
+      <p:sp>
+        <p:nvSpPr>
+          <p:cNvPr id="26" name="テキスト ボックス 25">
+            <a:extLst>
+              <a:ext uri="{FF2B5EF4-FFF2-40B4-BE49-F238E27FC236}">
+                <a16:creationId xmlns:a16="http://schemas.microsoft.com/office/drawing/2014/main" id="{A6685222-556A-5A45-4712-050B493071EB}"/>
+              </a:ext>
+            </a:extLst>
+          </p:cNvPr>
+          <p:cNvSpPr txBox="1"/>
+          <p:nvPr/>
+        </p:nvSpPr>
+        <p:spPr>
+          <a:xfrm>
+            <a:off x="6164036" y="2394854"/>
+            <a:ext cx="5672364" cy="2862322"/>
           </a:xfrm>
           <a:prstGeom prst="rect">
             <a:avLst/>
           </a:prstGeom>
           <a:noFill/>
-          <a:ln w="28575">
-            <a:solidFill>
-              <a:srgbClr val="FFFF00"/>
-            </a:solidFill>
-          </a:ln>
-        </p:spPr>
-        <p:style>
-          <a:lnRef idx="2">
-            <a:schemeClr val="accent1">
-              <a:shade val="15000"/>
-            </a:schemeClr>
-          </a:lnRef>
-          <a:fillRef idx="1">
-            <a:schemeClr val="accent1"/>
-          </a:fillRef>
-          <a:effectRef idx="0">
-            <a:schemeClr val="accent1"/>
-          </a:effectRef>
-          <a:fontRef idx="minor">
-            <a:schemeClr val="lt1"/>
-          </a:fontRef>
-        </p:style>
-        <p:txBody>
-          <a:bodyPr rtlCol="0" anchor="t" anchorCtr="0"/>
+        </p:spPr>
+        <p:txBody>
+          <a:bodyPr wrap="square" rtlCol="0">
+            <a:spAutoFit/>
+          </a:bodyPr>
           <a:lstStyle/>
           <a:p>
             <a:pPr marL="285750" indent="-285750">
-              <a:buFont typeface="Wingdings" panose="05000000000000000000" pitchFamily="2" charset="2"/>
-              <a:buChar char="l"/>
+              <a:buFont typeface="Arial" panose="020B0604020202020204" pitchFamily="34" charset="0"/>
+              <a:buChar char="•"/>
             </a:pPr>
             <a:r>
-              <a:rPr kumimoji="1" lang="ja-JP" altLang="en-US" dirty="0">
-                <a:solidFill>
-                  <a:schemeClr val="tx1">
-                    <a:lumMod val="75000"/>
-                  </a:schemeClr>
-                </a:solidFill>
-              </a:rPr>
-              <a:t>ああ</a:t>
-            </a:r>
-          </a:p>
-        </p:txBody>
-      </p:sp>
-      <p:sp>
-        <p:nvSpPr>
-          <p:cNvPr id="6" name="正方形/長方形 5">
-            <a:extLst>
-              <a:ext uri="{FF2B5EF4-FFF2-40B4-BE49-F238E27FC236}">
-                <a16:creationId xmlns:a16="http://schemas.microsoft.com/office/drawing/2014/main" id="{725A5F26-C6B0-E077-E1C8-6C313703AE69}"/>
-              </a:ext>
-            </a:extLst>
-          </p:cNvPr>
-          <p:cNvSpPr/>
-          <p:nvPr/>
-        </p:nvSpPr>
-        <p:spPr>
-          <a:xfrm>
-            <a:off x="355600" y="2322788"/>
-            <a:ext cx="5015186" cy="539278"/>
+              <a:rPr lang="ja-JP" altLang="ja-JP" dirty="0"/>
+              <a:t>APIとDB、フロントエンドとバックエンドなど、</a:t>
+            </a:r>
+            <a:br>
+              <a:rPr lang="en-US" altLang="ja-JP" dirty="0"/>
+            </a:br>
+            <a:r>
+              <a:rPr lang="ja-JP" altLang="ja-JP" dirty="0"/>
+              <a:t>システムは何かと何かが結びつくことで成立</a:t>
+            </a:r>
+            <a:r>
+              <a:rPr lang="ja-JP" altLang="en-US" dirty="0"/>
+              <a:t>する。</a:t>
+            </a:r>
+            <a:endParaRPr lang="en-US" altLang="ja-JP" dirty="0"/>
+          </a:p>
+          <a:p>
+            <a:endParaRPr lang="en-US" altLang="ja-JP" dirty="0"/>
+          </a:p>
+          <a:p>
+            <a:pPr marL="285750" indent="-285750">
+              <a:buFont typeface="Arial" panose="020B0604020202020204" pitchFamily="34" charset="0"/>
+              <a:buChar char="•"/>
+            </a:pPr>
+            <a:r>
+              <a:rPr lang="ja-JP" altLang="en-US" dirty="0"/>
+              <a:t>この何かと何かの結びつきを、「結合」という。</a:t>
+            </a:r>
+            <a:br>
+              <a:rPr lang="en-US" altLang="ja-JP" dirty="0"/>
+            </a:br>
+            <a:r>
+              <a:rPr lang="ja-JP" altLang="en-US" dirty="0"/>
+              <a:t>「結合」は、疎まれる傾向にある概念。</a:t>
+            </a:r>
+            <a:br>
+              <a:rPr lang="en-US" altLang="ja-JP" dirty="0"/>
+            </a:br>
+            <a:r>
+              <a:rPr lang="ja-JP" altLang="en-US" dirty="0"/>
+              <a:t>例</a:t>
+            </a:r>
+            <a:r>
+              <a:rPr lang="en-US" altLang="ja-JP" dirty="0"/>
+              <a:t>)</a:t>
+            </a:r>
+            <a:r>
+              <a:rPr lang="ja-JP" altLang="en-US" dirty="0"/>
+              <a:t>「疎結合にしよう！」、「密結合は避けよう」</a:t>
+            </a:r>
+            <a:endParaRPr lang="en-US" altLang="ja-JP" dirty="0"/>
+          </a:p>
+          <a:p>
+            <a:pPr marL="285750" indent="-285750">
+              <a:buFont typeface="Arial" panose="020B0604020202020204" pitchFamily="34" charset="0"/>
+              <a:buChar char="•"/>
+            </a:pPr>
+            <a:endParaRPr lang="en-US" altLang="ja-JP" dirty="0"/>
+          </a:p>
+          <a:p>
+            <a:pPr marL="285750" indent="-285750">
+              <a:buFont typeface="Arial" panose="020B0604020202020204" pitchFamily="34" charset="0"/>
+              <a:buChar char="•"/>
+            </a:pPr>
+            <a:r>
+              <a:rPr lang="ja-JP" altLang="en-US" dirty="0"/>
+              <a:t>ただし、「結合」なしにシステムは存在しえない。</a:t>
+            </a:r>
+            <a:br>
+              <a:rPr lang="en-US" altLang="ja-JP" dirty="0"/>
+            </a:br>
+            <a:r>
+              <a:rPr lang="ja-JP" altLang="en-US" dirty="0"/>
+              <a:t>我々を苦しめるのは、結合ではなく、結合によって生まれる</a:t>
+            </a:r>
+            <a:br>
+              <a:rPr lang="en-US" altLang="ja-JP" dirty="0"/>
+            </a:br>
+            <a:r>
+              <a:rPr lang="ja-JP" altLang="en-US" b="1" dirty="0"/>
+              <a:t>「複雑性」</a:t>
+            </a:r>
+            <a:r>
+              <a:rPr lang="ja-JP" altLang="en-US" dirty="0"/>
+              <a:t>である</a:t>
+            </a:r>
+            <a:endParaRPr lang="ja-JP" altLang="ja-JP" b="1" dirty="0"/>
+          </a:p>
+        </p:txBody>
+      </p:sp>
+      <p:sp>
+        <p:nvSpPr>
+          <p:cNvPr id="27" name="テキスト ボックス 26">
+            <a:extLst>
+              <a:ext uri="{FF2B5EF4-FFF2-40B4-BE49-F238E27FC236}">
+                <a16:creationId xmlns:a16="http://schemas.microsoft.com/office/drawing/2014/main" id="{5D8C2488-412D-433A-6D6D-2D00892203D6}"/>
+              </a:ext>
+            </a:extLst>
+          </p:cNvPr>
+          <p:cNvSpPr txBox="1"/>
+          <p:nvPr/>
+        </p:nvSpPr>
+        <p:spPr>
+          <a:xfrm>
+            <a:off x="2340113" y="3896807"/>
+            <a:ext cx="1031106" cy="369332"/>
           </a:xfrm>
           <a:prstGeom prst="rect">
             <a:avLst/>
           </a:prstGeom>
-          <a:solidFill>
-            <a:schemeClr val="accent1"/>
-          </a:solidFill>
-          <a:ln>
-            <a:noFill/>
-          </a:ln>
-        </p:spPr>
-        <p:style>
-          <a:lnRef idx="2">
-            <a:schemeClr val="accent1">
-              <a:shade val="15000"/>
-            </a:schemeClr>
-          </a:lnRef>
-          <a:fillRef idx="1">
-            <a:schemeClr val="accent1"/>
-          </a:fillRef>
-          <a:effectRef idx="0">
-            <a:schemeClr val="accent1"/>
-          </a:effectRef>
-          <a:fontRef idx="minor">
-            <a:schemeClr val="lt1"/>
-          </a:fontRef>
-        </p:style>
-        <p:txBody>
-          <a:bodyPr rtlCol="0" anchor="ctr"/>
+          <a:noFill/>
+        </p:spPr>
+        <p:txBody>
+          <a:bodyPr wrap="square" rtlCol="0">
+            <a:spAutoFit/>
+          </a:bodyPr>
           <a:lstStyle/>
           <a:p>
-            <a:pPr algn="ctr"/>
-            <a:r>
-              <a:rPr lang="ja-JP" altLang="en-US" sz="2400" dirty="0">
-                <a:solidFill>
-                  <a:schemeClr val="tx1">
-                    <a:lumMod val="75000"/>
-                  </a:schemeClr>
-                </a:solidFill>
-              </a:rPr>
-              <a:t>本スライドの背景</a:t>
-            </a:r>
-            <a:endParaRPr lang="ja-JP" altLang="en-US" dirty="0">
-              <a:solidFill>
-                <a:schemeClr val="tx1">
-                  <a:lumMod val="75000"/>
-                </a:schemeClr>
-              </a:solidFill>
-            </a:endParaRPr>
-          </a:p>
-        </p:txBody>
-      </p:sp>
-      <p:sp>
-        <p:nvSpPr>
-          <p:cNvPr id="7" name="正方形/長方形 6">
-            <a:extLst>
-              <a:ext uri="{FF2B5EF4-FFF2-40B4-BE49-F238E27FC236}">
-                <a16:creationId xmlns:a16="http://schemas.microsoft.com/office/drawing/2014/main" id="{484040B2-3DEC-59AA-9DBF-F91CE4F75D54}"/>
-              </a:ext>
-            </a:extLst>
-          </p:cNvPr>
-          <p:cNvSpPr/>
-          <p:nvPr/>
-        </p:nvSpPr>
-        <p:spPr>
-          <a:xfrm>
-            <a:off x="6821214" y="2322788"/>
-            <a:ext cx="5015186" cy="539278"/>
+            <a:r>
+              <a:rPr kumimoji="1" lang="ja-JP" altLang="en-US" dirty="0"/>
+              <a:t>結合</a:t>
+            </a:r>
+          </a:p>
+        </p:txBody>
+      </p:sp>
+      <p:sp>
+        <p:nvSpPr>
+          <p:cNvPr id="28" name="テキスト ボックス 27">
+            <a:extLst>
+              <a:ext uri="{FF2B5EF4-FFF2-40B4-BE49-F238E27FC236}">
+                <a16:creationId xmlns:a16="http://schemas.microsoft.com/office/drawing/2014/main" id="{5C97F8F6-1380-EF19-7703-85655A0E92B8}"/>
+              </a:ext>
+            </a:extLst>
+          </p:cNvPr>
+          <p:cNvSpPr txBox="1"/>
+          <p:nvPr/>
+        </p:nvSpPr>
+        <p:spPr>
+          <a:xfrm>
+            <a:off x="3360788" y="3896807"/>
+            <a:ext cx="1031106" cy="369332"/>
           </a:xfrm>
           <a:prstGeom prst="rect">
             <a:avLst/>
           </a:prstGeom>
-          <a:solidFill>
-            <a:schemeClr val="accent1"/>
-          </a:solidFill>
-          <a:ln>
-            <a:noFill/>
-          </a:ln>
-        </p:spPr>
-        <p:style>
-          <a:lnRef idx="2">
-            <a:schemeClr val="accent1">
-              <a:shade val="15000"/>
-            </a:schemeClr>
-          </a:lnRef>
-          <a:fillRef idx="1">
-            <a:schemeClr val="accent1"/>
-          </a:fillRef>
-          <a:effectRef idx="0">
-            <a:schemeClr val="accent1"/>
-          </a:effectRef>
-          <a:fontRef idx="minor">
-            <a:schemeClr val="lt1"/>
-          </a:fontRef>
-        </p:style>
-        <p:txBody>
-          <a:bodyPr rtlCol="0" anchor="ctr"/>
+          <a:noFill/>
+        </p:spPr>
+        <p:txBody>
+          <a:bodyPr wrap="square" rtlCol="0">
+            <a:spAutoFit/>
+          </a:bodyPr>
           <a:lstStyle/>
           <a:p>
-            <a:pPr algn="ctr"/>
-            <a:r>
-              <a:rPr lang="ja-JP" altLang="en-US" sz="2400" dirty="0">
-                <a:solidFill>
-                  <a:schemeClr val="tx1">
-                    <a:lumMod val="75000"/>
-                  </a:schemeClr>
-                </a:solidFill>
-              </a:rPr>
-              <a:t>本スライドの目的</a:t>
-            </a:r>
-            <a:endParaRPr kumimoji="1" lang="ja-JP" altLang="en-US" dirty="0"/>
+            <a:r>
+              <a:rPr kumimoji="1" lang="ja-JP" altLang="en-US" dirty="0"/>
+              <a:t>結合</a:t>
+            </a:r>
+          </a:p>
+        </p:txBody>
+      </p:sp>
+      <p:sp>
+        <p:nvSpPr>
+          <p:cNvPr id="29" name="テキスト ボックス 28">
+            <a:extLst>
+              <a:ext uri="{FF2B5EF4-FFF2-40B4-BE49-F238E27FC236}">
+                <a16:creationId xmlns:a16="http://schemas.microsoft.com/office/drawing/2014/main" id="{10813477-3AA4-28C8-BDE8-29D1AF37B168}"/>
+              </a:ext>
+            </a:extLst>
+          </p:cNvPr>
+          <p:cNvSpPr txBox="1"/>
+          <p:nvPr/>
+        </p:nvSpPr>
+        <p:spPr>
+          <a:xfrm>
+            <a:off x="934811" y="3896807"/>
+            <a:ext cx="1031106" cy="369332"/>
+          </a:xfrm>
+          <a:prstGeom prst="rect">
+            <a:avLst/>
+          </a:prstGeom>
+          <a:noFill/>
+        </p:spPr>
+        <p:txBody>
+          <a:bodyPr wrap="square" rtlCol="0">
+            <a:spAutoFit/>
+          </a:bodyPr>
+          <a:lstStyle/>
+          <a:p>
+            <a:r>
+              <a:rPr kumimoji="1" lang="ja-JP" altLang="en-US" dirty="0"/>
+              <a:t>結合</a:t>
+            </a:r>
+          </a:p>
+        </p:txBody>
+      </p:sp>
+      <p:sp>
+        <p:nvSpPr>
+          <p:cNvPr id="30" name="テキスト ボックス 29">
+            <a:extLst>
+              <a:ext uri="{FF2B5EF4-FFF2-40B4-BE49-F238E27FC236}">
+                <a16:creationId xmlns:a16="http://schemas.microsoft.com/office/drawing/2014/main" id="{FB31DE1A-7DE7-2B0D-22A1-8CA033A03529}"/>
+              </a:ext>
+            </a:extLst>
+          </p:cNvPr>
+          <p:cNvSpPr txBox="1"/>
+          <p:nvPr/>
+        </p:nvSpPr>
+        <p:spPr>
+          <a:xfrm>
+            <a:off x="2340113" y="5215039"/>
+            <a:ext cx="1031106" cy="369332"/>
+          </a:xfrm>
+          <a:prstGeom prst="rect">
+            <a:avLst/>
+          </a:prstGeom>
+          <a:noFill/>
+        </p:spPr>
+        <p:txBody>
+          <a:bodyPr wrap="square" rtlCol="0">
+            <a:spAutoFit/>
+          </a:bodyPr>
+          <a:lstStyle/>
+          <a:p>
+            <a:r>
+              <a:rPr kumimoji="1" lang="ja-JP" altLang="en-US" dirty="0"/>
+              <a:t>結合</a:t>
+            </a:r>
           </a:p>
         </p:txBody>
       </p:sp>
     </p:spTree>
     <p:extLst>
       <p:ext uri="{BB962C8B-B14F-4D97-AF65-F5344CB8AC3E}">
-        <p14:creationId xmlns:p14="http://schemas.microsoft.com/office/powerpoint/2010/main" val="2755181130"/>
+        <p14:creationId xmlns:p14="http://schemas.microsoft.com/office/powerpoint/2010/main" val="623798171"/>
       </p:ext>
     </p:extLst>
   </p:cSld>
@@ -19234,7 +20293,13 @@
   <p:cSld>
     <p:spTree>
       <p:nvGrpSpPr>
-        <p:cNvPr id="1" name=""/>
+        <p:cNvPr id="1" name="">
+          <a:extLst>
+            <a:ext uri="{FF2B5EF4-FFF2-40B4-BE49-F238E27FC236}">
+              <a16:creationId xmlns:a16="http://schemas.microsoft.com/office/drawing/2014/main" id="{08533F67-3C10-6633-12BE-34F8F8A48A10}"/>
+            </a:ext>
+          </a:extLst>
+        </p:cNvPr>
         <p:cNvGrpSpPr/>
         <p:nvPr/>
       </p:nvGrpSpPr>
@@ -19251,7 +20316,7 @@
           <p:cNvPr id="2" name="直線コネクタ 1">
             <a:extLst>
               <a:ext uri="{FF2B5EF4-FFF2-40B4-BE49-F238E27FC236}">
-                <a16:creationId xmlns:a16="http://schemas.microsoft.com/office/drawing/2014/main" id="{8D2C1743-B1DF-1311-D64E-194A38B34837}"/>
+                <a16:creationId xmlns:a16="http://schemas.microsoft.com/office/drawing/2014/main" id="{9740C99E-8A60-EAC0-A89B-6836B6DF154F}"/>
               </a:ext>
             </a:extLst>
           </p:cNvPr>
@@ -19290,7 +20355,7 @@
           <p:cNvPr id="3" name="タイトル プレースホルダー 1">
             <a:extLst>
               <a:ext uri="{FF2B5EF4-FFF2-40B4-BE49-F238E27FC236}">
-                <a16:creationId xmlns:a16="http://schemas.microsoft.com/office/drawing/2014/main" id="{1FC88A8E-53F0-B469-5D52-051622F0ECDE}"/>
+                <a16:creationId xmlns:a16="http://schemas.microsoft.com/office/drawing/2014/main" id="{C7510BA4-7A54-A2C4-E89D-C4EF6C3509CC}"/>
               </a:ext>
             </a:extLst>
           </p:cNvPr>
@@ -19333,22 +20398,11 @@
           </a:lstStyle>
           <a:p>
             <a:r>
-              <a:rPr lang="ja-JP" altLang="en-US" sz="2800" dirty="0"/>
-              <a:t>リード文</a:t>
+              <a:rPr lang="ja-JP" altLang="en-US" sz="2800"/>
+              <a:t>～は、～により、～することを目的としている</a:t>
             </a:r>
             <a:endParaRPr lang="en-US" altLang="ja-JP" sz="2800" dirty="0"/>
           </a:p>
-          <a:p>
-            <a:r>
-              <a:rPr lang="en-US" altLang="ja-JP" sz="2800" dirty="0"/>
-              <a:t>2</a:t>
-            </a:r>
-            <a:r>
-              <a:rPr lang="ja-JP" altLang="en-US" sz="2800" dirty="0"/>
-              <a:t>行に収まる程度で</a:t>
-            </a:r>
-            <a:endParaRPr lang="en-US" altLang="ja-JP" sz="2800" dirty="0"/>
-          </a:p>
         </p:txBody>
       </p:sp>
       <p:sp>
@@ -19356,7 +20410,7 @@
           <p:cNvPr id="4" name="タイトル プレースホルダー 1">
             <a:extLst>
               <a:ext uri="{FF2B5EF4-FFF2-40B4-BE49-F238E27FC236}">
-                <a16:creationId xmlns:a16="http://schemas.microsoft.com/office/drawing/2014/main" id="{306678DD-E9B8-0DA4-574D-12FF7A1F77B0}"/>
+                <a16:creationId xmlns:a16="http://schemas.microsoft.com/office/drawing/2014/main" id="{37A9D8E7-0DDA-4144-04F1-32E2E21FA926}"/>
               </a:ext>
             </a:extLst>
           </p:cNvPr>
@@ -19408,6 +20462,509 @@
       </p:sp>
       <p:sp>
         <p:nvSpPr>
+          <p:cNvPr id="8" name="二等辺三角形 7">
+            <a:extLst>
+              <a:ext uri="{FF2B5EF4-FFF2-40B4-BE49-F238E27FC236}">
+                <a16:creationId xmlns:a16="http://schemas.microsoft.com/office/drawing/2014/main" id="{EB5AC460-77C4-3273-3AD4-F1611D15E829}"/>
+              </a:ext>
+            </a:extLst>
+          </p:cNvPr>
+          <p:cNvSpPr/>
+          <p:nvPr/>
+        </p:nvSpPr>
+        <p:spPr>
+          <a:xfrm rot="5400000">
+            <a:off x="4329359" y="4369736"/>
+            <a:ext cx="3601016" cy="585679"/>
+          </a:xfrm>
+          <a:prstGeom prst="triangle">
+            <a:avLst/>
+          </a:prstGeom>
+          <a:solidFill>
+            <a:schemeClr val="tx1">
+              <a:lumMod val="40000"/>
+              <a:lumOff val="60000"/>
+            </a:schemeClr>
+          </a:solidFill>
+          <a:ln>
+            <a:noFill/>
+          </a:ln>
+        </p:spPr>
+        <p:style>
+          <a:lnRef idx="2">
+            <a:schemeClr val="accent1">
+              <a:shade val="15000"/>
+            </a:schemeClr>
+          </a:lnRef>
+          <a:fillRef idx="1">
+            <a:schemeClr val="accent1"/>
+          </a:fillRef>
+          <a:effectRef idx="0">
+            <a:schemeClr val="accent1"/>
+          </a:effectRef>
+          <a:fontRef idx="minor">
+            <a:schemeClr val="lt1"/>
+          </a:fontRef>
+        </p:style>
+        <p:txBody>
+          <a:bodyPr rtlCol="0" anchor="ctr"/>
+          <a:lstStyle/>
+          <a:p>
+            <a:pPr algn="ctr"/>
+            <a:endParaRPr kumimoji="1" lang="ja-JP" altLang="en-US"/>
+          </a:p>
+        </p:txBody>
+      </p:sp>
+      <p:sp>
+        <p:nvSpPr>
+          <p:cNvPr id="9" name="正方形/長方形 8">
+            <a:extLst>
+              <a:ext uri="{FF2B5EF4-FFF2-40B4-BE49-F238E27FC236}">
+                <a16:creationId xmlns:a16="http://schemas.microsoft.com/office/drawing/2014/main" id="{BC118070-57E6-FC5D-24FC-51292E3ACB11}"/>
+              </a:ext>
+            </a:extLst>
+          </p:cNvPr>
+          <p:cNvSpPr/>
+          <p:nvPr/>
+        </p:nvSpPr>
+        <p:spPr>
+          <a:xfrm>
+            <a:off x="336024" y="2876616"/>
+            <a:ext cx="5015186" cy="3586466"/>
+          </a:xfrm>
+          <a:prstGeom prst="rect">
+            <a:avLst/>
+          </a:prstGeom>
+          <a:noFill/>
+          <a:ln w="28575">
+            <a:solidFill>
+              <a:srgbClr val="FFFF00"/>
+            </a:solidFill>
+          </a:ln>
+        </p:spPr>
+        <p:style>
+          <a:lnRef idx="2">
+            <a:schemeClr val="accent1">
+              <a:shade val="15000"/>
+            </a:schemeClr>
+          </a:lnRef>
+          <a:fillRef idx="1">
+            <a:schemeClr val="accent1"/>
+          </a:fillRef>
+          <a:effectRef idx="0">
+            <a:schemeClr val="accent1"/>
+          </a:effectRef>
+          <a:fontRef idx="minor">
+            <a:schemeClr val="lt1"/>
+          </a:fontRef>
+        </p:style>
+        <p:txBody>
+          <a:bodyPr rtlCol="0" anchor="t" anchorCtr="0"/>
+          <a:lstStyle/>
+          <a:p>
+            <a:pPr marL="285750" indent="-285750">
+              <a:buFont typeface="Wingdings" panose="05000000000000000000" pitchFamily="2" charset="2"/>
+              <a:buChar char="l"/>
+            </a:pPr>
+            <a:r>
+              <a:rPr kumimoji="1" lang="ja-JP" altLang="en-US" dirty="0">
+                <a:solidFill>
+                  <a:schemeClr val="tx1">
+                    <a:lumMod val="75000"/>
+                  </a:schemeClr>
+                </a:solidFill>
+              </a:rPr>
+              <a:t>ああ</a:t>
+            </a:r>
+          </a:p>
+        </p:txBody>
+      </p:sp>
+      <p:sp>
+        <p:nvSpPr>
+          <p:cNvPr id="10" name="正方形/長方形 9">
+            <a:extLst>
+              <a:ext uri="{FF2B5EF4-FFF2-40B4-BE49-F238E27FC236}">
+                <a16:creationId xmlns:a16="http://schemas.microsoft.com/office/drawing/2014/main" id="{A5DD0F5F-F7DD-E0B3-E8B8-43DC8378525E}"/>
+              </a:ext>
+            </a:extLst>
+          </p:cNvPr>
+          <p:cNvSpPr/>
+          <p:nvPr/>
+        </p:nvSpPr>
+        <p:spPr>
+          <a:xfrm>
+            <a:off x="6821214" y="2876616"/>
+            <a:ext cx="5015186" cy="3586466"/>
+          </a:xfrm>
+          <a:prstGeom prst="rect">
+            <a:avLst/>
+          </a:prstGeom>
+          <a:noFill/>
+          <a:ln w="28575">
+            <a:solidFill>
+              <a:srgbClr val="FFFF00"/>
+            </a:solidFill>
+          </a:ln>
+        </p:spPr>
+        <p:style>
+          <a:lnRef idx="2">
+            <a:schemeClr val="accent1">
+              <a:shade val="15000"/>
+            </a:schemeClr>
+          </a:lnRef>
+          <a:fillRef idx="1">
+            <a:schemeClr val="accent1"/>
+          </a:fillRef>
+          <a:effectRef idx="0">
+            <a:schemeClr val="accent1"/>
+          </a:effectRef>
+          <a:fontRef idx="minor">
+            <a:schemeClr val="lt1"/>
+          </a:fontRef>
+        </p:style>
+        <p:txBody>
+          <a:bodyPr rtlCol="0" anchor="t" anchorCtr="0"/>
+          <a:lstStyle/>
+          <a:p>
+            <a:pPr marL="285750" indent="-285750">
+              <a:buFont typeface="Wingdings" panose="05000000000000000000" pitchFamily="2" charset="2"/>
+              <a:buChar char="l"/>
+            </a:pPr>
+            <a:r>
+              <a:rPr kumimoji="1" lang="ja-JP" altLang="en-US" dirty="0">
+                <a:solidFill>
+                  <a:schemeClr val="tx1">
+                    <a:lumMod val="75000"/>
+                  </a:schemeClr>
+                </a:solidFill>
+              </a:rPr>
+              <a:t>ああ</a:t>
+            </a:r>
+          </a:p>
+        </p:txBody>
+      </p:sp>
+      <p:sp>
+        <p:nvSpPr>
+          <p:cNvPr id="6" name="正方形/長方形 5">
+            <a:extLst>
+              <a:ext uri="{FF2B5EF4-FFF2-40B4-BE49-F238E27FC236}">
+                <a16:creationId xmlns:a16="http://schemas.microsoft.com/office/drawing/2014/main" id="{725A5F26-C6B0-E077-E1C8-6C313703AE69}"/>
+              </a:ext>
+            </a:extLst>
+          </p:cNvPr>
+          <p:cNvSpPr/>
+          <p:nvPr/>
+        </p:nvSpPr>
+        <p:spPr>
+          <a:xfrm>
+            <a:off x="355600" y="2322788"/>
+            <a:ext cx="5015186" cy="539278"/>
+          </a:xfrm>
+          <a:prstGeom prst="rect">
+            <a:avLst/>
+          </a:prstGeom>
+          <a:solidFill>
+            <a:schemeClr val="accent1"/>
+          </a:solidFill>
+          <a:ln>
+            <a:noFill/>
+          </a:ln>
+        </p:spPr>
+        <p:style>
+          <a:lnRef idx="2">
+            <a:schemeClr val="accent1">
+              <a:shade val="15000"/>
+            </a:schemeClr>
+          </a:lnRef>
+          <a:fillRef idx="1">
+            <a:schemeClr val="accent1"/>
+          </a:fillRef>
+          <a:effectRef idx="0">
+            <a:schemeClr val="accent1"/>
+          </a:effectRef>
+          <a:fontRef idx="minor">
+            <a:schemeClr val="lt1"/>
+          </a:fontRef>
+        </p:style>
+        <p:txBody>
+          <a:bodyPr rtlCol="0" anchor="ctr"/>
+          <a:lstStyle/>
+          <a:p>
+            <a:pPr algn="ctr"/>
+            <a:r>
+              <a:rPr lang="ja-JP" altLang="en-US" sz="2400" dirty="0">
+                <a:solidFill>
+                  <a:schemeClr val="tx1">
+                    <a:lumMod val="75000"/>
+                  </a:schemeClr>
+                </a:solidFill>
+              </a:rPr>
+              <a:t>本スライドの背景</a:t>
+            </a:r>
+            <a:endParaRPr lang="ja-JP" altLang="en-US" dirty="0">
+              <a:solidFill>
+                <a:schemeClr val="tx1">
+                  <a:lumMod val="75000"/>
+                </a:schemeClr>
+              </a:solidFill>
+            </a:endParaRPr>
+          </a:p>
+        </p:txBody>
+      </p:sp>
+      <p:sp>
+        <p:nvSpPr>
+          <p:cNvPr id="7" name="正方形/長方形 6">
+            <a:extLst>
+              <a:ext uri="{FF2B5EF4-FFF2-40B4-BE49-F238E27FC236}">
+                <a16:creationId xmlns:a16="http://schemas.microsoft.com/office/drawing/2014/main" id="{484040B2-3DEC-59AA-9DBF-F91CE4F75D54}"/>
+              </a:ext>
+            </a:extLst>
+          </p:cNvPr>
+          <p:cNvSpPr/>
+          <p:nvPr/>
+        </p:nvSpPr>
+        <p:spPr>
+          <a:xfrm>
+            <a:off x="6821214" y="2322788"/>
+            <a:ext cx="5015186" cy="539278"/>
+          </a:xfrm>
+          <a:prstGeom prst="rect">
+            <a:avLst/>
+          </a:prstGeom>
+          <a:solidFill>
+            <a:schemeClr val="accent1"/>
+          </a:solidFill>
+          <a:ln>
+            <a:noFill/>
+          </a:ln>
+        </p:spPr>
+        <p:style>
+          <a:lnRef idx="2">
+            <a:schemeClr val="accent1">
+              <a:shade val="15000"/>
+            </a:schemeClr>
+          </a:lnRef>
+          <a:fillRef idx="1">
+            <a:schemeClr val="accent1"/>
+          </a:fillRef>
+          <a:effectRef idx="0">
+            <a:schemeClr val="accent1"/>
+          </a:effectRef>
+          <a:fontRef idx="minor">
+            <a:schemeClr val="lt1"/>
+          </a:fontRef>
+        </p:style>
+        <p:txBody>
+          <a:bodyPr rtlCol="0" anchor="ctr"/>
+          <a:lstStyle/>
+          <a:p>
+            <a:pPr algn="ctr"/>
+            <a:r>
+              <a:rPr lang="ja-JP" altLang="en-US" sz="2400" dirty="0">
+                <a:solidFill>
+                  <a:schemeClr val="tx1">
+                    <a:lumMod val="75000"/>
+                  </a:schemeClr>
+                </a:solidFill>
+              </a:rPr>
+              <a:t>本スライドの目的</a:t>
+            </a:r>
+            <a:endParaRPr kumimoji="1" lang="ja-JP" altLang="en-US" dirty="0"/>
+          </a:p>
+        </p:txBody>
+      </p:sp>
+    </p:spTree>
+    <p:extLst>
+      <p:ext uri="{BB962C8B-B14F-4D97-AF65-F5344CB8AC3E}">
+        <p14:creationId xmlns:p14="http://schemas.microsoft.com/office/powerpoint/2010/main" val="2755181130"/>
+      </p:ext>
+    </p:extLst>
+  </p:cSld>
+  <p:clrMapOvr>
+    <a:masterClrMapping/>
+  </p:clrMapOvr>
+</p:sld>
+</file>
+
+<file path=ppt/slides/slide5.xml><?xml version="1.0" encoding="utf-8"?>
+<p:sld xmlns:a="http://schemas.openxmlformats.org/drawingml/2006/main" xmlns:r="http://schemas.openxmlformats.org/officeDocument/2006/relationships" xmlns:p="http://schemas.openxmlformats.org/presentationml/2006/main">
+  <p:cSld>
+    <p:spTree>
+      <p:nvGrpSpPr>
+        <p:cNvPr id="1" name=""/>
+        <p:cNvGrpSpPr/>
+        <p:nvPr/>
+      </p:nvGrpSpPr>
+      <p:grpSpPr>
+        <a:xfrm>
+          <a:off x="0" y="0"/>
+          <a:ext cx="0" cy="0"/>
+          <a:chOff x="0" y="0"/>
+          <a:chExt cx="0" cy="0"/>
+        </a:xfrm>
+      </p:grpSpPr>
+      <p:cxnSp>
+        <p:nvCxnSpPr>
+          <p:cNvPr id="2" name="直線コネクタ 1">
+            <a:extLst>
+              <a:ext uri="{FF2B5EF4-FFF2-40B4-BE49-F238E27FC236}">
+                <a16:creationId xmlns:a16="http://schemas.microsoft.com/office/drawing/2014/main" id="{8D2C1743-B1DF-1311-D64E-194A38B34837}"/>
+              </a:ext>
+            </a:extLst>
+          </p:cNvPr>
+          <p:cNvCxnSpPr>
+            <a:cxnSpLocks/>
+          </p:cNvCxnSpPr>
+          <p:nvPr/>
+        </p:nvCxnSpPr>
+        <p:spPr>
+          <a:xfrm>
+            <a:off x="0" y="1993900"/>
+            <a:ext cx="12192000" cy="0"/>
+          </a:xfrm>
+          <a:prstGeom prst="line">
+            <a:avLst/>
+          </a:prstGeom>
+          <a:ln w="38100"/>
+        </p:spPr>
+        <p:style>
+          <a:lnRef idx="2">
+            <a:schemeClr val="accent1"/>
+          </a:lnRef>
+          <a:fillRef idx="0">
+            <a:schemeClr val="accent1"/>
+          </a:fillRef>
+          <a:effectRef idx="1">
+            <a:schemeClr val="accent1"/>
+          </a:effectRef>
+          <a:fontRef idx="minor">
+            <a:schemeClr val="tx1"/>
+          </a:fontRef>
+        </p:style>
+      </p:cxnSp>
+      <p:sp>
+        <p:nvSpPr>
+          <p:cNvPr id="3" name="タイトル プレースホルダー 1">
+            <a:extLst>
+              <a:ext uri="{FF2B5EF4-FFF2-40B4-BE49-F238E27FC236}">
+                <a16:creationId xmlns:a16="http://schemas.microsoft.com/office/drawing/2014/main" id="{1FC88A8E-53F0-B469-5D52-051622F0ECDE}"/>
+              </a:ext>
+            </a:extLst>
+          </p:cNvPr>
+          <p:cNvSpPr txBox="1">
+            <a:spLocks/>
+          </p:cNvSpPr>
+          <p:nvPr/>
+        </p:nvSpPr>
+        <p:spPr>
+          <a:xfrm>
+            <a:off x="355600" y="1108076"/>
+            <a:ext cx="11506200" cy="812797"/>
+          </a:xfrm>
+          <a:prstGeom prst="rect">
+            <a:avLst/>
+          </a:prstGeom>
+        </p:spPr>
+        <p:txBody>
+          <a:bodyPr vert="horz" lIns="91440" tIns="45720" rIns="91440" bIns="45720" rtlCol="0" anchor="ctr">
+            <a:noAutofit/>
+          </a:bodyPr>
+          <a:lstStyle>
+            <a:lvl1pPr algn="l" defTabSz="914400" rtl="0" eaLnBrk="1" latinLnBrk="0" hangingPunct="1">
+              <a:lnSpc>
+                <a:spcPct val="90000"/>
+              </a:lnSpc>
+              <a:spcBef>
+                <a:spcPct val="0"/>
+              </a:spcBef>
+              <a:buNone/>
+              <a:defRPr kumimoji="1" sz="1400" kern="1200">
+                <a:solidFill>
+                  <a:schemeClr val="tx1"/>
+                </a:solidFill>
+                <a:latin typeface="+mj-lt"/>
+                <a:ea typeface="+mj-ea"/>
+                <a:cs typeface="+mj-cs"/>
+              </a:defRPr>
+            </a:lvl1pPr>
+          </a:lstStyle>
+          <a:p>
+            <a:r>
+              <a:rPr lang="ja-JP" altLang="en-US" sz="2800" dirty="0"/>
+              <a:t>リード文</a:t>
+            </a:r>
+            <a:endParaRPr lang="en-US" altLang="ja-JP" sz="2800" dirty="0"/>
+          </a:p>
+          <a:p>
+            <a:r>
+              <a:rPr lang="en-US" altLang="ja-JP" sz="2800" dirty="0"/>
+              <a:t>2</a:t>
+            </a:r>
+            <a:r>
+              <a:rPr lang="ja-JP" altLang="en-US" sz="2800" dirty="0"/>
+              <a:t>行に収まる程度で</a:t>
+            </a:r>
+            <a:endParaRPr lang="en-US" altLang="ja-JP" sz="2800" dirty="0"/>
+          </a:p>
+        </p:txBody>
+      </p:sp>
+      <p:sp>
+        <p:nvSpPr>
+          <p:cNvPr id="4" name="タイトル プレースホルダー 1">
+            <a:extLst>
+              <a:ext uri="{FF2B5EF4-FFF2-40B4-BE49-F238E27FC236}">
+                <a16:creationId xmlns:a16="http://schemas.microsoft.com/office/drawing/2014/main" id="{306678DD-E9B8-0DA4-574D-12FF7A1F77B0}"/>
+              </a:ext>
+            </a:extLst>
+          </p:cNvPr>
+          <p:cNvSpPr txBox="1">
+            <a:spLocks/>
+          </p:cNvSpPr>
+          <p:nvPr/>
+        </p:nvSpPr>
+        <p:spPr>
+          <a:xfrm>
+            <a:off x="355600" y="546100"/>
+            <a:ext cx="11506200" cy="488949"/>
+          </a:xfrm>
+          <a:prstGeom prst="rect">
+            <a:avLst/>
+          </a:prstGeom>
+        </p:spPr>
+        <p:txBody>
+          <a:bodyPr vert="horz" lIns="91440" tIns="45720" rIns="91440" bIns="45720" rtlCol="0" anchor="ctr">
+            <a:noAutofit/>
+          </a:bodyPr>
+          <a:lstStyle>
+            <a:lvl1pPr algn="l" defTabSz="914400" rtl="0" eaLnBrk="1" latinLnBrk="0" hangingPunct="1">
+              <a:lnSpc>
+                <a:spcPct val="90000"/>
+              </a:lnSpc>
+              <a:spcBef>
+                <a:spcPct val="0"/>
+              </a:spcBef>
+              <a:buNone/>
+              <a:defRPr kumimoji="1" sz="1400" kern="1200">
+                <a:solidFill>
+                  <a:schemeClr val="tx1"/>
+                </a:solidFill>
+                <a:latin typeface="+mj-lt"/>
+                <a:ea typeface="+mj-ea"/>
+                <a:cs typeface="+mj-cs"/>
+              </a:defRPr>
+            </a:lvl1pPr>
+          </a:lstStyle>
+          <a:p>
+            <a:r>
+              <a:rPr lang="ja-JP" altLang="en-US" dirty="0"/>
+              <a:t>目次内のタイトル名そのまま</a:t>
+            </a:r>
+            <a:endParaRPr lang="en-US" altLang="ja-JP" dirty="0"/>
+          </a:p>
+        </p:txBody>
+      </p:sp>
+      <p:sp>
+        <p:nvSpPr>
           <p:cNvPr id="5" name="タイトル プレースホルダー 1">
             <a:extLst>
               <a:ext uri="{FF2B5EF4-FFF2-40B4-BE49-F238E27FC236}">
@@ -19499,7 +21056,7 @@
 </p:sld>
 </file>
 
-<file path=ppt/slides/slide5.xml><?xml version="1.0" encoding="utf-8"?>
+<file path=ppt/slides/slide6.xml><?xml version="1.0" encoding="utf-8"?>
 <p:sld xmlns:a="http://schemas.openxmlformats.org/drawingml/2006/main" xmlns:r="http://schemas.openxmlformats.org/officeDocument/2006/relationships" xmlns:p="http://schemas.openxmlformats.org/presentationml/2006/main">
   <p:cSld>
     <p:spTree>
@@ -19772,7 +21329,7 @@
 </p:sld>
 </file>
 
-<file path=ppt/slides/slide6.xml><?xml version="1.0" encoding="utf-8"?>
+<file path=ppt/slides/slide7.xml><?xml version="1.0" encoding="utf-8"?>
 <p:sld xmlns:a="http://schemas.openxmlformats.org/drawingml/2006/main" xmlns:r="http://schemas.openxmlformats.org/officeDocument/2006/relationships" xmlns:p="http://schemas.openxmlformats.org/presentationml/2006/main">
   <p:cSld>
     <p:spTree>
@@ -19849,7 +21406,7 @@
 </p:sld>
 </file>
 
-<file path=ppt/slides/slide7.xml><?xml version="1.0" encoding="utf-8"?>
+<file path=ppt/slides/slide8.xml><?xml version="1.0" encoding="utf-8"?>
 <p:sld xmlns:a="http://schemas.openxmlformats.org/drawingml/2006/main" xmlns:r="http://schemas.openxmlformats.org/officeDocument/2006/relationships" xmlns:p="http://schemas.openxmlformats.org/presentationml/2006/main">
   <p:cSld>
     <p:spTree>
@@ -20194,7 +21751,7 @@
 </p:sld>
 </file>
 
-<file path=ppt/slides/slide8.xml><?xml version="1.0" encoding="utf-8"?>
+<file path=ppt/slides/slide9.xml><?xml version="1.0" encoding="utf-8"?>
 <p:sld xmlns:a="http://schemas.openxmlformats.org/drawingml/2006/main" xmlns:r="http://schemas.openxmlformats.org/officeDocument/2006/relationships" xmlns:p="http://schemas.openxmlformats.org/presentationml/2006/main">
   <p:cSld>
     <p:spTree>
@@ -21370,449 +22927,6 @@
     <p:extLst>
       <p:ext uri="{BB962C8B-B14F-4D97-AF65-F5344CB8AC3E}">
         <p14:creationId xmlns:p14="http://schemas.microsoft.com/office/powerpoint/2010/main" val="1755686314"/>
-      </p:ext>
-    </p:extLst>
-  </p:cSld>
-  <p:clrMapOvr>
-    <a:masterClrMapping/>
-  </p:clrMapOvr>
-</p:sld>
-</file>
-
-<file path=ppt/slides/slide9.xml><?xml version="1.0" encoding="utf-8"?>
-<p:sld xmlns:a="http://schemas.openxmlformats.org/drawingml/2006/main" xmlns:r="http://schemas.openxmlformats.org/officeDocument/2006/relationships" xmlns:p="http://schemas.openxmlformats.org/presentationml/2006/main">
-  <p:cSld>
-    <p:spTree>
-      <p:nvGrpSpPr>
-        <p:cNvPr id="1" name="">
-          <a:extLst>
-            <a:ext uri="{FF2B5EF4-FFF2-40B4-BE49-F238E27FC236}">
-              <a16:creationId xmlns:a16="http://schemas.microsoft.com/office/drawing/2014/main" id="{533F68EE-1A46-3A03-3F0B-DCE71857E64A}"/>
-            </a:ext>
-          </a:extLst>
-        </p:cNvPr>
-        <p:cNvGrpSpPr/>
-        <p:nvPr/>
-      </p:nvGrpSpPr>
-      <p:grpSpPr>
-        <a:xfrm>
-          <a:off x="0" y="0"/>
-          <a:ext cx="0" cy="0"/>
-          <a:chOff x="0" y="0"/>
-          <a:chExt cx="0" cy="0"/>
-        </a:xfrm>
-      </p:grpSpPr>
-      <p:cxnSp>
-        <p:nvCxnSpPr>
-          <p:cNvPr id="2" name="直線コネクタ 1">
-            <a:extLst>
-              <a:ext uri="{FF2B5EF4-FFF2-40B4-BE49-F238E27FC236}">
-                <a16:creationId xmlns:a16="http://schemas.microsoft.com/office/drawing/2014/main" id="{C3AA8E8F-8BDB-3C50-FC1B-8451ADE07263}"/>
-              </a:ext>
-            </a:extLst>
-          </p:cNvPr>
-          <p:cNvCxnSpPr>
-            <a:cxnSpLocks/>
-          </p:cNvCxnSpPr>
-          <p:nvPr/>
-        </p:nvCxnSpPr>
-        <p:spPr>
-          <a:xfrm>
-            <a:off x="0" y="1993900"/>
-            <a:ext cx="12192000" cy="0"/>
-          </a:xfrm>
-          <a:prstGeom prst="line">
-            <a:avLst/>
-          </a:prstGeom>
-          <a:ln w="38100"/>
-        </p:spPr>
-        <p:style>
-          <a:lnRef idx="2">
-            <a:schemeClr val="accent1"/>
-          </a:lnRef>
-          <a:fillRef idx="0">
-            <a:schemeClr val="accent1"/>
-          </a:fillRef>
-          <a:effectRef idx="1">
-            <a:schemeClr val="accent1"/>
-          </a:effectRef>
-          <a:fontRef idx="minor">
-            <a:schemeClr val="tx1"/>
-          </a:fontRef>
-        </p:style>
-      </p:cxnSp>
-      <p:sp>
-        <p:nvSpPr>
-          <p:cNvPr id="3" name="タイトル プレースホルダー 1">
-            <a:extLst>
-              <a:ext uri="{FF2B5EF4-FFF2-40B4-BE49-F238E27FC236}">
-                <a16:creationId xmlns:a16="http://schemas.microsoft.com/office/drawing/2014/main" id="{A49EC5EB-AA31-B498-E7F6-5D67061A6814}"/>
-              </a:ext>
-            </a:extLst>
-          </p:cNvPr>
-          <p:cNvSpPr txBox="1">
-            <a:spLocks/>
-          </p:cNvSpPr>
-          <p:nvPr/>
-        </p:nvSpPr>
-        <p:spPr>
-          <a:xfrm>
-            <a:off x="355600" y="1108076"/>
-            <a:ext cx="11506200" cy="812797"/>
-          </a:xfrm>
-          <a:prstGeom prst="rect">
-            <a:avLst/>
-          </a:prstGeom>
-        </p:spPr>
-        <p:txBody>
-          <a:bodyPr vert="horz" lIns="91440" tIns="45720" rIns="91440" bIns="45720" rtlCol="0" anchor="ctr">
-            <a:noAutofit/>
-          </a:bodyPr>
-          <a:lstStyle>
-            <a:lvl1pPr algn="l" defTabSz="914400" rtl="0" eaLnBrk="1" latinLnBrk="0" hangingPunct="1">
-              <a:lnSpc>
-                <a:spcPct val="90000"/>
-              </a:lnSpc>
-              <a:spcBef>
-                <a:spcPct val="0"/>
-              </a:spcBef>
-              <a:buNone/>
-              <a:defRPr kumimoji="1" sz="1400" kern="1200">
-                <a:solidFill>
-                  <a:schemeClr val="tx1"/>
-                </a:solidFill>
-                <a:latin typeface="+mj-lt"/>
-                <a:ea typeface="+mj-ea"/>
-                <a:cs typeface="+mj-cs"/>
-              </a:defRPr>
-            </a:lvl1pPr>
-          </a:lstStyle>
-          <a:p>
-            <a:r>
-              <a:rPr lang="ja-JP" altLang="en-US" sz="2800" dirty="0"/>
-              <a:t>リード文</a:t>
-            </a:r>
-            <a:endParaRPr lang="en-US" altLang="ja-JP" sz="2800" dirty="0"/>
-          </a:p>
-          <a:p>
-            <a:r>
-              <a:rPr lang="en-US" altLang="ja-JP" sz="2800" dirty="0"/>
-              <a:t>2</a:t>
-            </a:r>
-            <a:r>
-              <a:rPr lang="ja-JP" altLang="en-US" sz="2800" dirty="0"/>
-              <a:t>行に収まる程度で</a:t>
-            </a:r>
-            <a:endParaRPr lang="en-US" altLang="ja-JP" sz="2800" dirty="0"/>
-          </a:p>
-        </p:txBody>
-      </p:sp>
-      <p:sp>
-        <p:nvSpPr>
-          <p:cNvPr id="4" name="タイトル プレースホルダー 1">
-            <a:extLst>
-              <a:ext uri="{FF2B5EF4-FFF2-40B4-BE49-F238E27FC236}">
-                <a16:creationId xmlns:a16="http://schemas.microsoft.com/office/drawing/2014/main" id="{E34C69B8-1CC7-7929-D7CF-4F0F7833D1B0}"/>
-              </a:ext>
-            </a:extLst>
-          </p:cNvPr>
-          <p:cNvSpPr txBox="1">
-            <a:spLocks/>
-          </p:cNvSpPr>
-          <p:nvPr/>
-        </p:nvSpPr>
-        <p:spPr>
-          <a:xfrm>
-            <a:off x="355600" y="546100"/>
-            <a:ext cx="11506200" cy="488949"/>
-          </a:xfrm>
-          <a:prstGeom prst="rect">
-            <a:avLst/>
-          </a:prstGeom>
-        </p:spPr>
-        <p:txBody>
-          <a:bodyPr vert="horz" lIns="91440" tIns="45720" rIns="91440" bIns="45720" rtlCol="0" anchor="ctr">
-            <a:noAutofit/>
-          </a:bodyPr>
-          <a:lstStyle>
-            <a:lvl1pPr algn="l" defTabSz="914400" rtl="0" eaLnBrk="1" latinLnBrk="0" hangingPunct="1">
-              <a:lnSpc>
-                <a:spcPct val="90000"/>
-              </a:lnSpc>
-              <a:spcBef>
-                <a:spcPct val="0"/>
-              </a:spcBef>
-              <a:buNone/>
-              <a:defRPr kumimoji="1" sz="1400" kern="1200">
-                <a:solidFill>
-                  <a:schemeClr val="tx1"/>
-                </a:solidFill>
-                <a:latin typeface="+mj-lt"/>
-                <a:ea typeface="+mj-ea"/>
-                <a:cs typeface="+mj-cs"/>
-              </a:defRPr>
-            </a:lvl1pPr>
-          </a:lstStyle>
-          <a:p>
-            <a:r>
-              <a:rPr lang="ja-JP" altLang="en-US" dirty="0"/>
-              <a:t>ステップ図</a:t>
-            </a:r>
-            <a:endParaRPr lang="en-US" altLang="ja-JP" dirty="0"/>
-          </a:p>
-        </p:txBody>
-      </p:sp>
-      <p:sp>
-        <p:nvSpPr>
-          <p:cNvPr id="6" name="タイトル プレースホルダー 1">
-            <a:extLst>
-              <a:ext uri="{FF2B5EF4-FFF2-40B4-BE49-F238E27FC236}">
-                <a16:creationId xmlns:a16="http://schemas.microsoft.com/office/drawing/2014/main" id="{1E917474-F5C8-9688-1FB7-23F9F8CC3DD9}"/>
-              </a:ext>
-            </a:extLst>
-          </p:cNvPr>
-          <p:cNvSpPr txBox="1">
-            <a:spLocks/>
-          </p:cNvSpPr>
-          <p:nvPr/>
-        </p:nvSpPr>
-        <p:spPr>
-          <a:xfrm>
-            <a:off x="355600" y="4937124"/>
-            <a:ext cx="11506199" cy="1374763"/>
-          </a:xfrm>
-          <a:prstGeom prst="rect">
-            <a:avLst/>
-          </a:prstGeom>
-        </p:spPr>
-        <p:txBody>
-          <a:bodyPr vert="horz" lIns="91440" tIns="45720" rIns="91440" bIns="45720" rtlCol="0" anchor="t" anchorCtr="0">
-            <a:noAutofit/>
-          </a:bodyPr>
-          <a:lstStyle>
-            <a:lvl1pPr algn="l" defTabSz="914400" rtl="0" eaLnBrk="1" latinLnBrk="0" hangingPunct="1">
-              <a:lnSpc>
-                <a:spcPct val="90000"/>
-              </a:lnSpc>
-              <a:spcBef>
-                <a:spcPct val="0"/>
-              </a:spcBef>
-              <a:buNone/>
-              <a:defRPr kumimoji="1" sz="1400" kern="1200">
-                <a:solidFill>
-                  <a:schemeClr val="tx1"/>
-                </a:solidFill>
-                <a:latin typeface="+mj-lt"/>
-                <a:ea typeface="+mj-ea"/>
-                <a:cs typeface="+mj-cs"/>
-              </a:defRPr>
-            </a:lvl1pPr>
-          </a:lstStyle>
-          <a:p>
-            <a:pPr marL="285750" indent="-285750">
-              <a:buFont typeface="Arial" panose="020B0604020202020204" pitchFamily="34" charset="0"/>
-              <a:buChar char="•"/>
-            </a:pPr>
-            <a:r>
-              <a:rPr lang="ja-JP" altLang="en-US" sz="1800" dirty="0"/>
-              <a:t>バリューチェーン</a:t>
-            </a:r>
-            <a:endParaRPr lang="en-US" altLang="ja-JP" sz="1800" dirty="0"/>
-          </a:p>
-          <a:p>
-            <a:pPr marL="285750" indent="-285750">
-              <a:buFont typeface="Arial" panose="020B0604020202020204" pitchFamily="34" charset="0"/>
-              <a:buChar char="•"/>
-            </a:pPr>
-            <a:r>
-              <a:rPr lang="ja-JP" altLang="en-US" sz="1800" dirty="0"/>
-              <a:t>検討アプローチ</a:t>
-            </a:r>
-            <a:endParaRPr lang="en-US" altLang="ja-JP" sz="1800" dirty="0"/>
-          </a:p>
-          <a:p>
-            <a:endParaRPr lang="en-US" altLang="ja-JP" sz="1800" dirty="0"/>
-          </a:p>
-          <a:p>
-            <a:endParaRPr lang="en-US" altLang="ja-JP" sz="1800" dirty="0"/>
-          </a:p>
-          <a:p>
-            <a:endParaRPr lang="en-US" altLang="ja-JP" sz="1800" dirty="0"/>
-          </a:p>
-          <a:p>
-            <a:endParaRPr lang="en-US" altLang="ja-JP" sz="1800" dirty="0"/>
-          </a:p>
-        </p:txBody>
-      </p:sp>
-      <p:sp>
-        <p:nvSpPr>
-          <p:cNvPr id="7" name="矢印: 五方向 6">
-            <a:extLst>
-              <a:ext uri="{FF2B5EF4-FFF2-40B4-BE49-F238E27FC236}">
-                <a16:creationId xmlns:a16="http://schemas.microsoft.com/office/drawing/2014/main" id="{9D4F47B0-899C-DC8A-EBC0-814235BD8BE4}"/>
-              </a:ext>
-            </a:extLst>
-          </p:cNvPr>
-          <p:cNvSpPr/>
-          <p:nvPr/>
-        </p:nvSpPr>
-        <p:spPr>
-          <a:xfrm>
-            <a:off x="1650997" y="2669018"/>
-            <a:ext cx="2962635" cy="1592989"/>
-          </a:xfrm>
-          <a:prstGeom prst="homePlate">
-            <a:avLst/>
-          </a:prstGeom>
-          <a:solidFill>
-            <a:schemeClr val="accent1">
-              <a:lumMod val="20000"/>
-              <a:lumOff val="80000"/>
-            </a:schemeClr>
-          </a:solidFill>
-          <a:ln>
-            <a:noFill/>
-          </a:ln>
-        </p:spPr>
-        <p:style>
-          <a:lnRef idx="2">
-            <a:schemeClr val="accent1">
-              <a:shade val="15000"/>
-            </a:schemeClr>
-          </a:lnRef>
-          <a:fillRef idx="1">
-            <a:schemeClr val="accent1"/>
-          </a:fillRef>
-          <a:effectRef idx="0">
-            <a:schemeClr val="accent1"/>
-          </a:effectRef>
-          <a:fontRef idx="minor">
-            <a:schemeClr val="lt1"/>
-          </a:fontRef>
-        </p:style>
-        <p:txBody>
-          <a:bodyPr rtlCol="0" anchor="ctr"/>
-          <a:lstStyle/>
-          <a:p>
-            <a:pPr algn="ctr"/>
-            <a:endParaRPr kumimoji="1" lang="ja-JP" altLang="en-US"/>
-          </a:p>
-        </p:txBody>
-      </p:sp>
-      <p:sp>
-        <p:nvSpPr>
-          <p:cNvPr id="8" name="矢印: 五方向 7">
-            <a:extLst>
-              <a:ext uri="{FF2B5EF4-FFF2-40B4-BE49-F238E27FC236}">
-                <a16:creationId xmlns:a16="http://schemas.microsoft.com/office/drawing/2014/main" id="{0C36EA1A-89D2-F22A-3A35-6B130850FD8C}"/>
-              </a:ext>
-            </a:extLst>
-          </p:cNvPr>
-          <p:cNvSpPr/>
-          <p:nvPr/>
-        </p:nvSpPr>
-        <p:spPr>
-          <a:xfrm>
-            <a:off x="4705282" y="2669018"/>
-            <a:ext cx="2962635" cy="1592989"/>
-          </a:xfrm>
-          <a:prstGeom prst="homePlate">
-            <a:avLst/>
-          </a:prstGeom>
-          <a:solidFill>
-            <a:schemeClr val="accent1">
-              <a:lumMod val="20000"/>
-              <a:lumOff val="80000"/>
-            </a:schemeClr>
-          </a:solidFill>
-          <a:ln>
-            <a:noFill/>
-          </a:ln>
-        </p:spPr>
-        <p:style>
-          <a:lnRef idx="2">
-            <a:schemeClr val="accent1">
-              <a:shade val="15000"/>
-            </a:schemeClr>
-          </a:lnRef>
-          <a:fillRef idx="1">
-            <a:schemeClr val="accent1"/>
-          </a:fillRef>
-          <a:effectRef idx="0">
-            <a:schemeClr val="accent1"/>
-          </a:effectRef>
-          <a:fontRef idx="minor">
-            <a:schemeClr val="lt1"/>
-          </a:fontRef>
-        </p:style>
-        <p:txBody>
-          <a:bodyPr rtlCol="0" anchor="ctr"/>
-          <a:lstStyle/>
-          <a:p>
-            <a:pPr algn="ctr"/>
-            <a:endParaRPr kumimoji="1" lang="ja-JP" altLang="en-US"/>
-          </a:p>
-        </p:txBody>
-      </p:sp>
-      <p:sp>
-        <p:nvSpPr>
-          <p:cNvPr id="9" name="矢印: 五方向 8">
-            <a:extLst>
-              <a:ext uri="{FF2B5EF4-FFF2-40B4-BE49-F238E27FC236}">
-                <a16:creationId xmlns:a16="http://schemas.microsoft.com/office/drawing/2014/main" id="{D3B4CFBC-9A2D-087F-7C20-2940C4916562}"/>
-              </a:ext>
-            </a:extLst>
-          </p:cNvPr>
-          <p:cNvSpPr/>
-          <p:nvPr/>
-        </p:nvSpPr>
-        <p:spPr>
-          <a:xfrm>
-            <a:off x="7759567" y="2669018"/>
-            <a:ext cx="2962635" cy="1592989"/>
-          </a:xfrm>
-          <a:prstGeom prst="homePlate">
-            <a:avLst/>
-          </a:prstGeom>
-          <a:solidFill>
-            <a:schemeClr val="accent1">
-              <a:lumMod val="20000"/>
-              <a:lumOff val="80000"/>
-            </a:schemeClr>
-          </a:solidFill>
-          <a:ln>
-            <a:noFill/>
-          </a:ln>
-        </p:spPr>
-        <p:style>
-          <a:lnRef idx="2">
-            <a:schemeClr val="accent1">
-              <a:shade val="15000"/>
-            </a:schemeClr>
-          </a:lnRef>
-          <a:fillRef idx="1">
-            <a:schemeClr val="accent1"/>
-          </a:fillRef>
-          <a:effectRef idx="0">
-            <a:schemeClr val="accent1"/>
-          </a:effectRef>
-          <a:fontRef idx="minor">
-            <a:schemeClr val="lt1"/>
-          </a:fontRef>
-        </p:style>
-        <p:txBody>
-          <a:bodyPr rtlCol="0" anchor="ctr"/>
-          <a:lstStyle/>
-          <a:p>
-            <a:pPr algn="ctr"/>
-            <a:endParaRPr kumimoji="1" lang="ja-JP" altLang="en-US"/>
-          </a:p>
-        </p:txBody>
-      </p:sp>
-    </p:spTree>
-    <p:extLst>
-      <p:ext uri="{BB962C8B-B14F-4D97-AF65-F5344CB8AC3E}">
-        <p14:creationId xmlns:p14="http://schemas.microsoft.com/office/powerpoint/2010/main" val="11201252"/>
       </p:ext>
     </p:extLst>
   </p:cSld>
